--- a/guide_utilisation.pptx
+++ b/guide_utilisation.pptx
@@ -11,6 +11,7 @@
     <p:sldId id="259" r:id="rId10"/>
     <p:sldId id="260" r:id="rId11"/>
     <p:sldId id="261" r:id="rId12"/>
+    <p:sldId id="262" r:id="rId13"/>
   </p:sldIdLst>
   <p:sldSz cx="12191695" cy="6858000" type="screen4x3"/>
   <p:notesSz cx="6858000" cy="9144000"/>
@@ -3109,8 +3110,8 @@
         </p:nvSpPr>
         <p:spPr>
           <a:xfrm>
-            <a:off x="914400" y="2011680"/>
-            <a:ext cx="10360152" cy="2743200"/>
+            <a:off x="914400" y="1828800"/>
+            <a:ext cx="10360152" cy="3200400"/>
           </a:xfrm>
           <a:prstGeom prst="rect">
             <a:avLst/>
@@ -3145,20 +3146,7 @@
               </a:defRPr>
             </a:pPr>
             <a:r>
-              <a:t>Guide d'Utilisation Numérique Complet</a:t>
-            </a:r>
-          </a:p>
-          <a:p>
-            <a:pPr>
-              <a:defRPr sz="1800">
-                <a:solidFill>
-                  <a:srgbClr val="C8DCFF"/>
-                </a:solidFill>
-                <a:latin typeface="Arial"/>
-              </a:defRPr>
-            </a:pPr>
-            <a:r>
-              <a:t>Gestion Scolaire • Emploi du Temps • Notes &amp; Facturation</a:t>
+              <a:t>Guide Procédural &amp; Tutoriels Étape par Étape</a:t>
             </a:r>
           </a:p>
         </p:txBody>
@@ -3212,7 +3200,7 @@
           <a:lstStyle/>
           <a:p>
             <a:pPr>
-              <a:defRPr sz="2800" b="1">
+              <a:defRPr sz="2400" b="1">
                 <a:solidFill>
                   <a:srgbClr val="0B4998"/>
                 </a:solidFill>
@@ -3220,7 +3208,7 @@
               </a:defRPr>
             </a:pPr>
             <a:r>
-              <a:t>1. Rôles &amp; Gestion des Accès (RBAC)</a:t>
+              <a:t>Tutoriel 1 : Créer un utilisateur &amp; attribuer des droits</a:t>
             </a:r>
           </a:p>
         </p:txBody>
@@ -3233,8 +3221,8 @@
         </p:nvSpPr>
         <p:spPr>
           <a:xfrm>
-            <a:off x="457200" y="1371600"/>
-            <a:ext cx="11274552" cy="4572000"/>
+            <a:off x="457200" y="1097280"/>
+            <a:ext cx="11274552" cy="5303520"/>
           </a:xfrm>
           <a:prstGeom prst="rect">
             <a:avLst/>
@@ -3250,77 +3238,96 @@
           <a:p>
             <a:pPr/>
             <a:r>
-              <a:rPr b="1" sz="1800">
-                <a:solidFill>
-                  <a:srgbClr val="1E293B"/>
-                </a:solidFill>
-              </a:rPr>
-              <a:t>• Directeur / Super Admin : </a:t>
-            </a:r>
-            <a:r>
-              <a:rPr sz="1600">
-                <a:solidFill>
-                  <a:srgbClr val="1E293B"/>
-                </a:solidFill>
-              </a:rPr>
-              <a:t>Accès total à tous les onglets, modification des droits, déverrouillage des notes figées et validation finale des Procès-Verbaux (PV).</a:t>
+              <a:rPr b="1" sz="1500">
+                <a:solidFill>
+                  <a:srgbClr val="1E293B"/>
+                </a:solidFill>
+              </a:rPr>
+              <a:t>1. Ouvrir l'onglet : </a:t>
+            </a:r>
+            <a:r>
+              <a:rPr sz="1400">
+                <a:solidFill>
+                  <a:srgbClr val="1E293B"/>
+                </a:solidFill>
+              </a:rPr>
+              <a:t>Sélectionnez l'onglet 'Administration' dans le menu principal.</a:t>
             </a:r>
           </a:p>
           <a:p>
             <a:pPr/>
             <a:r>
-              <a:rPr b="1" sz="1800">
-                <a:solidFill>
-                  <a:srgbClr val="1E293B"/>
-                </a:solidFill>
-              </a:rPr>
-              <a:t>• Correspondant Fichier (Informaticien) : </a:t>
-            </a:r>
-            <a:r>
-              <a:rPr sz="1600">
-                <a:solidFill>
-                  <a:srgbClr val="1E293B"/>
-                </a:solidFill>
-              </a:rPr>
-              <a:t>Gestion technique des bases de données, inscriptions, configurations d'EDT et correctifs de notes.</a:t>
+              <a:rPr b="1" sz="1500">
+                <a:solidFill>
+                  <a:srgbClr val="1E293B"/>
+                </a:solidFill>
+              </a:rPr>
+              <a:t>2. Remplir le formulaire : </a:t>
+            </a:r>
+            <a:r>
+              <a:rPr sz="1400">
+                <a:solidFill>
+                  <a:srgbClr val="1E293B"/>
+                </a:solidFill>
+              </a:rPr>
+              <a:t>Allez à 'Créer un nouveau compte utilisateur', entrez le Nom complet, l'Email/Identifiant, et le Mot de passe.</a:t>
             </a:r>
           </a:p>
           <a:p>
             <a:pPr/>
             <a:r>
-              <a:rPr b="1" sz="1800">
-                <a:solidFill>
-                  <a:srgbClr val="1E293B"/>
-                </a:solidFill>
-              </a:rPr>
-              <a:t>• Professeurs : </a:t>
-            </a:r>
-            <a:r>
-              <a:rPr sz="1600">
-                <a:solidFill>
-                  <a:srgbClr val="1E293B"/>
-                </a:solidFill>
-              </a:rPr>
-              <a:t>Accès limité à l'emploi du temps personnel et saisie des notes uniquement sur autorisation expresse.</a:t>
+              <a:rPr b="1" sz="1500">
+                <a:solidFill>
+                  <a:srgbClr val="1E293B"/>
+                </a:solidFill>
+              </a:rPr>
+              <a:t>3. Sélectionner le rôle : </a:t>
+            </a:r>
+            <a:r>
+              <a:rPr sz="1400">
+                <a:solidFill>
+                  <a:srgbClr val="1E293B"/>
+                </a:solidFill>
+              </a:rPr>
+              <a:t>Choisissez le rôle approprié dans la liste déroulante (Super Admin, Directeur, Informaticien, Professeur).</a:t>
             </a:r>
           </a:p>
           <a:p>
             <a:pPr/>
             <a:r>
-              <a:rPr b="1" sz="1800">
-                <a:solidFill>
-                  <a:srgbClr val="1E293B"/>
-                </a:solidFill>
-              </a:rPr>
-              <a:t>• Attribution des droits : </a:t>
-            </a:r>
-            <a:r>
-              <a:rPr sz="1600">
-                <a:solidFill>
-                  <a:srgbClr val="1E293B"/>
-                </a:solidFill>
-              </a:rPr>
-              <a:t>Le Directeur attribue la permission 'Saisie des Moyennes' dynamiquement via l'onglet Administration.</a:t>
+              <a:rPr b="1" sz="1500">
+                <a:solidFill>
+                  <a:srgbClr val="1E293B"/>
+                </a:solidFill>
+              </a:rPr>
+              <a:t>4. Enregistrer : </a:t>
+            </a:r>
+            <a:r>
+              <a:rPr sz="1400">
+                <a:solidFill>
+                  <a:srgbClr val="1E293B"/>
+                </a:solidFill>
+              </a:rPr>
+              <a:t>Cliquez sur le bouton orange 'Créer le compte utilisateur'.</a:t>
+            </a:r>
+          </a:p>
+          <a:p>
+            <a:pPr/>
+            <a:r>
+              <a:rPr b="1" sz="1500">
+                <a:solidFill>
+                  <a:srgbClr val="1E293B"/>
+                </a:solidFill>
+              </a:rPr>
+              <a:t>5. Assigner la Saisie des Moyennes : </a:t>
+            </a:r>
+            <a:r>
+              <a:rPr sz="1400">
+                <a:solidFill>
+                  <a:srgbClr val="1E293B"/>
+                </a:solidFill>
+              </a:rPr>
+              <a:t>Dans la liste des comptes ci-dessous, repérez l'utilisateur et cochez la case 'Saisie des Moyennes'.</a:t>
             </a:r>
           </a:p>
         </p:txBody>
@@ -3374,7 +3381,7 @@
           <a:lstStyle/>
           <a:p>
             <a:pPr>
-              <a:defRPr sz="2800" b="1">
+              <a:defRPr sz="2400" b="1">
                 <a:solidFill>
                   <a:srgbClr val="0B4998"/>
                 </a:solidFill>
@@ -3382,7 +3389,7 @@
               </a:defRPr>
             </a:pPr>
             <a:r>
-              <a:t>2. Saisie des Moyennes &amp; Verrouillage</a:t>
+              <a:t>Tutoriel 2 : Planifier un cours sur l'Emploi du Temps</a:t>
             </a:r>
           </a:p>
         </p:txBody>
@@ -3395,8 +3402,8 @@
         </p:nvSpPr>
         <p:spPr>
           <a:xfrm>
-            <a:off x="457200" y="1371600"/>
-            <a:ext cx="11274552" cy="4572000"/>
+            <a:off x="457200" y="1097280"/>
+            <a:ext cx="11274552" cy="5303520"/>
           </a:xfrm>
           <a:prstGeom prst="rect">
             <a:avLst/>
@@ -3412,77 +3419,96 @@
           <a:p>
             <a:pPr/>
             <a:r>
-              <a:rPr b="1" sz="1800">
-                <a:solidFill>
-                  <a:srgbClr val="1E293B"/>
-                </a:solidFill>
-              </a:rPr>
-              <a:t>• Saisie par le Professeur : </a:t>
-            </a:r>
-            <a:r>
-              <a:rPr sz="1600">
-                <a:solidFill>
-                  <a:srgbClr val="1E293B"/>
-                </a:solidFill>
-              </a:rPr>
-              <a:t>Le professeur remplit la grille de notes pour sa classe/matière autorisée.</a:t>
+              <a:rPr b="1" sz="1500">
+                <a:solidFill>
+                  <a:srgbClr val="1E293B"/>
+                </a:solidFill>
+              </a:rPr>
+              <a:t>1. Accéder au module : </a:t>
+            </a:r>
+            <a:r>
+              <a:rPr sz="1400">
+                <a:solidFill>
+                  <a:srgbClr val="1E293B"/>
+                </a:solidFill>
+              </a:rPr>
+              <a:t>Allez sur l'onglet 'EDT - Planification'.</a:t>
             </a:r>
           </a:p>
           <a:p>
             <a:pPr/>
             <a:r>
-              <a:rPr b="1" sz="1800">
-                <a:solidFill>
-                  <a:srgbClr val="1E293B"/>
-                </a:solidFill>
-              </a:rPr>
-              <a:t>• Action 'Valider &amp; Figer' : </a:t>
-            </a:r>
-            <a:r>
-              <a:rPr sz="1600">
-                <a:solidFill>
-                  <a:srgbClr val="1E293B"/>
-                </a:solidFill>
-              </a:rPr>
-              <a:t>Une fois validées, les notes passent au statut verrouillé (🔒). L'enseignant ne peut plus les modifier.</a:t>
+              <a:rPr b="1" sz="1500">
+                <a:solidFill>
+                  <a:srgbClr val="1E293B"/>
+                </a:solidFill>
+              </a:rPr>
+              <a:t>2. Remplir les détails : </a:t>
+            </a:r>
+            <a:r>
+              <a:rPr sz="1400">
+                <a:solidFill>
+                  <a:srgbClr val="1E293B"/>
+                </a:solidFill>
+              </a:rPr>
+              <a:t>Sélectionnez la Classe, le Professeur, la Matière et la Salle d'étude.</a:t>
             </a:r>
           </a:p>
           <a:p>
             <a:pPr/>
             <a:r>
-              <a:rPr b="1" sz="1800">
-                <a:solidFill>
-                  <a:srgbClr val="1E293B"/>
-                </a:solidFill>
-              </a:rPr>
-              <a:t>• Règle de Sécurité : </a:t>
-            </a:r>
-            <a:r>
-              <a:rPr sz="1600">
-                <a:solidFill>
-                  <a:srgbClr val="1E293B"/>
-                </a:solidFill>
-              </a:rPr>
-              <a:t>Les modifications après validation sont exclusivement réservées au Directeur et à l'Informaticien.</a:t>
+              <a:rPr b="1" sz="1500">
+                <a:solidFill>
+                  <a:srgbClr val="1E293B"/>
+                </a:solidFill>
+              </a:rPr>
+              <a:t>3. Choisir le créneau : </a:t>
+            </a:r>
+            <a:r>
+              <a:rPr sz="1400">
+                <a:solidFill>
+                  <a:srgbClr val="1E293B"/>
+                </a:solidFill>
+              </a:rPr>
+              <a:t>Choisissez le Jour de la semaine (ex: Lundi) et le Créneau horaire (ex: 08:00 - 10:00).</a:t>
             </a:r>
           </a:p>
           <a:p>
             <a:pPr/>
             <a:r>
-              <a:rPr b="1" sz="1800">
-                <a:solidFill>
-                  <a:srgbClr val="1E293B"/>
-                </a:solidFill>
-              </a:rPr>
-              <a:t>• Déverrouillage : </a:t>
-            </a:r>
-            <a:r>
-              <a:rPr sz="1600">
-                <a:solidFill>
-                  <a:srgbClr val="1E293B"/>
-                </a:solidFill>
-              </a:rPr>
-              <a:t>Le Directeur peut débloquer individuellement ou par lot les notes pour permettre un correctif.</a:t>
+              <a:rPr b="1" sz="1500">
+                <a:solidFill>
+                  <a:srgbClr val="1E293B"/>
+                </a:solidFill>
+              </a:rPr>
+              <a:t>4. Détection automatique : </a:t>
+            </a:r>
+            <a:r>
+              <a:rPr sz="1400">
+                <a:solidFill>
+                  <a:srgbClr val="1E293B"/>
+                </a:solidFill>
+              </a:rPr>
+              <a:t>Le système bloque instantanément la planification si le prof ou la salle est déjà occupé(e).</a:t>
+            </a:r>
+          </a:p>
+          <a:p>
+            <a:pPr/>
+            <a:r>
+              <a:rPr b="1" sz="1500">
+                <a:solidFill>
+                  <a:srgbClr val="1E293B"/>
+                </a:solidFill>
+              </a:rPr>
+              <a:t>5. Validation : </a:t>
+            </a:r>
+            <a:r>
+              <a:rPr sz="1400">
+                <a:solidFill>
+                  <a:srgbClr val="1E293B"/>
+                </a:solidFill>
+              </a:rPr>
+              <a:t>Cliquez sur 'Planifier ce cours' pour l'ajouter à la grille hebdomadaire.</a:t>
             </a:r>
           </a:p>
         </p:txBody>
@@ -3536,7 +3562,7 @@
           <a:lstStyle/>
           <a:p>
             <a:pPr>
-              <a:defRPr sz="2800" b="1">
+              <a:defRPr sz="2400" b="1">
                 <a:solidFill>
                   <a:srgbClr val="0B4998"/>
                 </a:solidFill>
@@ -3544,7 +3570,7 @@
               </a:defRPr>
             </a:pPr>
             <a:r>
-              <a:t>3. Procédure de Validation des Bulletins</a:t>
+              <a:t>Tutoriel 3 : Saisie des notes (Enseignants) &amp; Verrouillage</a:t>
             </a:r>
           </a:p>
         </p:txBody>
@@ -3557,8 +3583,8 @@
         </p:nvSpPr>
         <p:spPr>
           <a:xfrm>
-            <a:off x="457200" y="1371600"/>
-            <a:ext cx="11274552" cy="4572000"/>
+            <a:off x="457200" y="1097280"/>
+            <a:ext cx="11274552" cy="5303520"/>
           </a:xfrm>
           <a:prstGeom prst="rect">
             <a:avLst/>
@@ -3574,96 +3600,96 @@
           <a:p>
             <a:pPr/>
             <a:r>
-              <a:rPr b="1" sz="1800">
-                <a:solidFill>
-                  <a:srgbClr val="1E293B"/>
-                </a:solidFill>
-              </a:rPr>
-              <a:t>• Étape 1 : Saisie de notes </a:t>
-            </a:r>
-            <a:r>
-              <a:rPr sz="1600">
-                <a:solidFill>
-                  <a:srgbClr val="1E293B"/>
-                </a:solidFill>
-              </a:rPr>
-              <a:t>par les enseignants pour toutes les matières.</a:t>
+              <a:rPr b="1" sz="1500">
+                <a:solidFill>
+                  <a:srgbClr val="1E293B"/>
+                </a:solidFill>
+              </a:rPr>
+              <a:t>1. Connexion Professeur : </a:t>
+            </a:r>
+            <a:r>
+              <a:rPr sz="1400">
+                <a:solidFill>
+                  <a:srgbClr val="1E293B"/>
+                </a:solidFill>
+              </a:rPr>
+              <a:t>Connectez-vous au portail avec vos identifiants d'enseignant.</a:t>
             </a:r>
           </a:p>
           <a:p>
             <a:pPr/>
             <a:r>
-              <a:rPr b="1" sz="1800">
-                <a:solidFill>
-                  <a:srgbClr val="1E293B"/>
-                </a:solidFill>
-              </a:rPr>
-              <a:t>• Étape 2 : Consultation de la 'Natte' </a:t>
-            </a:r>
-            <a:r>
-              <a:rPr sz="1600">
-                <a:solidFill>
-                  <a:srgbClr val="1E293B"/>
-                </a:solidFill>
-              </a:rPr>
-              <a:t>par la direction pour vérification globale.</a:t>
+              <a:rPr b="1" sz="1500">
+                <a:solidFill>
+                  <a:srgbClr val="1E293B"/>
+                </a:solidFill>
+              </a:rPr>
+              <a:t>2. Sélectionner la classe : </a:t>
+            </a:r>
+            <a:r>
+              <a:rPr sz="1400">
+                <a:solidFill>
+                  <a:srgbClr val="1E293B"/>
+                </a:solidFill>
+              </a:rPr>
+              <a:t>Allez dans 'Espace Enseignant' &gt; 'Saisie des Moyennes', puis choisissez la Classe et la Matière.</a:t>
             </a:r>
           </a:p>
           <a:p>
             <a:pPr/>
             <a:r>
-              <a:rPr b="1" sz="1800">
-                <a:solidFill>
-                  <a:srgbClr val="1E293B"/>
-                </a:solidFill>
-              </a:rPr>
-              <a:t>• Étape 3 : Validation du Procès-Verbal (PV) </a:t>
-            </a:r>
-            <a:r>
-              <a:rPr sz="1600">
-                <a:solidFill>
-                  <a:srgbClr val="1E293B"/>
-                </a:solidFill>
-              </a:rPr>
-              <a:t>de la classe par le Directeur (onglet Évaluations).</a:t>
+              <a:rPr b="1" sz="1500">
+                <a:solidFill>
+                  <a:srgbClr val="1E293B"/>
+                </a:solidFill>
+              </a:rPr>
+              <a:t>3. Saisir les notes : </a:t>
+            </a:r>
+            <a:r>
+              <a:rPr sz="1400">
+                <a:solidFill>
+                  <a:srgbClr val="1E293B"/>
+                </a:solidFill>
+              </a:rPr>
+              <a:t>Entrez la note de chaque élève de la liste (valeur sur 20) et cliquez sur 'Enregistrer'.</a:t>
             </a:r>
           </a:p>
           <a:p>
             <a:pPr/>
             <a:r>
-              <a:rPr b="1" sz="1800">
-                <a:solidFill>
-                  <a:srgbClr val="1E293B"/>
-                </a:solidFill>
-              </a:rPr>
-              <a:t>• Étape 4 : Impression des Bulletins </a:t>
-            </a:r>
-            <a:r>
-              <a:rPr sz="1600">
-                <a:solidFill>
-                  <a:srgbClr val="1E293B"/>
-                </a:solidFill>
-              </a:rPr>
-              <a:t>devenue disponible uniquement après validation du PV de la classe.</a:t>
+              <a:rPr b="1" sz="1500">
+                <a:solidFill>
+                  <a:srgbClr val="1E293B"/>
+                </a:solidFill>
+              </a:rPr>
+              <a:t>4. Figer définitivement : </a:t>
+            </a:r>
+            <a:r>
+              <a:rPr sz="1400">
+                <a:solidFill>
+                  <a:srgbClr val="1E293B"/>
+                </a:solidFill>
+              </a:rPr>
+              <a:t>Cliquez sur le bouton vert '🔒 Valider &amp; Figer' pour verrouiller la saisie.</a:t>
             </a:r>
           </a:p>
           <a:p>
             <a:pPr/>
             <a:r>
-              <a:rPr b="1" sz="1800">
-                <a:solidFill>
-                  <a:srgbClr val="1E293B"/>
-                </a:solidFill>
-              </a:rPr>
-              <a:t>• Sécurité renforcée : </a:t>
-            </a:r>
-            <a:r>
-              <a:rPr sz="1600">
-                <a:solidFill>
-                  <a:srgbClr val="1E293B"/>
-                </a:solidFill>
-              </a:rPr>
-              <a:t>Aucun bulletin n'est éditable ou consultable si le PV de classe n'est pas validé au préalable.</a:t>
+              <a:rPr b="1" sz="1500">
+                <a:solidFill>
+                  <a:srgbClr val="1E293B"/>
+                </a:solidFill>
+              </a:rPr>
+              <a:t>5. Sécurité : </a:t>
+            </a:r>
+            <a:r>
+              <a:rPr sz="1400">
+                <a:solidFill>
+                  <a:srgbClr val="1E293B"/>
+                </a:solidFill>
+              </a:rPr>
+              <a:t>Une fois figée, la note affiche le badge '🔒 Figé' et le professeur ne peut plus la modifier.</a:t>
             </a:r>
           </a:p>
         </p:txBody>
@@ -3717,7 +3743,7 @@
           <a:lstStyle/>
           <a:p>
             <a:pPr>
-              <a:defRPr sz="2800" b="1">
+              <a:defRPr sz="2400" b="1">
                 <a:solidFill>
                   <a:srgbClr val="0B4998"/>
                 </a:solidFill>
@@ -3725,7 +3751,7 @@
               </a:defRPr>
             </a:pPr>
             <a:r>
-              <a:t>4. Emplois du Temps (EDT)</a:t>
+              <a:t>Tutoriel 4 : Déverrouiller une note (Direction)</a:t>
             </a:r>
           </a:p>
         </p:txBody>
@@ -3738,8 +3764,8 @@
         </p:nvSpPr>
         <p:spPr>
           <a:xfrm>
-            <a:off x="457200" y="1371600"/>
-            <a:ext cx="11274552" cy="4572000"/>
+            <a:off x="457200" y="1097280"/>
+            <a:ext cx="11274552" cy="5303520"/>
           </a:xfrm>
           <a:prstGeom prst="rect">
             <a:avLst/>
@@ -3755,77 +3781,77 @@
           <a:p>
             <a:pPr/>
             <a:r>
-              <a:rPr b="1" sz="1800">
-                <a:solidFill>
-                  <a:srgbClr val="1E293B"/>
-                </a:solidFill>
-              </a:rPr>
-              <a:t>• Planification intelligente : </a:t>
-            </a:r>
-            <a:r>
-              <a:rPr sz="1600">
-                <a:solidFill>
-                  <a:srgbClr val="1E293B"/>
-                </a:solidFill>
-              </a:rPr>
-              <a:t>Attribution des créneaux horaires, enseignants, salles et matières.</a:t>
+              <a:rPr b="1" sz="1500">
+                <a:solidFill>
+                  <a:srgbClr val="1E293B"/>
+                </a:solidFill>
+              </a:rPr>
+              <a:t>1. Accéder au portail prof : </a:t>
+            </a:r>
+            <a:r>
+              <a:rPr sz="1400">
+                <a:solidFill>
+                  <a:srgbClr val="1E293B"/>
+                </a:solidFill>
+              </a:rPr>
+              <a:t>Connectez-vous en tant que Directeur ou Super Admin et allez dans le portail enseignant.</a:t>
             </a:r>
           </a:p>
           <a:p>
             <a:pPr/>
             <a:r>
-              <a:rPr b="1" sz="1800">
-                <a:solidFill>
-                  <a:srgbClr val="1E293B"/>
-                </a:solidFill>
-              </a:rPr>
-              <a:t>• Détection des conflits : </a:t>
-            </a:r>
-            <a:r>
-              <a:rPr sz="1600">
-                <a:solidFill>
-                  <a:srgbClr val="1E293B"/>
-                </a:solidFill>
-              </a:rPr>
-              <a:t>Vérification instantanée en cas de double réservation d'enseignant, de salle ou d'horaire indisponible.</a:t>
+              <a:rPr b="1" sz="1500">
+                <a:solidFill>
+                  <a:srgbClr val="1E293B"/>
+                </a:solidFill>
+              </a:rPr>
+              <a:t>2. Trouver la note figée : </a:t>
+            </a:r>
+            <a:r>
+              <a:rPr sz="1400">
+                <a:solidFill>
+                  <a:srgbClr val="1E293B"/>
+                </a:solidFill>
+              </a:rPr>
+              <a:t>Sélectionnez la classe et la matière concernée dans le filtre du portail.</a:t>
             </a:r>
           </a:p>
           <a:p>
             <a:pPr/>
             <a:r>
-              <a:rPr b="1" sz="1800">
-                <a:solidFill>
-                  <a:srgbClr val="1E293B"/>
-                </a:solidFill>
-              </a:rPr>
-              <a:t>• Professeur Principal : </a:t>
-            </a:r>
-            <a:r>
-              <a:rPr sz="1600">
-                <a:solidFill>
-                  <a:srgbClr val="1E293B"/>
-                </a:solidFill>
-              </a:rPr>
-              <a:t>Chaque classe possède son enseignant principal attitré visible sur l'EDT et le bulletin.</a:t>
+              <a:rPr b="1" sz="1500">
+                <a:solidFill>
+                  <a:srgbClr val="1E293B"/>
+                </a:solidFill>
+              </a:rPr>
+              <a:t>3. Déverrouiller : </a:t>
+            </a:r>
+            <a:r>
+              <a:rPr sz="1400">
+                <a:solidFill>
+                  <a:srgbClr val="1E293B"/>
+                </a:solidFill>
+              </a:rPr>
+              <a:t>Cliquez sur le lien orange '🔓 Déverr.' à côté de la note verrouillée.</a:t>
             </a:r>
           </a:p>
           <a:p>
             <a:pPr/>
             <a:r>
-              <a:rPr b="1" sz="1800">
-                <a:solidFill>
-                  <a:srgbClr val="1E293B"/>
-                </a:solidFill>
-              </a:rPr>
-              <a:t>• Visualisation et Impression : </a:t>
-            </a:r>
-            <a:r>
-              <a:rPr sz="1600">
-                <a:solidFill>
-                  <a:srgbClr val="1E293B"/>
-                </a:solidFill>
-              </a:rPr>
-              <a:t>Grilles d'EDT claires filtrables par enseignant ou par classe prêtes pour l'impression.</a:t>
+              <a:rPr b="1" sz="1500">
+                <a:solidFill>
+                  <a:srgbClr val="1E293B"/>
+                </a:solidFill>
+              </a:rPr>
+              <a:t>4. Confirmation : </a:t>
+            </a:r>
+            <a:r>
+              <a:rPr sz="1400">
+                <a:solidFill>
+                  <a:srgbClr val="1E293B"/>
+                </a:solidFill>
+              </a:rPr>
+              <a:t>Confirmez l'alerte du navigateur. Le badge '🔒 Figé' disparaît et l'enseignant peut à nouveau corriger.</a:t>
             </a:r>
           </a:p>
         </p:txBody>
@@ -3879,7 +3905,7 @@
           <a:lstStyle/>
           <a:p>
             <a:pPr>
-              <a:defRPr sz="2800" b="1">
+              <a:defRPr sz="2400" b="1">
                 <a:solidFill>
                   <a:srgbClr val="0B4998"/>
                 </a:solidFill>
@@ -3887,7 +3913,7 @@
               </a:defRPr>
             </a:pPr>
             <a:r>
-              <a:t>5. Facturation &amp; Scolarité</a:t>
+              <a:t>Tutoriel 5 : Valider le Procès-Verbal (PV)</a:t>
             </a:r>
           </a:p>
         </p:txBody>
@@ -3900,8 +3926,8 @@
         </p:nvSpPr>
         <p:spPr>
           <a:xfrm>
-            <a:off x="457200" y="1371600"/>
-            <a:ext cx="11274552" cy="4572000"/>
+            <a:off x="457200" y="1097280"/>
+            <a:ext cx="11274552" cy="5303520"/>
           </a:xfrm>
           <a:prstGeom prst="rect">
             <a:avLst/>
@@ -3917,58 +3943,258 @@
           <a:p>
             <a:pPr/>
             <a:r>
-              <a:rPr b="1" sz="1800">
-                <a:solidFill>
-                  <a:srgbClr val="1E293B"/>
-                </a:solidFill>
-              </a:rPr>
-              <a:t>• Traçabilité financière : </a:t>
-            </a:r>
-            <a:r>
-              <a:rPr sz="1600">
-                <a:solidFill>
-                  <a:srgbClr val="1E293B"/>
-                </a:solidFill>
-              </a:rPr>
-              <a:t>Enregistrement des versements d'écolages par élève.</a:t>
+              <a:rPr b="1" sz="1500">
+                <a:solidFill>
+                  <a:srgbClr val="1E293B"/>
+                </a:solidFill>
+              </a:rPr>
+              <a:t>1. Accéder à l'onglet : </a:t>
+            </a:r>
+            <a:r>
+              <a:rPr sz="1400">
+                <a:solidFill>
+                  <a:srgbClr val="1E293B"/>
+                </a:solidFill>
+              </a:rPr>
+              <a:t>Allez sur 'Évaluations &amp; Examens' &gt; sous-onglet 'Procès-Verbaux &amp; Validation'.</a:t>
             </a:r>
           </a:p>
           <a:p>
             <a:pPr/>
             <a:r>
-              <a:rPr b="1" sz="1800">
-                <a:solidFill>
-                  <a:srgbClr val="1E293B"/>
-                </a:solidFill>
-              </a:rPr>
-              <a:t>• Reçus PDF officiels : </a:t>
-            </a:r>
-            <a:r>
-              <a:rPr sz="1600">
-                <a:solidFill>
-                  <a:srgbClr val="1E293B"/>
-                </a:solidFill>
-              </a:rPr>
-              <a:t>Génération automatique d'un reçu imprimable pour chaque transaction.</a:t>
+              <a:rPr b="1" sz="1500">
+                <a:solidFill>
+                  <a:srgbClr val="1E293B"/>
+                </a:solidFill>
+              </a:rPr>
+              <a:t>2. Vérifier la classe : </a:t>
+            </a:r>
+            <a:r>
+              <a:rPr sz="1400">
+                <a:solidFill>
+                  <a:srgbClr val="1E293B"/>
+                </a:solidFill>
+              </a:rPr>
+              <a:t>Sélectionnez la classe et examinez les moyennes affichées sur l'écran (Natte de vérification).</a:t>
             </a:r>
           </a:p>
           <a:p>
             <a:pPr/>
             <a:r>
-              <a:rPr b="1" sz="1800">
-                <a:solidFill>
-                  <a:srgbClr val="1E293B"/>
-                </a:solidFill>
-              </a:rPr>
-              <a:t>• Notification intégrée : </a:t>
-            </a:r>
-            <a:r>
-              <a:rPr sz="1600">
-                <a:solidFill>
-                  <a:srgbClr val="1E293B"/>
-                </a:solidFill>
-              </a:rPr>
-              <a:t>Bouton d'envoi rapide par WhatsApp ou SMS pour notifier instantanément les parents d'élèves.</a:t>
+              <a:rPr b="1" sz="1500">
+                <a:solidFill>
+                  <a:srgbClr val="1E293B"/>
+                </a:solidFill>
+              </a:rPr>
+              <a:t>3. Lancer la validation : </a:t>
+            </a:r>
+            <a:r>
+              <a:rPr sz="1400">
+                <a:solidFill>
+                  <a:srgbClr val="1E293B"/>
+                </a:solidFill>
+              </a:rPr>
+              <a:t>Cliquez sur 'Valider le PV pour cette Classe' pour verrouiller le trimestre.</a:t>
+            </a:r>
+          </a:p>
+          <a:p>
+            <a:pPr/>
+            <a:r>
+              <a:rPr b="1" sz="1500">
+                <a:solidFill>
+                  <a:srgbClr val="1E293B"/>
+                </a:solidFill>
+              </a:rPr>
+              <a:t>4. Effet immédiat : </a:t>
+            </a:r>
+            <a:r>
+              <a:rPr sz="1400">
+                <a:solidFill>
+                  <a:srgbClr val="1E293B"/>
+                </a:solidFill>
+              </a:rPr>
+              <a:t>Les bulletins scolaires de cette classe deviennent instantanément disponibles pour l'impression.</a:t>
+            </a:r>
+          </a:p>
+        </p:txBody>
+      </p:sp>
+    </p:spTree>
+  </p:cSld>
+  <p:clrMapOvr>
+    <a:masterClrMapping/>
+  </p:clrMapOvr>
+</p:sld>
+</file>
+
+<file path=ppt/slides/slide7.xml><?xml version="1.0" encoding="utf-8"?>
+<p:sld xmlns:a="http://schemas.openxmlformats.org/drawingml/2006/main" xmlns:p="http://schemas.openxmlformats.org/presentationml/2006/main" xmlns:r="http://schemas.openxmlformats.org/officeDocument/2006/relationships">
+  <p:cSld>
+    <p:bg>
+      <p:bgPr>
+        <a:solidFill>
+          <a:srgbClr val="F8FAFC"/>
+        </a:solidFill>
+        <a:effectLst/>
+      </p:bgPr>
+    </p:bg>
+    <p:spTree>
+      <p:nvGrpSpPr>
+        <p:cNvPr id="1" name=""/>
+        <p:cNvGrpSpPr/>
+        <p:nvPr/>
+      </p:nvGrpSpPr>
+      <p:grpSpPr/>
+      <p:sp>
+        <p:nvSpPr>
+          <p:cNvPr id="2" name="TextBox 1"/>
+          <p:cNvSpPr txBox="1"/>
+          <p:nvPr/>
+        </p:nvSpPr>
+        <p:spPr>
+          <a:xfrm>
+            <a:off x="457200" y="365760"/>
+            <a:ext cx="11274552" cy="731520"/>
+          </a:xfrm>
+          <a:prstGeom prst="rect">
+            <a:avLst/>
+          </a:prstGeom>
+          <a:noFill/>
+        </p:spPr>
+        <p:txBody>
+          <a:bodyPr wrap="square">
+            <a:spAutoFit/>
+          </a:bodyPr>
+          <a:lstStyle/>
+          <a:p>
+            <a:pPr>
+              <a:defRPr sz="2400" b="1">
+                <a:solidFill>
+                  <a:srgbClr val="0B4998"/>
+                </a:solidFill>
+                <a:latin typeface="Arial"/>
+              </a:defRPr>
+            </a:pPr>
+            <a:r>
+              <a:t>Tutoriel 6 : Enregistrer un paiement &amp; générer le reçu</a:t>
+            </a:r>
+          </a:p>
+        </p:txBody>
+      </p:sp>
+      <p:sp>
+        <p:nvSpPr>
+          <p:cNvPr id="3" name="TextBox 2"/>
+          <p:cNvSpPr txBox="1"/>
+          <p:nvPr/>
+        </p:nvSpPr>
+        <p:spPr>
+          <a:xfrm>
+            <a:off x="457200" y="1097280"/>
+            <a:ext cx="11274552" cy="5303520"/>
+          </a:xfrm>
+          <a:prstGeom prst="rect">
+            <a:avLst/>
+          </a:prstGeom>
+          <a:noFill/>
+        </p:spPr>
+        <p:txBody>
+          <a:bodyPr wrap="square">
+            <a:spAutoFit/>
+          </a:bodyPr>
+          <a:lstStyle/>
+          <a:p/>
+          <a:p>
+            <a:pPr/>
+            <a:r>
+              <a:rPr b="1" sz="1500">
+                <a:solidFill>
+                  <a:srgbClr val="1E293B"/>
+                </a:solidFill>
+              </a:rPr>
+              <a:t>1. Ouvrir l'onglet financier : </a:t>
+            </a:r>
+            <a:r>
+              <a:rPr sz="1400">
+                <a:solidFill>
+                  <a:srgbClr val="1E293B"/>
+                </a:solidFill>
+              </a:rPr>
+              <a:t>Sélectionnez l'onglet 'Finances &amp; Écolages'.</a:t>
+            </a:r>
+          </a:p>
+          <a:p>
+            <a:pPr/>
+            <a:r>
+              <a:rPr b="1" sz="1500">
+                <a:solidFill>
+                  <a:srgbClr val="1E293B"/>
+                </a:solidFill>
+              </a:rPr>
+              <a:t>2. Sélectionner l'élève : </a:t>
+            </a:r>
+            <a:r>
+              <a:rPr sz="1400">
+                <a:solidFill>
+                  <a:srgbClr val="1E293B"/>
+                </a:solidFill>
+              </a:rPr>
+              <a:t>Recherchez et sélectionnez l'élève dans la liste déroulante.</a:t>
+            </a:r>
+          </a:p>
+          <a:p>
+            <a:pPr/>
+            <a:r>
+              <a:rPr b="1" sz="1500">
+                <a:solidFill>
+                  <a:srgbClr val="1E293B"/>
+                </a:solidFill>
+              </a:rPr>
+              <a:t>3. Remplir le versement : </a:t>
+            </a:r>
+            <a:r>
+              <a:rPr sz="1400">
+                <a:solidFill>
+                  <a:srgbClr val="1E293B"/>
+                </a:solidFill>
+              </a:rPr>
+              <a:t>Entrez le Montant payé, le Motif du versement, et le Mode de règlement (Espèces, Chèque, etc.).</a:t>
+            </a:r>
+          </a:p>
+          <a:p>
+            <a:pPr/>
+            <a:r>
+              <a:rPr b="1" sz="1500">
+                <a:solidFill>
+                  <a:srgbClr val="1E293B"/>
+                </a:solidFill>
+              </a:rPr>
+              <a:t>4. Enregistrer : </a:t>
+            </a:r>
+            <a:r>
+              <a:rPr sz="1400">
+                <a:solidFill>
+                  <a:srgbClr val="1E293B"/>
+                </a:solidFill>
+              </a:rPr>
+              <a:t>Cliquez sur 'Enregistrer la transaction'. Le solde de l'élève se met à jour immédiatement.</a:t>
+            </a:r>
+          </a:p>
+          <a:p>
+            <a:pPr/>
+            <a:r>
+              <a:rPr b="1" sz="1500">
+                <a:solidFill>
+                  <a:srgbClr val="1E293B"/>
+                </a:solidFill>
+              </a:rPr>
+              <a:t>5. Télécharger/Envoyer : </a:t>
+            </a:r>
+            <a:r>
+              <a:rPr sz="1400">
+                <a:solidFill>
+                  <a:srgbClr val="1E293B"/>
+                </a:solidFill>
+              </a:rPr>
+              <a:t>Cliquez sur 'Générer Reçu PDF' pour l'imprimer, ou utilisez le bouton WhatsApp pour envoyer la notification.</a:t>
             </a:r>
           </a:p>
         </p:txBody>

--- a/guide_utilisation.pptx
+++ b/guide_utilisation.pptx
@@ -12,6 +12,36 @@
     <p:sldId id="260" r:id="rId11"/>
     <p:sldId id="261" r:id="rId12"/>
     <p:sldId id="262" r:id="rId13"/>
+    <p:sldId id="263" r:id="rId14"/>
+    <p:sldId id="264" r:id="rId15"/>
+    <p:sldId id="265" r:id="rId16"/>
+    <p:sldId id="266" r:id="rId17"/>
+    <p:sldId id="267" r:id="rId18"/>
+    <p:sldId id="268" r:id="rId19"/>
+    <p:sldId id="269" r:id="rId20"/>
+    <p:sldId id="270" r:id="rId21"/>
+    <p:sldId id="271" r:id="rId22"/>
+    <p:sldId id="272" r:id="rId23"/>
+    <p:sldId id="273" r:id="rId24"/>
+    <p:sldId id="274" r:id="rId25"/>
+    <p:sldId id="275" r:id="rId26"/>
+    <p:sldId id="276" r:id="rId27"/>
+    <p:sldId id="277" r:id="rId28"/>
+    <p:sldId id="278" r:id="rId29"/>
+    <p:sldId id="279" r:id="rId30"/>
+    <p:sldId id="280" r:id="rId31"/>
+    <p:sldId id="281" r:id="rId32"/>
+    <p:sldId id="282" r:id="rId33"/>
+    <p:sldId id="283" r:id="rId34"/>
+    <p:sldId id="284" r:id="rId35"/>
+    <p:sldId id="285" r:id="rId36"/>
+    <p:sldId id="286" r:id="rId37"/>
+    <p:sldId id="287" r:id="rId38"/>
+    <p:sldId id="288" r:id="rId39"/>
+    <p:sldId id="289" r:id="rId40"/>
+    <p:sldId id="290" r:id="rId41"/>
+    <p:sldId id="291" r:id="rId42"/>
+    <p:sldId id="292" r:id="rId43"/>
   </p:sldIdLst>
   <p:sldSz cx="12191695" cy="6858000" type="screen4x3"/>
   <p:notesSz cx="6858000" cy="9144000"/>
@@ -3110,8 +3140,8 @@
         </p:nvSpPr>
         <p:spPr>
           <a:xfrm>
-            <a:off x="914400" y="1828800"/>
-            <a:ext cx="10360152" cy="3200400"/>
+            <a:off x="731520" y="1645920"/>
+            <a:ext cx="10698480" cy="3840480"/>
           </a:xfrm>
           <a:prstGeom prst="rect">
             <a:avLst/>
@@ -3125,7 +3155,7 @@
           <a:lstStyle/>
           <a:p>
             <a:pPr>
-              <a:defRPr sz="5400" b="1">
+              <a:defRPr sz="5200" b="1">
                 <a:solidFill>
                   <a:srgbClr val="EE7B11"/>
                 </a:solidFill>
@@ -3138,7 +3168,7 @@
           </a:p>
           <a:p>
             <a:pPr>
-              <a:defRPr sz="2800" b="1">
+              <a:defRPr sz="2600" b="1">
                 <a:solidFill>
                   <a:srgbClr val="FFFFFF"/>
                 </a:solidFill>
@@ -3146,7 +3176,2106 @@
               </a:defRPr>
             </a:pPr>
             <a:r>
-              <a:t>Guide Procédural &amp; Tutoriels Étape par Étape</a:t>
+              <a:t>Guide d'Utilisation Complet — Pas-à-Pas</a:t>
+            </a:r>
+          </a:p>
+          <a:p>
+            <a:pPr>
+              <a:defRPr sz="1600">
+                <a:solidFill>
+                  <a:srgbClr val="B4C8F0"/>
+                </a:solidFill>
+                <a:latin typeface="Arial"/>
+              </a:defRPr>
+            </a:pPr>
+            <a:r>
+              <a:t>Tous les modules · Toutes les procédures · Sans zone d'ombre</a:t>
+            </a:r>
+          </a:p>
+        </p:txBody>
+      </p:sp>
+    </p:spTree>
+  </p:cSld>
+  <p:clrMapOvr>
+    <a:masterClrMapping/>
+  </p:clrMapOvr>
+</p:sld>
+</file>
+
+<file path=ppt/slides/slide10.xml><?xml version="1.0" encoding="utf-8"?>
+<p:sld xmlns:a="http://schemas.openxmlformats.org/drawingml/2006/main" xmlns:p="http://schemas.openxmlformats.org/presentationml/2006/main" xmlns:r="http://schemas.openxmlformats.org/officeDocument/2006/relationships">
+  <p:cSld>
+    <p:bg>
+      <p:bgPr>
+        <a:solidFill>
+          <a:srgbClr val="F8FAFC"/>
+        </a:solidFill>
+        <a:effectLst/>
+      </p:bgPr>
+    </p:bg>
+    <p:spTree>
+      <p:nvGrpSpPr>
+        <p:cNvPr id="1" name=""/>
+        <p:cNvGrpSpPr/>
+        <p:nvPr/>
+      </p:nvGrpSpPr>
+      <p:grpSpPr/>
+      <p:sp>
+        <p:nvSpPr>
+          <p:cNvPr id="2" name="TextBox 1"/>
+          <p:cNvSpPr txBox="1"/>
+          <p:nvPr/>
+        </p:nvSpPr>
+        <p:spPr>
+          <a:xfrm>
+            <a:off x="0" y="0"/>
+            <a:ext cx="12191695" cy="411480"/>
+          </a:xfrm>
+          <a:prstGeom prst="rect">
+            <a:avLst/>
+          </a:prstGeom>
+          <a:solidFill>
+            <a:srgbClr val="0B4998"/>
+          </a:solidFill>
+        </p:spPr>
+        <p:txBody>
+          <a:bodyPr wrap="none">
+            <a:spAutoFit/>
+          </a:bodyPr>
+          <a:lstStyle/>
+          <a:p>
+            <a:pPr>
+              <a:defRPr sz="900" b="1">
+                <a:solidFill>
+                  <a:srgbClr val="FFFFFF"/>
+                </a:solidFill>
+                <a:latin typeface="Arial"/>
+              </a:defRPr>
+            </a:pPr>
+            <a:r>
+              <a:rPr>
+                <a:solidFill>
+                  <a:srgbClr val="FFFFFF"/>
+                </a:solidFill>
+              </a:rPr>
+              <a:t>MODULE 5 : GESTION DES MATIÈRES &amp; COEFFICIENTS</a:t>
+            </a:r>
+          </a:p>
+        </p:txBody>
+      </p:sp>
+      <p:sp>
+        <p:nvSpPr>
+          <p:cNvPr id="3" name="TextBox 2"/>
+          <p:cNvSpPr txBox="1"/>
+          <p:nvPr/>
+        </p:nvSpPr>
+        <p:spPr>
+          <a:xfrm>
+            <a:off x="365760" y="457200"/>
+            <a:ext cx="11430000" cy="548640"/>
+          </a:xfrm>
+          <a:prstGeom prst="rect">
+            <a:avLst/>
+          </a:prstGeom>
+          <a:noFill/>
+        </p:spPr>
+        <p:txBody>
+          <a:bodyPr wrap="none">
+            <a:spAutoFit/>
+          </a:bodyPr>
+          <a:lstStyle/>
+          <a:p>
+            <a:pPr>
+              <a:defRPr sz="2000" b="1">
+                <a:solidFill>
+                  <a:srgbClr val="EE7B11"/>
+                </a:solidFill>
+                <a:latin typeface="Arial"/>
+              </a:defRPr>
+            </a:pPr>
+            <a:r>
+              <a:t>Comment ajouter une nouvelle matière</a:t>
+            </a:r>
+          </a:p>
+        </p:txBody>
+      </p:sp>
+      <p:sp>
+        <p:nvSpPr>
+          <p:cNvPr id="4" name="TextBox 3"/>
+          <p:cNvSpPr txBox="1"/>
+          <p:nvPr/>
+        </p:nvSpPr>
+        <p:spPr>
+          <a:xfrm>
+            <a:off x="457200" y="1143000"/>
+            <a:ext cx="11247120" cy="5394960"/>
+          </a:xfrm>
+          <a:prstGeom prst="rect">
+            <a:avLst/>
+          </a:prstGeom>
+          <a:noFill/>
+        </p:spPr>
+        <p:txBody>
+          <a:bodyPr wrap="square">
+            <a:spAutoFit/>
+          </a:bodyPr>
+          <a:lstStyle/>
+          <a:p>
+            <a:pPr>
+              <a:defRPr sz="1200" b="1">
+                <a:solidFill>
+                  <a:srgbClr val="1E293B"/>
+                </a:solidFill>
+                <a:latin typeface="Arial"/>
+              </a:defRPr>
+            </a:pPr>
+            <a:r>
+              <a:t>1. Allez dans l'onglet 'Matières' ou 'EDT - Classes &amp; Séries'.</a:t>
+            </a:r>
+          </a:p>
+          <a:p>
+            <a:pPr>
+              <a:defRPr sz="1200" b="1">
+                <a:solidFill>
+                  <a:srgbClr val="1E293B"/>
+                </a:solidFill>
+                <a:latin typeface="Arial"/>
+              </a:defRPr>
+            </a:pPr>
+            <a:r>
+              <a:t>2. Dans le formulaire 'Ajouter une Matière', saisissez :</a:t>
+            </a:r>
+          </a:p>
+          <a:p>
+            <a:pPr>
+              <a:defRPr sz="1100" b="0">
+                <a:solidFill>
+                  <a:srgbClr val="505050"/>
+                </a:solidFill>
+                <a:latin typeface="Arial"/>
+              </a:defRPr>
+            </a:pPr>
+            <a:r>
+              <a:t>    - Nom de la matière (ex: Mathématiques, Français, Anglais)</a:t>
+            </a:r>
+          </a:p>
+          <a:p>
+            <a:pPr>
+              <a:defRPr sz="1100" b="0">
+                <a:solidFill>
+                  <a:srgbClr val="505050"/>
+                </a:solidFill>
+                <a:latin typeface="Arial"/>
+              </a:defRPr>
+            </a:pPr>
+            <a:r>
+              <a:t>    - Coefficient : poids de la matière dans le calcul des moyennes (ex: 4 pour Math)</a:t>
+            </a:r>
+          </a:p>
+          <a:p>
+            <a:pPr>
+              <a:defRPr sz="1100" b="0">
+                <a:solidFill>
+                  <a:srgbClr val="505050"/>
+                </a:solidFill>
+                <a:latin typeface="Arial"/>
+              </a:defRPr>
+            </a:pPr>
+            <a:r>
+              <a:t>    - Cochez 'Langue Vivante 2 (LV2)' si c'est une langue facultative (ex: Espagnol, Allemand)</a:t>
+            </a:r>
+          </a:p>
+          <a:p>
+            <a:pPr>
+              <a:defRPr sz="1100" b="0">
+                <a:solidFill>
+                  <a:srgbClr val="505050"/>
+                </a:solidFill>
+                <a:latin typeface="Arial"/>
+              </a:defRPr>
+            </a:pPr>
+            <a:r>
+              <a:t>    - Choisissez une couleur pour l'affichage dans l'EDT</a:t>
+            </a:r>
+          </a:p>
+          <a:p>
+            <a:pPr>
+              <a:defRPr sz="1200" b="1">
+                <a:solidFill>
+                  <a:srgbClr val="1E293B"/>
+                </a:solidFill>
+                <a:latin typeface="Arial"/>
+              </a:defRPr>
+            </a:pPr>
+            <a:r>
+              <a:t>7. Cliquez sur 'Ajouter la Matière'.</a:t>
+            </a:r>
+          </a:p>
+        </p:txBody>
+      </p:sp>
+    </p:spTree>
+  </p:cSld>
+  <p:clrMapOvr>
+    <a:masterClrMapping/>
+  </p:clrMapOvr>
+</p:sld>
+</file>
+
+<file path=ppt/slides/slide11.xml><?xml version="1.0" encoding="utf-8"?>
+<p:sld xmlns:a="http://schemas.openxmlformats.org/drawingml/2006/main" xmlns:p="http://schemas.openxmlformats.org/presentationml/2006/main" xmlns:r="http://schemas.openxmlformats.org/officeDocument/2006/relationships">
+  <p:cSld>
+    <p:bg>
+      <p:bgPr>
+        <a:solidFill>
+          <a:srgbClr val="F8FAFC"/>
+        </a:solidFill>
+        <a:effectLst/>
+      </p:bgPr>
+    </p:bg>
+    <p:spTree>
+      <p:nvGrpSpPr>
+        <p:cNvPr id="1" name=""/>
+        <p:cNvGrpSpPr/>
+        <p:nvPr/>
+      </p:nvGrpSpPr>
+      <p:grpSpPr/>
+      <p:sp>
+        <p:nvSpPr>
+          <p:cNvPr id="2" name="TextBox 1"/>
+          <p:cNvSpPr txBox="1"/>
+          <p:nvPr/>
+        </p:nvSpPr>
+        <p:spPr>
+          <a:xfrm>
+            <a:off x="0" y="0"/>
+            <a:ext cx="12191695" cy="411480"/>
+          </a:xfrm>
+          <a:prstGeom prst="rect">
+            <a:avLst/>
+          </a:prstGeom>
+          <a:solidFill>
+            <a:srgbClr val="0B4998"/>
+          </a:solidFill>
+        </p:spPr>
+        <p:txBody>
+          <a:bodyPr wrap="none">
+            <a:spAutoFit/>
+          </a:bodyPr>
+          <a:lstStyle/>
+          <a:p>
+            <a:pPr>
+              <a:defRPr sz="900" b="1">
+                <a:solidFill>
+                  <a:srgbClr val="FFFFFF"/>
+                </a:solidFill>
+                <a:latin typeface="Arial"/>
+              </a:defRPr>
+            </a:pPr>
+            <a:r>
+              <a:rPr>
+                <a:solidFill>
+                  <a:srgbClr val="FFFFFF"/>
+                </a:solidFill>
+              </a:rPr>
+              <a:t>MODULE 5 : GESTION DES MATIÈRES &amp; COEFFICIENTS</a:t>
+            </a:r>
+          </a:p>
+        </p:txBody>
+      </p:sp>
+      <p:sp>
+        <p:nvSpPr>
+          <p:cNvPr id="3" name="TextBox 2"/>
+          <p:cNvSpPr txBox="1"/>
+          <p:nvPr/>
+        </p:nvSpPr>
+        <p:spPr>
+          <a:xfrm>
+            <a:off x="365760" y="457200"/>
+            <a:ext cx="11430000" cy="548640"/>
+          </a:xfrm>
+          <a:prstGeom prst="rect">
+            <a:avLst/>
+          </a:prstGeom>
+          <a:noFill/>
+        </p:spPr>
+        <p:txBody>
+          <a:bodyPr wrap="none">
+            <a:spAutoFit/>
+          </a:bodyPr>
+          <a:lstStyle/>
+          <a:p>
+            <a:pPr>
+              <a:defRPr sz="2000" b="1">
+                <a:solidFill>
+                  <a:srgbClr val="EE7B11"/>
+                </a:solidFill>
+                <a:latin typeface="Arial"/>
+              </a:defRPr>
+            </a:pPr>
+            <a:r>
+              <a:t>Comment modifier le coefficient d'une matière</a:t>
+            </a:r>
+          </a:p>
+        </p:txBody>
+      </p:sp>
+      <p:sp>
+        <p:nvSpPr>
+          <p:cNvPr id="4" name="TextBox 3"/>
+          <p:cNvSpPr txBox="1"/>
+          <p:nvPr/>
+        </p:nvSpPr>
+        <p:spPr>
+          <a:xfrm>
+            <a:off x="457200" y="1143000"/>
+            <a:ext cx="11247120" cy="5394960"/>
+          </a:xfrm>
+          <a:prstGeom prst="rect">
+            <a:avLst/>
+          </a:prstGeom>
+          <a:noFill/>
+        </p:spPr>
+        <p:txBody>
+          <a:bodyPr wrap="square">
+            <a:spAutoFit/>
+          </a:bodyPr>
+          <a:lstStyle/>
+          <a:p>
+            <a:pPr>
+              <a:defRPr sz="1200" b="0">
+                <a:solidFill>
+                  <a:srgbClr val="1E293B"/>
+                </a:solidFill>
+                <a:latin typeface="Arial"/>
+              </a:defRPr>
+            </a:pPr>
+            <a:r>
+              <a:t>1. Dans la liste des matières, cliquez sur le bouton Modifier de la matière.</a:t>
+            </a:r>
+          </a:p>
+          <a:p>
+            <a:pPr>
+              <a:defRPr sz="1200" b="0">
+                <a:solidFill>
+                  <a:srgbClr val="1E293B"/>
+                </a:solidFill>
+                <a:latin typeface="Arial"/>
+              </a:defRPr>
+            </a:pPr>
+            <a:r>
+              <a:t>2. Changez la valeur du Coefficient selon les directives pédagogiques.</a:t>
+            </a:r>
+          </a:p>
+          <a:p>
+            <a:pPr>
+              <a:defRPr sz="1200" b="0">
+                <a:solidFill>
+                  <a:srgbClr val="1E293B"/>
+                </a:solidFill>
+                <a:latin typeface="Arial"/>
+              </a:defRPr>
+            </a:pPr>
+            <a:r>
+              <a:t>3. Cliquez sur 'Enregistrer'. Les bulletins recalculent automatiquement les moyennes.</a:t>
+            </a:r>
+          </a:p>
+        </p:txBody>
+      </p:sp>
+    </p:spTree>
+  </p:cSld>
+  <p:clrMapOvr>
+    <a:masterClrMapping/>
+  </p:clrMapOvr>
+</p:sld>
+</file>
+
+<file path=ppt/slides/slide12.xml><?xml version="1.0" encoding="utf-8"?>
+<p:sld xmlns:a="http://schemas.openxmlformats.org/drawingml/2006/main" xmlns:p="http://schemas.openxmlformats.org/presentationml/2006/main" xmlns:r="http://schemas.openxmlformats.org/officeDocument/2006/relationships">
+  <p:cSld>
+    <p:bg>
+      <p:bgPr>
+        <a:solidFill>
+          <a:srgbClr val="F8FAFC"/>
+        </a:solidFill>
+        <a:effectLst/>
+      </p:bgPr>
+    </p:bg>
+    <p:spTree>
+      <p:nvGrpSpPr>
+        <p:cNvPr id="1" name=""/>
+        <p:cNvGrpSpPr/>
+        <p:nvPr/>
+      </p:nvGrpSpPr>
+      <p:grpSpPr/>
+      <p:sp>
+        <p:nvSpPr>
+          <p:cNvPr id="2" name="TextBox 1"/>
+          <p:cNvSpPr txBox="1"/>
+          <p:nvPr/>
+        </p:nvSpPr>
+        <p:spPr>
+          <a:xfrm>
+            <a:off x="0" y="0"/>
+            <a:ext cx="12191695" cy="411480"/>
+          </a:xfrm>
+          <a:prstGeom prst="rect">
+            <a:avLst/>
+          </a:prstGeom>
+          <a:solidFill>
+            <a:srgbClr val="0B4998"/>
+          </a:solidFill>
+        </p:spPr>
+        <p:txBody>
+          <a:bodyPr wrap="none">
+            <a:spAutoFit/>
+          </a:bodyPr>
+          <a:lstStyle/>
+          <a:p>
+            <a:pPr>
+              <a:defRPr sz="900" b="1">
+                <a:solidFill>
+                  <a:srgbClr val="FFFFFF"/>
+                </a:solidFill>
+                <a:latin typeface="Arial"/>
+              </a:defRPr>
+            </a:pPr>
+            <a:r>
+              <a:rPr>
+                <a:solidFill>
+                  <a:srgbClr val="FFFFFF"/>
+                </a:solidFill>
+              </a:rPr>
+              <a:t>MODULE 6 : GESTION DES ENSEIGNANTS</a:t>
+            </a:r>
+          </a:p>
+        </p:txBody>
+      </p:sp>
+      <p:sp>
+        <p:nvSpPr>
+          <p:cNvPr id="3" name="TextBox 2"/>
+          <p:cNvSpPr txBox="1"/>
+          <p:nvPr/>
+        </p:nvSpPr>
+        <p:spPr>
+          <a:xfrm>
+            <a:off x="365760" y="457200"/>
+            <a:ext cx="11430000" cy="548640"/>
+          </a:xfrm>
+          <a:prstGeom prst="rect">
+            <a:avLst/>
+          </a:prstGeom>
+          <a:noFill/>
+        </p:spPr>
+        <p:txBody>
+          <a:bodyPr wrap="none">
+            <a:spAutoFit/>
+          </a:bodyPr>
+          <a:lstStyle/>
+          <a:p>
+            <a:pPr>
+              <a:defRPr sz="2000" b="1">
+                <a:solidFill>
+                  <a:srgbClr val="EE7B11"/>
+                </a:solidFill>
+                <a:latin typeface="Arial"/>
+              </a:defRPr>
+            </a:pPr>
+            <a:r>
+              <a:t>Comment ajouter un enseignant</a:t>
+            </a:r>
+          </a:p>
+        </p:txBody>
+      </p:sp>
+      <p:sp>
+        <p:nvSpPr>
+          <p:cNvPr id="4" name="TextBox 3"/>
+          <p:cNvSpPr txBox="1"/>
+          <p:nvPr/>
+        </p:nvSpPr>
+        <p:spPr>
+          <a:xfrm>
+            <a:off x="457200" y="1143000"/>
+            <a:ext cx="11247120" cy="5394960"/>
+          </a:xfrm>
+          <a:prstGeom prst="rect">
+            <a:avLst/>
+          </a:prstGeom>
+          <a:noFill/>
+        </p:spPr>
+        <p:txBody>
+          <a:bodyPr wrap="square">
+            <a:spAutoFit/>
+          </a:bodyPr>
+          <a:lstStyle/>
+          <a:p>
+            <a:pPr>
+              <a:defRPr sz="1200" b="1">
+                <a:solidFill>
+                  <a:srgbClr val="1E293B"/>
+                </a:solidFill>
+                <a:latin typeface="Arial"/>
+              </a:defRPr>
+            </a:pPr>
+            <a:r>
+              <a:t>1. Allez dans l'onglet 'Enseignants &amp; Équipes'.</a:t>
+            </a:r>
+          </a:p>
+          <a:p>
+            <a:pPr>
+              <a:defRPr sz="1200" b="1">
+                <a:solidFill>
+                  <a:srgbClr val="1E293B"/>
+                </a:solidFill>
+                <a:latin typeface="Arial"/>
+              </a:defRPr>
+            </a:pPr>
+            <a:r>
+              <a:t>2. Dans le formulaire d'ajout, saisissez :</a:t>
+            </a:r>
+          </a:p>
+          <a:p>
+            <a:pPr>
+              <a:defRPr sz="1100" b="0">
+                <a:solidFill>
+                  <a:srgbClr val="505050"/>
+                </a:solidFill>
+                <a:latin typeface="Arial"/>
+              </a:defRPr>
+            </a:pPr>
+            <a:r>
+              <a:t>    - Nom et Prénom complets</a:t>
+            </a:r>
+          </a:p>
+          <a:p>
+            <a:pPr>
+              <a:defRPr sz="1100" b="0">
+                <a:solidFill>
+                  <a:srgbClr val="505050"/>
+                </a:solidFill>
+                <a:latin typeface="Arial"/>
+              </a:defRPr>
+            </a:pPr>
+            <a:r>
+              <a:t>    - Matière(s) enseignée(s)</a:t>
+            </a:r>
+          </a:p>
+          <a:p>
+            <a:pPr>
+              <a:defRPr sz="1100" b="0">
+                <a:solidFill>
+                  <a:srgbClr val="505050"/>
+                </a:solidFill>
+                <a:latin typeface="Arial"/>
+              </a:defRPr>
+            </a:pPr>
+            <a:r>
+              <a:t>    - Téléphone et Email professionnel</a:t>
+            </a:r>
+          </a:p>
+          <a:p>
+            <a:pPr>
+              <a:defRPr sz="1100" b="0">
+                <a:solidFill>
+                  <a:srgbClr val="505050"/>
+                </a:solidFill>
+                <a:latin typeface="Arial"/>
+              </a:defRPr>
+            </a:pPr>
+            <a:r>
+              <a:t>    - Statut (Titulaire, Contractuel, Vacataire)</a:t>
+            </a:r>
+          </a:p>
+          <a:p>
+            <a:pPr>
+              <a:defRPr sz="1200" b="1">
+                <a:solidFill>
+                  <a:srgbClr val="1E293B"/>
+                </a:solidFill>
+                <a:latin typeface="Arial"/>
+              </a:defRPr>
+            </a:pPr>
+            <a:r>
+              <a:t>7. Cliquez sur 'Ajouter l'Enseignant'.</a:t>
+            </a:r>
+          </a:p>
+        </p:txBody>
+      </p:sp>
+    </p:spTree>
+  </p:cSld>
+  <p:clrMapOvr>
+    <a:masterClrMapping/>
+  </p:clrMapOvr>
+</p:sld>
+</file>
+
+<file path=ppt/slides/slide13.xml><?xml version="1.0" encoding="utf-8"?>
+<p:sld xmlns:a="http://schemas.openxmlformats.org/drawingml/2006/main" xmlns:p="http://schemas.openxmlformats.org/presentationml/2006/main" xmlns:r="http://schemas.openxmlformats.org/officeDocument/2006/relationships">
+  <p:cSld>
+    <p:bg>
+      <p:bgPr>
+        <a:solidFill>
+          <a:srgbClr val="F8FAFC"/>
+        </a:solidFill>
+        <a:effectLst/>
+      </p:bgPr>
+    </p:bg>
+    <p:spTree>
+      <p:nvGrpSpPr>
+        <p:cNvPr id="1" name=""/>
+        <p:cNvGrpSpPr/>
+        <p:nvPr/>
+      </p:nvGrpSpPr>
+      <p:grpSpPr/>
+      <p:sp>
+        <p:nvSpPr>
+          <p:cNvPr id="2" name="TextBox 1"/>
+          <p:cNvSpPr txBox="1"/>
+          <p:nvPr/>
+        </p:nvSpPr>
+        <p:spPr>
+          <a:xfrm>
+            <a:off x="0" y="0"/>
+            <a:ext cx="12191695" cy="411480"/>
+          </a:xfrm>
+          <a:prstGeom prst="rect">
+            <a:avLst/>
+          </a:prstGeom>
+          <a:solidFill>
+            <a:srgbClr val="0B4998"/>
+          </a:solidFill>
+        </p:spPr>
+        <p:txBody>
+          <a:bodyPr wrap="none">
+            <a:spAutoFit/>
+          </a:bodyPr>
+          <a:lstStyle/>
+          <a:p>
+            <a:pPr>
+              <a:defRPr sz="900" b="1">
+                <a:solidFill>
+                  <a:srgbClr val="FFFFFF"/>
+                </a:solidFill>
+                <a:latin typeface="Arial"/>
+              </a:defRPr>
+            </a:pPr>
+            <a:r>
+              <a:rPr>
+                <a:solidFill>
+                  <a:srgbClr val="FFFFFF"/>
+                </a:solidFill>
+              </a:rPr>
+              <a:t>MODULE 6 : GESTION DES ENSEIGNANTS</a:t>
+            </a:r>
+          </a:p>
+        </p:txBody>
+      </p:sp>
+      <p:sp>
+        <p:nvSpPr>
+          <p:cNvPr id="3" name="TextBox 2"/>
+          <p:cNvSpPr txBox="1"/>
+          <p:nvPr/>
+        </p:nvSpPr>
+        <p:spPr>
+          <a:xfrm>
+            <a:off x="365760" y="457200"/>
+            <a:ext cx="11430000" cy="548640"/>
+          </a:xfrm>
+          <a:prstGeom prst="rect">
+            <a:avLst/>
+          </a:prstGeom>
+          <a:noFill/>
+        </p:spPr>
+        <p:txBody>
+          <a:bodyPr wrap="none">
+            <a:spAutoFit/>
+          </a:bodyPr>
+          <a:lstStyle/>
+          <a:p>
+            <a:pPr>
+              <a:defRPr sz="2000" b="1">
+                <a:solidFill>
+                  <a:srgbClr val="EE7B11"/>
+                </a:solidFill>
+                <a:latin typeface="Arial"/>
+              </a:defRPr>
+            </a:pPr>
+            <a:r>
+              <a:t>Comment déclarer les indisponibilités d'un enseignant</a:t>
+            </a:r>
+          </a:p>
+        </p:txBody>
+      </p:sp>
+      <p:sp>
+        <p:nvSpPr>
+          <p:cNvPr id="4" name="TextBox 3"/>
+          <p:cNvSpPr txBox="1"/>
+          <p:nvPr/>
+        </p:nvSpPr>
+        <p:spPr>
+          <a:xfrm>
+            <a:off x="457200" y="1143000"/>
+            <a:ext cx="11247120" cy="5394960"/>
+          </a:xfrm>
+          <a:prstGeom prst="rect">
+            <a:avLst/>
+          </a:prstGeom>
+          <a:noFill/>
+        </p:spPr>
+        <p:txBody>
+          <a:bodyPr wrap="square">
+            <a:spAutoFit/>
+          </a:bodyPr>
+          <a:lstStyle/>
+          <a:p>
+            <a:pPr>
+              <a:defRPr sz="1200" b="1">
+                <a:solidFill>
+                  <a:srgbClr val="1E293B"/>
+                </a:solidFill>
+                <a:latin typeface="Arial"/>
+              </a:defRPr>
+            </a:pPr>
+            <a:r>
+              <a:t>1. Allez dans l'Espace Enseignant (Portail Professeur).</a:t>
+            </a:r>
+          </a:p>
+          <a:p>
+            <a:pPr>
+              <a:defRPr sz="1200" b="0">
+                <a:solidFill>
+                  <a:srgbClr val="1E293B"/>
+                </a:solidFill>
+                <a:latin typeface="Arial"/>
+              </a:defRPr>
+            </a:pPr>
+            <a:r>
+              <a:t>2. Sélectionnez le professeur dans la liste déroulante en haut.</a:t>
+            </a:r>
+          </a:p>
+          <a:p>
+            <a:pPr>
+              <a:defRPr sz="1200" b="1">
+                <a:solidFill>
+                  <a:srgbClr val="1E293B"/>
+                </a:solidFill>
+                <a:latin typeface="Arial"/>
+              </a:defRPr>
+            </a:pPr>
+            <a:r>
+              <a:t>3. Repérez la grille horaire hebdomadaire affichée.</a:t>
+            </a:r>
+          </a:p>
+          <a:p>
+            <a:pPr>
+              <a:defRPr sz="1200" b="0">
+                <a:solidFill>
+                  <a:srgbClr val="1E293B"/>
+                </a:solidFill>
+                <a:latin typeface="Arial"/>
+              </a:defRPr>
+            </a:pPr>
+            <a:r>
+              <a:t>4. Cliquez directement sur une case de la grille pour la basculer en 'Indisponible' (case grisée avec ❌).</a:t>
+            </a:r>
+          </a:p>
+          <a:p>
+            <a:pPr>
+              <a:defRPr sz="1200" b="1">
+                <a:solidFill>
+                  <a:srgbClr val="1E293B"/>
+                </a:solidFill>
+                <a:latin typeface="Arial"/>
+              </a:defRPr>
+            </a:pPr>
+            <a:r>
+              <a:t>5. Recliquez sur la case pour la remettre en disponible.</a:t>
+            </a:r>
+          </a:p>
+          <a:p>
+            <a:pPr>
+              <a:defRPr sz="1200" b="0">
+                <a:solidFill>
+                  <a:srgbClr val="1E293B"/>
+                </a:solidFill>
+                <a:latin typeface="Arial"/>
+              </a:defRPr>
+            </a:pPr>
+            <a:r>
+              <a:t>6. Les créneaux indisponibles bloquent automatiquement la planification de cours sur ces plages.</a:t>
+            </a:r>
+          </a:p>
+        </p:txBody>
+      </p:sp>
+    </p:spTree>
+  </p:cSld>
+  <p:clrMapOvr>
+    <a:masterClrMapping/>
+  </p:clrMapOvr>
+</p:sld>
+</file>
+
+<file path=ppt/slides/slide14.xml><?xml version="1.0" encoding="utf-8"?>
+<p:sld xmlns:a="http://schemas.openxmlformats.org/drawingml/2006/main" xmlns:p="http://schemas.openxmlformats.org/presentationml/2006/main" xmlns:r="http://schemas.openxmlformats.org/officeDocument/2006/relationships">
+  <p:cSld>
+    <p:bg>
+      <p:bgPr>
+        <a:solidFill>
+          <a:srgbClr val="F8FAFC"/>
+        </a:solidFill>
+        <a:effectLst/>
+      </p:bgPr>
+    </p:bg>
+    <p:spTree>
+      <p:nvGrpSpPr>
+        <p:cNvPr id="1" name=""/>
+        <p:cNvGrpSpPr/>
+        <p:nvPr/>
+      </p:nvGrpSpPr>
+      <p:grpSpPr/>
+      <p:sp>
+        <p:nvSpPr>
+          <p:cNvPr id="2" name="TextBox 1"/>
+          <p:cNvSpPr txBox="1"/>
+          <p:nvPr/>
+        </p:nvSpPr>
+        <p:spPr>
+          <a:xfrm>
+            <a:off x="0" y="0"/>
+            <a:ext cx="12191695" cy="411480"/>
+          </a:xfrm>
+          <a:prstGeom prst="rect">
+            <a:avLst/>
+          </a:prstGeom>
+          <a:solidFill>
+            <a:srgbClr val="0B4998"/>
+          </a:solidFill>
+        </p:spPr>
+        <p:txBody>
+          <a:bodyPr wrap="none">
+            <a:spAutoFit/>
+          </a:bodyPr>
+          <a:lstStyle/>
+          <a:p>
+            <a:pPr>
+              <a:defRPr sz="900" b="1">
+                <a:solidFill>
+                  <a:srgbClr val="FFFFFF"/>
+                </a:solidFill>
+                <a:latin typeface="Arial"/>
+              </a:defRPr>
+            </a:pPr>
+            <a:r>
+              <a:rPr>
+                <a:solidFill>
+                  <a:srgbClr val="FFFFFF"/>
+                </a:solidFill>
+              </a:rPr>
+              <a:t>MODULE 6 : GESTION DES ENSEIGNANTS</a:t>
+            </a:r>
+          </a:p>
+        </p:txBody>
+      </p:sp>
+      <p:sp>
+        <p:nvSpPr>
+          <p:cNvPr id="3" name="TextBox 2"/>
+          <p:cNvSpPr txBox="1"/>
+          <p:nvPr/>
+        </p:nvSpPr>
+        <p:spPr>
+          <a:xfrm>
+            <a:off x="365760" y="457200"/>
+            <a:ext cx="11430000" cy="548640"/>
+          </a:xfrm>
+          <a:prstGeom prst="rect">
+            <a:avLst/>
+          </a:prstGeom>
+          <a:noFill/>
+        </p:spPr>
+        <p:txBody>
+          <a:bodyPr wrap="none">
+            <a:spAutoFit/>
+          </a:bodyPr>
+          <a:lstStyle/>
+          <a:p>
+            <a:pPr>
+              <a:defRPr sz="2000" b="1">
+                <a:solidFill>
+                  <a:srgbClr val="EE7B11"/>
+                </a:solidFill>
+                <a:latin typeface="Arial"/>
+              </a:defRPr>
+            </a:pPr>
+            <a:r>
+              <a:t>Comment affecter un professeur principal à une classe</a:t>
+            </a:r>
+          </a:p>
+        </p:txBody>
+      </p:sp>
+      <p:sp>
+        <p:nvSpPr>
+          <p:cNvPr id="4" name="TextBox 3"/>
+          <p:cNvSpPr txBox="1"/>
+          <p:nvPr/>
+        </p:nvSpPr>
+        <p:spPr>
+          <a:xfrm>
+            <a:off x="457200" y="1143000"/>
+            <a:ext cx="11247120" cy="5394960"/>
+          </a:xfrm>
+          <a:prstGeom prst="rect">
+            <a:avLst/>
+          </a:prstGeom>
+          <a:noFill/>
+        </p:spPr>
+        <p:txBody>
+          <a:bodyPr wrap="square">
+            <a:spAutoFit/>
+          </a:bodyPr>
+          <a:lstStyle/>
+          <a:p>
+            <a:pPr>
+              <a:defRPr sz="1200" b="1">
+                <a:solidFill>
+                  <a:srgbClr val="1E293B"/>
+                </a:solidFill>
+                <a:latin typeface="Arial"/>
+              </a:defRPr>
+            </a:pPr>
+            <a:r>
+              <a:t>1. Allez dans l'onglet de gestion des Classes.</a:t>
+            </a:r>
+          </a:p>
+          <a:p>
+            <a:pPr>
+              <a:defRPr sz="1200" b="1">
+                <a:solidFill>
+                  <a:srgbClr val="1E293B"/>
+                </a:solidFill>
+                <a:latin typeface="Arial"/>
+              </a:defRPr>
+            </a:pPr>
+            <a:r>
+              <a:t>2. Cliquez sur Modifier pour la classe concernée.</a:t>
+            </a:r>
+          </a:p>
+          <a:p>
+            <a:pPr>
+              <a:defRPr sz="1200" b="0">
+                <a:solidFill>
+                  <a:srgbClr val="1E293B"/>
+                </a:solidFill>
+                <a:latin typeface="Arial"/>
+              </a:defRPr>
+            </a:pPr>
+            <a:r>
+              <a:t>3. Dans le champ 'Professeur Principal', sélectionnez l'enseignant dans la liste déroulante.</a:t>
+            </a:r>
+          </a:p>
+          <a:p>
+            <a:pPr>
+              <a:defRPr sz="1200" b="0">
+                <a:solidFill>
+                  <a:srgbClr val="1E293B"/>
+                </a:solidFill>
+                <a:latin typeface="Arial"/>
+              </a:defRPr>
+            </a:pPr>
+            <a:r>
+              <a:t>4. Cliquez sur 'Enregistrer'. Le nom apparaîtra sur tous les bulletins de cette classe.</a:t>
+            </a:r>
+          </a:p>
+        </p:txBody>
+      </p:sp>
+    </p:spTree>
+  </p:cSld>
+  <p:clrMapOvr>
+    <a:masterClrMapping/>
+  </p:clrMapOvr>
+</p:sld>
+</file>
+
+<file path=ppt/slides/slide15.xml><?xml version="1.0" encoding="utf-8"?>
+<p:sld xmlns:a="http://schemas.openxmlformats.org/drawingml/2006/main" xmlns:p="http://schemas.openxmlformats.org/presentationml/2006/main" xmlns:r="http://schemas.openxmlformats.org/officeDocument/2006/relationships">
+  <p:cSld>
+    <p:bg>
+      <p:bgPr>
+        <a:solidFill>
+          <a:srgbClr val="F8FAFC"/>
+        </a:solidFill>
+        <a:effectLst/>
+      </p:bgPr>
+    </p:bg>
+    <p:spTree>
+      <p:nvGrpSpPr>
+        <p:cNvPr id="1" name=""/>
+        <p:cNvGrpSpPr/>
+        <p:nvPr/>
+      </p:nvGrpSpPr>
+      <p:grpSpPr/>
+      <p:sp>
+        <p:nvSpPr>
+          <p:cNvPr id="2" name="TextBox 1"/>
+          <p:cNvSpPr txBox="1"/>
+          <p:nvPr/>
+        </p:nvSpPr>
+        <p:spPr>
+          <a:xfrm>
+            <a:off x="0" y="0"/>
+            <a:ext cx="12191695" cy="411480"/>
+          </a:xfrm>
+          <a:prstGeom prst="rect">
+            <a:avLst/>
+          </a:prstGeom>
+          <a:solidFill>
+            <a:srgbClr val="0B4998"/>
+          </a:solidFill>
+        </p:spPr>
+        <p:txBody>
+          <a:bodyPr wrap="none">
+            <a:spAutoFit/>
+          </a:bodyPr>
+          <a:lstStyle/>
+          <a:p>
+            <a:pPr>
+              <a:defRPr sz="900" b="1">
+                <a:solidFill>
+                  <a:srgbClr val="FFFFFF"/>
+                </a:solidFill>
+                <a:latin typeface="Arial"/>
+              </a:defRPr>
+            </a:pPr>
+            <a:r>
+              <a:rPr>
+                <a:solidFill>
+                  <a:srgbClr val="FFFFFF"/>
+                </a:solidFill>
+              </a:rPr>
+              <a:t>MODULE 7 : GESTION DES SALLES</a:t>
+            </a:r>
+          </a:p>
+        </p:txBody>
+      </p:sp>
+      <p:sp>
+        <p:nvSpPr>
+          <p:cNvPr id="3" name="TextBox 2"/>
+          <p:cNvSpPr txBox="1"/>
+          <p:nvPr/>
+        </p:nvSpPr>
+        <p:spPr>
+          <a:xfrm>
+            <a:off x="365760" y="457200"/>
+            <a:ext cx="11430000" cy="548640"/>
+          </a:xfrm>
+          <a:prstGeom prst="rect">
+            <a:avLst/>
+          </a:prstGeom>
+          <a:noFill/>
+        </p:spPr>
+        <p:txBody>
+          <a:bodyPr wrap="none">
+            <a:spAutoFit/>
+          </a:bodyPr>
+          <a:lstStyle/>
+          <a:p>
+            <a:pPr>
+              <a:defRPr sz="2000" b="1">
+                <a:solidFill>
+                  <a:srgbClr val="EE7B11"/>
+                </a:solidFill>
+                <a:latin typeface="Arial"/>
+              </a:defRPr>
+            </a:pPr>
+            <a:r>
+              <a:t>Comment ajouter une salle de cours</a:t>
+            </a:r>
+          </a:p>
+        </p:txBody>
+      </p:sp>
+      <p:sp>
+        <p:nvSpPr>
+          <p:cNvPr id="4" name="TextBox 3"/>
+          <p:cNvSpPr txBox="1"/>
+          <p:nvPr/>
+        </p:nvSpPr>
+        <p:spPr>
+          <a:xfrm>
+            <a:off x="457200" y="1143000"/>
+            <a:ext cx="11247120" cy="5394960"/>
+          </a:xfrm>
+          <a:prstGeom prst="rect">
+            <a:avLst/>
+          </a:prstGeom>
+          <a:noFill/>
+        </p:spPr>
+        <p:txBody>
+          <a:bodyPr wrap="square">
+            <a:spAutoFit/>
+          </a:bodyPr>
+          <a:lstStyle/>
+          <a:p>
+            <a:pPr>
+              <a:defRPr sz="1200" b="1">
+                <a:solidFill>
+                  <a:srgbClr val="1E293B"/>
+                </a:solidFill>
+                <a:latin typeface="Arial"/>
+              </a:defRPr>
+            </a:pPr>
+            <a:r>
+              <a:t>1. Allez dans l'onglet 'EDT - Salles &amp; Classes'.</a:t>
+            </a:r>
+          </a:p>
+          <a:p>
+            <a:pPr>
+              <a:defRPr sz="1200" b="1">
+                <a:solidFill>
+                  <a:srgbClr val="1E293B"/>
+                </a:solidFill>
+                <a:latin typeface="Arial"/>
+              </a:defRPr>
+            </a:pPr>
+            <a:r>
+              <a:t>2. Dans le formulaire 'Ajouter une Salle', saisissez :</a:t>
+            </a:r>
+          </a:p>
+          <a:p>
+            <a:pPr>
+              <a:defRPr sz="1100" b="0">
+                <a:solidFill>
+                  <a:srgbClr val="505050"/>
+                </a:solidFill>
+                <a:latin typeface="Arial"/>
+              </a:defRPr>
+            </a:pPr>
+            <a:r>
+              <a:t>    - Identifiant (ex: s101, slab, sgym)</a:t>
+            </a:r>
+          </a:p>
+          <a:p>
+            <a:pPr>
+              <a:defRPr sz="1100" b="0">
+                <a:solidFill>
+                  <a:srgbClr val="505050"/>
+                </a:solidFill>
+                <a:latin typeface="Arial"/>
+              </a:defRPr>
+            </a:pPr>
+            <a:r>
+              <a:t>    - Nom complet (ex: Salle 101 - Standard)</a:t>
+            </a:r>
+          </a:p>
+          <a:p>
+            <a:pPr>
+              <a:defRPr sz="1100" b="0">
+                <a:solidFill>
+                  <a:srgbClr val="505050"/>
+                </a:solidFill>
+                <a:latin typeface="Arial"/>
+              </a:defRPr>
+            </a:pPr>
+            <a:r>
+              <a:t>    - Type : Standard, Laboratoire, Gymnase, Atelier</a:t>
+            </a:r>
+          </a:p>
+          <a:p>
+            <a:pPr>
+              <a:defRPr sz="1100" b="0">
+                <a:solidFill>
+                  <a:srgbClr val="505050"/>
+                </a:solidFill>
+                <a:latin typeface="Arial"/>
+              </a:defRPr>
+            </a:pPr>
+            <a:r>
+              <a:t>    - Capacité maximale</a:t>
+            </a:r>
+          </a:p>
+          <a:p>
+            <a:pPr>
+              <a:defRPr sz="1200" b="0">
+                <a:solidFill>
+                  <a:srgbClr val="1E293B"/>
+                </a:solidFill>
+                <a:latin typeface="Arial"/>
+              </a:defRPr>
+            </a:pPr>
+            <a:r>
+              <a:t>7. Cliquez sur 'Ajouter la Salle'. Elle est disponible dans le planificateur d'EDT.</a:t>
+            </a:r>
+          </a:p>
+        </p:txBody>
+      </p:sp>
+    </p:spTree>
+  </p:cSld>
+  <p:clrMapOvr>
+    <a:masterClrMapping/>
+  </p:clrMapOvr>
+</p:sld>
+</file>
+
+<file path=ppt/slides/slide16.xml><?xml version="1.0" encoding="utf-8"?>
+<p:sld xmlns:a="http://schemas.openxmlformats.org/drawingml/2006/main" xmlns:p="http://schemas.openxmlformats.org/presentationml/2006/main" xmlns:r="http://schemas.openxmlformats.org/officeDocument/2006/relationships">
+  <p:cSld>
+    <p:bg>
+      <p:bgPr>
+        <a:solidFill>
+          <a:srgbClr val="F8FAFC"/>
+        </a:solidFill>
+        <a:effectLst/>
+      </p:bgPr>
+    </p:bg>
+    <p:spTree>
+      <p:nvGrpSpPr>
+        <p:cNvPr id="1" name=""/>
+        <p:cNvGrpSpPr/>
+        <p:nvPr/>
+      </p:nvGrpSpPr>
+      <p:grpSpPr/>
+      <p:sp>
+        <p:nvSpPr>
+          <p:cNvPr id="2" name="TextBox 1"/>
+          <p:cNvSpPr txBox="1"/>
+          <p:nvPr/>
+        </p:nvSpPr>
+        <p:spPr>
+          <a:xfrm>
+            <a:off x="0" y="0"/>
+            <a:ext cx="12191695" cy="411480"/>
+          </a:xfrm>
+          <a:prstGeom prst="rect">
+            <a:avLst/>
+          </a:prstGeom>
+          <a:solidFill>
+            <a:srgbClr val="0B4998"/>
+          </a:solidFill>
+        </p:spPr>
+        <p:txBody>
+          <a:bodyPr wrap="none">
+            <a:spAutoFit/>
+          </a:bodyPr>
+          <a:lstStyle/>
+          <a:p>
+            <a:pPr>
+              <a:defRPr sz="900" b="1">
+                <a:solidFill>
+                  <a:srgbClr val="FFFFFF"/>
+                </a:solidFill>
+                <a:latin typeface="Arial"/>
+              </a:defRPr>
+            </a:pPr>
+            <a:r>
+              <a:rPr>
+                <a:solidFill>
+                  <a:srgbClr val="FFFFFF"/>
+                </a:solidFill>
+              </a:rPr>
+              <a:t>MODULE 8 : EMPLOI DU TEMPS (EDT)</a:t>
+            </a:r>
+          </a:p>
+        </p:txBody>
+      </p:sp>
+      <p:sp>
+        <p:nvSpPr>
+          <p:cNvPr id="3" name="TextBox 2"/>
+          <p:cNvSpPr txBox="1"/>
+          <p:nvPr/>
+        </p:nvSpPr>
+        <p:spPr>
+          <a:xfrm>
+            <a:off x="365760" y="457200"/>
+            <a:ext cx="11430000" cy="548640"/>
+          </a:xfrm>
+          <a:prstGeom prst="rect">
+            <a:avLst/>
+          </a:prstGeom>
+          <a:noFill/>
+        </p:spPr>
+        <p:txBody>
+          <a:bodyPr wrap="none">
+            <a:spAutoFit/>
+          </a:bodyPr>
+          <a:lstStyle/>
+          <a:p>
+            <a:pPr>
+              <a:defRPr sz="2000" b="1">
+                <a:solidFill>
+                  <a:srgbClr val="EE7B11"/>
+                </a:solidFill>
+                <a:latin typeface="Arial"/>
+              </a:defRPr>
+            </a:pPr>
+            <a:r>
+              <a:t>Comment planifier un cours</a:t>
+            </a:r>
+          </a:p>
+        </p:txBody>
+      </p:sp>
+      <p:sp>
+        <p:nvSpPr>
+          <p:cNvPr id="4" name="TextBox 3"/>
+          <p:cNvSpPr txBox="1"/>
+          <p:nvPr/>
+        </p:nvSpPr>
+        <p:spPr>
+          <a:xfrm>
+            <a:off x="457200" y="1143000"/>
+            <a:ext cx="11247120" cy="5394960"/>
+          </a:xfrm>
+          <a:prstGeom prst="rect">
+            <a:avLst/>
+          </a:prstGeom>
+          <a:noFill/>
+        </p:spPr>
+        <p:txBody>
+          <a:bodyPr wrap="square">
+            <a:spAutoFit/>
+          </a:bodyPr>
+          <a:lstStyle/>
+          <a:p>
+            <a:pPr>
+              <a:defRPr sz="1200" b="1">
+                <a:solidFill>
+                  <a:srgbClr val="1E293B"/>
+                </a:solidFill>
+                <a:latin typeface="Arial"/>
+              </a:defRPr>
+            </a:pPr>
+            <a:r>
+              <a:t>1. Allez sur l'onglet 'EDT - Planification'.</a:t>
+            </a:r>
+          </a:p>
+          <a:p>
+            <a:pPr>
+              <a:defRPr sz="1200" b="1">
+                <a:solidFill>
+                  <a:srgbClr val="1E293B"/>
+                </a:solidFill>
+                <a:latin typeface="Arial"/>
+              </a:defRPr>
+            </a:pPr>
+            <a:r>
+              <a:t>2. Dans le formulaire à gauche, sélectionnez dans l'ordre :</a:t>
+            </a:r>
+          </a:p>
+          <a:p>
+            <a:pPr>
+              <a:defRPr sz="1100" b="0">
+                <a:solidFill>
+                  <a:srgbClr val="505050"/>
+                </a:solidFill>
+                <a:latin typeface="Arial"/>
+              </a:defRPr>
+            </a:pPr>
+            <a:r>
+              <a:t>    1. La Classe (ex: 6ème A)</a:t>
+            </a:r>
+          </a:p>
+          <a:p>
+            <a:pPr>
+              <a:defRPr sz="1100" b="0">
+                <a:solidFill>
+                  <a:srgbClr val="505050"/>
+                </a:solidFill>
+                <a:latin typeface="Arial"/>
+              </a:defRPr>
+            </a:pPr>
+            <a:r>
+              <a:t>    2. Le Professeur (ex: M. Koffi)</a:t>
+            </a:r>
+          </a:p>
+          <a:p>
+            <a:pPr>
+              <a:defRPr sz="1100" b="0">
+                <a:solidFill>
+                  <a:srgbClr val="505050"/>
+                </a:solidFill>
+                <a:latin typeface="Arial"/>
+              </a:defRPr>
+            </a:pPr>
+            <a:r>
+              <a:t>    3. La Matière (ex: Mathématiques)</a:t>
+            </a:r>
+          </a:p>
+          <a:p>
+            <a:pPr>
+              <a:defRPr sz="1100" b="0">
+                <a:solidFill>
+                  <a:srgbClr val="505050"/>
+                </a:solidFill>
+                <a:latin typeface="Arial"/>
+              </a:defRPr>
+            </a:pPr>
+            <a:r>
+              <a:t>    4. La Salle (ex: Salle 101)</a:t>
+            </a:r>
+          </a:p>
+          <a:p>
+            <a:pPr>
+              <a:defRPr sz="1100" b="0">
+                <a:solidFill>
+                  <a:srgbClr val="505050"/>
+                </a:solidFill>
+                <a:latin typeface="Arial"/>
+              </a:defRPr>
+            </a:pPr>
+            <a:r>
+              <a:t>    5. Le Jour (ex: Lundi)</a:t>
+            </a:r>
+          </a:p>
+          <a:p>
+            <a:pPr>
+              <a:defRPr sz="1100" b="0">
+                <a:solidFill>
+                  <a:srgbClr val="505050"/>
+                </a:solidFill>
+                <a:latin typeface="Arial"/>
+              </a:defRPr>
+            </a:pPr>
+            <a:r>
+              <a:t>    6. Le Créneau horaire (ex: 08:00 - 10:00)</a:t>
+            </a:r>
+          </a:p>
+          <a:p>
+            <a:pPr>
+              <a:defRPr sz="1200" b="1">
+                <a:solidFill>
+                  <a:srgbClr val="1E293B"/>
+                </a:solidFill>
+                <a:latin typeface="Arial"/>
+              </a:defRPr>
+            </a:pPr>
+            <a:r>
+              <a:t>9. Cliquez sur 'Planifier ce cours'.</a:t>
+            </a:r>
+          </a:p>
+          <a:p>
+            <a:pPr>
+              <a:defRPr sz="1200" b="0">
+                <a:solidFill>
+                  <a:srgbClr val="1E293B"/>
+                </a:solidFill>
+                <a:latin typeface="Arial"/>
+              </a:defRPr>
+            </a:pPr>
+            <a:r>
+              <a:t>10. Si aucun conflit n'est détecté, le cours s'affiche dans la grille hebdomadaire.</a:t>
+            </a:r>
+          </a:p>
+          <a:p>
+            <a:pPr>
+              <a:defRPr sz="1200" b="0">
+                <a:solidFill>
+                  <a:srgbClr val="1E293B"/>
+                </a:solidFill>
+                <a:latin typeface="Arial"/>
+              </a:defRPr>
+            </a:pPr>
+            <a:r>
+              <a:t>11. Si un conflit est détecté (prof occupé, salle prise, indispo), une alerte rouge bloque la création.</a:t>
+            </a:r>
+          </a:p>
+        </p:txBody>
+      </p:sp>
+    </p:spTree>
+  </p:cSld>
+  <p:clrMapOvr>
+    <a:masterClrMapping/>
+  </p:clrMapOvr>
+</p:sld>
+</file>
+
+<file path=ppt/slides/slide17.xml><?xml version="1.0" encoding="utf-8"?>
+<p:sld xmlns:a="http://schemas.openxmlformats.org/drawingml/2006/main" xmlns:p="http://schemas.openxmlformats.org/presentationml/2006/main" xmlns:r="http://schemas.openxmlformats.org/officeDocument/2006/relationships">
+  <p:cSld>
+    <p:bg>
+      <p:bgPr>
+        <a:solidFill>
+          <a:srgbClr val="F8FAFC"/>
+        </a:solidFill>
+        <a:effectLst/>
+      </p:bgPr>
+    </p:bg>
+    <p:spTree>
+      <p:nvGrpSpPr>
+        <p:cNvPr id="1" name=""/>
+        <p:cNvGrpSpPr/>
+        <p:nvPr/>
+      </p:nvGrpSpPr>
+      <p:grpSpPr/>
+      <p:sp>
+        <p:nvSpPr>
+          <p:cNvPr id="2" name="TextBox 1"/>
+          <p:cNvSpPr txBox="1"/>
+          <p:nvPr/>
+        </p:nvSpPr>
+        <p:spPr>
+          <a:xfrm>
+            <a:off x="0" y="0"/>
+            <a:ext cx="12191695" cy="411480"/>
+          </a:xfrm>
+          <a:prstGeom prst="rect">
+            <a:avLst/>
+          </a:prstGeom>
+          <a:solidFill>
+            <a:srgbClr val="0B4998"/>
+          </a:solidFill>
+        </p:spPr>
+        <p:txBody>
+          <a:bodyPr wrap="none">
+            <a:spAutoFit/>
+          </a:bodyPr>
+          <a:lstStyle/>
+          <a:p>
+            <a:pPr>
+              <a:defRPr sz="900" b="1">
+                <a:solidFill>
+                  <a:srgbClr val="FFFFFF"/>
+                </a:solidFill>
+                <a:latin typeface="Arial"/>
+              </a:defRPr>
+            </a:pPr>
+            <a:r>
+              <a:rPr>
+                <a:solidFill>
+                  <a:srgbClr val="FFFFFF"/>
+                </a:solidFill>
+              </a:rPr>
+              <a:t>MODULE 8 : EMPLOI DU TEMPS (EDT)</a:t>
+            </a:r>
+          </a:p>
+        </p:txBody>
+      </p:sp>
+      <p:sp>
+        <p:nvSpPr>
+          <p:cNvPr id="3" name="TextBox 2"/>
+          <p:cNvSpPr txBox="1"/>
+          <p:nvPr/>
+        </p:nvSpPr>
+        <p:spPr>
+          <a:xfrm>
+            <a:off x="365760" y="457200"/>
+            <a:ext cx="11430000" cy="548640"/>
+          </a:xfrm>
+          <a:prstGeom prst="rect">
+            <a:avLst/>
+          </a:prstGeom>
+          <a:noFill/>
+        </p:spPr>
+        <p:txBody>
+          <a:bodyPr wrap="none">
+            <a:spAutoFit/>
+          </a:bodyPr>
+          <a:lstStyle/>
+          <a:p>
+            <a:pPr>
+              <a:defRPr sz="2000" b="1">
+                <a:solidFill>
+                  <a:srgbClr val="EE7B11"/>
+                </a:solidFill>
+                <a:latin typeface="Arial"/>
+              </a:defRPr>
+            </a:pPr>
+            <a:r>
+              <a:t>Comment supprimer un cours planifié</a:t>
+            </a:r>
+          </a:p>
+        </p:txBody>
+      </p:sp>
+      <p:sp>
+        <p:nvSpPr>
+          <p:cNvPr id="4" name="TextBox 3"/>
+          <p:cNvSpPr txBox="1"/>
+          <p:nvPr/>
+        </p:nvSpPr>
+        <p:spPr>
+          <a:xfrm>
+            <a:off x="457200" y="1143000"/>
+            <a:ext cx="11247120" cy="5394960"/>
+          </a:xfrm>
+          <a:prstGeom prst="rect">
+            <a:avLst/>
+          </a:prstGeom>
+          <a:noFill/>
+        </p:spPr>
+        <p:txBody>
+          <a:bodyPr wrap="square">
+            <a:spAutoFit/>
+          </a:bodyPr>
+          <a:lstStyle/>
+          <a:p>
+            <a:pPr>
+              <a:defRPr sz="1200" b="1">
+                <a:solidFill>
+                  <a:srgbClr val="1E293B"/>
+                </a:solidFill>
+                <a:latin typeface="Arial"/>
+              </a:defRPr>
+            </a:pPr>
+            <a:r>
+              <a:t>1. Dans la grille d'EDT, cliquez sur le cours à supprimer.</a:t>
+            </a:r>
+          </a:p>
+          <a:p>
+            <a:pPr>
+              <a:defRPr sz="1200" b="0">
+                <a:solidFill>
+                  <a:srgbClr val="1E293B"/>
+                </a:solidFill>
+                <a:latin typeface="Arial"/>
+              </a:defRPr>
+            </a:pPr>
+            <a:r>
+              <a:t>2. Un panneau de détail s'ouvre à droite ou une boîte de dialogue apparaît.</a:t>
+            </a:r>
+          </a:p>
+          <a:p>
+            <a:pPr>
+              <a:defRPr sz="1200" b="0">
+                <a:solidFill>
+                  <a:srgbClr val="1E293B"/>
+                </a:solidFill>
+                <a:latin typeface="Arial"/>
+              </a:defRPr>
+            </a:pPr>
+            <a:r>
+              <a:t>3. Cliquez sur le bouton rouge 'Supprimer ce cours' et confirmez.</a:t>
+            </a:r>
+          </a:p>
+          <a:p>
+            <a:pPr>
+              <a:defRPr sz="1200" b="1">
+                <a:solidFill>
+                  <a:srgbClr val="1E293B"/>
+                </a:solidFill>
+                <a:latin typeface="Arial"/>
+              </a:defRPr>
+            </a:pPr>
+            <a:r>
+              <a:t>4. Le créneau est immédiatement libéré.</a:t>
+            </a:r>
+          </a:p>
+        </p:txBody>
+      </p:sp>
+    </p:spTree>
+  </p:cSld>
+  <p:clrMapOvr>
+    <a:masterClrMapping/>
+  </p:clrMapOvr>
+</p:sld>
+</file>
+
+<file path=ppt/slides/slide18.xml><?xml version="1.0" encoding="utf-8"?>
+<p:sld xmlns:a="http://schemas.openxmlformats.org/drawingml/2006/main" xmlns:p="http://schemas.openxmlformats.org/presentationml/2006/main" xmlns:r="http://schemas.openxmlformats.org/officeDocument/2006/relationships">
+  <p:cSld>
+    <p:bg>
+      <p:bgPr>
+        <a:solidFill>
+          <a:srgbClr val="F8FAFC"/>
+        </a:solidFill>
+        <a:effectLst/>
+      </p:bgPr>
+    </p:bg>
+    <p:spTree>
+      <p:nvGrpSpPr>
+        <p:cNvPr id="1" name=""/>
+        <p:cNvGrpSpPr/>
+        <p:nvPr/>
+      </p:nvGrpSpPr>
+      <p:grpSpPr/>
+      <p:sp>
+        <p:nvSpPr>
+          <p:cNvPr id="2" name="TextBox 1"/>
+          <p:cNvSpPr txBox="1"/>
+          <p:nvPr/>
+        </p:nvSpPr>
+        <p:spPr>
+          <a:xfrm>
+            <a:off x="0" y="0"/>
+            <a:ext cx="12191695" cy="411480"/>
+          </a:xfrm>
+          <a:prstGeom prst="rect">
+            <a:avLst/>
+          </a:prstGeom>
+          <a:solidFill>
+            <a:srgbClr val="0B4998"/>
+          </a:solidFill>
+        </p:spPr>
+        <p:txBody>
+          <a:bodyPr wrap="none">
+            <a:spAutoFit/>
+          </a:bodyPr>
+          <a:lstStyle/>
+          <a:p>
+            <a:pPr>
+              <a:defRPr sz="900" b="1">
+                <a:solidFill>
+                  <a:srgbClr val="FFFFFF"/>
+                </a:solidFill>
+                <a:latin typeface="Arial"/>
+              </a:defRPr>
+            </a:pPr>
+            <a:r>
+              <a:rPr>
+                <a:solidFill>
+                  <a:srgbClr val="FFFFFF"/>
+                </a:solidFill>
+              </a:rPr>
+              <a:t>MODULE 8 : EMPLOI DU TEMPS (EDT)</a:t>
+            </a:r>
+          </a:p>
+        </p:txBody>
+      </p:sp>
+      <p:sp>
+        <p:nvSpPr>
+          <p:cNvPr id="3" name="TextBox 2"/>
+          <p:cNvSpPr txBox="1"/>
+          <p:nvPr/>
+        </p:nvSpPr>
+        <p:spPr>
+          <a:xfrm>
+            <a:off x="365760" y="457200"/>
+            <a:ext cx="11430000" cy="548640"/>
+          </a:xfrm>
+          <a:prstGeom prst="rect">
+            <a:avLst/>
+          </a:prstGeom>
+          <a:noFill/>
+        </p:spPr>
+        <p:txBody>
+          <a:bodyPr wrap="none">
+            <a:spAutoFit/>
+          </a:bodyPr>
+          <a:lstStyle/>
+          <a:p>
+            <a:pPr>
+              <a:defRPr sz="2000" b="1">
+                <a:solidFill>
+                  <a:srgbClr val="EE7B11"/>
+                </a:solidFill>
+                <a:latin typeface="Arial"/>
+              </a:defRPr>
+            </a:pPr>
+            <a:r>
+              <a:t>Comment imprimer l'emploi du temps</a:t>
+            </a:r>
+          </a:p>
+        </p:txBody>
+      </p:sp>
+      <p:sp>
+        <p:nvSpPr>
+          <p:cNvPr id="4" name="TextBox 3"/>
+          <p:cNvSpPr txBox="1"/>
+          <p:nvPr/>
+        </p:nvSpPr>
+        <p:spPr>
+          <a:xfrm>
+            <a:off x="457200" y="1143000"/>
+            <a:ext cx="11247120" cy="5394960"/>
+          </a:xfrm>
+          <a:prstGeom prst="rect">
+            <a:avLst/>
+          </a:prstGeom>
+          <a:noFill/>
+        </p:spPr>
+        <p:txBody>
+          <a:bodyPr wrap="square">
+            <a:spAutoFit/>
+          </a:bodyPr>
+          <a:lstStyle/>
+          <a:p>
+            <a:pPr>
+              <a:defRPr sz="1200" b="0">
+                <a:solidFill>
+                  <a:srgbClr val="1E293B"/>
+                </a:solidFill>
+                <a:latin typeface="Arial"/>
+              </a:defRPr>
+            </a:pPr>
+            <a:r>
+              <a:t>1. Dans l'onglet EDT, utilisez les filtres en haut pour choisir la vue :</a:t>
+            </a:r>
+          </a:p>
+          <a:p>
+            <a:pPr>
+              <a:defRPr sz="1100" b="0">
+                <a:solidFill>
+                  <a:srgbClr val="505050"/>
+                </a:solidFill>
+                <a:latin typeface="Arial"/>
+              </a:defRPr>
+            </a:pPr>
+            <a:r>
+              <a:t>    - Par Classe : affiche tous les cours de la classe sélectionnée</a:t>
+            </a:r>
+          </a:p>
+          <a:p>
+            <a:pPr>
+              <a:defRPr sz="1100" b="0">
+                <a:solidFill>
+                  <a:srgbClr val="505050"/>
+                </a:solidFill>
+                <a:latin typeface="Arial"/>
+              </a:defRPr>
+            </a:pPr>
+            <a:r>
+              <a:t>    - Par Enseignant : affiche le planning personnel du professeur sélectionné</a:t>
+            </a:r>
+          </a:p>
+          <a:p>
+            <a:pPr>
+              <a:defRPr sz="1200" b="1">
+                <a:solidFill>
+                  <a:srgbClr val="1E293B"/>
+                </a:solidFill>
+                <a:latin typeface="Arial"/>
+              </a:defRPr>
+            </a:pPr>
+            <a:r>
+              <a:t>4. Cliquez sur le bouton 'Imprimer' (icône imprimante).</a:t>
+            </a:r>
+          </a:p>
+          <a:p>
+            <a:pPr>
+              <a:defRPr sz="1200" b="0">
+                <a:solidFill>
+                  <a:srgbClr val="1E293B"/>
+                </a:solidFill>
+                <a:latin typeface="Arial"/>
+              </a:defRPr>
+            </a:pPr>
+            <a:r>
+              <a:t>5. La boîte de dialogue d'impression du navigateur s'ouvre. Choisissez 'Enregistrer en PDF' ou imprimez directement.</a:t>
+            </a:r>
+          </a:p>
+        </p:txBody>
+      </p:sp>
+    </p:spTree>
+  </p:cSld>
+  <p:clrMapOvr>
+    <a:masterClrMapping/>
+  </p:clrMapOvr>
+</p:sld>
+</file>
+
+<file path=ppt/slides/slide19.xml><?xml version="1.0" encoding="utf-8"?>
+<p:sld xmlns:a="http://schemas.openxmlformats.org/drawingml/2006/main" xmlns:p="http://schemas.openxmlformats.org/presentationml/2006/main" xmlns:r="http://schemas.openxmlformats.org/officeDocument/2006/relationships">
+  <p:cSld>
+    <p:bg>
+      <p:bgPr>
+        <a:solidFill>
+          <a:srgbClr val="F8FAFC"/>
+        </a:solidFill>
+        <a:effectLst/>
+      </p:bgPr>
+    </p:bg>
+    <p:spTree>
+      <p:nvGrpSpPr>
+        <p:cNvPr id="1" name=""/>
+        <p:cNvGrpSpPr/>
+        <p:nvPr/>
+      </p:nvGrpSpPr>
+      <p:grpSpPr/>
+      <p:sp>
+        <p:nvSpPr>
+          <p:cNvPr id="2" name="TextBox 1"/>
+          <p:cNvSpPr txBox="1"/>
+          <p:nvPr/>
+        </p:nvSpPr>
+        <p:spPr>
+          <a:xfrm>
+            <a:off x="0" y="0"/>
+            <a:ext cx="12191695" cy="411480"/>
+          </a:xfrm>
+          <a:prstGeom prst="rect">
+            <a:avLst/>
+          </a:prstGeom>
+          <a:solidFill>
+            <a:srgbClr val="0B4998"/>
+          </a:solidFill>
+        </p:spPr>
+        <p:txBody>
+          <a:bodyPr wrap="none">
+            <a:spAutoFit/>
+          </a:bodyPr>
+          <a:lstStyle/>
+          <a:p>
+            <a:pPr>
+              <a:defRPr sz="900" b="1">
+                <a:solidFill>
+                  <a:srgbClr val="FFFFFF"/>
+                </a:solidFill>
+                <a:latin typeface="Arial"/>
+              </a:defRPr>
+            </a:pPr>
+            <a:r>
+              <a:rPr>
+                <a:solidFill>
+                  <a:srgbClr val="FFFFFF"/>
+                </a:solidFill>
+              </a:rPr>
+              <a:t>MODULE 9 : GESTION DES ÉLÈVES</a:t>
+            </a:r>
+          </a:p>
+        </p:txBody>
+      </p:sp>
+      <p:sp>
+        <p:nvSpPr>
+          <p:cNvPr id="3" name="TextBox 2"/>
+          <p:cNvSpPr txBox="1"/>
+          <p:nvPr/>
+        </p:nvSpPr>
+        <p:spPr>
+          <a:xfrm>
+            <a:off x="365760" y="457200"/>
+            <a:ext cx="11430000" cy="548640"/>
+          </a:xfrm>
+          <a:prstGeom prst="rect">
+            <a:avLst/>
+          </a:prstGeom>
+          <a:noFill/>
+        </p:spPr>
+        <p:txBody>
+          <a:bodyPr wrap="none">
+            <a:spAutoFit/>
+          </a:bodyPr>
+          <a:lstStyle/>
+          <a:p>
+            <a:pPr>
+              <a:defRPr sz="2000" b="1">
+                <a:solidFill>
+                  <a:srgbClr val="EE7B11"/>
+                </a:solidFill>
+                <a:latin typeface="Arial"/>
+              </a:defRPr>
+            </a:pPr>
+            <a:r>
+              <a:t>Comment inscrire un nouvel élève</a:t>
+            </a:r>
+          </a:p>
+        </p:txBody>
+      </p:sp>
+      <p:sp>
+        <p:nvSpPr>
+          <p:cNvPr id="4" name="TextBox 3"/>
+          <p:cNvSpPr txBox="1"/>
+          <p:nvPr/>
+        </p:nvSpPr>
+        <p:spPr>
+          <a:xfrm>
+            <a:off x="457200" y="1143000"/>
+            <a:ext cx="11247120" cy="5394960"/>
+          </a:xfrm>
+          <a:prstGeom prst="rect">
+            <a:avLst/>
+          </a:prstGeom>
+          <a:noFill/>
+        </p:spPr>
+        <p:txBody>
+          <a:bodyPr wrap="square">
+            <a:spAutoFit/>
+          </a:bodyPr>
+          <a:lstStyle/>
+          <a:p>
+            <a:pPr>
+              <a:defRPr sz="1200" b="1">
+                <a:solidFill>
+                  <a:srgbClr val="1E293B"/>
+                </a:solidFill>
+                <a:latin typeface="Arial"/>
+              </a:defRPr>
+            </a:pPr>
+            <a:r>
+              <a:t>1. Allez dans l'onglet 'Élèves' du menu principal.</a:t>
+            </a:r>
+          </a:p>
+          <a:p>
+            <a:pPr>
+              <a:defRPr sz="1200" b="1">
+                <a:solidFill>
+                  <a:srgbClr val="1E293B"/>
+                </a:solidFill>
+                <a:latin typeface="Arial"/>
+              </a:defRPr>
+            </a:pPr>
+            <a:r>
+              <a:t>2. Dans le panneau 'Inscrire un nouvel élève', remplissez :</a:t>
+            </a:r>
+          </a:p>
+          <a:p>
+            <a:pPr>
+              <a:defRPr sz="1100" b="0">
+                <a:solidFill>
+                  <a:srgbClr val="505050"/>
+                </a:solidFill>
+                <a:latin typeface="Arial"/>
+              </a:defRPr>
+            </a:pPr>
+            <a:r>
+              <a:t>    - Nom de famille</a:t>
+            </a:r>
+          </a:p>
+          <a:p>
+            <a:pPr>
+              <a:defRPr sz="1100" b="0">
+                <a:solidFill>
+                  <a:srgbClr val="505050"/>
+                </a:solidFill>
+                <a:latin typeface="Arial"/>
+              </a:defRPr>
+            </a:pPr>
+            <a:r>
+              <a:t>    - Prénom(s)</a:t>
+            </a:r>
+          </a:p>
+          <a:p>
+            <a:pPr>
+              <a:defRPr sz="1100" b="0">
+                <a:solidFill>
+                  <a:srgbClr val="505050"/>
+                </a:solidFill>
+                <a:latin typeface="Arial"/>
+              </a:defRPr>
+            </a:pPr>
+            <a:r>
+              <a:t>    - Genre (Masculin / Féminin)</a:t>
+            </a:r>
+          </a:p>
+          <a:p>
+            <a:pPr>
+              <a:defRPr sz="1100" b="0">
+                <a:solidFill>
+                  <a:srgbClr val="505050"/>
+                </a:solidFill>
+                <a:latin typeface="Arial"/>
+              </a:defRPr>
+            </a:pPr>
+            <a:r>
+              <a:t>    - Classe d'affectation (sélectionnez dans la liste des classes)</a:t>
+            </a:r>
+          </a:p>
+          <a:p>
+            <a:pPr>
+              <a:defRPr sz="1200" b="1">
+                <a:solidFill>
+                  <a:srgbClr val="1E293B"/>
+                </a:solidFill>
+                <a:latin typeface="Arial"/>
+              </a:defRPr>
+            </a:pPr>
+            <a:r>
+              <a:t>7. Cliquez sur 'Enregistrer l'inscription'.</a:t>
+            </a:r>
+          </a:p>
+          <a:p>
+            <a:pPr>
+              <a:defRPr sz="1200" b="0">
+                <a:solidFill>
+                  <a:srgbClr val="1E293B"/>
+                </a:solidFill>
+                <a:latin typeface="Arial"/>
+              </a:defRPr>
+            </a:pPr>
+            <a:r>
+              <a:t>8. L'élève apparaît dans le registre de sa classe et dans la liste des bulletins.</a:t>
             </a:r>
           </a:p>
         </p:txBody>
@@ -3185,30 +5314,37 @@
         </p:nvSpPr>
         <p:spPr>
           <a:xfrm>
-            <a:off x="457200" y="365760"/>
-            <a:ext cx="11274552" cy="731520"/>
-          </a:xfrm>
-          <a:prstGeom prst="rect">
-            <a:avLst/>
-          </a:prstGeom>
-          <a:noFill/>
-        </p:spPr>
-        <p:txBody>
-          <a:bodyPr wrap="square">
+            <a:off x="0" y="0"/>
+            <a:ext cx="12191695" cy="411480"/>
+          </a:xfrm>
+          <a:prstGeom prst="rect">
+            <a:avLst/>
+          </a:prstGeom>
+          <a:solidFill>
+            <a:srgbClr val="0B4998"/>
+          </a:solidFill>
+        </p:spPr>
+        <p:txBody>
+          <a:bodyPr wrap="none">
             <a:spAutoFit/>
           </a:bodyPr>
           <a:lstStyle/>
           <a:p>
             <a:pPr>
-              <a:defRPr sz="2400" b="1">
-                <a:solidFill>
-                  <a:srgbClr val="0B4998"/>
-                </a:solidFill>
-                <a:latin typeface="Arial"/>
-              </a:defRPr>
-            </a:pPr>
-            <a:r>
-              <a:t>Tutoriel 1 : Créer un utilisateur &amp; attribuer des droits</a:t>
+              <a:defRPr sz="900" b="1">
+                <a:solidFill>
+                  <a:srgbClr val="FFFFFF"/>
+                </a:solidFill>
+                <a:latin typeface="Arial"/>
+              </a:defRPr>
+            </a:pPr>
+            <a:r>
+              <a:rPr>
+                <a:solidFill>
+                  <a:srgbClr val="FFFFFF"/>
+                </a:solidFill>
+              </a:rPr>
+              <a:t>MODULE 1 : CONNEXION &amp; SÉCURITÉ</a:t>
             </a:r>
           </a:p>
         </p:txBody>
@@ -3221,8 +5357,44 @@
         </p:nvSpPr>
         <p:spPr>
           <a:xfrm>
-            <a:off x="457200" y="1097280"/>
-            <a:ext cx="11274552" cy="5303520"/>
+            <a:off x="365760" y="457200"/>
+            <a:ext cx="11430000" cy="548640"/>
+          </a:xfrm>
+          <a:prstGeom prst="rect">
+            <a:avLst/>
+          </a:prstGeom>
+          <a:noFill/>
+        </p:spPr>
+        <p:txBody>
+          <a:bodyPr wrap="none">
+            <a:spAutoFit/>
+          </a:bodyPr>
+          <a:lstStyle/>
+          <a:p>
+            <a:pPr>
+              <a:defRPr sz="2000" b="1">
+                <a:solidFill>
+                  <a:srgbClr val="EE7B11"/>
+                </a:solidFill>
+                <a:latin typeface="Arial"/>
+              </a:defRPr>
+            </a:pPr>
+            <a:r>
+              <a:t>Comment se connecter à l'application</a:t>
+            </a:r>
+          </a:p>
+        </p:txBody>
+      </p:sp>
+      <p:sp>
+        <p:nvSpPr>
+          <p:cNvPr id="4" name="TextBox 3"/>
+          <p:cNvSpPr txBox="1"/>
+          <p:nvPr/>
+        </p:nvSpPr>
+        <p:spPr>
+          <a:xfrm>
+            <a:off x="457200" y="1143000"/>
+            <a:ext cx="11247120" cy="5394960"/>
           </a:xfrm>
           <a:prstGeom prst="rect">
             <a:avLst/>
@@ -3234,100 +5406,2129 @@
             <a:spAutoFit/>
           </a:bodyPr>
           <a:lstStyle/>
-          <a:p/>
-          <a:p>
-            <a:pPr/>
-            <a:r>
-              <a:rPr b="1" sz="1500">
-                <a:solidFill>
-                  <a:srgbClr val="1E293B"/>
+          <a:p>
+            <a:pPr>
+              <a:defRPr sz="1200" b="0">
+                <a:solidFill>
+                  <a:srgbClr val="1E293B"/>
+                </a:solidFill>
+                <a:latin typeface="Arial"/>
+              </a:defRPr>
+            </a:pPr>
+            <a:r>
+              <a:t>1. Ouvrez votre navigateur (Chrome, Edge, Firefox) et accédez à l'URL de l'application.</a:t>
+            </a:r>
+          </a:p>
+          <a:p>
+            <a:pPr>
+              <a:defRPr sz="1200" b="0">
+                <a:solidFill>
+                  <a:srgbClr val="1E293B"/>
+                </a:solidFill>
+                <a:latin typeface="Arial"/>
+              </a:defRPr>
+            </a:pPr>
+            <a:r>
+              <a:t>2. Sur l'écran de connexion, saisissez votre Identifiant (email) dans le champ prévu.</a:t>
+            </a:r>
+          </a:p>
+          <a:p>
+            <a:pPr>
+              <a:defRPr sz="1200" b="1">
+                <a:solidFill>
+                  <a:srgbClr val="1E293B"/>
+                </a:solidFill>
+                <a:latin typeface="Arial"/>
+              </a:defRPr>
+            </a:pPr>
+            <a:r>
+              <a:t>3. Saisissez votre Mot de passe dans le champ suivant.</a:t>
+            </a:r>
+          </a:p>
+          <a:p>
+            <a:pPr>
+              <a:defRPr sz="1200" b="1">
+                <a:solidFill>
+                  <a:srgbClr val="1E293B"/>
+                </a:solidFill>
+                <a:latin typeface="Arial"/>
+              </a:defRPr>
+            </a:pPr>
+            <a:r>
+              <a:t>4. Cliquez sur le bouton bleu 'Se connecter'.</a:t>
+            </a:r>
+          </a:p>
+          <a:p>
+            <a:pPr>
+              <a:defRPr sz="1200" b="0">
+                <a:solidFill>
+                  <a:srgbClr val="1E293B"/>
+                </a:solidFill>
+                <a:latin typeface="Arial"/>
+              </a:defRPr>
+            </a:pPr>
+            <a:r>
+              <a:t>5. Si vos identifiants sont corrects, vous êtes redirigé vers le Tableau de Bord correspondant à votre rôle.</a:t>
+            </a:r>
+          </a:p>
+          <a:p>
+            <a:pPr>
+              <a:defRPr sz="1200" b="0">
+                <a:solidFill>
+                  <a:srgbClr val="1E293B"/>
+                </a:solidFill>
+                <a:latin typeface="Arial"/>
+              </a:defRPr>
+            </a:pPr>
+            <a:r>
+              <a:t>6. En cas d'erreur, un message rouge s'affiche. Vérifiez l'identifiant et le mot de passe saisis.</a:t>
+            </a:r>
+          </a:p>
+        </p:txBody>
+      </p:sp>
+    </p:spTree>
+  </p:cSld>
+  <p:clrMapOvr>
+    <a:masterClrMapping/>
+  </p:clrMapOvr>
+</p:sld>
+</file>
+
+<file path=ppt/slides/slide20.xml><?xml version="1.0" encoding="utf-8"?>
+<p:sld xmlns:a="http://schemas.openxmlformats.org/drawingml/2006/main" xmlns:p="http://schemas.openxmlformats.org/presentationml/2006/main" xmlns:r="http://schemas.openxmlformats.org/officeDocument/2006/relationships">
+  <p:cSld>
+    <p:bg>
+      <p:bgPr>
+        <a:solidFill>
+          <a:srgbClr val="F8FAFC"/>
+        </a:solidFill>
+        <a:effectLst/>
+      </p:bgPr>
+    </p:bg>
+    <p:spTree>
+      <p:nvGrpSpPr>
+        <p:cNvPr id="1" name=""/>
+        <p:cNvGrpSpPr/>
+        <p:nvPr/>
+      </p:nvGrpSpPr>
+      <p:grpSpPr/>
+      <p:sp>
+        <p:nvSpPr>
+          <p:cNvPr id="2" name="TextBox 1"/>
+          <p:cNvSpPr txBox="1"/>
+          <p:nvPr/>
+        </p:nvSpPr>
+        <p:spPr>
+          <a:xfrm>
+            <a:off x="0" y="0"/>
+            <a:ext cx="12191695" cy="411480"/>
+          </a:xfrm>
+          <a:prstGeom prst="rect">
+            <a:avLst/>
+          </a:prstGeom>
+          <a:solidFill>
+            <a:srgbClr val="0B4998"/>
+          </a:solidFill>
+        </p:spPr>
+        <p:txBody>
+          <a:bodyPr wrap="none">
+            <a:spAutoFit/>
+          </a:bodyPr>
+          <a:lstStyle/>
+          <a:p>
+            <a:pPr>
+              <a:defRPr sz="900" b="1">
+                <a:solidFill>
+                  <a:srgbClr val="FFFFFF"/>
+                </a:solidFill>
+                <a:latin typeface="Arial"/>
+              </a:defRPr>
+            </a:pPr>
+            <a:r>
+              <a:rPr>
+                <a:solidFill>
+                  <a:srgbClr val="FFFFFF"/>
                 </a:solidFill>
               </a:rPr>
-              <a:t>1. Ouvrir l'onglet : </a:t>
-            </a:r>
-            <a:r>
-              <a:rPr sz="1400">
-                <a:solidFill>
-                  <a:srgbClr val="1E293B"/>
+              <a:t>MODULE 9 : GESTION DES ÉLÈVES</a:t>
+            </a:r>
+          </a:p>
+        </p:txBody>
+      </p:sp>
+      <p:sp>
+        <p:nvSpPr>
+          <p:cNvPr id="3" name="TextBox 2"/>
+          <p:cNvSpPr txBox="1"/>
+          <p:nvPr/>
+        </p:nvSpPr>
+        <p:spPr>
+          <a:xfrm>
+            <a:off x="365760" y="457200"/>
+            <a:ext cx="11430000" cy="548640"/>
+          </a:xfrm>
+          <a:prstGeom prst="rect">
+            <a:avLst/>
+          </a:prstGeom>
+          <a:noFill/>
+        </p:spPr>
+        <p:txBody>
+          <a:bodyPr wrap="none">
+            <a:spAutoFit/>
+          </a:bodyPr>
+          <a:lstStyle/>
+          <a:p>
+            <a:pPr>
+              <a:defRPr sz="2000" b="1">
+                <a:solidFill>
+                  <a:srgbClr val="EE7B11"/>
+                </a:solidFill>
+                <a:latin typeface="Arial"/>
+              </a:defRPr>
+            </a:pPr>
+            <a:r>
+              <a:t>Comment modifier les informations d'un élève</a:t>
+            </a:r>
+          </a:p>
+        </p:txBody>
+      </p:sp>
+      <p:sp>
+        <p:nvSpPr>
+          <p:cNvPr id="4" name="TextBox 3"/>
+          <p:cNvSpPr txBox="1"/>
+          <p:nvPr/>
+        </p:nvSpPr>
+        <p:spPr>
+          <a:xfrm>
+            <a:off x="457200" y="1143000"/>
+            <a:ext cx="11247120" cy="5394960"/>
+          </a:xfrm>
+          <a:prstGeom prst="rect">
+            <a:avLst/>
+          </a:prstGeom>
+          <a:noFill/>
+        </p:spPr>
+        <p:txBody>
+          <a:bodyPr wrap="square">
+            <a:spAutoFit/>
+          </a:bodyPr>
+          <a:lstStyle/>
+          <a:p>
+            <a:pPr>
+              <a:defRPr sz="1200" b="0">
+                <a:solidFill>
+                  <a:srgbClr val="1E293B"/>
+                </a:solidFill>
+                <a:latin typeface="Arial"/>
+              </a:defRPr>
+            </a:pPr>
+            <a:r>
+              <a:t>1. Dans la liste des élèves, cliquez sur le bouton Modifier (crayon) à droite de l'élève.</a:t>
+            </a:r>
+          </a:p>
+          <a:p>
+            <a:pPr>
+              <a:defRPr sz="1200" b="1">
+                <a:solidFill>
+                  <a:srgbClr val="1E293B"/>
+                </a:solidFill>
+                <a:latin typeface="Arial"/>
+              </a:defRPr>
+            </a:pPr>
+            <a:r>
+              <a:t>2. Mettez à jour les champs nécessaires (nom, classe, genre).</a:t>
+            </a:r>
+          </a:p>
+          <a:p>
+            <a:pPr>
+              <a:defRPr sz="1200" b="0">
+                <a:solidFill>
+                  <a:srgbClr val="1E293B"/>
+                </a:solidFill>
+                <a:latin typeface="Arial"/>
+              </a:defRPr>
+            </a:pPr>
+            <a:r>
+              <a:t>3. Cliquez sur 'Enregistrer'. Les bulletins et registres sont mis à jour automatiquement.</a:t>
+            </a:r>
+          </a:p>
+        </p:txBody>
+      </p:sp>
+    </p:spTree>
+  </p:cSld>
+  <p:clrMapOvr>
+    <a:masterClrMapping/>
+  </p:clrMapOvr>
+</p:sld>
+</file>
+
+<file path=ppt/slides/slide21.xml><?xml version="1.0" encoding="utf-8"?>
+<p:sld xmlns:a="http://schemas.openxmlformats.org/drawingml/2006/main" xmlns:p="http://schemas.openxmlformats.org/presentationml/2006/main" xmlns:r="http://schemas.openxmlformats.org/officeDocument/2006/relationships">
+  <p:cSld>
+    <p:bg>
+      <p:bgPr>
+        <a:solidFill>
+          <a:srgbClr val="F8FAFC"/>
+        </a:solidFill>
+        <a:effectLst/>
+      </p:bgPr>
+    </p:bg>
+    <p:spTree>
+      <p:nvGrpSpPr>
+        <p:cNvPr id="1" name=""/>
+        <p:cNvGrpSpPr/>
+        <p:nvPr/>
+      </p:nvGrpSpPr>
+      <p:grpSpPr/>
+      <p:sp>
+        <p:nvSpPr>
+          <p:cNvPr id="2" name="TextBox 1"/>
+          <p:cNvSpPr txBox="1"/>
+          <p:nvPr/>
+        </p:nvSpPr>
+        <p:spPr>
+          <a:xfrm>
+            <a:off x="0" y="0"/>
+            <a:ext cx="12191695" cy="411480"/>
+          </a:xfrm>
+          <a:prstGeom prst="rect">
+            <a:avLst/>
+          </a:prstGeom>
+          <a:solidFill>
+            <a:srgbClr val="0B4998"/>
+          </a:solidFill>
+        </p:spPr>
+        <p:txBody>
+          <a:bodyPr wrap="none">
+            <a:spAutoFit/>
+          </a:bodyPr>
+          <a:lstStyle/>
+          <a:p>
+            <a:pPr>
+              <a:defRPr sz="900" b="1">
+                <a:solidFill>
+                  <a:srgbClr val="FFFFFF"/>
+                </a:solidFill>
+                <a:latin typeface="Arial"/>
+              </a:defRPr>
+            </a:pPr>
+            <a:r>
+              <a:rPr>
+                <a:solidFill>
+                  <a:srgbClr val="FFFFFF"/>
                 </a:solidFill>
               </a:rPr>
-              <a:t>Sélectionnez l'onglet 'Administration' dans le menu principal.</a:t>
-            </a:r>
-          </a:p>
-          <a:p>
-            <a:pPr/>
-            <a:r>
-              <a:rPr b="1" sz="1500">
-                <a:solidFill>
-                  <a:srgbClr val="1E293B"/>
+              <a:t>MODULE 9 : GESTION DES ÉLÈVES</a:t>
+            </a:r>
+          </a:p>
+        </p:txBody>
+      </p:sp>
+      <p:sp>
+        <p:nvSpPr>
+          <p:cNvPr id="3" name="TextBox 2"/>
+          <p:cNvSpPr txBox="1"/>
+          <p:nvPr/>
+        </p:nvSpPr>
+        <p:spPr>
+          <a:xfrm>
+            <a:off x="365760" y="457200"/>
+            <a:ext cx="11430000" cy="548640"/>
+          </a:xfrm>
+          <a:prstGeom prst="rect">
+            <a:avLst/>
+          </a:prstGeom>
+          <a:noFill/>
+        </p:spPr>
+        <p:txBody>
+          <a:bodyPr wrap="none">
+            <a:spAutoFit/>
+          </a:bodyPr>
+          <a:lstStyle/>
+          <a:p>
+            <a:pPr>
+              <a:defRPr sz="2000" b="1">
+                <a:solidFill>
+                  <a:srgbClr val="EE7B11"/>
+                </a:solidFill>
+                <a:latin typeface="Arial"/>
+              </a:defRPr>
+            </a:pPr>
+            <a:r>
+              <a:t>Comment changer un élève de classe</a:t>
+            </a:r>
+          </a:p>
+        </p:txBody>
+      </p:sp>
+      <p:sp>
+        <p:nvSpPr>
+          <p:cNvPr id="4" name="TextBox 3"/>
+          <p:cNvSpPr txBox="1"/>
+          <p:nvPr/>
+        </p:nvSpPr>
+        <p:spPr>
+          <a:xfrm>
+            <a:off x="457200" y="1143000"/>
+            <a:ext cx="11247120" cy="5394960"/>
+          </a:xfrm>
+          <a:prstGeom prst="rect">
+            <a:avLst/>
+          </a:prstGeom>
+          <a:noFill/>
+        </p:spPr>
+        <p:txBody>
+          <a:bodyPr wrap="square">
+            <a:spAutoFit/>
+          </a:bodyPr>
+          <a:lstStyle/>
+          <a:p>
+            <a:pPr>
+              <a:defRPr sz="1200" b="1">
+                <a:solidFill>
+                  <a:srgbClr val="1E293B"/>
+                </a:solidFill>
+                <a:latin typeface="Arial"/>
+              </a:defRPr>
+            </a:pPr>
+            <a:r>
+              <a:t>1. Cliquez sur Modifier pour l'élève concerné.</a:t>
+            </a:r>
+          </a:p>
+          <a:p>
+            <a:pPr>
+              <a:defRPr sz="1200" b="1">
+                <a:solidFill>
+                  <a:srgbClr val="1E293B"/>
+                </a:solidFill>
+                <a:latin typeface="Arial"/>
+              </a:defRPr>
+            </a:pPr>
+            <a:r>
+              <a:t>2. Changez la 'Classe d'affectation' dans le menu déroulant.</a:t>
+            </a:r>
+          </a:p>
+          <a:p>
+            <a:pPr>
+              <a:defRPr sz="1200" b="1">
+                <a:solidFill>
+                  <a:srgbClr val="1E293B"/>
+                </a:solidFill>
+                <a:latin typeface="Arial"/>
+              </a:defRPr>
+            </a:pPr>
+            <a:r>
+              <a:t>3. Cliquez sur 'Enregistrer'.</a:t>
+            </a:r>
+          </a:p>
+          <a:p>
+            <a:pPr>
+              <a:defRPr sz="1200" b="0">
+                <a:solidFill>
+                  <a:srgbClr val="1E293B"/>
+                </a:solidFill>
+                <a:latin typeface="Arial"/>
+              </a:defRPr>
+            </a:pPr>
+            <a:r>
+              <a:t>4. ATTENTION : Les notes déjà saisies pour l'ancienne classe restent associées à l'élève.</a:t>
+            </a:r>
+          </a:p>
+        </p:txBody>
+      </p:sp>
+    </p:spTree>
+  </p:cSld>
+  <p:clrMapOvr>
+    <a:masterClrMapping/>
+  </p:clrMapOvr>
+</p:sld>
+</file>
+
+<file path=ppt/slides/slide22.xml><?xml version="1.0" encoding="utf-8"?>
+<p:sld xmlns:a="http://schemas.openxmlformats.org/drawingml/2006/main" xmlns:p="http://schemas.openxmlformats.org/presentationml/2006/main" xmlns:r="http://schemas.openxmlformats.org/officeDocument/2006/relationships">
+  <p:cSld>
+    <p:bg>
+      <p:bgPr>
+        <a:solidFill>
+          <a:srgbClr val="F8FAFC"/>
+        </a:solidFill>
+        <a:effectLst/>
+      </p:bgPr>
+    </p:bg>
+    <p:spTree>
+      <p:nvGrpSpPr>
+        <p:cNvPr id="1" name=""/>
+        <p:cNvGrpSpPr/>
+        <p:nvPr/>
+      </p:nvGrpSpPr>
+      <p:grpSpPr/>
+      <p:sp>
+        <p:nvSpPr>
+          <p:cNvPr id="2" name="TextBox 1"/>
+          <p:cNvSpPr txBox="1"/>
+          <p:nvPr/>
+        </p:nvSpPr>
+        <p:spPr>
+          <a:xfrm>
+            <a:off x="0" y="0"/>
+            <a:ext cx="12191695" cy="411480"/>
+          </a:xfrm>
+          <a:prstGeom prst="rect">
+            <a:avLst/>
+          </a:prstGeom>
+          <a:solidFill>
+            <a:srgbClr val="0B4998"/>
+          </a:solidFill>
+        </p:spPr>
+        <p:txBody>
+          <a:bodyPr wrap="none">
+            <a:spAutoFit/>
+          </a:bodyPr>
+          <a:lstStyle/>
+          <a:p>
+            <a:pPr>
+              <a:defRPr sz="900" b="1">
+                <a:solidFill>
+                  <a:srgbClr val="FFFFFF"/>
+                </a:solidFill>
+                <a:latin typeface="Arial"/>
+              </a:defRPr>
+            </a:pPr>
+            <a:r>
+              <a:rPr>
+                <a:solidFill>
+                  <a:srgbClr val="FFFFFF"/>
                 </a:solidFill>
               </a:rPr>
-              <a:t>2. Remplir le formulaire : </a:t>
-            </a:r>
-            <a:r>
-              <a:rPr sz="1400">
-                <a:solidFill>
-                  <a:srgbClr val="1E293B"/>
+              <a:t>MODULE 10 : SAISIE DES NOTES &amp; ÉVALUATIONS</a:t>
+            </a:r>
+          </a:p>
+        </p:txBody>
+      </p:sp>
+      <p:sp>
+        <p:nvSpPr>
+          <p:cNvPr id="3" name="TextBox 2"/>
+          <p:cNvSpPr txBox="1"/>
+          <p:nvPr/>
+        </p:nvSpPr>
+        <p:spPr>
+          <a:xfrm>
+            <a:off x="365760" y="457200"/>
+            <a:ext cx="11430000" cy="548640"/>
+          </a:xfrm>
+          <a:prstGeom prst="rect">
+            <a:avLst/>
+          </a:prstGeom>
+          <a:noFill/>
+        </p:spPr>
+        <p:txBody>
+          <a:bodyPr wrap="none">
+            <a:spAutoFit/>
+          </a:bodyPr>
+          <a:lstStyle/>
+          <a:p>
+            <a:pPr>
+              <a:defRPr sz="2000" b="1">
+                <a:solidFill>
+                  <a:srgbClr val="EE7B11"/>
+                </a:solidFill>
+                <a:latin typeface="Arial"/>
+              </a:defRPr>
+            </a:pPr>
+            <a:r>
+              <a:t>Comment saisir une note via le registre administratif</a:t>
+            </a:r>
+          </a:p>
+        </p:txBody>
+      </p:sp>
+      <p:sp>
+        <p:nvSpPr>
+          <p:cNvPr id="4" name="TextBox 3"/>
+          <p:cNvSpPr txBox="1"/>
+          <p:nvPr/>
+        </p:nvSpPr>
+        <p:spPr>
+          <a:xfrm>
+            <a:off x="457200" y="1143000"/>
+            <a:ext cx="11247120" cy="5394960"/>
+          </a:xfrm>
+          <a:prstGeom prst="rect">
+            <a:avLst/>
+          </a:prstGeom>
+          <a:noFill/>
+        </p:spPr>
+        <p:txBody>
+          <a:bodyPr wrap="square">
+            <a:spAutoFit/>
+          </a:bodyPr>
+          <a:lstStyle/>
+          <a:p>
+            <a:pPr>
+              <a:defRPr sz="1200" b="1">
+                <a:solidFill>
+                  <a:srgbClr val="1E293B"/>
+                </a:solidFill>
+                <a:latin typeface="Arial"/>
+              </a:defRPr>
+            </a:pPr>
+            <a:r>
+              <a:t>1. Connectez-vous avec un compte Directeur ou Informaticien.</a:t>
+            </a:r>
+          </a:p>
+          <a:p>
+            <a:pPr>
+              <a:defRPr sz="1200" b="1">
+                <a:solidFill>
+                  <a:srgbClr val="1E293B"/>
+                </a:solidFill>
+                <a:latin typeface="Arial"/>
+              </a:defRPr>
+            </a:pPr>
+            <a:r>
+              <a:t>2. Allez dans l'onglet 'Évaluations &amp; Examens'.</a:t>
+            </a:r>
+          </a:p>
+          <a:p>
+            <a:pPr>
+              <a:defRPr sz="1200" b="1">
+                <a:solidFill>
+                  <a:srgbClr val="1E293B"/>
+                </a:solidFill>
+                <a:latin typeface="Arial"/>
+              </a:defRPr>
+            </a:pPr>
+            <a:r>
+              <a:t>3. Dans le formulaire 'Saisir une Note d'Évaluation' :</a:t>
+            </a:r>
+          </a:p>
+          <a:p>
+            <a:pPr>
+              <a:defRPr sz="1100" b="0">
+                <a:solidFill>
+                  <a:srgbClr val="505050"/>
+                </a:solidFill>
+                <a:latin typeface="Arial"/>
+              </a:defRPr>
+            </a:pPr>
+            <a:r>
+              <a:t>    - Sélectionnez l'Élève dans la liste déroulante</a:t>
+            </a:r>
+          </a:p>
+          <a:p>
+            <a:pPr>
+              <a:defRPr sz="1100" b="0">
+                <a:solidFill>
+                  <a:srgbClr val="505050"/>
+                </a:solidFill>
+                <a:latin typeface="Arial"/>
+              </a:defRPr>
+            </a:pPr>
+            <a:r>
+              <a:t>    - Sélectionnez la Matière</a:t>
+            </a:r>
+          </a:p>
+          <a:p>
+            <a:pPr>
+              <a:defRPr sz="1100" b="0">
+                <a:solidFill>
+                  <a:srgbClr val="505050"/>
+                </a:solidFill>
+                <a:latin typeface="Arial"/>
+              </a:defRPr>
+            </a:pPr>
+            <a:r>
+              <a:t>    - Choisissez le Coefficient de l'évaluation (1, 2, 3 ou 5)</a:t>
+            </a:r>
+          </a:p>
+          <a:p>
+            <a:pPr>
+              <a:defRPr sz="1100" b="0">
+                <a:solidFill>
+                  <a:srgbClr val="505050"/>
+                </a:solidFill>
+                <a:latin typeface="Arial"/>
+              </a:defRPr>
+            </a:pPr>
+            <a:r>
+              <a:t>    - Saisissez l'intitulé du devoir (ex: Interrogation Écrite n°1)</a:t>
+            </a:r>
+          </a:p>
+          <a:p>
+            <a:pPr>
+              <a:defRPr sz="1100" b="0">
+                <a:solidFill>
+                  <a:srgbClr val="505050"/>
+                </a:solidFill>
+                <a:latin typeface="Arial"/>
+              </a:defRPr>
+            </a:pPr>
+            <a:r>
+              <a:t>    - Entrez la Note sur 20 (ex: 14.5)</a:t>
+            </a:r>
+          </a:p>
+          <a:p>
+            <a:pPr>
+              <a:defRPr sz="1200" b="1">
+                <a:solidFill>
+                  <a:srgbClr val="1E293B"/>
+                </a:solidFill>
+                <a:latin typeface="Arial"/>
+              </a:defRPr>
+            </a:pPr>
+            <a:r>
+              <a:t>9. Cliquez sur 'Soumettre au Registre Électronique'.</a:t>
+            </a:r>
+          </a:p>
+        </p:txBody>
+      </p:sp>
+    </p:spTree>
+  </p:cSld>
+  <p:clrMapOvr>
+    <a:masterClrMapping/>
+  </p:clrMapOvr>
+</p:sld>
+</file>
+
+<file path=ppt/slides/slide23.xml><?xml version="1.0" encoding="utf-8"?>
+<p:sld xmlns:a="http://schemas.openxmlformats.org/drawingml/2006/main" xmlns:p="http://schemas.openxmlformats.org/presentationml/2006/main" xmlns:r="http://schemas.openxmlformats.org/officeDocument/2006/relationships">
+  <p:cSld>
+    <p:bg>
+      <p:bgPr>
+        <a:solidFill>
+          <a:srgbClr val="F8FAFC"/>
+        </a:solidFill>
+        <a:effectLst/>
+      </p:bgPr>
+    </p:bg>
+    <p:spTree>
+      <p:nvGrpSpPr>
+        <p:cNvPr id="1" name=""/>
+        <p:cNvGrpSpPr/>
+        <p:nvPr/>
+      </p:nvGrpSpPr>
+      <p:grpSpPr/>
+      <p:sp>
+        <p:nvSpPr>
+          <p:cNvPr id="2" name="TextBox 1"/>
+          <p:cNvSpPr txBox="1"/>
+          <p:nvPr/>
+        </p:nvSpPr>
+        <p:spPr>
+          <a:xfrm>
+            <a:off x="0" y="0"/>
+            <a:ext cx="12191695" cy="411480"/>
+          </a:xfrm>
+          <a:prstGeom prst="rect">
+            <a:avLst/>
+          </a:prstGeom>
+          <a:solidFill>
+            <a:srgbClr val="0B4998"/>
+          </a:solidFill>
+        </p:spPr>
+        <p:txBody>
+          <a:bodyPr wrap="none">
+            <a:spAutoFit/>
+          </a:bodyPr>
+          <a:lstStyle/>
+          <a:p>
+            <a:pPr>
+              <a:defRPr sz="900" b="1">
+                <a:solidFill>
+                  <a:srgbClr val="FFFFFF"/>
+                </a:solidFill>
+                <a:latin typeface="Arial"/>
+              </a:defRPr>
+            </a:pPr>
+            <a:r>
+              <a:rPr>
+                <a:solidFill>
+                  <a:srgbClr val="FFFFFF"/>
                 </a:solidFill>
               </a:rPr>
-              <a:t>Allez à 'Créer un nouveau compte utilisateur', entrez le Nom complet, l'Email/Identifiant, et le Mot de passe.</a:t>
-            </a:r>
-          </a:p>
-          <a:p>
-            <a:pPr/>
-            <a:r>
-              <a:rPr b="1" sz="1500">
-                <a:solidFill>
-                  <a:srgbClr val="1E293B"/>
+              <a:t>MODULE 10 : SAISIE DES NOTES &amp; ÉVALUATIONS</a:t>
+            </a:r>
+          </a:p>
+        </p:txBody>
+      </p:sp>
+      <p:sp>
+        <p:nvSpPr>
+          <p:cNvPr id="3" name="TextBox 2"/>
+          <p:cNvSpPr txBox="1"/>
+          <p:nvPr/>
+        </p:nvSpPr>
+        <p:spPr>
+          <a:xfrm>
+            <a:off x="365760" y="457200"/>
+            <a:ext cx="11430000" cy="548640"/>
+          </a:xfrm>
+          <a:prstGeom prst="rect">
+            <a:avLst/>
+          </a:prstGeom>
+          <a:noFill/>
+        </p:spPr>
+        <p:txBody>
+          <a:bodyPr wrap="none">
+            <a:spAutoFit/>
+          </a:bodyPr>
+          <a:lstStyle/>
+          <a:p>
+            <a:pPr>
+              <a:defRPr sz="2000" b="1">
+                <a:solidFill>
+                  <a:srgbClr val="EE7B11"/>
+                </a:solidFill>
+                <a:latin typeface="Arial"/>
+              </a:defRPr>
+            </a:pPr>
+            <a:r>
+              <a:t>Comment saisir des notes via le portail enseignant</a:t>
+            </a:r>
+          </a:p>
+        </p:txBody>
+      </p:sp>
+      <p:sp>
+        <p:nvSpPr>
+          <p:cNvPr id="4" name="TextBox 3"/>
+          <p:cNvSpPr txBox="1"/>
+          <p:nvPr/>
+        </p:nvSpPr>
+        <p:spPr>
+          <a:xfrm>
+            <a:off x="457200" y="1143000"/>
+            <a:ext cx="11247120" cy="5394960"/>
+          </a:xfrm>
+          <a:prstGeom prst="rect">
+            <a:avLst/>
+          </a:prstGeom>
+          <a:noFill/>
+        </p:spPr>
+        <p:txBody>
+          <a:bodyPr wrap="square">
+            <a:spAutoFit/>
+          </a:bodyPr>
+          <a:lstStyle/>
+          <a:p>
+            <a:pPr>
+              <a:defRPr sz="1200" b="0">
+                <a:solidFill>
+                  <a:srgbClr val="1E293B"/>
+                </a:solidFill>
+                <a:latin typeface="Arial"/>
+              </a:defRPr>
+            </a:pPr>
+            <a:r>
+              <a:t>1. Connectez-vous avec un compte Professeur autorisé (permission 'Saisie des Moyennes' active).</a:t>
+            </a:r>
+          </a:p>
+          <a:p>
+            <a:pPr>
+              <a:defRPr sz="1200" b="0">
+                <a:solidFill>
+                  <a:srgbClr val="1E293B"/>
+                </a:solidFill>
+                <a:latin typeface="Arial"/>
+              </a:defRPr>
+            </a:pPr>
+            <a:r>
+              <a:t>2. Allez dans 'Espace Enseignant' &gt; sous-section 'Saisie des Moyennes'.</a:t>
+            </a:r>
+          </a:p>
+          <a:p>
+            <a:pPr>
+              <a:defRPr sz="1200" b="0">
+                <a:solidFill>
+                  <a:srgbClr val="1E293B"/>
+                </a:solidFill>
+                <a:latin typeface="Arial"/>
+              </a:defRPr>
+            </a:pPr>
+            <a:r>
+              <a:t>3. Sélectionnez votre Classe et votre Matière dans les filtres.</a:t>
+            </a:r>
+          </a:p>
+          <a:p>
+            <a:pPr>
+              <a:defRPr sz="1200" b="1">
+                <a:solidFill>
+                  <a:srgbClr val="1E293B"/>
+                </a:solidFill>
+                <a:latin typeface="Arial"/>
+              </a:defRPr>
+            </a:pPr>
+            <a:r>
+              <a:t>4. La liste de vos élèves apparaît.</a:t>
+            </a:r>
+          </a:p>
+          <a:p>
+            <a:pPr>
+              <a:defRPr sz="1200" b="0">
+                <a:solidFill>
+                  <a:srgbClr val="1E293B"/>
+                </a:solidFill>
+                <a:latin typeface="Arial"/>
+              </a:defRPr>
+            </a:pPr>
+            <a:r>
+              <a:t>5. Pour chaque élève, saisissez sa note dans le champ numérique.</a:t>
+            </a:r>
+          </a:p>
+          <a:p>
+            <a:pPr>
+              <a:defRPr sz="1200" b="1">
+                <a:solidFill>
+                  <a:srgbClr val="1E293B"/>
+                </a:solidFill>
+                <a:latin typeface="Arial"/>
+              </a:defRPr>
+            </a:pPr>
+            <a:r>
+              <a:t>6. Renseignez l'intitulé de l'évaluation et le coefficient.</a:t>
+            </a:r>
+          </a:p>
+          <a:p>
+            <a:pPr>
+              <a:defRPr sz="1200" b="0">
+                <a:solidFill>
+                  <a:srgbClr val="1E293B"/>
+                </a:solidFill>
+                <a:latin typeface="Arial"/>
+              </a:defRPr>
+            </a:pPr>
+            <a:r>
+              <a:t>7. Cliquez sur le bouton orange 'Enregistrer toutes les notes saisies'.</a:t>
+            </a:r>
+          </a:p>
+        </p:txBody>
+      </p:sp>
+    </p:spTree>
+  </p:cSld>
+  <p:clrMapOvr>
+    <a:masterClrMapping/>
+  </p:clrMapOvr>
+</p:sld>
+</file>
+
+<file path=ppt/slides/slide24.xml><?xml version="1.0" encoding="utf-8"?>
+<p:sld xmlns:a="http://schemas.openxmlformats.org/drawingml/2006/main" xmlns:p="http://schemas.openxmlformats.org/presentationml/2006/main" xmlns:r="http://schemas.openxmlformats.org/officeDocument/2006/relationships">
+  <p:cSld>
+    <p:bg>
+      <p:bgPr>
+        <a:solidFill>
+          <a:srgbClr val="F8FAFC"/>
+        </a:solidFill>
+        <a:effectLst/>
+      </p:bgPr>
+    </p:bg>
+    <p:spTree>
+      <p:nvGrpSpPr>
+        <p:cNvPr id="1" name=""/>
+        <p:cNvGrpSpPr/>
+        <p:nvPr/>
+      </p:nvGrpSpPr>
+      <p:grpSpPr/>
+      <p:sp>
+        <p:nvSpPr>
+          <p:cNvPr id="2" name="TextBox 1"/>
+          <p:cNvSpPr txBox="1"/>
+          <p:nvPr/>
+        </p:nvSpPr>
+        <p:spPr>
+          <a:xfrm>
+            <a:off x="0" y="0"/>
+            <a:ext cx="12191695" cy="411480"/>
+          </a:xfrm>
+          <a:prstGeom prst="rect">
+            <a:avLst/>
+          </a:prstGeom>
+          <a:solidFill>
+            <a:srgbClr val="0B4998"/>
+          </a:solidFill>
+        </p:spPr>
+        <p:txBody>
+          <a:bodyPr wrap="none">
+            <a:spAutoFit/>
+          </a:bodyPr>
+          <a:lstStyle/>
+          <a:p>
+            <a:pPr>
+              <a:defRPr sz="900" b="1">
+                <a:solidFill>
+                  <a:srgbClr val="FFFFFF"/>
+                </a:solidFill>
+                <a:latin typeface="Arial"/>
+              </a:defRPr>
+            </a:pPr>
+            <a:r>
+              <a:rPr>
+                <a:solidFill>
+                  <a:srgbClr val="FFFFFF"/>
                 </a:solidFill>
               </a:rPr>
-              <a:t>3. Sélectionner le rôle : </a:t>
-            </a:r>
-            <a:r>
-              <a:rPr sz="1400">
-                <a:solidFill>
-                  <a:srgbClr val="1E293B"/>
+              <a:t>MODULE 10 : SAISIE DES NOTES &amp; ÉVALUATIONS</a:t>
+            </a:r>
+          </a:p>
+        </p:txBody>
+      </p:sp>
+      <p:sp>
+        <p:nvSpPr>
+          <p:cNvPr id="3" name="TextBox 2"/>
+          <p:cNvSpPr txBox="1"/>
+          <p:nvPr/>
+        </p:nvSpPr>
+        <p:spPr>
+          <a:xfrm>
+            <a:off x="365760" y="457200"/>
+            <a:ext cx="11430000" cy="548640"/>
+          </a:xfrm>
+          <a:prstGeom prst="rect">
+            <a:avLst/>
+          </a:prstGeom>
+          <a:noFill/>
+        </p:spPr>
+        <p:txBody>
+          <a:bodyPr wrap="none">
+            <a:spAutoFit/>
+          </a:bodyPr>
+          <a:lstStyle/>
+          <a:p>
+            <a:pPr>
+              <a:defRPr sz="2000" b="1">
+                <a:solidFill>
+                  <a:srgbClr val="EE7B11"/>
+                </a:solidFill>
+                <a:latin typeface="Arial"/>
+              </a:defRPr>
+            </a:pPr>
+            <a:r>
+              <a:t>Comment figer (valider) les notes d'une matière</a:t>
+            </a:r>
+          </a:p>
+        </p:txBody>
+      </p:sp>
+      <p:sp>
+        <p:nvSpPr>
+          <p:cNvPr id="4" name="TextBox 3"/>
+          <p:cNvSpPr txBox="1"/>
+          <p:nvPr/>
+        </p:nvSpPr>
+        <p:spPr>
+          <a:xfrm>
+            <a:off x="457200" y="1143000"/>
+            <a:ext cx="11247120" cy="5394960"/>
+          </a:xfrm>
+          <a:prstGeom prst="rect">
+            <a:avLst/>
+          </a:prstGeom>
+          <a:noFill/>
+        </p:spPr>
+        <p:txBody>
+          <a:bodyPr wrap="square">
+            <a:spAutoFit/>
+          </a:bodyPr>
+          <a:lstStyle/>
+          <a:p>
+            <a:pPr>
+              <a:defRPr sz="1200" b="0">
+                <a:solidFill>
+                  <a:srgbClr val="1E293B"/>
+                </a:solidFill>
+                <a:latin typeface="Arial"/>
+              </a:defRPr>
+            </a:pPr>
+            <a:r>
+              <a:t>1. Dans la section 'Notes déjà saisies' (côté droit du portail enseignant), vérifiez vos notes.</a:t>
+            </a:r>
+          </a:p>
+          <a:p>
+            <a:pPr>
+              <a:defRPr sz="1200" b="0">
+                <a:solidFill>
+                  <a:srgbClr val="1E293B"/>
+                </a:solidFill>
+                <a:latin typeface="Arial"/>
+              </a:defRPr>
+            </a:pPr>
+            <a:r>
+              <a:t>2. Si tout est correct, cliquez sur le bouton vert '🔒 Valider &amp; Figer'.</a:t>
+            </a:r>
+          </a:p>
+          <a:p>
+            <a:pPr>
+              <a:defRPr sz="1200" b="1">
+                <a:solidFill>
+                  <a:srgbClr val="1E293B"/>
+                </a:solidFill>
+                <a:latin typeface="Arial"/>
+              </a:defRPr>
+            </a:pPr>
+            <a:r>
+              <a:t>3. Confirmez dans la boîte de dialogue qui s'affiche.</a:t>
+            </a:r>
+          </a:p>
+          <a:p>
+            <a:pPr>
+              <a:defRPr sz="1200" b="0">
+                <a:solidFill>
+                  <a:srgbClr val="1E293B"/>
+                </a:solidFill>
+                <a:latin typeface="Arial"/>
+              </a:defRPr>
+            </a:pPr>
+            <a:r>
+              <a:t>4. Les notes passent au statut '🔒 Figé'. Vous ne pouvez plus les modifier.</a:t>
+            </a:r>
+          </a:p>
+          <a:p>
+            <a:pPr>
+              <a:defRPr sz="1200" b="0">
+                <a:solidFill>
+                  <a:srgbClr val="1E293B"/>
+                </a:solidFill>
+                <a:latin typeface="Arial"/>
+              </a:defRPr>
+            </a:pPr>
+            <a:r>
+              <a:t>5. Seul le Directeur ou l'Informaticien peut les déverrouiller en cas d'erreur.</a:t>
+            </a:r>
+          </a:p>
+        </p:txBody>
+      </p:sp>
+    </p:spTree>
+  </p:cSld>
+  <p:clrMapOvr>
+    <a:masterClrMapping/>
+  </p:clrMapOvr>
+</p:sld>
+</file>
+
+<file path=ppt/slides/slide25.xml><?xml version="1.0" encoding="utf-8"?>
+<p:sld xmlns:a="http://schemas.openxmlformats.org/drawingml/2006/main" xmlns:p="http://schemas.openxmlformats.org/presentationml/2006/main" xmlns:r="http://schemas.openxmlformats.org/officeDocument/2006/relationships">
+  <p:cSld>
+    <p:bg>
+      <p:bgPr>
+        <a:solidFill>
+          <a:srgbClr val="F8FAFC"/>
+        </a:solidFill>
+        <a:effectLst/>
+      </p:bgPr>
+    </p:bg>
+    <p:spTree>
+      <p:nvGrpSpPr>
+        <p:cNvPr id="1" name=""/>
+        <p:cNvGrpSpPr/>
+        <p:nvPr/>
+      </p:nvGrpSpPr>
+      <p:grpSpPr/>
+      <p:sp>
+        <p:nvSpPr>
+          <p:cNvPr id="2" name="TextBox 1"/>
+          <p:cNvSpPr txBox="1"/>
+          <p:nvPr/>
+        </p:nvSpPr>
+        <p:spPr>
+          <a:xfrm>
+            <a:off x="0" y="0"/>
+            <a:ext cx="12191695" cy="411480"/>
+          </a:xfrm>
+          <a:prstGeom prst="rect">
+            <a:avLst/>
+          </a:prstGeom>
+          <a:solidFill>
+            <a:srgbClr val="0B4998"/>
+          </a:solidFill>
+        </p:spPr>
+        <p:txBody>
+          <a:bodyPr wrap="none">
+            <a:spAutoFit/>
+          </a:bodyPr>
+          <a:lstStyle/>
+          <a:p>
+            <a:pPr>
+              <a:defRPr sz="900" b="1">
+                <a:solidFill>
+                  <a:srgbClr val="FFFFFF"/>
+                </a:solidFill>
+                <a:latin typeface="Arial"/>
+              </a:defRPr>
+            </a:pPr>
+            <a:r>
+              <a:rPr>
+                <a:solidFill>
+                  <a:srgbClr val="FFFFFF"/>
                 </a:solidFill>
               </a:rPr>
-              <a:t>Choisissez le rôle approprié dans la liste déroulante (Super Admin, Directeur, Informaticien, Professeur).</a:t>
-            </a:r>
-          </a:p>
-          <a:p>
-            <a:pPr/>
-            <a:r>
-              <a:rPr b="1" sz="1500">
-                <a:solidFill>
-                  <a:srgbClr val="1E293B"/>
+              <a:t>MODULE 10 : SAISIE DES NOTES &amp; ÉVALUATIONS</a:t>
+            </a:r>
+          </a:p>
+        </p:txBody>
+      </p:sp>
+      <p:sp>
+        <p:nvSpPr>
+          <p:cNvPr id="3" name="TextBox 2"/>
+          <p:cNvSpPr txBox="1"/>
+          <p:nvPr/>
+        </p:nvSpPr>
+        <p:spPr>
+          <a:xfrm>
+            <a:off x="365760" y="457200"/>
+            <a:ext cx="11430000" cy="548640"/>
+          </a:xfrm>
+          <a:prstGeom prst="rect">
+            <a:avLst/>
+          </a:prstGeom>
+          <a:noFill/>
+        </p:spPr>
+        <p:txBody>
+          <a:bodyPr wrap="none">
+            <a:spAutoFit/>
+          </a:bodyPr>
+          <a:lstStyle/>
+          <a:p>
+            <a:pPr>
+              <a:defRPr sz="2000" b="1">
+                <a:solidFill>
+                  <a:srgbClr val="EE7B11"/>
+                </a:solidFill>
+                <a:latin typeface="Arial"/>
+              </a:defRPr>
+            </a:pPr>
+            <a:r>
+              <a:t>Comment déverrouiller une note figée (Directeur/Admin uniquement)</a:t>
+            </a:r>
+          </a:p>
+        </p:txBody>
+      </p:sp>
+      <p:sp>
+        <p:nvSpPr>
+          <p:cNvPr id="4" name="TextBox 3"/>
+          <p:cNvSpPr txBox="1"/>
+          <p:nvPr/>
+        </p:nvSpPr>
+        <p:spPr>
+          <a:xfrm>
+            <a:off x="457200" y="1143000"/>
+            <a:ext cx="11247120" cy="5394960"/>
+          </a:xfrm>
+          <a:prstGeom prst="rect">
+            <a:avLst/>
+          </a:prstGeom>
+          <a:noFill/>
+        </p:spPr>
+        <p:txBody>
+          <a:bodyPr wrap="square">
+            <a:spAutoFit/>
+          </a:bodyPr>
+          <a:lstStyle/>
+          <a:p>
+            <a:pPr>
+              <a:defRPr sz="1200" b="1">
+                <a:solidFill>
+                  <a:srgbClr val="1E293B"/>
+                </a:solidFill>
+                <a:latin typeface="Arial"/>
+              </a:defRPr>
+            </a:pPr>
+            <a:r>
+              <a:t>1. Connectez-vous avec un compte Directeur ou Super Admin.</a:t>
+            </a:r>
+          </a:p>
+          <a:p>
+            <a:pPr>
+              <a:defRPr sz="1200" b="0">
+                <a:solidFill>
+                  <a:srgbClr val="1E293B"/>
+                </a:solidFill>
+                <a:latin typeface="Arial"/>
+              </a:defRPr>
+            </a:pPr>
+            <a:r>
+              <a:t>2. Accédez au Portail Enseignant, sélectionnez la classe et la matière concernée.</a:t>
+            </a:r>
+          </a:p>
+          <a:p>
+            <a:pPr>
+              <a:defRPr sz="1200" b="0">
+                <a:solidFill>
+                  <a:srgbClr val="1E293B"/>
+                </a:solidFill>
+                <a:latin typeface="Arial"/>
+              </a:defRPr>
+            </a:pPr>
+            <a:r>
+              <a:t>3. Dans la liste des notes saisies, repérez la note marquée '🔒 Figé'.</a:t>
+            </a:r>
+          </a:p>
+          <a:p>
+            <a:pPr>
+              <a:defRPr sz="1200" b="1">
+                <a:solidFill>
+                  <a:srgbClr val="1E293B"/>
+                </a:solidFill>
+                <a:latin typeface="Arial"/>
+              </a:defRPr>
+            </a:pPr>
+            <a:r>
+              <a:t>4. Cliquez sur le bouton bleu '🔓 Déverr.' à droite de la note.</a:t>
+            </a:r>
+          </a:p>
+          <a:p>
+            <a:pPr>
+              <a:defRPr sz="1200" b="1">
+                <a:solidFill>
+                  <a:srgbClr val="1E293B"/>
+                </a:solidFill>
+                <a:latin typeface="Arial"/>
+              </a:defRPr>
+            </a:pPr>
+            <a:r>
+              <a:t>5. Confirmez dans la boîte de dialogue.</a:t>
+            </a:r>
+          </a:p>
+          <a:p>
+            <a:pPr>
+              <a:defRPr sz="1200" b="0">
+                <a:solidFill>
+                  <a:srgbClr val="1E293B"/>
+                </a:solidFill>
+                <a:latin typeface="Arial"/>
+              </a:defRPr>
+            </a:pPr>
+            <a:r>
+              <a:t>6. Le badge '🔒 Figé' disparaît. L'enseignant peut à nouveau modifier la note depuis sa session.</a:t>
+            </a:r>
+          </a:p>
+        </p:txBody>
+      </p:sp>
+    </p:spTree>
+  </p:cSld>
+  <p:clrMapOvr>
+    <a:masterClrMapping/>
+  </p:clrMapOvr>
+</p:sld>
+</file>
+
+<file path=ppt/slides/slide26.xml><?xml version="1.0" encoding="utf-8"?>
+<p:sld xmlns:a="http://schemas.openxmlformats.org/drawingml/2006/main" xmlns:p="http://schemas.openxmlformats.org/presentationml/2006/main" xmlns:r="http://schemas.openxmlformats.org/officeDocument/2006/relationships">
+  <p:cSld>
+    <p:bg>
+      <p:bgPr>
+        <a:solidFill>
+          <a:srgbClr val="F8FAFC"/>
+        </a:solidFill>
+        <a:effectLst/>
+      </p:bgPr>
+    </p:bg>
+    <p:spTree>
+      <p:nvGrpSpPr>
+        <p:cNvPr id="1" name=""/>
+        <p:cNvGrpSpPr/>
+        <p:nvPr/>
+      </p:nvGrpSpPr>
+      <p:grpSpPr/>
+      <p:sp>
+        <p:nvSpPr>
+          <p:cNvPr id="2" name="TextBox 1"/>
+          <p:cNvSpPr txBox="1"/>
+          <p:nvPr/>
+        </p:nvSpPr>
+        <p:spPr>
+          <a:xfrm>
+            <a:off x="0" y="0"/>
+            <a:ext cx="12191695" cy="411480"/>
+          </a:xfrm>
+          <a:prstGeom prst="rect">
+            <a:avLst/>
+          </a:prstGeom>
+          <a:solidFill>
+            <a:srgbClr val="0B4998"/>
+          </a:solidFill>
+        </p:spPr>
+        <p:txBody>
+          <a:bodyPr wrap="none">
+            <a:spAutoFit/>
+          </a:bodyPr>
+          <a:lstStyle/>
+          <a:p>
+            <a:pPr>
+              <a:defRPr sz="900" b="1">
+                <a:solidFill>
+                  <a:srgbClr val="FFFFFF"/>
+                </a:solidFill>
+                <a:latin typeface="Arial"/>
+              </a:defRPr>
+            </a:pPr>
+            <a:r>
+              <a:rPr>
+                <a:solidFill>
+                  <a:srgbClr val="FFFFFF"/>
                 </a:solidFill>
               </a:rPr>
-              <a:t>4. Enregistrer : </a:t>
-            </a:r>
-            <a:r>
-              <a:rPr sz="1400">
-                <a:solidFill>
-                  <a:srgbClr val="1E293B"/>
+              <a:t>MODULE 10 : SAISIE DES NOTES &amp; ÉVALUATIONS</a:t>
+            </a:r>
+          </a:p>
+        </p:txBody>
+      </p:sp>
+      <p:sp>
+        <p:nvSpPr>
+          <p:cNvPr id="3" name="TextBox 2"/>
+          <p:cNvSpPr txBox="1"/>
+          <p:nvPr/>
+        </p:nvSpPr>
+        <p:spPr>
+          <a:xfrm>
+            <a:off x="365760" y="457200"/>
+            <a:ext cx="11430000" cy="548640"/>
+          </a:xfrm>
+          <a:prstGeom prst="rect">
+            <a:avLst/>
+          </a:prstGeom>
+          <a:noFill/>
+        </p:spPr>
+        <p:txBody>
+          <a:bodyPr wrap="none">
+            <a:spAutoFit/>
+          </a:bodyPr>
+          <a:lstStyle/>
+          <a:p>
+            <a:pPr>
+              <a:defRPr sz="2000" b="1">
+                <a:solidFill>
+                  <a:srgbClr val="EE7B11"/>
+                </a:solidFill>
+                <a:latin typeface="Arial"/>
+              </a:defRPr>
+            </a:pPr>
+            <a:r>
+              <a:t>Comment supprimer une note erronée</a:t>
+            </a:r>
+          </a:p>
+        </p:txBody>
+      </p:sp>
+      <p:sp>
+        <p:nvSpPr>
+          <p:cNvPr id="4" name="TextBox 3"/>
+          <p:cNvSpPr txBox="1"/>
+          <p:nvPr/>
+        </p:nvSpPr>
+        <p:spPr>
+          <a:xfrm>
+            <a:off x="457200" y="1143000"/>
+            <a:ext cx="11247120" cy="5394960"/>
+          </a:xfrm>
+          <a:prstGeom prst="rect">
+            <a:avLst/>
+          </a:prstGeom>
+          <a:noFill/>
+        </p:spPr>
+        <p:txBody>
+          <a:bodyPr wrap="square">
+            <a:spAutoFit/>
+          </a:bodyPr>
+          <a:lstStyle/>
+          <a:p>
+            <a:pPr>
+              <a:defRPr sz="1200" b="0">
+                <a:solidFill>
+                  <a:srgbClr val="1E293B"/>
+                </a:solidFill>
+                <a:latin typeface="Arial"/>
+              </a:defRPr>
+            </a:pPr>
+            <a:r>
+              <a:t>1. Seuls le Directeur et l'Informaticien peuvent supprimer des notes.</a:t>
+            </a:r>
+          </a:p>
+          <a:p>
+            <a:pPr>
+              <a:defRPr sz="1200" b="0">
+                <a:solidFill>
+                  <a:srgbClr val="1E293B"/>
+                </a:solidFill>
+                <a:latin typeface="Arial"/>
+              </a:defRPr>
+            </a:pPr>
+            <a:r>
+              <a:t>2. Dans l'onglet Évaluations, repérez la note dans la liste 'Derniers coefficients enregistrés'.</a:t>
+            </a:r>
+          </a:p>
+          <a:p>
+            <a:pPr>
+              <a:defRPr sz="1200" b="0">
+                <a:solidFill>
+                  <a:srgbClr val="1E293B"/>
+                </a:solidFill>
+                <a:latin typeface="Arial"/>
+              </a:defRPr>
+            </a:pPr>
+            <a:r>
+              <a:t>3. Survolez la ligne avec la souris : un bouton rouge Corbeille apparaît.</a:t>
+            </a:r>
+          </a:p>
+          <a:p>
+            <a:pPr>
+              <a:defRPr sz="1200" b="1">
+                <a:solidFill>
+                  <a:srgbClr val="1E293B"/>
+                </a:solidFill>
+                <a:latin typeface="Arial"/>
+              </a:defRPr>
+            </a:pPr>
+            <a:r>
+              <a:t>4. Cliquez sur la Corbeille et confirmez la suppression.</a:t>
+            </a:r>
+          </a:p>
+          <a:p>
+            <a:pPr>
+              <a:defRPr sz="1200" b="0">
+                <a:solidFill>
+                  <a:srgbClr val="1E293B"/>
+                </a:solidFill>
+                <a:latin typeface="Arial"/>
+              </a:defRPr>
+            </a:pPr>
+            <a:r>
+              <a:t>5. Si la note est figée, utilisez d'abord le déverrouillage avant de la supprimer.</a:t>
+            </a:r>
+          </a:p>
+        </p:txBody>
+      </p:sp>
+    </p:spTree>
+  </p:cSld>
+  <p:clrMapOvr>
+    <a:masterClrMapping/>
+  </p:clrMapOvr>
+</p:sld>
+</file>
+
+<file path=ppt/slides/slide27.xml><?xml version="1.0" encoding="utf-8"?>
+<p:sld xmlns:a="http://schemas.openxmlformats.org/drawingml/2006/main" xmlns:p="http://schemas.openxmlformats.org/presentationml/2006/main" xmlns:r="http://schemas.openxmlformats.org/officeDocument/2006/relationships">
+  <p:cSld>
+    <p:bg>
+      <p:bgPr>
+        <a:solidFill>
+          <a:srgbClr val="F8FAFC"/>
+        </a:solidFill>
+        <a:effectLst/>
+      </p:bgPr>
+    </p:bg>
+    <p:spTree>
+      <p:nvGrpSpPr>
+        <p:cNvPr id="1" name=""/>
+        <p:cNvGrpSpPr/>
+        <p:nvPr/>
+      </p:nvGrpSpPr>
+      <p:grpSpPr/>
+      <p:sp>
+        <p:nvSpPr>
+          <p:cNvPr id="2" name="TextBox 1"/>
+          <p:cNvSpPr txBox="1"/>
+          <p:nvPr/>
+        </p:nvSpPr>
+        <p:spPr>
+          <a:xfrm>
+            <a:off x="0" y="0"/>
+            <a:ext cx="12191695" cy="411480"/>
+          </a:xfrm>
+          <a:prstGeom prst="rect">
+            <a:avLst/>
+          </a:prstGeom>
+          <a:solidFill>
+            <a:srgbClr val="0B4998"/>
+          </a:solidFill>
+        </p:spPr>
+        <p:txBody>
+          <a:bodyPr wrap="none">
+            <a:spAutoFit/>
+          </a:bodyPr>
+          <a:lstStyle/>
+          <a:p>
+            <a:pPr>
+              <a:defRPr sz="900" b="1">
+                <a:solidFill>
+                  <a:srgbClr val="FFFFFF"/>
+                </a:solidFill>
+                <a:latin typeface="Arial"/>
+              </a:defRPr>
+            </a:pPr>
+            <a:r>
+              <a:rPr>
+                <a:solidFill>
+                  <a:srgbClr val="FFFFFF"/>
                 </a:solidFill>
               </a:rPr>
-              <a:t>Cliquez sur le bouton orange 'Créer le compte utilisateur'.</a:t>
-            </a:r>
-          </a:p>
-          <a:p>
-            <a:pPr/>
-            <a:r>
-              <a:rPr b="1" sz="1500">
-                <a:solidFill>
-                  <a:srgbClr val="1E293B"/>
+              <a:t>MODULE 11 : PROCÈS-VERBAUX ET BULLETINS</a:t>
+            </a:r>
+          </a:p>
+        </p:txBody>
+      </p:sp>
+      <p:sp>
+        <p:nvSpPr>
+          <p:cNvPr id="3" name="TextBox 2"/>
+          <p:cNvSpPr txBox="1"/>
+          <p:nvPr/>
+        </p:nvSpPr>
+        <p:spPr>
+          <a:xfrm>
+            <a:off x="365760" y="457200"/>
+            <a:ext cx="11430000" cy="548640"/>
+          </a:xfrm>
+          <a:prstGeom prst="rect">
+            <a:avLst/>
+          </a:prstGeom>
+          <a:noFill/>
+        </p:spPr>
+        <p:txBody>
+          <a:bodyPr wrap="none">
+            <a:spAutoFit/>
+          </a:bodyPr>
+          <a:lstStyle/>
+          <a:p>
+            <a:pPr>
+              <a:defRPr sz="2000" b="1">
+                <a:solidFill>
+                  <a:srgbClr val="EE7B11"/>
+                </a:solidFill>
+                <a:latin typeface="Arial"/>
+              </a:defRPr>
+            </a:pPr>
+            <a:r>
+              <a:t>Comment valider le procès-verbal (PV) d'une classe</a:t>
+            </a:r>
+          </a:p>
+        </p:txBody>
+      </p:sp>
+      <p:sp>
+        <p:nvSpPr>
+          <p:cNvPr id="4" name="TextBox 3"/>
+          <p:cNvSpPr txBox="1"/>
+          <p:nvPr/>
+        </p:nvSpPr>
+        <p:spPr>
+          <a:xfrm>
+            <a:off x="457200" y="1143000"/>
+            <a:ext cx="11247120" cy="5394960"/>
+          </a:xfrm>
+          <a:prstGeom prst="rect">
+            <a:avLst/>
+          </a:prstGeom>
+          <a:noFill/>
+        </p:spPr>
+        <p:txBody>
+          <a:bodyPr wrap="square">
+            <a:spAutoFit/>
+          </a:bodyPr>
+          <a:lstStyle/>
+          <a:p>
+            <a:pPr>
+              <a:defRPr sz="1200" b="0">
+                <a:solidFill>
+                  <a:srgbClr val="1E293B"/>
+                </a:solidFill>
+                <a:latin typeface="Arial"/>
+              </a:defRPr>
+            </a:pPr>
+            <a:r>
+              <a:t>1. Vérifiez d'abord que TOUTES les notes de la classe ont été saisies et figées.</a:t>
+            </a:r>
+          </a:p>
+          <a:p>
+            <a:pPr>
+              <a:defRPr sz="1200" b="0">
+                <a:solidFill>
+                  <a:srgbClr val="1E293B"/>
+                </a:solidFill>
+                <a:latin typeface="Arial"/>
+              </a:defRPr>
+            </a:pPr>
+            <a:r>
+              <a:t>2. Allez dans l'onglet 'Évaluations' &gt; sous-onglet 'Procès-Verbaux &amp; Validation'.</a:t>
+            </a:r>
+          </a:p>
+          <a:p>
+            <a:pPr>
+              <a:defRPr sz="1200" b="1">
+                <a:solidFill>
+                  <a:srgbClr val="1E293B"/>
+                </a:solidFill>
+                <a:latin typeface="Arial"/>
+              </a:defRPr>
+            </a:pPr>
+            <a:r>
+              <a:t>3. Sélectionnez la Classe dans la liste déroulante.</a:t>
+            </a:r>
+          </a:p>
+          <a:p>
+            <a:pPr>
+              <a:defRPr sz="1200" b="0">
+                <a:solidFill>
+                  <a:srgbClr val="1E293B"/>
+                </a:solidFill>
+                <a:latin typeface="Arial"/>
+              </a:defRPr>
+            </a:pPr>
+            <a:r>
+              <a:t>4. Consultez la grille de la Natte : vérifiez que chaque matière a une moyenne calculée.</a:t>
+            </a:r>
+          </a:p>
+          <a:p>
+            <a:pPr>
+              <a:defRPr sz="1200" b="0">
+                <a:solidFill>
+                  <a:srgbClr val="1E293B"/>
+                </a:solidFill>
+                <a:latin typeface="Arial"/>
+              </a:defRPr>
+            </a:pPr>
+            <a:r>
+              <a:t>5. Si tout est complet et correct, cliquez sur 'Valider le PV pour cette Classe'.</a:t>
+            </a:r>
+          </a:p>
+          <a:p>
+            <a:pPr>
+              <a:defRPr sz="1200" b="1">
+                <a:solidFill>
+                  <a:srgbClr val="1E293B"/>
+                </a:solidFill>
+                <a:latin typeface="Arial"/>
+              </a:defRPr>
+            </a:pPr>
+            <a:r>
+              <a:t>6. Le statut de la classe passe à 'PV Validé ✅'.</a:t>
+            </a:r>
+          </a:p>
+          <a:p>
+            <a:pPr>
+              <a:defRPr sz="1200" b="0">
+                <a:solidFill>
+                  <a:srgbClr val="1E293B"/>
+                </a:solidFill>
+                <a:latin typeface="Arial"/>
+              </a:defRPr>
+            </a:pPr>
+            <a:r>
+              <a:t>7. Les bulletins de cette classe sont maintenant disponibles pour impression.</a:t>
+            </a:r>
+          </a:p>
+        </p:txBody>
+      </p:sp>
+    </p:spTree>
+  </p:cSld>
+  <p:clrMapOvr>
+    <a:masterClrMapping/>
+  </p:clrMapOvr>
+</p:sld>
+</file>
+
+<file path=ppt/slides/slide28.xml><?xml version="1.0" encoding="utf-8"?>
+<p:sld xmlns:a="http://schemas.openxmlformats.org/drawingml/2006/main" xmlns:p="http://schemas.openxmlformats.org/presentationml/2006/main" xmlns:r="http://schemas.openxmlformats.org/officeDocument/2006/relationships">
+  <p:cSld>
+    <p:bg>
+      <p:bgPr>
+        <a:solidFill>
+          <a:srgbClr val="F8FAFC"/>
+        </a:solidFill>
+        <a:effectLst/>
+      </p:bgPr>
+    </p:bg>
+    <p:spTree>
+      <p:nvGrpSpPr>
+        <p:cNvPr id="1" name=""/>
+        <p:cNvGrpSpPr/>
+        <p:nvPr/>
+      </p:nvGrpSpPr>
+      <p:grpSpPr/>
+      <p:sp>
+        <p:nvSpPr>
+          <p:cNvPr id="2" name="TextBox 1"/>
+          <p:cNvSpPr txBox="1"/>
+          <p:nvPr/>
+        </p:nvSpPr>
+        <p:spPr>
+          <a:xfrm>
+            <a:off x="0" y="0"/>
+            <a:ext cx="12191695" cy="411480"/>
+          </a:xfrm>
+          <a:prstGeom prst="rect">
+            <a:avLst/>
+          </a:prstGeom>
+          <a:solidFill>
+            <a:srgbClr val="0B4998"/>
+          </a:solidFill>
+        </p:spPr>
+        <p:txBody>
+          <a:bodyPr wrap="none">
+            <a:spAutoFit/>
+          </a:bodyPr>
+          <a:lstStyle/>
+          <a:p>
+            <a:pPr>
+              <a:defRPr sz="900" b="1">
+                <a:solidFill>
+                  <a:srgbClr val="FFFFFF"/>
+                </a:solidFill>
+                <a:latin typeface="Arial"/>
+              </a:defRPr>
+            </a:pPr>
+            <a:r>
+              <a:rPr>
+                <a:solidFill>
+                  <a:srgbClr val="FFFFFF"/>
                 </a:solidFill>
               </a:rPr>
-              <a:t>5. Assigner la Saisie des Moyennes : </a:t>
-            </a:r>
-            <a:r>
-              <a:rPr sz="1400">
-                <a:solidFill>
-                  <a:srgbClr val="1E293B"/>
+              <a:t>MODULE 11 : PROCÈS-VERBAUX ET BULLETINS</a:t>
+            </a:r>
+          </a:p>
+        </p:txBody>
+      </p:sp>
+      <p:sp>
+        <p:nvSpPr>
+          <p:cNvPr id="3" name="TextBox 2"/>
+          <p:cNvSpPr txBox="1"/>
+          <p:nvPr/>
+        </p:nvSpPr>
+        <p:spPr>
+          <a:xfrm>
+            <a:off x="365760" y="457200"/>
+            <a:ext cx="11430000" cy="548640"/>
+          </a:xfrm>
+          <a:prstGeom prst="rect">
+            <a:avLst/>
+          </a:prstGeom>
+          <a:noFill/>
+        </p:spPr>
+        <p:txBody>
+          <a:bodyPr wrap="none">
+            <a:spAutoFit/>
+          </a:bodyPr>
+          <a:lstStyle/>
+          <a:p>
+            <a:pPr>
+              <a:defRPr sz="2000" b="1">
+                <a:solidFill>
+                  <a:srgbClr val="EE7B11"/>
+                </a:solidFill>
+                <a:latin typeface="Arial"/>
+              </a:defRPr>
+            </a:pPr>
+            <a:r>
+              <a:t>Comment imprimer le bulletin scolaire d'un élève</a:t>
+            </a:r>
+          </a:p>
+        </p:txBody>
+      </p:sp>
+      <p:sp>
+        <p:nvSpPr>
+          <p:cNvPr id="4" name="TextBox 3"/>
+          <p:cNvSpPr txBox="1"/>
+          <p:nvPr/>
+        </p:nvSpPr>
+        <p:spPr>
+          <a:xfrm>
+            <a:off x="457200" y="1143000"/>
+            <a:ext cx="11247120" cy="5394960"/>
+          </a:xfrm>
+          <a:prstGeom prst="rect">
+            <a:avLst/>
+          </a:prstGeom>
+          <a:noFill/>
+        </p:spPr>
+        <p:txBody>
+          <a:bodyPr wrap="square">
+            <a:spAutoFit/>
+          </a:bodyPr>
+          <a:lstStyle/>
+          <a:p>
+            <a:pPr>
+              <a:defRPr sz="1200" b="1">
+                <a:solidFill>
+                  <a:srgbClr val="1E293B"/>
+                </a:solidFill>
+                <a:latin typeface="Arial"/>
+              </a:defRPr>
+            </a:pPr>
+            <a:r>
+              <a:t>1. Vérifiez que le PV de la classe a été validé au préalable.</a:t>
+            </a:r>
+          </a:p>
+          <a:p>
+            <a:pPr>
+              <a:defRPr sz="1200" b="0">
+                <a:solidFill>
+                  <a:srgbClr val="1E293B"/>
+                </a:solidFill>
+                <a:latin typeface="Arial"/>
+              </a:defRPr>
+            </a:pPr>
+            <a:r>
+              <a:t>2. Allez dans l'onglet 'Évaluations' &gt; sous-onglet 'Éditeur de Bulletins'.</a:t>
+            </a:r>
+          </a:p>
+          <a:p>
+            <a:pPr>
+              <a:defRPr sz="1200" b="0">
+                <a:solidFill>
+                  <a:srgbClr val="1E293B"/>
+                </a:solidFill>
+                <a:latin typeface="Arial"/>
+              </a:defRPr>
+            </a:pPr>
+            <a:r>
+              <a:t>3. Sélectionnez la Classe et l'Élève dans les menus déroulants.</a:t>
+            </a:r>
+          </a:p>
+          <a:p>
+            <a:pPr>
+              <a:defRPr sz="1200" b="0">
+                <a:solidFill>
+                  <a:srgbClr val="1E293B"/>
+                </a:solidFill>
+                <a:latin typeface="Arial"/>
+              </a:defRPr>
+            </a:pPr>
+            <a:r>
+              <a:t>4. Le bulletin s'affiche avec : toutes les matières, les moyennes, le rang, la mention et les appréciations.</a:t>
+            </a:r>
+          </a:p>
+          <a:p>
+            <a:pPr>
+              <a:defRPr sz="1200" b="1">
+                <a:solidFill>
+                  <a:srgbClr val="1E293B"/>
+                </a:solidFill>
+                <a:latin typeface="Arial"/>
+              </a:defRPr>
+            </a:pPr>
+            <a:r>
+              <a:t>5. Cliquez sur 'Imprimer le Bulletin' (icône imprimante).</a:t>
+            </a:r>
+          </a:p>
+          <a:p>
+            <a:pPr>
+              <a:defRPr sz="1200" b="0">
+                <a:solidFill>
+                  <a:srgbClr val="1E293B"/>
+                </a:solidFill>
+                <a:latin typeface="Arial"/>
+              </a:defRPr>
+            </a:pPr>
+            <a:r>
+              <a:t>6. La fenêtre d'impression système s'ouvre. Sélectionnez 'Enregistrer en PDF' ou imprimez directement.</a:t>
+            </a:r>
+          </a:p>
+          <a:p>
+            <a:pPr>
+              <a:defRPr sz="1200" b="0">
+                <a:solidFill>
+                  <a:srgbClr val="1E293B"/>
+                </a:solidFill>
+                <a:latin typeface="Arial"/>
+              </a:defRPr>
+            </a:pPr>
+            <a:r>
+              <a:t>7. Si le PV n'est pas validé, un message d'avertissement jaune s'affiche et bloque l'impression.</a:t>
+            </a:r>
+          </a:p>
+        </p:txBody>
+      </p:sp>
+    </p:spTree>
+  </p:cSld>
+  <p:clrMapOvr>
+    <a:masterClrMapping/>
+  </p:clrMapOvr>
+</p:sld>
+</file>
+
+<file path=ppt/slides/slide29.xml><?xml version="1.0" encoding="utf-8"?>
+<p:sld xmlns:a="http://schemas.openxmlformats.org/drawingml/2006/main" xmlns:p="http://schemas.openxmlformats.org/presentationml/2006/main" xmlns:r="http://schemas.openxmlformats.org/officeDocument/2006/relationships">
+  <p:cSld>
+    <p:bg>
+      <p:bgPr>
+        <a:solidFill>
+          <a:srgbClr val="F8FAFC"/>
+        </a:solidFill>
+        <a:effectLst/>
+      </p:bgPr>
+    </p:bg>
+    <p:spTree>
+      <p:nvGrpSpPr>
+        <p:cNvPr id="1" name=""/>
+        <p:cNvGrpSpPr/>
+        <p:nvPr/>
+      </p:nvGrpSpPr>
+      <p:grpSpPr/>
+      <p:sp>
+        <p:nvSpPr>
+          <p:cNvPr id="2" name="TextBox 1"/>
+          <p:cNvSpPr txBox="1"/>
+          <p:nvPr/>
+        </p:nvSpPr>
+        <p:spPr>
+          <a:xfrm>
+            <a:off x="0" y="0"/>
+            <a:ext cx="12191695" cy="411480"/>
+          </a:xfrm>
+          <a:prstGeom prst="rect">
+            <a:avLst/>
+          </a:prstGeom>
+          <a:solidFill>
+            <a:srgbClr val="0B4998"/>
+          </a:solidFill>
+        </p:spPr>
+        <p:txBody>
+          <a:bodyPr wrap="none">
+            <a:spAutoFit/>
+          </a:bodyPr>
+          <a:lstStyle/>
+          <a:p>
+            <a:pPr>
+              <a:defRPr sz="900" b="1">
+                <a:solidFill>
+                  <a:srgbClr val="FFFFFF"/>
+                </a:solidFill>
+                <a:latin typeface="Arial"/>
+              </a:defRPr>
+            </a:pPr>
+            <a:r>
+              <a:rPr>
+                <a:solidFill>
+                  <a:srgbClr val="FFFFFF"/>
                 </a:solidFill>
               </a:rPr>
-              <a:t>Dans la liste des comptes ci-dessous, repérez l'utilisateur et cochez la case 'Saisie des Moyennes'.</a:t>
+              <a:t>MODULE 12 : SUIVI DES PRÉSENCES (ABSENCES)</a:t>
+            </a:r>
+          </a:p>
+        </p:txBody>
+      </p:sp>
+      <p:sp>
+        <p:nvSpPr>
+          <p:cNvPr id="3" name="TextBox 2"/>
+          <p:cNvSpPr txBox="1"/>
+          <p:nvPr/>
+        </p:nvSpPr>
+        <p:spPr>
+          <a:xfrm>
+            <a:off x="365760" y="457200"/>
+            <a:ext cx="11430000" cy="548640"/>
+          </a:xfrm>
+          <a:prstGeom prst="rect">
+            <a:avLst/>
+          </a:prstGeom>
+          <a:noFill/>
+        </p:spPr>
+        <p:txBody>
+          <a:bodyPr wrap="none">
+            <a:spAutoFit/>
+          </a:bodyPr>
+          <a:lstStyle/>
+          <a:p>
+            <a:pPr>
+              <a:defRPr sz="2000" b="1">
+                <a:solidFill>
+                  <a:srgbClr val="EE7B11"/>
+                </a:solidFill>
+                <a:latin typeface="Arial"/>
+              </a:defRPr>
+            </a:pPr>
+            <a:r>
+              <a:t>Comment enregistrer les absences d'un élève</a:t>
+            </a:r>
+          </a:p>
+        </p:txBody>
+      </p:sp>
+      <p:sp>
+        <p:nvSpPr>
+          <p:cNvPr id="4" name="TextBox 3"/>
+          <p:cNvSpPr txBox="1"/>
+          <p:nvPr/>
+        </p:nvSpPr>
+        <p:spPr>
+          <a:xfrm>
+            <a:off x="457200" y="1143000"/>
+            <a:ext cx="11247120" cy="5394960"/>
+          </a:xfrm>
+          <a:prstGeom prst="rect">
+            <a:avLst/>
+          </a:prstGeom>
+          <a:noFill/>
+        </p:spPr>
+        <p:txBody>
+          <a:bodyPr wrap="square">
+            <a:spAutoFit/>
+          </a:bodyPr>
+          <a:lstStyle/>
+          <a:p>
+            <a:pPr>
+              <a:defRPr sz="1200" b="1">
+                <a:solidFill>
+                  <a:srgbClr val="1E293B"/>
+                </a:solidFill>
+                <a:latin typeface="Arial"/>
+              </a:defRPr>
+            </a:pPr>
+            <a:r>
+              <a:t>1. Allez dans l'onglet 'Présences &amp; Absences'.</a:t>
+            </a:r>
+          </a:p>
+          <a:p>
+            <a:pPr>
+              <a:defRPr sz="1200" b="1">
+                <a:solidFill>
+                  <a:srgbClr val="1E293B"/>
+                </a:solidFill>
+                <a:latin typeface="Arial"/>
+              </a:defRPr>
+            </a:pPr>
+            <a:r>
+              <a:t>2. Sélectionnez la Classe et la Date du jour.</a:t>
+            </a:r>
+          </a:p>
+          <a:p>
+            <a:pPr>
+              <a:defRPr sz="1200" b="1">
+                <a:solidFill>
+                  <a:srgbClr val="1E293B"/>
+                </a:solidFill>
+                <a:latin typeface="Arial"/>
+              </a:defRPr>
+            </a:pPr>
+            <a:r>
+              <a:t>3. La liste des élèves de la classe s'affiche.</a:t>
+            </a:r>
+          </a:p>
+          <a:p>
+            <a:pPr>
+              <a:defRPr sz="1200" b="0">
+                <a:solidFill>
+                  <a:srgbClr val="1E293B"/>
+                </a:solidFill>
+                <a:latin typeface="Arial"/>
+              </a:defRPr>
+            </a:pPr>
+            <a:r>
+              <a:t>4. Pour chaque élève absent, cliquez sur la case correspondante pour la cocher.</a:t>
+            </a:r>
+          </a:p>
+          <a:p>
+            <a:pPr>
+              <a:defRPr sz="1200" b="1">
+                <a:solidFill>
+                  <a:srgbClr val="1E293B"/>
+                </a:solidFill>
+                <a:latin typeface="Arial"/>
+              </a:defRPr>
+            </a:pPr>
+            <a:r>
+              <a:t>5. Indiquez si l'absence est Justifiée ou Non Justifiée.</a:t>
+            </a:r>
+          </a:p>
+          <a:p>
+            <a:pPr>
+              <a:defRPr sz="1200" b="1">
+                <a:solidFill>
+                  <a:srgbClr val="1E293B"/>
+                </a:solidFill>
+                <a:latin typeface="Arial"/>
+              </a:defRPr>
+            </a:pPr>
+            <a:r>
+              <a:t>6. Cliquez sur 'Enregistrer l'appel' pour sauvegarder.</a:t>
             </a:r>
           </a:p>
         </p:txBody>
@@ -3366,30 +7567,37 @@
         </p:nvSpPr>
         <p:spPr>
           <a:xfrm>
-            <a:off x="457200" y="365760"/>
-            <a:ext cx="11274552" cy="731520"/>
-          </a:xfrm>
-          <a:prstGeom prst="rect">
-            <a:avLst/>
-          </a:prstGeom>
-          <a:noFill/>
-        </p:spPr>
-        <p:txBody>
-          <a:bodyPr wrap="square">
+            <a:off x="0" y="0"/>
+            <a:ext cx="12191695" cy="411480"/>
+          </a:xfrm>
+          <a:prstGeom prst="rect">
+            <a:avLst/>
+          </a:prstGeom>
+          <a:solidFill>
+            <a:srgbClr val="0B4998"/>
+          </a:solidFill>
+        </p:spPr>
+        <p:txBody>
+          <a:bodyPr wrap="none">
             <a:spAutoFit/>
           </a:bodyPr>
           <a:lstStyle/>
           <a:p>
             <a:pPr>
-              <a:defRPr sz="2400" b="1">
-                <a:solidFill>
-                  <a:srgbClr val="0B4998"/>
-                </a:solidFill>
-                <a:latin typeface="Arial"/>
-              </a:defRPr>
-            </a:pPr>
-            <a:r>
-              <a:t>Tutoriel 2 : Planifier un cours sur l'Emploi du Temps</a:t>
+              <a:defRPr sz="900" b="1">
+                <a:solidFill>
+                  <a:srgbClr val="FFFFFF"/>
+                </a:solidFill>
+                <a:latin typeface="Arial"/>
+              </a:defRPr>
+            </a:pPr>
+            <a:r>
+              <a:rPr>
+                <a:solidFill>
+                  <a:srgbClr val="FFFFFF"/>
+                </a:solidFill>
+              </a:rPr>
+              <a:t>MODULE 1 : CONNEXION &amp; SÉCURITÉ</a:t>
             </a:r>
           </a:p>
         </p:txBody>
@@ -3402,8 +7610,44 @@
         </p:nvSpPr>
         <p:spPr>
           <a:xfrm>
-            <a:off x="457200" y="1097280"/>
-            <a:ext cx="11274552" cy="5303520"/>
+            <a:off x="365760" y="457200"/>
+            <a:ext cx="11430000" cy="548640"/>
+          </a:xfrm>
+          <a:prstGeom prst="rect">
+            <a:avLst/>
+          </a:prstGeom>
+          <a:noFill/>
+        </p:spPr>
+        <p:txBody>
+          <a:bodyPr wrap="none">
+            <a:spAutoFit/>
+          </a:bodyPr>
+          <a:lstStyle/>
+          <a:p>
+            <a:pPr>
+              <a:defRPr sz="2000" b="1">
+                <a:solidFill>
+                  <a:srgbClr val="EE7B11"/>
+                </a:solidFill>
+                <a:latin typeface="Arial"/>
+              </a:defRPr>
+            </a:pPr>
+            <a:r>
+              <a:t>Comment se déconnecter</a:t>
+            </a:r>
+          </a:p>
+        </p:txBody>
+      </p:sp>
+      <p:sp>
+        <p:nvSpPr>
+          <p:cNvPr id="4" name="TextBox 3"/>
+          <p:cNvSpPr txBox="1"/>
+          <p:nvPr/>
+        </p:nvSpPr>
+        <p:spPr>
+          <a:xfrm>
+            <a:off x="457200" y="1143000"/>
+            <a:ext cx="11247120" cy="5394960"/>
           </a:xfrm>
           <a:prstGeom prst="rect">
             <a:avLst/>
@@ -3415,100 +7659,1691 @@
             <a:spAutoFit/>
           </a:bodyPr>
           <a:lstStyle/>
-          <a:p/>
-          <a:p>
-            <a:pPr/>
-            <a:r>
-              <a:rPr b="1" sz="1500">
-                <a:solidFill>
-                  <a:srgbClr val="1E293B"/>
+          <a:p>
+            <a:pPr>
+              <a:defRPr sz="1200" b="0">
+                <a:solidFill>
+                  <a:srgbClr val="1E293B"/>
+                </a:solidFill>
+                <a:latin typeface="Arial"/>
+              </a:defRPr>
+            </a:pPr>
+            <a:r>
+              <a:t>1. En haut à droite de l'interface, cliquez sur votre nom d'utilisateur ou l'icône de profil.</a:t>
+            </a:r>
+          </a:p>
+          <a:p>
+            <a:pPr>
+              <a:defRPr sz="1200" b="1">
+                <a:solidFill>
+                  <a:srgbClr val="1E293B"/>
+                </a:solidFill>
+                <a:latin typeface="Arial"/>
+              </a:defRPr>
+            </a:pPr>
+            <a:r>
+              <a:t>2. Dans le menu déroulant, cliquez sur 'Se déconnecter'.</a:t>
+            </a:r>
+          </a:p>
+          <a:p>
+            <a:pPr>
+              <a:defRPr sz="1200" b="0">
+                <a:solidFill>
+                  <a:srgbClr val="1E293B"/>
+                </a:solidFill>
+                <a:latin typeface="Arial"/>
+              </a:defRPr>
+            </a:pPr>
+            <a:r>
+              <a:t>3. Vous êtes redirigé vers l'écran de connexion. Votre session est fermée.</a:t>
+            </a:r>
+          </a:p>
+        </p:txBody>
+      </p:sp>
+    </p:spTree>
+  </p:cSld>
+  <p:clrMapOvr>
+    <a:masterClrMapping/>
+  </p:clrMapOvr>
+</p:sld>
+</file>
+
+<file path=ppt/slides/slide30.xml><?xml version="1.0" encoding="utf-8"?>
+<p:sld xmlns:a="http://schemas.openxmlformats.org/drawingml/2006/main" xmlns:p="http://schemas.openxmlformats.org/presentationml/2006/main" xmlns:r="http://schemas.openxmlformats.org/officeDocument/2006/relationships">
+  <p:cSld>
+    <p:bg>
+      <p:bgPr>
+        <a:solidFill>
+          <a:srgbClr val="F8FAFC"/>
+        </a:solidFill>
+        <a:effectLst/>
+      </p:bgPr>
+    </p:bg>
+    <p:spTree>
+      <p:nvGrpSpPr>
+        <p:cNvPr id="1" name=""/>
+        <p:cNvGrpSpPr/>
+        <p:nvPr/>
+      </p:nvGrpSpPr>
+      <p:grpSpPr/>
+      <p:sp>
+        <p:nvSpPr>
+          <p:cNvPr id="2" name="TextBox 1"/>
+          <p:cNvSpPr txBox="1"/>
+          <p:nvPr/>
+        </p:nvSpPr>
+        <p:spPr>
+          <a:xfrm>
+            <a:off x="0" y="0"/>
+            <a:ext cx="12191695" cy="411480"/>
+          </a:xfrm>
+          <a:prstGeom prst="rect">
+            <a:avLst/>
+          </a:prstGeom>
+          <a:solidFill>
+            <a:srgbClr val="0B4998"/>
+          </a:solidFill>
+        </p:spPr>
+        <p:txBody>
+          <a:bodyPr wrap="none">
+            <a:spAutoFit/>
+          </a:bodyPr>
+          <a:lstStyle/>
+          <a:p>
+            <a:pPr>
+              <a:defRPr sz="900" b="1">
+                <a:solidFill>
+                  <a:srgbClr val="FFFFFF"/>
+                </a:solidFill>
+                <a:latin typeface="Arial"/>
+              </a:defRPr>
+            </a:pPr>
+            <a:r>
+              <a:rPr>
+                <a:solidFill>
+                  <a:srgbClr val="FFFFFF"/>
                 </a:solidFill>
               </a:rPr>
-              <a:t>1. Accéder au module : </a:t>
-            </a:r>
-            <a:r>
-              <a:rPr sz="1400">
-                <a:solidFill>
-                  <a:srgbClr val="1E293B"/>
+              <a:t>MODULE 12 : SUIVI DES PRÉSENCES (ABSENCES)</a:t>
+            </a:r>
+          </a:p>
+        </p:txBody>
+      </p:sp>
+      <p:sp>
+        <p:nvSpPr>
+          <p:cNvPr id="3" name="TextBox 2"/>
+          <p:cNvSpPr txBox="1"/>
+          <p:nvPr/>
+        </p:nvSpPr>
+        <p:spPr>
+          <a:xfrm>
+            <a:off x="365760" y="457200"/>
+            <a:ext cx="11430000" cy="548640"/>
+          </a:xfrm>
+          <a:prstGeom prst="rect">
+            <a:avLst/>
+          </a:prstGeom>
+          <a:noFill/>
+        </p:spPr>
+        <p:txBody>
+          <a:bodyPr wrap="none">
+            <a:spAutoFit/>
+          </a:bodyPr>
+          <a:lstStyle/>
+          <a:p>
+            <a:pPr>
+              <a:defRPr sz="2000" b="1">
+                <a:solidFill>
+                  <a:srgbClr val="EE7B11"/>
+                </a:solidFill>
+                <a:latin typeface="Arial"/>
+              </a:defRPr>
+            </a:pPr>
+            <a:r>
+              <a:t>Comment consulter l'historique des absences d'un élève</a:t>
+            </a:r>
+          </a:p>
+        </p:txBody>
+      </p:sp>
+      <p:sp>
+        <p:nvSpPr>
+          <p:cNvPr id="4" name="TextBox 3"/>
+          <p:cNvSpPr txBox="1"/>
+          <p:nvPr/>
+        </p:nvSpPr>
+        <p:spPr>
+          <a:xfrm>
+            <a:off x="457200" y="1143000"/>
+            <a:ext cx="11247120" cy="5394960"/>
+          </a:xfrm>
+          <a:prstGeom prst="rect">
+            <a:avLst/>
+          </a:prstGeom>
+          <a:noFill/>
+        </p:spPr>
+        <p:txBody>
+          <a:bodyPr wrap="square">
+            <a:spAutoFit/>
+          </a:bodyPr>
+          <a:lstStyle/>
+          <a:p>
+            <a:pPr>
+              <a:defRPr sz="1200" b="0">
+                <a:solidFill>
+                  <a:srgbClr val="1E293B"/>
+                </a:solidFill>
+                <a:latin typeface="Arial"/>
+              </a:defRPr>
+            </a:pPr>
+            <a:r>
+              <a:t>1. Dans l'onglet Présences, allez dans le sous-onglet 'Historique'.</a:t>
+            </a:r>
+          </a:p>
+          <a:p>
+            <a:pPr>
+              <a:defRPr sz="1200" b="1">
+                <a:solidFill>
+                  <a:srgbClr val="1E293B"/>
+                </a:solidFill>
+                <a:latin typeface="Arial"/>
+              </a:defRPr>
+            </a:pPr>
+            <a:r>
+              <a:t>2. Filtrez par Élève et par Période (mois ou trimestre).</a:t>
+            </a:r>
+          </a:p>
+          <a:p>
+            <a:pPr>
+              <a:defRPr sz="1200" b="0">
+                <a:solidFill>
+                  <a:srgbClr val="1E293B"/>
+                </a:solidFill>
+                <a:latin typeface="Arial"/>
+              </a:defRPr>
+            </a:pPr>
+            <a:r>
+              <a:t>3. Le tableau affiche toutes les dates d'absence avec le statut (justifiée/non justifiée).</a:t>
+            </a:r>
+          </a:p>
+          <a:p>
+            <a:pPr>
+              <a:defRPr sz="1200" b="1">
+                <a:solidFill>
+                  <a:srgbClr val="1E293B"/>
+                </a:solidFill>
+                <a:latin typeface="Arial"/>
+              </a:defRPr>
+            </a:pPr>
+            <a:r>
+              <a:t>4. Le total d'heures d'absence est calculé automatiquement.</a:t>
+            </a:r>
+          </a:p>
+        </p:txBody>
+      </p:sp>
+    </p:spTree>
+  </p:cSld>
+  <p:clrMapOvr>
+    <a:masterClrMapping/>
+  </p:clrMapOvr>
+</p:sld>
+</file>
+
+<file path=ppt/slides/slide31.xml><?xml version="1.0" encoding="utf-8"?>
+<p:sld xmlns:a="http://schemas.openxmlformats.org/drawingml/2006/main" xmlns:p="http://schemas.openxmlformats.org/presentationml/2006/main" xmlns:r="http://schemas.openxmlformats.org/officeDocument/2006/relationships">
+  <p:cSld>
+    <p:bg>
+      <p:bgPr>
+        <a:solidFill>
+          <a:srgbClr val="F8FAFC"/>
+        </a:solidFill>
+        <a:effectLst/>
+      </p:bgPr>
+    </p:bg>
+    <p:spTree>
+      <p:nvGrpSpPr>
+        <p:cNvPr id="1" name=""/>
+        <p:cNvGrpSpPr/>
+        <p:nvPr/>
+      </p:nvGrpSpPr>
+      <p:grpSpPr/>
+      <p:sp>
+        <p:nvSpPr>
+          <p:cNvPr id="2" name="TextBox 1"/>
+          <p:cNvSpPr txBox="1"/>
+          <p:nvPr/>
+        </p:nvSpPr>
+        <p:spPr>
+          <a:xfrm>
+            <a:off x="0" y="0"/>
+            <a:ext cx="12191695" cy="411480"/>
+          </a:xfrm>
+          <a:prstGeom prst="rect">
+            <a:avLst/>
+          </a:prstGeom>
+          <a:solidFill>
+            <a:srgbClr val="0B4998"/>
+          </a:solidFill>
+        </p:spPr>
+        <p:txBody>
+          <a:bodyPr wrap="none">
+            <a:spAutoFit/>
+          </a:bodyPr>
+          <a:lstStyle/>
+          <a:p>
+            <a:pPr>
+              <a:defRPr sz="900" b="1">
+                <a:solidFill>
+                  <a:srgbClr val="FFFFFF"/>
+                </a:solidFill>
+                <a:latin typeface="Arial"/>
+              </a:defRPr>
+            </a:pPr>
+            <a:r>
+              <a:rPr>
+                <a:solidFill>
+                  <a:srgbClr val="FFFFFF"/>
                 </a:solidFill>
               </a:rPr>
-              <a:t>Allez sur l'onglet 'EDT - Planification'.</a:t>
-            </a:r>
-          </a:p>
-          <a:p>
-            <a:pPr/>
-            <a:r>
-              <a:rPr b="1" sz="1500">
-                <a:solidFill>
-                  <a:srgbClr val="1E293B"/>
+              <a:t>MODULE 13 : FINANCES &amp; ÉCOLAGES</a:t>
+            </a:r>
+          </a:p>
+        </p:txBody>
+      </p:sp>
+      <p:sp>
+        <p:nvSpPr>
+          <p:cNvPr id="3" name="TextBox 2"/>
+          <p:cNvSpPr txBox="1"/>
+          <p:nvPr/>
+        </p:nvSpPr>
+        <p:spPr>
+          <a:xfrm>
+            <a:off x="365760" y="457200"/>
+            <a:ext cx="11430000" cy="548640"/>
+          </a:xfrm>
+          <a:prstGeom prst="rect">
+            <a:avLst/>
+          </a:prstGeom>
+          <a:noFill/>
+        </p:spPr>
+        <p:txBody>
+          <a:bodyPr wrap="none">
+            <a:spAutoFit/>
+          </a:bodyPr>
+          <a:lstStyle/>
+          <a:p>
+            <a:pPr>
+              <a:defRPr sz="2000" b="1">
+                <a:solidFill>
+                  <a:srgbClr val="EE7B11"/>
+                </a:solidFill>
+                <a:latin typeface="Arial"/>
+              </a:defRPr>
+            </a:pPr>
+            <a:r>
+              <a:t>Comment enregistrer un paiement de scolarité</a:t>
+            </a:r>
+          </a:p>
+        </p:txBody>
+      </p:sp>
+      <p:sp>
+        <p:nvSpPr>
+          <p:cNvPr id="4" name="TextBox 3"/>
+          <p:cNvSpPr txBox="1"/>
+          <p:nvPr/>
+        </p:nvSpPr>
+        <p:spPr>
+          <a:xfrm>
+            <a:off x="457200" y="1143000"/>
+            <a:ext cx="11247120" cy="5394960"/>
+          </a:xfrm>
+          <a:prstGeom prst="rect">
+            <a:avLst/>
+          </a:prstGeom>
+          <a:noFill/>
+        </p:spPr>
+        <p:txBody>
+          <a:bodyPr wrap="square">
+            <a:spAutoFit/>
+          </a:bodyPr>
+          <a:lstStyle/>
+          <a:p>
+            <a:pPr>
+              <a:defRPr sz="1200" b="1">
+                <a:solidFill>
+                  <a:srgbClr val="1E293B"/>
+                </a:solidFill>
+                <a:latin typeface="Arial"/>
+              </a:defRPr>
+            </a:pPr>
+            <a:r>
+              <a:t>1. Allez dans l'onglet 'Finances &amp; Écolages'.</a:t>
+            </a:r>
+          </a:p>
+          <a:p>
+            <a:pPr>
+              <a:defRPr sz="1200" b="0">
+                <a:solidFill>
+                  <a:srgbClr val="1E293B"/>
+                </a:solidFill>
+                <a:latin typeface="Arial"/>
+              </a:defRPr>
+            </a:pPr>
+            <a:r>
+              <a:t>2. Dans la section 'Nouvelle Transaction', sélectionnez l'Élève concerné.</a:t>
+            </a:r>
+          </a:p>
+          <a:p>
+            <a:pPr>
+              <a:defRPr sz="1200" b="1">
+                <a:solidFill>
+                  <a:srgbClr val="1E293B"/>
+                </a:solidFill>
+                <a:latin typeface="Arial"/>
+              </a:defRPr>
+            </a:pPr>
+            <a:r>
+              <a:t>3. Renseignez :</a:t>
+            </a:r>
+          </a:p>
+          <a:p>
+            <a:pPr>
+              <a:defRPr sz="1100" b="0">
+                <a:solidFill>
+                  <a:srgbClr val="505050"/>
+                </a:solidFill>
+                <a:latin typeface="Arial"/>
+              </a:defRPr>
+            </a:pPr>
+            <a:r>
+              <a:t>    - Montant versé (ex: 75 000 FCFA)</a:t>
+            </a:r>
+          </a:p>
+          <a:p>
+            <a:pPr>
+              <a:defRPr sz="1100" b="0">
+                <a:solidFill>
+                  <a:srgbClr val="505050"/>
+                </a:solidFill>
+                <a:latin typeface="Arial"/>
+              </a:defRPr>
+            </a:pPr>
+            <a:r>
+              <a:t>    - Motif : Inscription, Scolarité 1er/2ème/3ème Trimestre, Fournitures, etc.</a:t>
+            </a:r>
+          </a:p>
+          <a:p>
+            <a:pPr>
+              <a:defRPr sz="1100" b="0">
+                <a:solidFill>
+                  <a:srgbClr val="505050"/>
+                </a:solidFill>
+                <a:latin typeface="Arial"/>
+              </a:defRPr>
+            </a:pPr>
+            <a:r>
+              <a:t>    - Mode de règlement : Espèces, Chèque, Orange Money, Wave, MTN Money</a:t>
+            </a:r>
+          </a:p>
+          <a:p>
+            <a:pPr>
+              <a:defRPr sz="1100" b="0">
+                <a:solidFill>
+                  <a:srgbClr val="505050"/>
+                </a:solidFill>
+                <a:latin typeface="Arial"/>
+              </a:defRPr>
+            </a:pPr>
+            <a:r>
+              <a:t>    - Date du versement</a:t>
+            </a:r>
+          </a:p>
+          <a:p>
+            <a:pPr>
+              <a:defRPr sz="1200" b="1">
+                <a:solidFill>
+                  <a:srgbClr val="1E293B"/>
+                </a:solidFill>
+                <a:latin typeface="Arial"/>
+              </a:defRPr>
+            </a:pPr>
+            <a:r>
+              <a:t>8. Cliquez sur 'Enregistrer la transaction'.</a:t>
+            </a:r>
+          </a:p>
+          <a:p>
+            <a:pPr>
+              <a:defRPr sz="1200" b="1">
+                <a:solidFill>
+                  <a:srgbClr val="1E293B"/>
+                </a:solidFill>
+                <a:latin typeface="Arial"/>
+              </a:defRPr>
+            </a:pPr>
+            <a:r>
+              <a:t>9. Le solde restant de l'élève est recalculé automatiquement.</a:t>
+            </a:r>
+          </a:p>
+        </p:txBody>
+      </p:sp>
+    </p:spTree>
+  </p:cSld>
+  <p:clrMapOvr>
+    <a:masterClrMapping/>
+  </p:clrMapOvr>
+</p:sld>
+</file>
+
+<file path=ppt/slides/slide32.xml><?xml version="1.0" encoding="utf-8"?>
+<p:sld xmlns:a="http://schemas.openxmlformats.org/drawingml/2006/main" xmlns:p="http://schemas.openxmlformats.org/presentationml/2006/main" xmlns:r="http://schemas.openxmlformats.org/officeDocument/2006/relationships">
+  <p:cSld>
+    <p:bg>
+      <p:bgPr>
+        <a:solidFill>
+          <a:srgbClr val="F8FAFC"/>
+        </a:solidFill>
+        <a:effectLst/>
+      </p:bgPr>
+    </p:bg>
+    <p:spTree>
+      <p:nvGrpSpPr>
+        <p:cNvPr id="1" name=""/>
+        <p:cNvGrpSpPr/>
+        <p:nvPr/>
+      </p:nvGrpSpPr>
+      <p:grpSpPr/>
+      <p:sp>
+        <p:nvSpPr>
+          <p:cNvPr id="2" name="TextBox 1"/>
+          <p:cNvSpPr txBox="1"/>
+          <p:nvPr/>
+        </p:nvSpPr>
+        <p:spPr>
+          <a:xfrm>
+            <a:off x="0" y="0"/>
+            <a:ext cx="12191695" cy="411480"/>
+          </a:xfrm>
+          <a:prstGeom prst="rect">
+            <a:avLst/>
+          </a:prstGeom>
+          <a:solidFill>
+            <a:srgbClr val="0B4998"/>
+          </a:solidFill>
+        </p:spPr>
+        <p:txBody>
+          <a:bodyPr wrap="none">
+            <a:spAutoFit/>
+          </a:bodyPr>
+          <a:lstStyle/>
+          <a:p>
+            <a:pPr>
+              <a:defRPr sz="900" b="1">
+                <a:solidFill>
+                  <a:srgbClr val="FFFFFF"/>
+                </a:solidFill>
+                <a:latin typeface="Arial"/>
+              </a:defRPr>
+            </a:pPr>
+            <a:r>
+              <a:rPr>
+                <a:solidFill>
+                  <a:srgbClr val="FFFFFF"/>
                 </a:solidFill>
               </a:rPr>
-              <a:t>2. Remplir les détails : </a:t>
-            </a:r>
-            <a:r>
-              <a:rPr sz="1400">
-                <a:solidFill>
-                  <a:srgbClr val="1E293B"/>
+              <a:t>MODULE 13 : FINANCES &amp; ÉCOLAGES</a:t>
+            </a:r>
+          </a:p>
+        </p:txBody>
+      </p:sp>
+      <p:sp>
+        <p:nvSpPr>
+          <p:cNvPr id="3" name="TextBox 2"/>
+          <p:cNvSpPr txBox="1"/>
+          <p:nvPr/>
+        </p:nvSpPr>
+        <p:spPr>
+          <a:xfrm>
+            <a:off x="365760" y="457200"/>
+            <a:ext cx="11430000" cy="548640"/>
+          </a:xfrm>
+          <a:prstGeom prst="rect">
+            <a:avLst/>
+          </a:prstGeom>
+          <a:noFill/>
+        </p:spPr>
+        <p:txBody>
+          <a:bodyPr wrap="none">
+            <a:spAutoFit/>
+          </a:bodyPr>
+          <a:lstStyle/>
+          <a:p>
+            <a:pPr>
+              <a:defRPr sz="2000" b="1">
+                <a:solidFill>
+                  <a:srgbClr val="EE7B11"/>
+                </a:solidFill>
+                <a:latin typeface="Arial"/>
+              </a:defRPr>
+            </a:pPr>
+            <a:r>
+              <a:t>Comment générer et imprimer un reçu de paiement</a:t>
+            </a:r>
+          </a:p>
+        </p:txBody>
+      </p:sp>
+      <p:sp>
+        <p:nvSpPr>
+          <p:cNvPr id="4" name="TextBox 3"/>
+          <p:cNvSpPr txBox="1"/>
+          <p:nvPr/>
+        </p:nvSpPr>
+        <p:spPr>
+          <a:xfrm>
+            <a:off x="457200" y="1143000"/>
+            <a:ext cx="11247120" cy="5394960"/>
+          </a:xfrm>
+          <a:prstGeom prst="rect">
+            <a:avLst/>
+          </a:prstGeom>
+          <a:noFill/>
+        </p:spPr>
+        <p:txBody>
+          <a:bodyPr wrap="square">
+            <a:spAutoFit/>
+          </a:bodyPr>
+          <a:lstStyle/>
+          <a:p>
+            <a:pPr>
+              <a:defRPr sz="1200" b="0">
+                <a:solidFill>
+                  <a:srgbClr val="1E293B"/>
+                </a:solidFill>
+                <a:latin typeface="Arial"/>
+              </a:defRPr>
+            </a:pPr>
+            <a:r>
+              <a:t>1. Après avoir enregistré un paiement, repérez-le dans la table des transactions.</a:t>
+            </a:r>
+          </a:p>
+          <a:p>
+            <a:pPr>
+              <a:defRPr sz="1200" b="0">
+                <a:solidFill>
+                  <a:srgbClr val="1E293B"/>
+                </a:solidFill>
+                <a:latin typeface="Arial"/>
+              </a:defRPr>
+            </a:pPr>
+            <a:r>
+              <a:t>2. Cliquez sur le bouton 'Reçu PDF' à droite de la transaction.</a:t>
+            </a:r>
+          </a:p>
+          <a:p>
+            <a:pPr>
+              <a:defRPr sz="1200" b="1">
+                <a:solidFill>
+                  <a:srgbClr val="1E293B"/>
+                </a:solidFill>
+                <a:latin typeface="Arial"/>
+              </a:defRPr>
+            </a:pPr>
+            <a:r>
+              <a:t>3. Un reçu officiel au format PDF est généré avec :</a:t>
+            </a:r>
+          </a:p>
+          <a:p>
+            <a:pPr>
+              <a:defRPr sz="1100" b="0">
+                <a:solidFill>
+                  <a:srgbClr val="505050"/>
+                </a:solidFill>
+                <a:latin typeface="Arial"/>
+              </a:defRPr>
+            </a:pPr>
+            <a:r>
+              <a:t>    - Le nom de l'établissement et le logo</a:t>
+            </a:r>
+          </a:p>
+          <a:p>
+            <a:pPr>
+              <a:defRPr sz="1100" b="0">
+                <a:solidFill>
+                  <a:srgbClr val="505050"/>
+                </a:solidFill>
+                <a:latin typeface="Arial"/>
+              </a:defRPr>
+            </a:pPr>
+            <a:r>
+              <a:t>    - Le nom de l'élève et sa classe</a:t>
+            </a:r>
+          </a:p>
+          <a:p>
+            <a:pPr>
+              <a:defRPr sz="1100" b="0">
+                <a:solidFill>
+                  <a:srgbClr val="505050"/>
+                </a:solidFill>
+                <a:latin typeface="Arial"/>
+              </a:defRPr>
+            </a:pPr>
+            <a:r>
+              <a:t>    - Le montant payé, le motif et la date</a:t>
+            </a:r>
+          </a:p>
+          <a:p>
+            <a:pPr>
+              <a:defRPr sz="1100" b="0">
+                <a:solidFill>
+                  <a:srgbClr val="505050"/>
+                </a:solidFill>
+                <a:latin typeface="Arial"/>
+              </a:defRPr>
+            </a:pPr>
+            <a:r>
+              <a:t>    - Un numéro de reçu unique</a:t>
+            </a:r>
+          </a:p>
+          <a:p>
+            <a:pPr>
+              <a:defRPr sz="1200" b="1">
+                <a:solidFill>
+                  <a:srgbClr val="1E293B"/>
+                </a:solidFill>
+                <a:latin typeface="Arial"/>
+              </a:defRPr>
+            </a:pPr>
+            <a:r>
+              <a:t>8. Cliquez sur 'Télécharger' ou 'Imprimer' selon votre besoin.</a:t>
+            </a:r>
+          </a:p>
+        </p:txBody>
+      </p:sp>
+    </p:spTree>
+  </p:cSld>
+  <p:clrMapOvr>
+    <a:masterClrMapping/>
+  </p:clrMapOvr>
+</p:sld>
+</file>
+
+<file path=ppt/slides/slide33.xml><?xml version="1.0" encoding="utf-8"?>
+<p:sld xmlns:a="http://schemas.openxmlformats.org/drawingml/2006/main" xmlns:p="http://schemas.openxmlformats.org/presentationml/2006/main" xmlns:r="http://schemas.openxmlformats.org/officeDocument/2006/relationships">
+  <p:cSld>
+    <p:bg>
+      <p:bgPr>
+        <a:solidFill>
+          <a:srgbClr val="F8FAFC"/>
+        </a:solidFill>
+        <a:effectLst/>
+      </p:bgPr>
+    </p:bg>
+    <p:spTree>
+      <p:nvGrpSpPr>
+        <p:cNvPr id="1" name=""/>
+        <p:cNvGrpSpPr/>
+        <p:nvPr/>
+      </p:nvGrpSpPr>
+      <p:grpSpPr/>
+      <p:sp>
+        <p:nvSpPr>
+          <p:cNvPr id="2" name="TextBox 1"/>
+          <p:cNvSpPr txBox="1"/>
+          <p:nvPr/>
+        </p:nvSpPr>
+        <p:spPr>
+          <a:xfrm>
+            <a:off x="0" y="0"/>
+            <a:ext cx="12191695" cy="411480"/>
+          </a:xfrm>
+          <a:prstGeom prst="rect">
+            <a:avLst/>
+          </a:prstGeom>
+          <a:solidFill>
+            <a:srgbClr val="0B4998"/>
+          </a:solidFill>
+        </p:spPr>
+        <p:txBody>
+          <a:bodyPr wrap="none">
+            <a:spAutoFit/>
+          </a:bodyPr>
+          <a:lstStyle/>
+          <a:p>
+            <a:pPr>
+              <a:defRPr sz="900" b="1">
+                <a:solidFill>
+                  <a:srgbClr val="FFFFFF"/>
+                </a:solidFill>
+                <a:latin typeface="Arial"/>
+              </a:defRPr>
+            </a:pPr>
+            <a:r>
+              <a:rPr>
+                <a:solidFill>
+                  <a:srgbClr val="FFFFFF"/>
                 </a:solidFill>
               </a:rPr>
-              <a:t>Sélectionnez la Classe, le Professeur, la Matière et la Salle d'étude.</a:t>
-            </a:r>
-          </a:p>
-          <a:p>
-            <a:pPr/>
-            <a:r>
-              <a:rPr b="1" sz="1500">
-                <a:solidFill>
-                  <a:srgbClr val="1E293B"/>
+              <a:t>MODULE 13 : FINANCES &amp; ÉCOLAGES</a:t>
+            </a:r>
+          </a:p>
+        </p:txBody>
+      </p:sp>
+      <p:sp>
+        <p:nvSpPr>
+          <p:cNvPr id="3" name="TextBox 2"/>
+          <p:cNvSpPr txBox="1"/>
+          <p:nvPr/>
+        </p:nvSpPr>
+        <p:spPr>
+          <a:xfrm>
+            <a:off x="365760" y="457200"/>
+            <a:ext cx="11430000" cy="548640"/>
+          </a:xfrm>
+          <a:prstGeom prst="rect">
+            <a:avLst/>
+          </a:prstGeom>
+          <a:noFill/>
+        </p:spPr>
+        <p:txBody>
+          <a:bodyPr wrap="none">
+            <a:spAutoFit/>
+          </a:bodyPr>
+          <a:lstStyle/>
+          <a:p>
+            <a:pPr>
+              <a:defRPr sz="2000" b="1">
+                <a:solidFill>
+                  <a:srgbClr val="EE7B11"/>
+                </a:solidFill>
+                <a:latin typeface="Arial"/>
+              </a:defRPr>
+            </a:pPr>
+            <a:r>
+              <a:t>Comment envoyer un reçu par WhatsApp ou SMS</a:t>
+            </a:r>
+          </a:p>
+        </p:txBody>
+      </p:sp>
+      <p:sp>
+        <p:nvSpPr>
+          <p:cNvPr id="4" name="TextBox 3"/>
+          <p:cNvSpPr txBox="1"/>
+          <p:nvPr/>
+        </p:nvSpPr>
+        <p:spPr>
+          <a:xfrm>
+            <a:off x="457200" y="1143000"/>
+            <a:ext cx="11247120" cy="5394960"/>
+          </a:xfrm>
+          <a:prstGeom prst="rect">
+            <a:avLst/>
+          </a:prstGeom>
+          <a:noFill/>
+        </p:spPr>
+        <p:txBody>
+          <a:bodyPr wrap="square">
+            <a:spAutoFit/>
+          </a:bodyPr>
+          <a:lstStyle/>
+          <a:p>
+            <a:pPr>
+              <a:defRPr sz="1200" b="0">
+                <a:solidFill>
+                  <a:srgbClr val="1E293B"/>
+                </a:solidFill>
+                <a:latin typeface="Arial"/>
+              </a:defRPr>
+            </a:pPr>
+            <a:r>
+              <a:t>1. Après avoir généré le reçu, cliquez sur le bouton vert 'WhatsApp'.</a:t>
+            </a:r>
+          </a:p>
+          <a:p>
+            <a:pPr>
+              <a:defRPr sz="1200" b="0">
+                <a:solidFill>
+                  <a:srgbClr val="1E293B"/>
+                </a:solidFill>
+                <a:latin typeface="Arial"/>
+              </a:defRPr>
+            </a:pPr>
+            <a:r>
+              <a:t>2. Votre application WhatsApp s'ouvre avec un message pré-rempli contenant les détails du paiement.</a:t>
+            </a:r>
+          </a:p>
+          <a:p>
+            <a:pPr>
+              <a:defRPr sz="1200" b="0">
+                <a:solidFill>
+                  <a:srgbClr val="1E293B"/>
+                </a:solidFill>
+                <a:latin typeface="Arial"/>
+              </a:defRPr>
+            </a:pPr>
+            <a:r>
+              <a:t>3. Sélectionnez ou saisissez le numéro du parent/tuteur de l'élève.</a:t>
+            </a:r>
+          </a:p>
+          <a:p>
+            <a:pPr>
+              <a:defRPr sz="1200" b="0">
+                <a:solidFill>
+                  <a:srgbClr val="1E293B"/>
+                </a:solidFill>
+                <a:latin typeface="Arial"/>
+              </a:defRPr>
+            </a:pPr>
+            <a:r>
+              <a:t>4. Cliquez sur Envoyer. Le parent reçoit instantanément la confirmation de paiement.</a:t>
+            </a:r>
+          </a:p>
+        </p:txBody>
+      </p:sp>
+    </p:spTree>
+  </p:cSld>
+  <p:clrMapOvr>
+    <a:masterClrMapping/>
+  </p:clrMapOvr>
+</p:sld>
+</file>
+
+<file path=ppt/slides/slide34.xml><?xml version="1.0" encoding="utf-8"?>
+<p:sld xmlns:a="http://schemas.openxmlformats.org/drawingml/2006/main" xmlns:p="http://schemas.openxmlformats.org/presentationml/2006/main" xmlns:r="http://schemas.openxmlformats.org/officeDocument/2006/relationships">
+  <p:cSld>
+    <p:bg>
+      <p:bgPr>
+        <a:solidFill>
+          <a:srgbClr val="F8FAFC"/>
+        </a:solidFill>
+        <a:effectLst/>
+      </p:bgPr>
+    </p:bg>
+    <p:spTree>
+      <p:nvGrpSpPr>
+        <p:cNvPr id="1" name=""/>
+        <p:cNvGrpSpPr/>
+        <p:nvPr/>
+      </p:nvGrpSpPr>
+      <p:grpSpPr/>
+      <p:sp>
+        <p:nvSpPr>
+          <p:cNvPr id="2" name="TextBox 1"/>
+          <p:cNvSpPr txBox="1"/>
+          <p:nvPr/>
+        </p:nvSpPr>
+        <p:spPr>
+          <a:xfrm>
+            <a:off x="0" y="0"/>
+            <a:ext cx="12191695" cy="411480"/>
+          </a:xfrm>
+          <a:prstGeom prst="rect">
+            <a:avLst/>
+          </a:prstGeom>
+          <a:solidFill>
+            <a:srgbClr val="0B4998"/>
+          </a:solidFill>
+        </p:spPr>
+        <p:txBody>
+          <a:bodyPr wrap="none">
+            <a:spAutoFit/>
+          </a:bodyPr>
+          <a:lstStyle/>
+          <a:p>
+            <a:pPr>
+              <a:defRPr sz="900" b="1">
+                <a:solidFill>
+                  <a:srgbClr val="FFFFFF"/>
+                </a:solidFill>
+                <a:latin typeface="Arial"/>
+              </a:defRPr>
+            </a:pPr>
+            <a:r>
+              <a:rPr>
+                <a:solidFill>
+                  <a:srgbClr val="FFFFFF"/>
                 </a:solidFill>
               </a:rPr>
-              <a:t>3. Choisir le créneau : </a:t>
-            </a:r>
-            <a:r>
-              <a:rPr sz="1400">
-                <a:solidFill>
-                  <a:srgbClr val="1E293B"/>
+              <a:t>MODULE 14 : RAPPORTS &amp; STATISTIQUES</a:t>
+            </a:r>
+          </a:p>
+        </p:txBody>
+      </p:sp>
+      <p:sp>
+        <p:nvSpPr>
+          <p:cNvPr id="3" name="TextBox 2"/>
+          <p:cNvSpPr txBox="1"/>
+          <p:nvPr/>
+        </p:nvSpPr>
+        <p:spPr>
+          <a:xfrm>
+            <a:off x="365760" y="457200"/>
+            <a:ext cx="11430000" cy="548640"/>
+          </a:xfrm>
+          <a:prstGeom prst="rect">
+            <a:avLst/>
+          </a:prstGeom>
+          <a:noFill/>
+        </p:spPr>
+        <p:txBody>
+          <a:bodyPr wrap="none">
+            <a:spAutoFit/>
+          </a:bodyPr>
+          <a:lstStyle/>
+          <a:p>
+            <a:pPr>
+              <a:defRPr sz="2000" b="1">
+                <a:solidFill>
+                  <a:srgbClr val="EE7B11"/>
+                </a:solidFill>
+                <a:latin typeface="Arial"/>
+              </a:defRPr>
+            </a:pPr>
+            <a:r>
+              <a:t>Comment générer un rapport de classe</a:t>
+            </a:r>
+          </a:p>
+        </p:txBody>
+      </p:sp>
+      <p:sp>
+        <p:nvSpPr>
+          <p:cNvPr id="4" name="TextBox 3"/>
+          <p:cNvSpPr txBox="1"/>
+          <p:nvPr/>
+        </p:nvSpPr>
+        <p:spPr>
+          <a:xfrm>
+            <a:off x="457200" y="1143000"/>
+            <a:ext cx="11247120" cy="5394960"/>
+          </a:xfrm>
+          <a:prstGeom prst="rect">
+            <a:avLst/>
+          </a:prstGeom>
+          <a:noFill/>
+        </p:spPr>
+        <p:txBody>
+          <a:bodyPr wrap="square">
+            <a:spAutoFit/>
+          </a:bodyPr>
+          <a:lstStyle/>
+          <a:p>
+            <a:pPr>
+              <a:defRPr sz="1200" b="1">
+                <a:solidFill>
+                  <a:srgbClr val="1E293B"/>
+                </a:solidFill>
+                <a:latin typeface="Arial"/>
+              </a:defRPr>
+            </a:pPr>
+            <a:r>
+              <a:t>1. Allez dans l'onglet 'Rapports &amp; Statistiques'.</a:t>
+            </a:r>
+          </a:p>
+          <a:p>
+            <a:pPr>
+              <a:defRPr sz="1200" b="0">
+                <a:solidFill>
+                  <a:srgbClr val="1E293B"/>
+                </a:solidFill>
+                <a:latin typeface="Arial"/>
+              </a:defRPr>
+            </a:pPr>
+            <a:r>
+              <a:t>2. Sélectionnez le type de rapport : Résultats scolaires, Présences, Financier.</a:t>
+            </a:r>
+          </a:p>
+          <a:p>
+            <a:pPr>
+              <a:defRPr sz="1200" b="0">
+                <a:solidFill>
+                  <a:srgbClr val="1E293B"/>
+                </a:solidFill>
+                <a:latin typeface="Arial"/>
+              </a:defRPr>
+            </a:pPr>
+            <a:r>
+              <a:t>3. Choisissez la Classe et la Période (Trimestre 1, 2 ou 3, ou Annuel).</a:t>
+            </a:r>
+          </a:p>
+          <a:p>
+            <a:pPr>
+              <a:defRPr sz="1200" b="1">
+                <a:solidFill>
+                  <a:srgbClr val="1E293B"/>
+                </a:solidFill>
+                <a:latin typeface="Arial"/>
+              </a:defRPr>
+            </a:pPr>
+            <a:r>
+              <a:t>4. Cliquez sur 'Générer le Rapport'.</a:t>
+            </a:r>
+          </a:p>
+          <a:p>
+            <a:pPr>
+              <a:defRPr sz="1200" b="0">
+                <a:solidFill>
+                  <a:srgbClr val="1E293B"/>
+                </a:solidFill>
+                <a:latin typeface="Arial"/>
+              </a:defRPr>
+            </a:pPr>
+            <a:r>
+              <a:t>5. Le rapport s'affiche avec des graphiques et des tableaux récapitulatifs.</a:t>
+            </a:r>
+          </a:p>
+          <a:p>
+            <a:pPr>
+              <a:defRPr sz="1200" b="0">
+                <a:solidFill>
+                  <a:srgbClr val="1E293B"/>
+                </a:solidFill>
+                <a:latin typeface="Arial"/>
+              </a:defRPr>
+            </a:pPr>
+            <a:r>
+              <a:t>6. Cliquez sur 'Exporter en PDF' ou 'Exporter en Excel' pour le sauvegarder.</a:t>
+            </a:r>
+          </a:p>
+        </p:txBody>
+      </p:sp>
+    </p:spTree>
+  </p:cSld>
+  <p:clrMapOvr>
+    <a:masterClrMapping/>
+  </p:clrMapOvr>
+</p:sld>
+</file>
+
+<file path=ppt/slides/slide35.xml><?xml version="1.0" encoding="utf-8"?>
+<p:sld xmlns:a="http://schemas.openxmlformats.org/drawingml/2006/main" xmlns:p="http://schemas.openxmlformats.org/presentationml/2006/main" xmlns:r="http://schemas.openxmlformats.org/officeDocument/2006/relationships">
+  <p:cSld>
+    <p:bg>
+      <p:bgPr>
+        <a:solidFill>
+          <a:srgbClr val="F8FAFC"/>
+        </a:solidFill>
+        <a:effectLst/>
+      </p:bgPr>
+    </p:bg>
+    <p:spTree>
+      <p:nvGrpSpPr>
+        <p:cNvPr id="1" name=""/>
+        <p:cNvGrpSpPr/>
+        <p:nvPr/>
+      </p:nvGrpSpPr>
+      <p:grpSpPr/>
+      <p:sp>
+        <p:nvSpPr>
+          <p:cNvPr id="2" name="TextBox 1"/>
+          <p:cNvSpPr txBox="1"/>
+          <p:nvPr/>
+        </p:nvSpPr>
+        <p:spPr>
+          <a:xfrm>
+            <a:off x="0" y="0"/>
+            <a:ext cx="12191695" cy="411480"/>
+          </a:xfrm>
+          <a:prstGeom prst="rect">
+            <a:avLst/>
+          </a:prstGeom>
+          <a:solidFill>
+            <a:srgbClr val="0B4998"/>
+          </a:solidFill>
+        </p:spPr>
+        <p:txBody>
+          <a:bodyPr wrap="none">
+            <a:spAutoFit/>
+          </a:bodyPr>
+          <a:lstStyle/>
+          <a:p>
+            <a:pPr>
+              <a:defRPr sz="900" b="1">
+                <a:solidFill>
+                  <a:srgbClr val="FFFFFF"/>
+                </a:solidFill>
+                <a:latin typeface="Arial"/>
+              </a:defRPr>
+            </a:pPr>
+            <a:r>
+              <a:rPr>
+                <a:solidFill>
+                  <a:srgbClr val="FFFFFF"/>
                 </a:solidFill>
               </a:rPr>
-              <a:t>Choisissez le Jour de la semaine (ex: Lundi) et le Créneau horaire (ex: 08:00 - 10:00).</a:t>
-            </a:r>
-          </a:p>
-          <a:p>
-            <a:pPr/>
-            <a:r>
-              <a:rPr b="1" sz="1500">
-                <a:solidFill>
-                  <a:srgbClr val="1E293B"/>
+              <a:t>MODULE 14 : RAPPORTS &amp; STATISTIQUES</a:t>
+            </a:r>
+          </a:p>
+        </p:txBody>
+      </p:sp>
+      <p:sp>
+        <p:nvSpPr>
+          <p:cNvPr id="3" name="TextBox 2"/>
+          <p:cNvSpPr txBox="1"/>
+          <p:nvPr/>
+        </p:nvSpPr>
+        <p:spPr>
+          <a:xfrm>
+            <a:off x="365760" y="457200"/>
+            <a:ext cx="11430000" cy="548640"/>
+          </a:xfrm>
+          <a:prstGeom prst="rect">
+            <a:avLst/>
+          </a:prstGeom>
+          <a:noFill/>
+        </p:spPr>
+        <p:txBody>
+          <a:bodyPr wrap="none">
+            <a:spAutoFit/>
+          </a:bodyPr>
+          <a:lstStyle/>
+          <a:p>
+            <a:pPr>
+              <a:defRPr sz="2000" b="1">
+                <a:solidFill>
+                  <a:srgbClr val="EE7B11"/>
+                </a:solidFill>
+                <a:latin typeface="Arial"/>
+              </a:defRPr>
+            </a:pPr>
+            <a:r>
+              <a:t>Comment consulter les statistiques du tableau de bord</a:t>
+            </a:r>
+          </a:p>
+        </p:txBody>
+      </p:sp>
+      <p:sp>
+        <p:nvSpPr>
+          <p:cNvPr id="4" name="TextBox 3"/>
+          <p:cNvSpPr txBox="1"/>
+          <p:nvPr/>
+        </p:nvSpPr>
+        <p:spPr>
+          <a:xfrm>
+            <a:off x="457200" y="1143000"/>
+            <a:ext cx="11247120" cy="5394960"/>
+          </a:xfrm>
+          <a:prstGeom prst="rect">
+            <a:avLst/>
+          </a:prstGeom>
+          <a:noFill/>
+        </p:spPr>
+        <p:txBody>
+          <a:bodyPr wrap="square">
+            <a:spAutoFit/>
+          </a:bodyPr>
+          <a:lstStyle/>
+          <a:p>
+            <a:pPr>
+              <a:defRPr sz="1200" b="0">
+                <a:solidFill>
+                  <a:srgbClr val="1E293B"/>
+                </a:solidFill>
+                <a:latin typeface="Arial"/>
+              </a:defRPr>
+            </a:pPr>
+            <a:r>
+              <a:t>1. Accédez à l'onglet 'Tableau de Bord' (page d'accueil après connexion).</a:t>
+            </a:r>
+          </a:p>
+          <a:p>
+            <a:pPr>
+              <a:defRPr sz="1200" b="1">
+                <a:solidFill>
+                  <a:srgbClr val="1E293B"/>
+                </a:solidFill>
+                <a:latin typeface="Arial"/>
+              </a:defRPr>
+            </a:pPr>
+            <a:r>
+              <a:t>2. Les cartes colorées affichent en temps réel :</a:t>
+            </a:r>
+          </a:p>
+          <a:p>
+            <a:pPr>
+              <a:defRPr sz="1100" b="0">
+                <a:solidFill>
+                  <a:srgbClr val="505050"/>
+                </a:solidFill>
+                <a:latin typeface="Arial"/>
+              </a:defRPr>
+            </a:pPr>
+            <a:r>
+              <a:t>    - Effectif total d'élèves inscrits</a:t>
+            </a:r>
+          </a:p>
+          <a:p>
+            <a:pPr>
+              <a:defRPr sz="1100" b="0">
+                <a:solidFill>
+                  <a:srgbClr val="505050"/>
+                </a:solidFill>
+                <a:latin typeface="Arial"/>
+              </a:defRPr>
+            </a:pPr>
+            <a:r>
+              <a:t>    - Nombre de cours planifiés cette semaine</a:t>
+            </a:r>
+          </a:p>
+          <a:p>
+            <a:pPr>
+              <a:defRPr sz="1100" b="0">
+                <a:solidFill>
+                  <a:srgbClr val="505050"/>
+                </a:solidFill>
+                <a:latin typeface="Arial"/>
+              </a:defRPr>
+            </a:pPr>
+            <a:r>
+              <a:t>    - Taux de remplissage des salles</a:t>
+            </a:r>
+          </a:p>
+          <a:p>
+            <a:pPr>
+              <a:defRPr sz="1100" b="0">
+                <a:solidFill>
+                  <a:srgbClr val="505050"/>
+                </a:solidFill>
+                <a:latin typeface="Arial"/>
+              </a:defRPr>
+            </a:pPr>
+            <a:r>
+              <a:t>    - Nombre de professeurs actifs</a:t>
+            </a:r>
+          </a:p>
+          <a:p>
+            <a:pPr>
+              <a:defRPr sz="1200" b="0">
+                <a:solidFill>
+                  <a:srgbClr val="1E293B"/>
+                </a:solidFill>
+                <a:latin typeface="Arial"/>
+              </a:defRPr>
+            </a:pPr>
+            <a:r>
+              <a:t>7. Consultez les graphiques de répartition par classe et par genre.</a:t>
+            </a:r>
+          </a:p>
+        </p:txBody>
+      </p:sp>
+    </p:spTree>
+  </p:cSld>
+  <p:clrMapOvr>
+    <a:masterClrMapping/>
+  </p:clrMapOvr>
+</p:sld>
+</file>
+
+<file path=ppt/slides/slide36.xml><?xml version="1.0" encoding="utf-8"?>
+<p:sld xmlns:a="http://schemas.openxmlformats.org/drawingml/2006/main" xmlns:p="http://schemas.openxmlformats.org/presentationml/2006/main" xmlns:r="http://schemas.openxmlformats.org/officeDocument/2006/relationships">
+  <p:cSld>
+    <p:bg>
+      <p:bgPr>
+        <a:solidFill>
+          <a:srgbClr val="F8FAFC"/>
+        </a:solidFill>
+        <a:effectLst/>
+      </p:bgPr>
+    </p:bg>
+    <p:spTree>
+      <p:nvGrpSpPr>
+        <p:cNvPr id="1" name=""/>
+        <p:cNvGrpSpPr/>
+        <p:nvPr/>
+      </p:nvGrpSpPr>
+      <p:grpSpPr/>
+      <p:sp>
+        <p:nvSpPr>
+          <p:cNvPr id="2" name="TextBox 1"/>
+          <p:cNvSpPr txBox="1"/>
+          <p:nvPr/>
+        </p:nvSpPr>
+        <p:spPr>
+          <a:xfrm>
+            <a:off x="0" y="0"/>
+            <a:ext cx="12191695" cy="411480"/>
+          </a:xfrm>
+          <a:prstGeom prst="rect">
+            <a:avLst/>
+          </a:prstGeom>
+          <a:solidFill>
+            <a:srgbClr val="0B4998"/>
+          </a:solidFill>
+        </p:spPr>
+        <p:txBody>
+          <a:bodyPr wrap="none">
+            <a:spAutoFit/>
+          </a:bodyPr>
+          <a:lstStyle/>
+          <a:p>
+            <a:pPr>
+              <a:defRPr sz="900" b="1">
+                <a:solidFill>
+                  <a:srgbClr val="FFFFFF"/>
+                </a:solidFill>
+                <a:latin typeface="Arial"/>
+              </a:defRPr>
+            </a:pPr>
+            <a:r>
+              <a:rPr>
+                <a:solidFill>
+                  <a:srgbClr val="FFFFFF"/>
                 </a:solidFill>
               </a:rPr>
-              <a:t>4. Détection automatique : </a:t>
-            </a:r>
-            <a:r>
-              <a:rPr sz="1400">
-                <a:solidFill>
-                  <a:srgbClr val="1E293B"/>
+              <a:t>MODULE 15 : SÉCURITÉ &amp; PROTECTION DES DONNÉES</a:t>
+            </a:r>
+          </a:p>
+        </p:txBody>
+      </p:sp>
+      <p:sp>
+        <p:nvSpPr>
+          <p:cNvPr id="3" name="TextBox 2"/>
+          <p:cNvSpPr txBox="1"/>
+          <p:nvPr/>
+        </p:nvSpPr>
+        <p:spPr>
+          <a:xfrm>
+            <a:off x="365760" y="457200"/>
+            <a:ext cx="11430000" cy="548640"/>
+          </a:xfrm>
+          <a:prstGeom prst="rect">
+            <a:avLst/>
+          </a:prstGeom>
+          <a:noFill/>
+        </p:spPr>
+        <p:txBody>
+          <a:bodyPr wrap="none">
+            <a:spAutoFit/>
+          </a:bodyPr>
+          <a:lstStyle/>
+          <a:p>
+            <a:pPr>
+              <a:defRPr sz="2000" b="1">
+                <a:solidFill>
+                  <a:srgbClr val="EE7B11"/>
+                </a:solidFill>
+                <a:latin typeface="Arial"/>
+              </a:defRPr>
+            </a:pPr>
+            <a:r>
+              <a:t>Comprendre les protections de sécurité de l'application</a:t>
+            </a:r>
+          </a:p>
+        </p:txBody>
+      </p:sp>
+      <p:sp>
+        <p:nvSpPr>
+          <p:cNvPr id="4" name="TextBox 3"/>
+          <p:cNvSpPr txBox="1"/>
+          <p:nvPr/>
+        </p:nvSpPr>
+        <p:spPr>
+          <a:xfrm>
+            <a:off x="457200" y="1143000"/>
+            <a:ext cx="11247120" cy="5394960"/>
+          </a:xfrm>
+          <a:prstGeom prst="rect">
+            <a:avLst/>
+          </a:prstGeom>
+          <a:noFill/>
+        </p:spPr>
+        <p:txBody>
+          <a:bodyPr wrap="square">
+            <a:spAutoFit/>
+          </a:bodyPr>
+          <a:lstStyle/>
+          <a:p>
+            <a:pPr>
+              <a:defRPr sz="1200" b="0">
+                <a:solidFill>
+                  <a:srgbClr val="1E293B"/>
+                </a:solidFill>
+                <a:latin typeface="Arial"/>
+              </a:defRPr>
+            </a:pPr>
+            <a:r>
+              <a:t>1. L'application interdit le clic droit sur les pages pour protéger le code source.</a:t>
+            </a:r>
+          </a:p>
+          <a:p>
+            <a:pPr>
+              <a:defRPr sz="1200" b="0">
+                <a:solidFill>
+                  <a:srgbClr val="1E293B"/>
+                </a:solidFill>
+                <a:latin typeface="Arial"/>
+              </a:defRPr>
+            </a:pPr>
+            <a:r>
+              <a:t>2. La touche F12 (outils développeur) est bloquée pour les utilisateurs non-admin.</a:t>
+            </a:r>
+          </a:p>
+          <a:p>
+            <a:pPr>
+              <a:defRPr sz="1200" b="0">
+                <a:solidFill>
+                  <a:srgbClr val="1E293B"/>
+                </a:solidFill>
+                <a:latin typeface="Arial"/>
+              </a:defRPr>
+            </a:pPr>
+            <a:r>
+              <a:t>3. Le raccourci Ctrl+S (sauvegarde page) et Ctrl+U (voir source) sont désactivés.</a:t>
+            </a:r>
+          </a:p>
+          <a:p>
+            <a:pPr>
+              <a:defRPr sz="1200" b="0">
+                <a:solidFill>
+                  <a:srgbClr val="1E293B"/>
+                </a:solidFill>
+                <a:latin typeface="Arial"/>
+              </a:defRPr>
+            </a:pPr>
+            <a:r>
+              <a:t>4. L'application ne fonctionne que sur les domaines autorisés (localhost, vercel.app).</a:t>
+            </a:r>
+          </a:p>
+          <a:p>
+            <a:pPr>
+              <a:defRPr sz="1200" b="0">
+                <a:solidFill>
+                  <a:srgbClr val="1E293B"/>
+                </a:solidFill>
+                <a:latin typeface="Arial"/>
+              </a:defRPr>
+            </a:pPr>
+            <a:r>
+              <a:t>5. Si l'URL n'est pas reconnue, un écran de verrouillage de domaine s'affiche.</a:t>
+            </a:r>
+          </a:p>
+        </p:txBody>
+      </p:sp>
+    </p:spTree>
+  </p:cSld>
+  <p:clrMapOvr>
+    <a:masterClrMapping/>
+  </p:clrMapOvr>
+</p:sld>
+</file>
+
+<file path=ppt/slides/slide37.xml><?xml version="1.0" encoding="utf-8"?>
+<p:sld xmlns:a="http://schemas.openxmlformats.org/drawingml/2006/main" xmlns:p="http://schemas.openxmlformats.org/presentationml/2006/main" xmlns:r="http://schemas.openxmlformats.org/officeDocument/2006/relationships">
+  <p:cSld>
+    <p:bg>
+      <p:bgPr>
+        <a:solidFill>
+          <a:srgbClr val="F8FAFC"/>
+        </a:solidFill>
+        <a:effectLst/>
+      </p:bgPr>
+    </p:bg>
+    <p:spTree>
+      <p:nvGrpSpPr>
+        <p:cNvPr id="1" name=""/>
+        <p:cNvGrpSpPr/>
+        <p:nvPr/>
+      </p:nvGrpSpPr>
+      <p:grpSpPr/>
+      <p:sp>
+        <p:nvSpPr>
+          <p:cNvPr id="2" name="TextBox 1"/>
+          <p:cNvSpPr txBox="1"/>
+          <p:nvPr/>
+        </p:nvSpPr>
+        <p:spPr>
+          <a:xfrm>
+            <a:off x="0" y="0"/>
+            <a:ext cx="12191695" cy="411480"/>
+          </a:xfrm>
+          <a:prstGeom prst="rect">
+            <a:avLst/>
+          </a:prstGeom>
+          <a:solidFill>
+            <a:srgbClr val="0B4998"/>
+          </a:solidFill>
+        </p:spPr>
+        <p:txBody>
+          <a:bodyPr wrap="none">
+            <a:spAutoFit/>
+          </a:bodyPr>
+          <a:lstStyle/>
+          <a:p>
+            <a:pPr>
+              <a:defRPr sz="900" b="1">
+                <a:solidFill>
+                  <a:srgbClr val="FFFFFF"/>
+                </a:solidFill>
+                <a:latin typeface="Arial"/>
+              </a:defRPr>
+            </a:pPr>
+            <a:r>
+              <a:rPr>
+                <a:solidFill>
+                  <a:srgbClr val="FFFFFF"/>
                 </a:solidFill>
               </a:rPr>
-              <a:t>Le système bloque instantanément la planification si le prof ou la salle est déjà occupé(e).</a:t>
-            </a:r>
-          </a:p>
-          <a:p>
-            <a:pPr/>
-            <a:r>
-              <a:rPr b="1" sz="1500">
-                <a:solidFill>
-                  <a:srgbClr val="1E293B"/>
-                </a:solidFill>
-              </a:rPr>
-              <a:t>5. Validation : </a:t>
-            </a:r>
-            <a:r>
-              <a:rPr sz="1400">
-                <a:solidFill>
-                  <a:srgbClr val="1E293B"/>
-                </a:solidFill>
-              </a:rPr>
-              <a:t>Cliquez sur 'Planifier ce cours' pour l'ajouter à la grille hebdomadaire.</a:t>
+              <a:t>MODULE 15 : SÉCURITÉ &amp; PROTECTION DES DONNÉES</a:t>
+            </a:r>
+          </a:p>
+        </p:txBody>
+      </p:sp>
+      <p:sp>
+        <p:nvSpPr>
+          <p:cNvPr id="3" name="TextBox 2"/>
+          <p:cNvSpPr txBox="1"/>
+          <p:nvPr/>
+        </p:nvSpPr>
+        <p:spPr>
+          <a:xfrm>
+            <a:off x="365760" y="457200"/>
+            <a:ext cx="11430000" cy="548640"/>
+          </a:xfrm>
+          <a:prstGeom prst="rect">
+            <a:avLst/>
+          </a:prstGeom>
+          <a:noFill/>
+        </p:spPr>
+        <p:txBody>
+          <a:bodyPr wrap="none">
+            <a:spAutoFit/>
+          </a:bodyPr>
+          <a:lstStyle/>
+          <a:p>
+            <a:pPr>
+              <a:defRPr sz="2000" b="1">
+                <a:solidFill>
+                  <a:srgbClr val="EE7B11"/>
+                </a:solidFill>
+                <a:latin typeface="Arial"/>
+              </a:defRPr>
+            </a:pPr>
+            <a:r>
+              <a:t>Comment gérer les permissions d'accès aux onglets</a:t>
+            </a:r>
+          </a:p>
+        </p:txBody>
+      </p:sp>
+      <p:sp>
+        <p:nvSpPr>
+          <p:cNvPr id="4" name="TextBox 3"/>
+          <p:cNvSpPr txBox="1"/>
+          <p:nvPr/>
+        </p:nvSpPr>
+        <p:spPr>
+          <a:xfrm>
+            <a:off x="457200" y="1143000"/>
+            <a:ext cx="11247120" cy="5394960"/>
+          </a:xfrm>
+          <a:prstGeom prst="rect">
+            <a:avLst/>
+          </a:prstGeom>
+          <a:noFill/>
+        </p:spPr>
+        <p:txBody>
+          <a:bodyPr wrap="square">
+            <a:spAutoFit/>
+          </a:bodyPr>
+          <a:lstStyle/>
+          <a:p>
+            <a:pPr>
+              <a:defRPr sz="1200" b="1">
+                <a:solidFill>
+                  <a:srgbClr val="1E293B"/>
+                </a:solidFill>
+                <a:latin typeface="Arial"/>
+              </a:defRPr>
+            </a:pPr>
+            <a:r>
+              <a:t>1. Connectez-vous en tant que Directeur ou Super Admin.</a:t>
+            </a:r>
+          </a:p>
+          <a:p>
+            <a:pPr>
+              <a:defRPr sz="1200" b="1">
+                <a:solidFill>
+                  <a:srgbClr val="1E293B"/>
+                </a:solidFill>
+                <a:latin typeface="Arial"/>
+              </a:defRPr>
+            </a:pPr>
+            <a:r>
+              <a:t>2. Allez dans l'onglet Administration.</a:t>
+            </a:r>
+          </a:p>
+          <a:p>
+            <a:pPr>
+              <a:defRPr sz="1200" b="0">
+                <a:solidFill>
+                  <a:srgbClr val="1E293B"/>
+                </a:solidFill>
+                <a:latin typeface="Arial"/>
+              </a:defRPr>
+            </a:pPr>
+            <a:r>
+              <a:t>3. Pour chaque utilisateur, cochez ou décochez les onglets auxquels il a accès dans la colonne 'Pages autorisées'.</a:t>
+            </a:r>
+          </a:p>
+          <a:p>
+            <a:pPr>
+              <a:defRPr sz="1200" b="1">
+                <a:solidFill>
+                  <a:srgbClr val="1E293B"/>
+                </a:solidFill>
+                <a:latin typeface="Arial"/>
+              </a:defRPr>
+            </a:pPr>
+            <a:r>
+              <a:t>4. Les modifications sont instantanées.</a:t>
+            </a:r>
+          </a:p>
+          <a:p>
+            <a:pPr>
+              <a:defRPr sz="1200" b="0">
+                <a:solidFill>
+                  <a:srgbClr val="1E293B"/>
+                </a:solidFill>
+                <a:latin typeface="Arial"/>
+              </a:defRPr>
+            </a:pPr>
+            <a:r>
+              <a:t>5. Un utilisateur sans permission sur un onglet ne verra pas cet onglet dans son menu de navigation.</a:t>
             </a:r>
           </a:p>
         </p:txBody>
@@ -3547,30 +9382,37 @@
         </p:nvSpPr>
         <p:spPr>
           <a:xfrm>
-            <a:off x="457200" y="365760"/>
-            <a:ext cx="11274552" cy="731520"/>
-          </a:xfrm>
-          <a:prstGeom prst="rect">
-            <a:avLst/>
-          </a:prstGeom>
-          <a:noFill/>
-        </p:spPr>
-        <p:txBody>
-          <a:bodyPr wrap="square">
+            <a:off x="0" y="0"/>
+            <a:ext cx="12191695" cy="411480"/>
+          </a:xfrm>
+          <a:prstGeom prst="rect">
+            <a:avLst/>
+          </a:prstGeom>
+          <a:solidFill>
+            <a:srgbClr val="0B4998"/>
+          </a:solidFill>
+        </p:spPr>
+        <p:txBody>
+          <a:bodyPr wrap="none">
             <a:spAutoFit/>
           </a:bodyPr>
           <a:lstStyle/>
           <a:p>
             <a:pPr>
-              <a:defRPr sz="2400" b="1">
-                <a:solidFill>
-                  <a:srgbClr val="0B4998"/>
-                </a:solidFill>
-                <a:latin typeface="Arial"/>
-              </a:defRPr>
-            </a:pPr>
-            <a:r>
-              <a:t>Tutoriel 3 : Saisie des notes (Enseignants) &amp; Verrouillage</a:t>
+              <a:defRPr sz="900" b="1">
+                <a:solidFill>
+                  <a:srgbClr val="FFFFFF"/>
+                </a:solidFill>
+                <a:latin typeface="Arial"/>
+              </a:defRPr>
+            </a:pPr>
+            <a:r>
+              <a:rPr>
+                <a:solidFill>
+                  <a:srgbClr val="FFFFFF"/>
+                </a:solidFill>
+              </a:rPr>
+              <a:t>MODULE 2 : ADMINISTRATION &amp; GESTION DES UTILISATEURS</a:t>
             </a:r>
           </a:p>
         </p:txBody>
@@ -3583,8 +9425,44 @@
         </p:nvSpPr>
         <p:spPr>
           <a:xfrm>
-            <a:off x="457200" y="1097280"/>
-            <a:ext cx="11274552" cy="5303520"/>
+            <a:off x="365760" y="457200"/>
+            <a:ext cx="11430000" cy="548640"/>
+          </a:xfrm>
+          <a:prstGeom prst="rect">
+            <a:avLst/>
+          </a:prstGeom>
+          <a:noFill/>
+        </p:spPr>
+        <p:txBody>
+          <a:bodyPr wrap="none">
+            <a:spAutoFit/>
+          </a:bodyPr>
+          <a:lstStyle/>
+          <a:p>
+            <a:pPr>
+              <a:defRPr sz="2000" b="1">
+                <a:solidFill>
+                  <a:srgbClr val="EE7B11"/>
+                </a:solidFill>
+                <a:latin typeface="Arial"/>
+              </a:defRPr>
+            </a:pPr>
+            <a:r>
+              <a:t>Comment créer un nouveau compte utilisateur</a:t>
+            </a:r>
+          </a:p>
+        </p:txBody>
+      </p:sp>
+      <p:sp>
+        <p:nvSpPr>
+          <p:cNvPr id="4" name="TextBox 3"/>
+          <p:cNvSpPr txBox="1"/>
+          <p:nvPr/>
+        </p:nvSpPr>
+        <p:spPr>
+          <a:xfrm>
+            <a:off x="457200" y="1143000"/>
+            <a:ext cx="11247120" cy="5394960"/>
           </a:xfrm>
           <a:prstGeom prst="rect">
             <a:avLst/>
@@ -3596,100 +9474,108 @@
             <a:spAutoFit/>
           </a:bodyPr>
           <a:lstStyle/>
-          <a:p/>
-          <a:p>
-            <a:pPr/>
-            <a:r>
-              <a:rPr b="1" sz="1500">
-                <a:solidFill>
-                  <a:srgbClr val="1E293B"/>
-                </a:solidFill>
-              </a:rPr>
-              <a:t>1. Connexion Professeur : </a:t>
-            </a:r>
-            <a:r>
-              <a:rPr sz="1400">
-                <a:solidFill>
-                  <a:srgbClr val="1E293B"/>
-                </a:solidFill>
-              </a:rPr>
-              <a:t>Connectez-vous au portail avec vos identifiants d'enseignant.</a:t>
-            </a:r>
-          </a:p>
-          <a:p>
-            <a:pPr/>
-            <a:r>
-              <a:rPr b="1" sz="1500">
-                <a:solidFill>
-                  <a:srgbClr val="1E293B"/>
-                </a:solidFill>
-              </a:rPr>
-              <a:t>2. Sélectionner la classe : </a:t>
-            </a:r>
-            <a:r>
-              <a:rPr sz="1400">
-                <a:solidFill>
-                  <a:srgbClr val="1E293B"/>
-                </a:solidFill>
-              </a:rPr>
-              <a:t>Allez dans 'Espace Enseignant' &gt; 'Saisie des Moyennes', puis choisissez la Classe et la Matière.</a:t>
-            </a:r>
-          </a:p>
-          <a:p>
-            <a:pPr/>
-            <a:r>
-              <a:rPr b="1" sz="1500">
-                <a:solidFill>
-                  <a:srgbClr val="1E293B"/>
-                </a:solidFill>
-              </a:rPr>
-              <a:t>3. Saisir les notes : </a:t>
-            </a:r>
-            <a:r>
-              <a:rPr sz="1400">
-                <a:solidFill>
-                  <a:srgbClr val="1E293B"/>
-                </a:solidFill>
-              </a:rPr>
-              <a:t>Entrez la note de chaque élève de la liste (valeur sur 20) et cliquez sur 'Enregistrer'.</a:t>
-            </a:r>
-          </a:p>
-          <a:p>
-            <a:pPr/>
-            <a:r>
-              <a:rPr b="1" sz="1500">
-                <a:solidFill>
-                  <a:srgbClr val="1E293B"/>
-                </a:solidFill>
-              </a:rPr>
-              <a:t>4. Figer définitivement : </a:t>
-            </a:r>
-            <a:r>
-              <a:rPr sz="1400">
-                <a:solidFill>
-                  <a:srgbClr val="1E293B"/>
-                </a:solidFill>
-              </a:rPr>
-              <a:t>Cliquez sur le bouton vert '🔒 Valider &amp; Figer' pour verrouiller la saisie.</a:t>
-            </a:r>
-          </a:p>
-          <a:p>
-            <a:pPr/>
-            <a:r>
-              <a:rPr b="1" sz="1500">
-                <a:solidFill>
-                  <a:srgbClr val="1E293B"/>
-                </a:solidFill>
-              </a:rPr>
-              <a:t>5. Sécurité : </a:t>
-            </a:r>
-            <a:r>
-              <a:rPr sz="1400">
-                <a:solidFill>
-                  <a:srgbClr val="1E293B"/>
-                </a:solidFill>
-              </a:rPr>
-              <a:t>Une fois figée, la note affiche le badge '🔒 Figé' et le professeur ne peut plus la modifier.</a:t>
+          <a:p>
+            <a:pPr>
+              <a:defRPr sz="1200" b="1">
+                <a:solidFill>
+                  <a:srgbClr val="1E293B"/>
+                </a:solidFill>
+                <a:latin typeface="Arial"/>
+              </a:defRPr>
+            </a:pPr>
+            <a:r>
+              <a:t>1. Connectez-vous avec un compte Directeur ou Super Admin.</a:t>
+            </a:r>
+          </a:p>
+          <a:p>
+            <a:pPr>
+              <a:defRPr sz="1200" b="0">
+                <a:solidFill>
+                  <a:srgbClr val="1E293B"/>
+                </a:solidFill>
+                <a:latin typeface="Arial"/>
+              </a:defRPr>
+            </a:pPr>
+            <a:r>
+              <a:t>2. Cliquez sur l'onglet 'Administration' dans la barre de navigation.</a:t>
+            </a:r>
+          </a:p>
+          <a:p>
+            <a:pPr>
+              <a:defRPr sz="1200" b="1">
+                <a:solidFill>
+                  <a:srgbClr val="1E293B"/>
+                </a:solidFill>
+                <a:latin typeface="Arial"/>
+              </a:defRPr>
+            </a:pPr>
+            <a:r>
+              <a:t>3. Allez à la section 'Créer un nouveau compte utilisateur'.</a:t>
+            </a:r>
+          </a:p>
+          <a:p>
+            <a:pPr>
+              <a:defRPr sz="1200" b="1">
+                <a:solidFill>
+                  <a:srgbClr val="1E293B"/>
+                </a:solidFill>
+                <a:latin typeface="Arial"/>
+              </a:defRPr>
+            </a:pPr>
+            <a:r>
+              <a:t>4. Remplissez : Nom complet, Identifiant/Email, Mot de passe.</a:t>
+            </a:r>
+          </a:p>
+          <a:p>
+            <a:pPr>
+              <a:defRPr sz="1200" b="0">
+                <a:solidFill>
+                  <a:srgbClr val="1E293B"/>
+                </a:solidFill>
+                <a:latin typeface="Arial"/>
+              </a:defRPr>
+            </a:pPr>
+            <a:r>
+              <a:t>5. Sélectionnez le Rôle : Super Admin, Directeur, Informaticien ou Professeur.</a:t>
+            </a:r>
+          </a:p>
+          <a:p>
+            <a:pPr>
+              <a:defRPr sz="1200" b="0">
+                <a:solidFill>
+                  <a:srgbClr val="1E293B"/>
+                </a:solidFill>
+                <a:latin typeface="Arial"/>
+              </a:defRPr>
+            </a:pPr>
+            <a:r>
+              <a:t>6. Si c'est un professeur, associez-le à un enseignant de la liste via 'Professeur lié'.</a:t>
+            </a:r>
+          </a:p>
+          <a:p>
+            <a:pPr>
+              <a:defRPr sz="1200" b="1">
+                <a:solidFill>
+                  <a:srgbClr val="1E293B"/>
+                </a:solidFill>
+                <a:latin typeface="Arial"/>
+              </a:defRPr>
+            </a:pPr>
+            <a:r>
+              <a:t>7. Cliquez sur le bouton orange 'Créer le compte utilisateur'.</a:t>
+            </a:r>
+          </a:p>
+          <a:p>
+            <a:pPr>
+              <a:defRPr sz="1200" b="1">
+                <a:solidFill>
+                  <a:srgbClr val="1E293B"/>
+                </a:solidFill>
+                <a:latin typeface="Arial"/>
+              </a:defRPr>
+            </a:pPr>
+            <a:r>
+              <a:t>8. Le compte apparaît dans la liste des comptes ci-dessous.</a:t>
             </a:r>
           </a:p>
         </p:txBody>
@@ -3728,30 +9614,37 @@
         </p:nvSpPr>
         <p:spPr>
           <a:xfrm>
-            <a:off x="457200" y="365760"/>
-            <a:ext cx="11274552" cy="731520"/>
-          </a:xfrm>
-          <a:prstGeom prst="rect">
-            <a:avLst/>
-          </a:prstGeom>
-          <a:noFill/>
-        </p:spPr>
-        <p:txBody>
-          <a:bodyPr wrap="square">
+            <a:off x="0" y="0"/>
+            <a:ext cx="12191695" cy="411480"/>
+          </a:xfrm>
+          <a:prstGeom prst="rect">
+            <a:avLst/>
+          </a:prstGeom>
+          <a:solidFill>
+            <a:srgbClr val="0B4998"/>
+          </a:solidFill>
+        </p:spPr>
+        <p:txBody>
+          <a:bodyPr wrap="none">
             <a:spAutoFit/>
           </a:bodyPr>
           <a:lstStyle/>
           <a:p>
             <a:pPr>
-              <a:defRPr sz="2400" b="1">
-                <a:solidFill>
-                  <a:srgbClr val="0B4998"/>
-                </a:solidFill>
-                <a:latin typeface="Arial"/>
-              </a:defRPr>
-            </a:pPr>
-            <a:r>
-              <a:t>Tutoriel 4 : Déverrouiller une note (Direction)</a:t>
+              <a:defRPr sz="900" b="1">
+                <a:solidFill>
+                  <a:srgbClr val="FFFFFF"/>
+                </a:solidFill>
+                <a:latin typeface="Arial"/>
+              </a:defRPr>
+            </a:pPr>
+            <a:r>
+              <a:rPr>
+                <a:solidFill>
+                  <a:srgbClr val="FFFFFF"/>
+                </a:solidFill>
+              </a:rPr>
+              <a:t>MODULE 2 : ADMINISTRATION &amp; GESTION DES UTILISATEURS</a:t>
             </a:r>
           </a:p>
         </p:txBody>
@@ -3764,8 +9657,44 @@
         </p:nvSpPr>
         <p:spPr>
           <a:xfrm>
-            <a:off x="457200" y="1097280"/>
-            <a:ext cx="11274552" cy="5303520"/>
+            <a:off x="365760" y="457200"/>
+            <a:ext cx="11430000" cy="548640"/>
+          </a:xfrm>
+          <a:prstGeom prst="rect">
+            <a:avLst/>
+          </a:prstGeom>
+          <a:noFill/>
+        </p:spPr>
+        <p:txBody>
+          <a:bodyPr wrap="none">
+            <a:spAutoFit/>
+          </a:bodyPr>
+          <a:lstStyle/>
+          <a:p>
+            <a:pPr>
+              <a:defRPr sz="2000" b="1">
+                <a:solidFill>
+                  <a:srgbClr val="EE7B11"/>
+                </a:solidFill>
+                <a:latin typeface="Arial"/>
+              </a:defRPr>
+            </a:pPr>
+            <a:r>
+              <a:t>Comment attribuer la permission 'Saisie des Moyennes' à un professeur</a:t>
+            </a:r>
+          </a:p>
+        </p:txBody>
+      </p:sp>
+      <p:sp>
+        <p:nvSpPr>
+          <p:cNvPr id="4" name="TextBox 3"/>
+          <p:cNvSpPr txBox="1"/>
+          <p:nvPr/>
+        </p:nvSpPr>
+        <p:spPr>
+          <a:xfrm>
+            <a:off x="457200" y="1143000"/>
+            <a:ext cx="11247120" cy="5394960"/>
           </a:xfrm>
           <a:prstGeom prst="rect">
             <a:avLst/>
@@ -3777,81 +9706,69 @@
             <a:spAutoFit/>
           </a:bodyPr>
           <a:lstStyle/>
-          <a:p/>
-          <a:p>
-            <a:pPr/>
-            <a:r>
-              <a:rPr b="1" sz="1500">
-                <a:solidFill>
-                  <a:srgbClr val="1E293B"/>
-                </a:solidFill>
-              </a:rPr>
-              <a:t>1. Accéder au portail prof : </a:t>
-            </a:r>
-            <a:r>
-              <a:rPr sz="1400">
-                <a:solidFill>
-                  <a:srgbClr val="1E293B"/>
-                </a:solidFill>
-              </a:rPr>
-              <a:t>Connectez-vous en tant que Directeur ou Super Admin et allez dans le portail enseignant.</a:t>
-            </a:r>
-          </a:p>
-          <a:p>
-            <a:pPr/>
-            <a:r>
-              <a:rPr b="1" sz="1500">
-                <a:solidFill>
-                  <a:srgbClr val="1E293B"/>
-                </a:solidFill>
-              </a:rPr>
-              <a:t>2. Trouver la note figée : </a:t>
-            </a:r>
-            <a:r>
-              <a:rPr sz="1400">
-                <a:solidFill>
-                  <a:srgbClr val="1E293B"/>
-                </a:solidFill>
-              </a:rPr>
-              <a:t>Sélectionnez la classe et la matière concernée dans le filtre du portail.</a:t>
-            </a:r>
-          </a:p>
-          <a:p>
-            <a:pPr/>
-            <a:r>
-              <a:rPr b="1" sz="1500">
-                <a:solidFill>
-                  <a:srgbClr val="1E293B"/>
-                </a:solidFill>
-              </a:rPr>
-              <a:t>3. Déverrouiller : </a:t>
-            </a:r>
-            <a:r>
-              <a:rPr sz="1400">
-                <a:solidFill>
-                  <a:srgbClr val="1E293B"/>
-                </a:solidFill>
-              </a:rPr>
-              <a:t>Cliquez sur le lien orange '🔓 Déverr.' à côté de la note verrouillée.</a:t>
-            </a:r>
-          </a:p>
-          <a:p>
-            <a:pPr/>
-            <a:r>
-              <a:rPr b="1" sz="1500">
-                <a:solidFill>
-                  <a:srgbClr val="1E293B"/>
-                </a:solidFill>
-              </a:rPr>
-              <a:t>4. Confirmation : </a:t>
-            </a:r>
-            <a:r>
-              <a:rPr sz="1400">
-                <a:solidFill>
-                  <a:srgbClr val="1E293B"/>
-                </a:solidFill>
-              </a:rPr>
-              <a:t>Confirmez l'alerte du navigateur. Le badge '🔒 Figé' disparaît et l'enseignant peut à nouveau corriger.</a:t>
+          <a:p>
+            <a:pPr>
+              <a:defRPr sz="1200" b="0">
+                <a:solidFill>
+                  <a:srgbClr val="1E293B"/>
+                </a:solidFill>
+                <a:latin typeface="Arial"/>
+              </a:defRPr>
+            </a:pPr>
+            <a:r>
+              <a:t>1. Dans l'onglet Administration, repérez la table 'Comptes utilisateurs enregistrés'.</a:t>
+            </a:r>
+          </a:p>
+          <a:p>
+            <a:pPr>
+              <a:defRPr sz="1200" b="1">
+                <a:solidFill>
+                  <a:srgbClr val="1E293B"/>
+                </a:solidFill>
+                <a:latin typeface="Arial"/>
+              </a:defRPr>
+            </a:pPr>
+            <a:r>
+              <a:t>2. Localisez le compte du professeur concerné dans la liste.</a:t>
+            </a:r>
+          </a:p>
+          <a:p>
+            <a:pPr>
+              <a:defRPr sz="1200" b="0">
+                <a:solidFill>
+                  <a:srgbClr val="1E293B"/>
+                </a:solidFill>
+                <a:latin typeface="Arial"/>
+              </a:defRPr>
+            </a:pPr>
+            <a:r>
+              <a:t>3. Dans la colonne 'Permissions', cochez la case 'Saisie des Moyennes'.</a:t>
+            </a:r>
+          </a:p>
+          <a:p>
+            <a:pPr>
+              <a:defRPr sz="1200" b="0">
+                <a:solidFill>
+                  <a:srgbClr val="1E293B"/>
+                </a:solidFill>
+                <a:latin typeface="Arial"/>
+              </a:defRPr>
+            </a:pPr>
+            <a:r>
+              <a:t>4. La permission est activée instantanément, sans déconnexion requise.</a:t>
+            </a:r>
+          </a:p>
+          <a:p>
+            <a:pPr>
+              <a:defRPr sz="1200" b="1">
+                <a:solidFill>
+                  <a:srgbClr val="1E293B"/>
+                </a:solidFill>
+                <a:latin typeface="Arial"/>
+              </a:defRPr>
+            </a:pPr>
+            <a:r>
+              <a:t>5. Pour révoquer le droit, décochez la même case.</a:t>
             </a:r>
           </a:p>
         </p:txBody>
@@ -3890,30 +9807,37 @@
         </p:nvSpPr>
         <p:spPr>
           <a:xfrm>
-            <a:off x="457200" y="365760"/>
-            <a:ext cx="11274552" cy="731520"/>
-          </a:xfrm>
-          <a:prstGeom prst="rect">
-            <a:avLst/>
-          </a:prstGeom>
-          <a:noFill/>
-        </p:spPr>
-        <p:txBody>
-          <a:bodyPr wrap="square">
+            <a:off x="0" y="0"/>
+            <a:ext cx="12191695" cy="411480"/>
+          </a:xfrm>
+          <a:prstGeom prst="rect">
+            <a:avLst/>
+          </a:prstGeom>
+          <a:solidFill>
+            <a:srgbClr val="0B4998"/>
+          </a:solidFill>
+        </p:spPr>
+        <p:txBody>
+          <a:bodyPr wrap="none">
             <a:spAutoFit/>
           </a:bodyPr>
           <a:lstStyle/>
           <a:p>
             <a:pPr>
-              <a:defRPr sz="2400" b="1">
-                <a:solidFill>
-                  <a:srgbClr val="0B4998"/>
-                </a:solidFill>
-                <a:latin typeface="Arial"/>
-              </a:defRPr>
-            </a:pPr>
-            <a:r>
-              <a:t>Tutoriel 5 : Valider le Procès-Verbal (PV)</a:t>
+              <a:defRPr sz="900" b="1">
+                <a:solidFill>
+                  <a:srgbClr val="FFFFFF"/>
+                </a:solidFill>
+                <a:latin typeface="Arial"/>
+              </a:defRPr>
+            </a:pPr>
+            <a:r>
+              <a:rPr>
+                <a:solidFill>
+                  <a:srgbClr val="FFFFFF"/>
+                </a:solidFill>
+              </a:rPr>
+              <a:t>MODULE 2 : ADMINISTRATION &amp; GESTION DES UTILISATEURS</a:t>
             </a:r>
           </a:p>
         </p:txBody>
@@ -3926,8 +9850,44 @@
         </p:nvSpPr>
         <p:spPr>
           <a:xfrm>
-            <a:off x="457200" y="1097280"/>
-            <a:ext cx="11274552" cy="5303520"/>
+            <a:off x="365760" y="457200"/>
+            <a:ext cx="11430000" cy="548640"/>
+          </a:xfrm>
+          <a:prstGeom prst="rect">
+            <a:avLst/>
+          </a:prstGeom>
+          <a:noFill/>
+        </p:spPr>
+        <p:txBody>
+          <a:bodyPr wrap="none">
+            <a:spAutoFit/>
+          </a:bodyPr>
+          <a:lstStyle/>
+          <a:p>
+            <a:pPr>
+              <a:defRPr sz="2000" b="1">
+                <a:solidFill>
+                  <a:srgbClr val="EE7B11"/>
+                </a:solidFill>
+                <a:latin typeface="Arial"/>
+              </a:defRPr>
+            </a:pPr>
+            <a:r>
+              <a:t>Comment modifier ou supprimer un compte utilisateur</a:t>
+            </a:r>
+          </a:p>
+        </p:txBody>
+      </p:sp>
+      <p:sp>
+        <p:nvSpPr>
+          <p:cNvPr id="4" name="TextBox 3"/>
+          <p:cNvSpPr txBox="1"/>
+          <p:nvPr/>
+        </p:nvSpPr>
+        <p:spPr>
+          <a:xfrm>
+            <a:off x="457200" y="1143000"/>
+            <a:ext cx="11247120" cy="5394960"/>
           </a:xfrm>
           <a:prstGeom prst="rect">
             <a:avLst/>
@@ -3939,81 +9899,69 @@
             <a:spAutoFit/>
           </a:bodyPr>
           <a:lstStyle/>
-          <a:p/>
-          <a:p>
-            <a:pPr/>
-            <a:r>
-              <a:rPr b="1" sz="1500">
-                <a:solidFill>
-                  <a:srgbClr val="1E293B"/>
-                </a:solidFill>
-              </a:rPr>
-              <a:t>1. Accéder à l'onglet : </a:t>
-            </a:r>
-            <a:r>
-              <a:rPr sz="1400">
-                <a:solidFill>
-                  <a:srgbClr val="1E293B"/>
-                </a:solidFill>
-              </a:rPr>
-              <a:t>Allez sur 'Évaluations &amp; Examens' &gt; sous-onglet 'Procès-Verbaux &amp; Validation'.</a:t>
-            </a:r>
-          </a:p>
-          <a:p>
-            <a:pPr/>
-            <a:r>
-              <a:rPr b="1" sz="1500">
-                <a:solidFill>
-                  <a:srgbClr val="1E293B"/>
-                </a:solidFill>
-              </a:rPr>
-              <a:t>2. Vérifier la classe : </a:t>
-            </a:r>
-            <a:r>
-              <a:rPr sz="1400">
-                <a:solidFill>
-                  <a:srgbClr val="1E293B"/>
-                </a:solidFill>
-              </a:rPr>
-              <a:t>Sélectionnez la classe et examinez les moyennes affichées sur l'écran (Natte de vérification).</a:t>
-            </a:r>
-          </a:p>
-          <a:p>
-            <a:pPr/>
-            <a:r>
-              <a:rPr b="1" sz="1500">
-                <a:solidFill>
-                  <a:srgbClr val="1E293B"/>
-                </a:solidFill>
-              </a:rPr>
-              <a:t>3. Lancer la validation : </a:t>
-            </a:r>
-            <a:r>
-              <a:rPr sz="1400">
-                <a:solidFill>
-                  <a:srgbClr val="1E293B"/>
-                </a:solidFill>
-              </a:rPr>
-              <a:t>Cliquez sur 'Valider le PV pour cette Classe' pour verrouiller le trimestre.</a:t>
-            </a:r>
-          </a:p>
-          <a:p>
-            <a:pPr/>
-            <a:r>
-              <a:rPr b="1" sz="1500">
-                <a:solidFill>
-                  <a:srgbClr val="1E293B"/>
-                </a:solidFill>
-              </a:rPr>
-              <a:t>4. Effet immédiat : </a:t>
-            </a:r>
-            <a:r>
-              <a:rPr sz="1400">
-                <a:solidFill>
-                  <a:srgbClr val="1E293B"/>
-                </a:solidFill>
-              </a:rPr>
-              <a:t>Les bulletins scolaires de cette classe deviennent instantanément disponibles pour l'impression.</a:t>
+          <a:p>
+            <a:pPr>
+              <a:defRPr sz="1200" b="0">
+                <a:solidFill>
+                  <a:srgbClr val="1E293B"/>
+                </a:solidFill>
+                <a:latin typeface="Arial"/>
+              </a:defRPr>
+            </a:pPr>
+            <a:r>
+              <a:t>1. Dans l'onglet Administration, repérez le compte dans la liste.</a:t>
+            </a:r>
+          </a:p>
+          <a:p>
+            <a:pPr>
+              <a:defRPr sz="1200" b="0">
+                <a:solidFill>
+                  <a:srgbClr val="1E293B"/>
+                </a:solidFill>
+                <a:latin typeface="Arial"/>
+              </a:defRPr>
+            </a:pPr>
+            <a:r>
+              <a:t>2. Pour modifier : cliquez sur le bouton Crayon (Modifier) à droite du compte.</a:t>
+            </a:r>
+          </a:p>
+          <a:p>
+            <a:pPr>
+              <a:defRPr sz="1200" b="0">
+                <a:solidFill>
+                  <a:srgbClr val="1E293B"/>
+                </a:solidFill>
+                <a:latin typeface="Arial"/>
+              </a:defRPr>
+            </a:pPr>
+            <a:r>
+              <a:t>3. Mettez à jour les champs souhaités (nom, rôle, mot de passe).</a:t>
+            </a:r>
+          </a:p>
+          <a:p>
+            <a:pPr>
+              <a:defRPr sz="1200" b="1">
+                <a:solidFill>
+                  <a:srgbClr val="1E293B"/>
+                </a:solidFill>
+                <a:latin typeface="Arial"/>
+              </a:defRPr>
+            </a:pPr>
+            <a:r>
+              <a:t>4. Cliquez sur 'Enregistrer les modifications'.</a:t>
+            </a:r>
+          </a:p>
+          <a:p>
+            <a:pPr>
+              <a:defRPr sz="1200" b="0">
+                <a:solidFill>
+                  <a:srgbClr val="1E293B"/>
+                </a:solidFill>
+                <a:latin typeface="Arial"/>
+              </a:defRPr>
+            </a:pPr>
+            <a:r>
+              <a:t>5. Pour supprimer : cliquez sur le bouton rouge Corbeille et confirmez la suppression.</a:t>
             </a:r>
           </a:p>
         </p:txBody>
@@ -4052,30 +10000,37 @@
         </p:nvSpPr>
         <p:spPr>
           <a:xfrm>
-            <a:off x="457200" y="365760"/>
-            <a:ext cx="11274552" cy="731520"/>
-          </a:xfrm>
-          <a:prstGeom prst="rect">
-            <a:avLst/>
-          </a:prstGeom>
-          <a:noFill/>
-        </p:spPr>
-        <p:txBody>
-          <a:bodyPr wrap="square">
+            <a:off x="0" y="0"/>
+            <a:ext cx="12191695" cy="411480"/>
+          </a:xfrm>
+          <a:prstGeom prst="rect">
+            <a:avLst/>
+          </a:prstGeom>
+          <a:solidFill>
+            <a:srgbClr val="0B4998"/>
+          </a:solidFill>
+        </p:spPr>
+        <p:txBody>
+          <a:bodyPr wrap="none">
             <a:spAutoFit/>
           </a:bodyPr>
           <a:lstStyle/>
           <a:p>
             <a:pPr>
-              <a:defRPr sz="2400" b="1">
-                <a:solidFill>
-                  <a:srgbClr val="0B4998"/>
-                </a:solidFill>
-                <a:latin typeface="Arial"/>
-              </a:defRPr>
-            </a:pPr>
-            <a:r>
-              <a:t>Tutoriel 6 : Enregistrer un paiement &amp; générer le reçu</a:t>
+              <a:defRPr sz="900" b="1">
+                <a:solidFill>
+                  <a:srgbClr val="FFFFFF"/>
+                </a:solidFill>
+                <a:latin typeface="Arial"/>
+              </a:defRPr>
+            </a:pPr>
+            <a:r>
+              <a:rPr>
+                <a:solidFill>
+                  <a:srgbClr val="FFFFFF"/>
+                </a:solidFill>
+              </a:rPr>
+              <a:t>MODULE 3 : CONFIGURATION DE L'ÉTABLISSEMENT</a:t>
             </a:r>
           </a:p>
         </p:txBody>
@@ -4088,8 +10043,44 @@
         </p:nvSpPr>
         <p:spPr>
           <a:xfrm>
-            <a:off x="457200" y="1097280"/>
-            <a:ext cx="11274552" cy="5303520"/>
+            <a:off x="365760" y="457200"/>
+            <a:ext cx="11430000" cy="548640"/>
+          </a:xfrm>
+          <a:prstGeom prst="rect">
+            <a:avLst/>
+          </a:prstGeom>
+          <a:noFill/>
+        </p:spPr>
+        <p:txBody>
+          <a:bodyPr wrap="none">
+            <a:spAutoFit/>
+          </a:bodyPr>
+          <a:lstStyle/>
+          <a:p>
+            <a:pPr>
+              <a:defRPr sz="2000" b="1">
+                <a:solidFill>
+                  <a:srgbClr val="EE7B11"/>
+                </a:solidFill>
+                <a:latin typeface="Arial"/>
+              </a:defRPr>
+            </a:pPr>
+            <a:r>
+              <a:t>Comment configurer les informations de l'école</a:t>
+            </a:r>
+          </a:p>
+        </p:txBody>
+      </p:sp>
+      <p:sp>
+        <p:nvSpPr>
+          <p:cNvPr id="4" name="TextBox 3"/>
+          <p:cNvSpPr txBox="1"/>
+          <p:nvPr/>
+        </p:nvSpPr>
+        <p:spPr>
+          <a:xfrm>
+            <a:off x="457200" y="1143000"/>
+            <a:ext cx="11247120" cy="5394960"/>
           </a:xfrm>
           <a:prstGeom prst="rect">
             <a:avLst/>
@@ -4101,100 +10092,546 @@
             <a:spAutoFit/>
           </a:bodyPr>
           <a:lstStyle/>
-          <a:p/>
-          <a:p>
-            <a:pPr/>
-            <a:r>
-              <a:rPr b="1" sz="1500">
-                <a:solidFill>
-                  <a:srgbClr val="1E293B"/>
+          <a:p>
+            <a:pPr>
+              <a:defRPr sz="1200" b="0">
+                <a:solidFill>
+                  <a:srgbClr val="1E293B"/>
+                </a:solidFill>
+                <a:latin typeface="Arial"/>
+              </a:defRPr>
+            </a:pPr>
+            <a:r>
+              <a:t>1. Accédez à l'onglet 'Paramètres' (icône engrenage) dans la navigation.</a:t>
+            </a:r>
+          </a:p>
+          <a:p>
+            <a:pPr>
+              <a:defRPr sz="1200" b="0">
+                <a:solidFill>
+                  <a:srgbClr val="1E293B"/>
+                </a:solidFill>
+                <a:latin typeface="Arial"/>
+              </a:defRPr>
+            </a:pPr>
+            <a:r>
+              <a:t>2. Dans la section 'Informations de l'établissement', modifiez :</a:t>
+            </a:r>
+          </a:p>
+          <a:p>
+            <a:pPr>
+              <a:defRPr sz="1100" b="0">
+                <a:solidFill>
+                  <a:srgbClr val="505050"/>
+                </a:solidFill>
+                <a:latin typeface="Arial"/>
+              </a:defRPr>
+            </a:pPr>
+            <a:r>
+              <a:t>    - Nom officiel de l'école</a:t>
+            </a:r>
+          </a:p>
+          <a:p>
+            <a:pPr>
+              <a:defRPr sz="1100" b="0">
+                <a:solidFill>
+                  <a:srgbClr val="505050"/>
+                </a:solidFill>
+                <a:latin typeface="Arial"/>
+              </a:defRPr>
+            </a:pPr>
+            <a:r>
+              <a:t>    - Sous-titre ou devise</a:t>
+            </a:r>
+          </a:p>
+          <a:p>
+            <a:pPr>
+              <a:defRPr sz="1100" b="0">
+                <a:solidFill>
+                  <a:srgbClr val="505050"/>
+                </a:solidFill>
+                <a:latin typeface="Arial"/>
+              </a:defRPr>
+            </a:pPr>
+            <a:r>
+              <a:t>    - Adresse, Téléphone, Email de contact</a:t>
+            </a:r>
+          </a:p>
+          <a:p>
+            <a:pPr>
+              <a:defRPr sz="1100" b="0">
+                <a:solidFill>
+                  <a:srgbClr val="505050"/>
+                </a:solidFill>
+                <a:latin typeface="Arial"/>
+              </a:defRPr>
+            </a:pPr>
+            <a:r>
+              <a:t>    - Nom du Directeur (imprimé sur les bulletins)</a:t>
+            </a:r>
+          </a:p>
+          <a:p>
+            <a:pPr>
+              <a:defRPr sz="1100" b="0">
+                <a:solidFill>
+                  <a:srgbClr val="505050"/>
+                </a:solidFill>
+                <a:latin typeface="Arial"/>
+              </a:defRPr>
+            </a:pPr>
+            <a:r>
+              <a:t>    - Année scolaire en cours (ex: 2025-2026)</a:t>
+            </a:r>
+          </a:p>
+          <a:p>
+            <a:pPr>
+              <a:defRPr sz="1200" b="1">
+                <a:solidFill>
+                  <a:srgbClr val="1E293B"/>
+                </a:solidFill>
+                <a:latin typeface="Arial"/>
+              </a:defRPr>
+            </a:pPr>
+            <a:r>
+              <a:t>8. Cliquez sur 'Enregistrer les paramètres' pour sauvegarder.</a:t>
+            </a:r>
+          </a:p>
+          <a:p>
+            <a:pPr>
+              <a:defRPr sz="1200" b="0">
+                <a:solidFill>
+                  <a:srgbClr val="1E293B"/>
+                </a:solidFill>
+                <a:latin typeface="Arial"/>
+              </a:defRPr>
+            </a:pPr>
+            <a:r>
+              <a:t>9. Ces informations apparaissent automatiquement sur tous les bulletins et procès-verbaux imprimés.</a:t>
+            </a:r>
+          </a:p>
+        </p:txBody>
+      </p:sp>
+    </p:spTree>
+  </p:cSld>
+  <p:clrMapOvr>
+    <a:masterClrMapping/>
+  </p:clrMapOvr>
+</p:sld>
+</file>
+
+<file path=ppt/slides/slide8.xml><?xml version="1.0" encoding="utf-8"?>
+<p:sld xmlns:a="http://schemas.openxmlformats.org/drawingml/2006/main" xmlns:p="http://schemas.openxmlformats.org/presentationml/2006/main" xmlns:r="http://schemas.openxmlformats.org/officeDocument/2006/relationships">
+  <p:cSld>
+    <p:bg>
+      <p:bgPr>
+        <a:solidFill>
+          <a:srgbClr val="F8FAFC"/>
+        </a:solidFill>
+        <a:effectLst/>
+      </p:bgPr>
+    </p:bg>
+    <p:spTree>
+      <p:nvGrpSpPr>
+        <p:cNvPr id="1" name=""/>
+        <p:cNvGrpSpPr/>
+        <p:nvPr/>
+      </p:nvGrpSpPr>
+      <p:grpSpPr/>
+      <p:sp>
+        <p:nvSpPr>
+          <p:cNvPr id="2" name="TextBox 1"/>
+          <p:cNvSpPr txBox="1"/>
+          <p:nvPr/>
+        </p:nvSpPr>
+        <p:spPr>
+          <a:xfrm>
+            <a:off x="0" y="0"/>
+            <a:ext cx="12191695" cy="411480"/>
+          </a:xfrm>
+          <a:prstGeom prst="rect">
+            <a:avLst/>
+          </a:prstGeom>
+          <a:solidFill>
+            <a:srgbClr val="0B4998"/>
+          </a:solidFill>
+        </p:spPr>
+        <p:txBody>
+          <a:bodyPr wrap="none">
+            <a:spAutoFit/>
+          </a:bodyPr>
+          <a:lstStyle/>
+          <a:p>
+            <a:pPr>
+              <a:defRPr sz="900" b="1">
+                <a:solidFill>
+                  <a:srgbClr val="FFFFFF"/>
+                </a:solidFill>
+                <a:latin typeface="Arial"/>
+              </a:defRPr>
+            </a:pPr>
+            <a:r>
+              <a:rPr>
+                <a:solidFill>
+                  <a:srgbClr val="FFFFFF"/>
                 </a:solidFill>
               </a:rPr>
-              <a:t>1. Ouvrir l'onglet financier : </a:t>
-            </a:r>
-            <a:r>
-              <a:rPr sz="1400">
-                <a:solidFill>
-                  <a:srgbClr val="1E293B"/>
+              <a:t>MODULE 4 : GESTION DES CLASSES</a:t>
+            </a:r>
+          </a:p>
+        </p:txBody>
+      </p:sp>
+      <p:sp>
+        <p:nvSpPr>
+          <p:cNvPr id="3" name="TextBox 2"/>
+          <p:cNvSpPr txBox="1"/>
+          <p:nvPr/>
+        </p:nvSpPr>
+        <p:spPr>
+          <a:xfrm>
+            <a:off x="365760" y="457200"/>
+            <a:ext cx="11430000" cy="548640"/>
+          </a:xfrm>
+          <a:prstGeom prst="rect">
+            <a:avLst/>
+          </a:prstGeom>
+          <a:noFill/>
+        </p:spPr>
+        <p:txBody>
+          <a:bodyPr wrap="none">
+            <a:spAutoFit/>
+          </a:bodyPr>
+          <a:lstStyle/>
+          <a:p>
+            <a:pPr>
+              <a:defRPr sz="2000" b="1">
+                <a:solidFill>
+                  <a:srgbClr val="EE7B11"/>
+                </a:solidFill>
+                <a:latin typeface="Arial"/>
+              </a:defRPr>
+            </a:pPr>
+            <a:r>
+              <a:t>Comment créer une nouvelle classe</a:t>
+            </a:r>
+          </a:p>
+        </p:txBody>
+      </p:sp>
+      <p:sp>
+        <p:nvSpPr>
+          <p:cNvPr id="4" name="TextBox 3"/>
+          <p:cNvSpPr txBox="1"/>
+          <p:nvPr/>
+        </p:nvSpPr>
+        <p:spPr>
+          <a:xfrm>
+            <a:off x="457200" y="1143000"/>
+            <a:ext cx="11247120" cy="5394960"/>
+          </a:xfrm>
+          <a:prstGeom prst="rect">
+            <a:avLst/>
+          </a:prstGeom>
+          <a:noFill/>
+        </p:spPr>
+        <p:txBody>
+          <a:bodyPr wrap="square">
+            <a:spAutoFit/>
+          </a:bodyPr>
+          <a:lstStyle/>
+          <a:p>
+            <a:pPr>
+              <a:defRPr sz="1200" b="0">
+                <a:solidFill>
+                  <a:srgbClr val="1E293B"/>
+                </a:solidFill>
+                <a:latin typeface="Arial"/>
+              </a:defRPr>
+            </a:pPr>
+            <a:r>
+              <a:t>1. Allez dans l'onglet 'EDT - Salles &amp; Classes' (ou module Académique).</a:t>
+            </a:r>
+          </a:p>
+          <a:p>
+            <a:pPr>
+              <a:defRPr sz="1200" b="1">
+                <a:solidFill>
+                  <a:srgbClr val="1E293B"/>
+                </a:solidFill>
+                <a:latin typeface="Arial"/>
+              </a:defRPr>
+            </a:pPr>
+            <a:r>
+              <a:t>2. Dans le formulaire 'Ajouter une Classe', saisissez :</a:t>
+            </a:r>
+          </a:p>
+          <a:p>
+            <a:pPr>
+              <a:defRPr sz="1100" b="0">
+                <a:solidFill>
+                  <a:srgbClr val="505050"/>
+                </a:solidFill>
+                <a:latin typeface="Arial"/>
+              </a:defRPr>
+            </a:pPr>
+            <a:r>
+              <a:t>    - Identifiant unique (ex: 6A, 5B, 4C, 3D)</a:t>
+            </a:r>
+          </a:p>
+          <a:p>
+            <a:pPr>
+              <a:defRPr sz="1100" b="0">
+                <a:solidFill>
+                  <a:srgbClr val="505050"/>
+                </a:solidFill>
+                <a:latin typeface="Arial"/>
+              </a:defRPr>
+            </a:pPr>
+            <a:r>
+              <a:t>    - Nom complet de la classe (ex: Classe de 6ème A)</a:t>
+            </a:r>
+          </a:p>
+          <a:p>
+            <a:pPr>
+              <a:defRPr sz="1100" b="0">
+                <a:solidFill>
+                  <a:srgbClr val="505050"/>
+                </a:solidFill>
+                <a:latin typeface="Arial"/>
+              </a:defRPr>
+            </a:pPr>
+            <a:r>
+              <a:t>    - Capacité maximale d'élèves</a:t>
+            </a:r>
+          </a:p>
+          <a:p>
+            <a:pPr>
+              <a:defRPr sz="1100" b="0">
+                <a:solidFill>
+                  <a:srgbClr val="505050"/>
+                </a:solidFill>
+                <a:latin typeface="Arial"/>
+              </a:defRPr>
+            </a:pPr>
+            <a:r>
+              <a:t>    - Couleur d'affichage dans l'EDT</a:t>
+            </a:r>
+          </a:p>
+          <a:p>
+            <a:pPr>
+              <a:defRPr sz="1100" b="0">
+                <a:solidFill>
+                  <a:srgbClr val="505050"/>
+                </a:solidFill>
+                <a:latin typeface="Arial"/>
+              </a:defRPr>
+            </a:pPr>
+            <a:r>
+              <a:t>    - Professeur Principal (sélectionnez dans la liste des enseignants)</a:t>
+            </a:r>
+          </a:p>
+          <a:p>
+            <a:pPr>
+              <a:defRPr sz="1200" b="0">
+                <a:solidFill>
+                  <a:srgbClr val="1E293B"/>
+                </a:solidFill>
+                <a:latin typeface="Arial"/>
+              </a:defRPr>
+            </a:pPr>
+            <a:r>
+              <a:t>8. Cliquez sur 'Ajouter la Classe'. Elle apparaît dans la grille d'emplois du temps.</a:t>
+            </a:r>
+          </a:p>
+        </p:txBody>
+      </p:sp>
+    </p:spTree>
+  </p:cSld>
+  <p:clrMapOvr>
+    <a:masterClrMapping/>
+  </p:clrMapOvr>
+</p:sld>
+</file>
+
+<file path=ppt/slides/slide9.xml><?xml version="1.0" encoding="utf-8"?>
+<p:sld xmlns:a="http://schemas.openxmlformats.org/drawingml/2006/main" xmlns:p="http://schemas.openxmlformats.org/presentationml/2006/main" xmlns:r="http://schemas.openxmlformats.org/officeDocument/2006/relationships">
+  <p:cSld>
+    <p:bg>
+      <p:bgPr>
+        <a:solidFill>
+          <a:srgbClr val="F8FAFC"/>
+        </a:solidFill>
+        <a:effectLst/>
+      </p:bgPr>
+    </p:bg>
+    <p:spTree>
+      <p:nvGrpSpPr>
+        <p:cNvPr id="1" name=""/>
+        <p:cNvGrpSpPr/>
+        <p:nvPr/>
+      </p:nvGrpSpPr>
+      <p:grpSpPr/>
+      <p:sp>
+        <p:nvSpPr>
+          <p:cNvPr id="2" name="TextBox 1"/>
+          <p:cNvSpPr txBox="1"/>
+          <p:nvPr/>
+        </p:nvSpPr>
+        <p:spPr>
+          <a:xfrm>
+            <a:off x="0" y="0"/>
+            <a:ext cx="12191695" cy="411480"/>
+          </a:xfrm>
+          <a:prstGeom prst="rect">
+            <a:avLst/>
+          </a:prstGeom>
+          <a:solidFill>
+            <a:srgbClr val="0B4998"/>
+          </a:solidFill>
+        </p:spPr>
+        <p:txBody>
+          <a:bodyPr wrap="none">
+            <a:spAutoFit/>
+          </a:bodyPr>
+          <a:lstStyle/>
+          <a:p>
+            <a:pPr>
+              <a:defRPr sz="900" b="1">
+                <a:solidFill>
+                  <a:srgbClr val="FFFFFF"/>
+                </a:solidFill>
+                <a:latin typeface="Arial"/>
+              </a:defRPr>
+            </a:pPr>
+            <a:r>
+              <a:rPr>
+                <a:solidFill>
+                  <a:srgbClr val="FFFFFF"/>
                 </a:solidFill>
               </a:rPr>
-              <a:t>Sélectionnez l'onglet 'Finances &amp; Écolages'.</a:t>
-            </a:r>
-          </a:p>
-          <a:p>
-            <a:pPr/>
-            <a:r>
-              <a:rPr b="1" sz="1500">
-                <a:solidFill>
-                  <a:srgbClr val="1E293B"/>
-                </a:solidFill>
-              </a:rPr>
-              <a:t>2. Sélectionner l'élève : </a:t>
-            </a:r>
-            <a:r>
-              <a:rPr sz="1400">
-                <a:solidFill>
-                  <a:srgbClr val="1E293B"/>
-                </a:solidFill>
-              </a:rPr>
-              <a:t>Recherchez et sélectionnez l'élève dans la liste déroulante.</a:t>
-            </a:r>
-          </a:p>
-          <a:p>
-            <a:pPr/>
-            <a:r>
-              <a:rPr b="1" sz="1500">
-                <a:solidFill>
-                  <a:srgbClr val="1E293B"/>
-                </a:solidFill>
-              </a:rPr>
-              <a:t>3. Remplir le versement : </a:t>
-            </a:r>
-            <a:r>
-              <a:rPr sz="1400">
-                <a:solidFill>
-                  <a:srgbClr val="1E293B"/>
-                </a:solidFill>
-              </a:rPr>
-              <a:t>Entrez le Montant payé, le Motif du versement, et le Mode de règlement (Espèces, Chèque, etc.).</a:t>
-            </a:r>
-          </a:p>
-          <a:p>
-            <a:pPr/>
-            <a:r>
-              <a:rPr b="1" sz="1500">
-                <a:solidFill>
-                  <a:srgbClr val="1E293B"/>
-                </a:solidFill>
-              </a:rPr>
-              <a:t>4. Enregistrer : </a:t>
-            </a:r>
-            <a:r>
-              <a:rPr sz="1400">
-                <a:solidFill>
-                  <a:srgbClr val="1E293B"/>
-                </a:solidFill>
-              </a:rPr>
-              <a:t>Cliquez sur 'Enregistrer la transaction'. Le solde de l'élève se met à jour immédiatement.</a:t>
-            </a:r>
-          </a:p>
-          <a:p>
-            <a:pPr/>
-            <a:r>
-              <a:rPr b="1" sz="1500">
-                <a:solidFill>
-                  <a:srgbClr val="1E293B"/>
-                </a:solidFill>
-              </a:rPr>
-              <a:t>5. Télécharger/Envoyer : </a:t>
-            </a:r>
-            <a:r>
-              <a:rPr sz="1400">
-                <a:solidFill>
-                  <a:srgbClr val="1E293B"/>
-                </a:solidFill>
-              </a:rPr>
-              <a:t>Cliquez sur 'Générer Reçu PDF' pour l'imprimer, ou utilisez le bouton WhatsApp pour envoyer la notification.</a:t>
+              <a:t>MODULE 4 : GESTION DES CLASSES</a:t>
+            </a:r>
+          </a:p>
+        </p:txBody>
+      </p:sp>
+      <p:sp>
+        <p:nvSpPr>
+          <p:cNvPr id="3" name="TextBox 2"/>
+          <p:cNvSpPr txBox="1"/>
+          <p:nvPr/>
+        </p:nvSpPr>
+        <p:spPr>
+          <a:xfrm>
+            <a:off x="365760" y="457200"/>
+            <a:ext cx="11430000" cy="548640"/>
+          </a:xfrm>
+          <a:prstGeom prst="rect">
+            <a:avLst/>
+          </a:prstGeom>
+          <a:noFill/>
+        </p:spPr>
+        <p:txBody>
+          <a:bodyPr wrap="none">
+            <a:spAutoFit/>
+          </a:bodyPr>
+          <a:lstStyle/>
+          <a:p>
+            <a:pPr>
+              <a:defRPr sz="2000" b="1">
+                <a:solidFill>
+                  <a:srgbClr val="EE7B11"/>
+                </a:solidFill>
+                <a:latin typeface="Arial"/>
+              </a:defRPr>
+            </a:pPr>
+            <a:r>
+              <a:t>Comment modifier ou supprimer une classe</a:t>
+            </a:r>
+          </a:p>
+        </p:txBody>
+      </p:sp>
+      <p:sp>
+        <p:nvSpPr>
+          <p:cNvPr id="4" name="TextBox 3"/>
+          <p:cNvSpPr txBox="1"/>
+          <p:nvPr/>
+        </p:nvSpPr>
+        <p:spPr>
+          <a:xfrm>
+            <a:off x="457200" y="1143000"/>
+            <a:ext cx="11247120" cy="5394960"/>
+          </a:xfrm>
+          <a:prstGeom prst="rect">
+            <a:avLst/>
+          </a:prstGeom>
+          <a:noFill/>
+        </p:spPr>
+        <p:txBody>
+          <a:bodyPr wrap="square">
+            <a:spAutoFit/>
+          </a:bodyPr>
+          <a:lstStyle/>
+          <a:p>
+            <a:pPr>
+              <a:defRPr sz="1200" b="0">
+                <a:solidFill>
+                  <a:srgbClr val="1E293B"/>
+                </a:solidFill>
+                <a:latin typeface="Arial"/>
+              </a:defRPr>
+            </a:pPr>
+            <a:r>
+              <a:t>1. Dans la liste des classes affichées, cliquez sur le bouton Modifier (crayon) de la classe.</a:t>
+            </a:r>
+          </a:p>
+          <a:p>
+            <a:pPr>
+              <a:defRPr sz="1200" b="0">
+                <a:solidFill>
+                  <a:srgbClr val="1E293B"/>
+                </a:solidFill>
+                <a:latin typeface="Arial"/>
+              </a:defRPr>
+            </a:pPr>
+            <a:r>
+              <a:t>2. Modifiez les champs (nom, capacité, professeur principal, couleur).</a:t>
+            </a:r>
+          </a:p>
+          <a:p>
+            <a:pPr>
+              <a:defRPr sz="1200" b="0">
+                <a:solidFill>
+                  <a:srgbClr val="1E293B"/>
+                </a:solidFill>
+                <a:latin typeface="Arial"/>
+              </a:defRPr>
+            </a:pPr>
+            <a:r>
+              <a:t>3. Cliquez sur 'Enregistrer'. Les changements sont reflétés dans tous les modules.</a:t>
+            </a:r>
+          </a:p>
+          <a:p>
+            <a:pPr>
+              <a:defRPr sz="1200" b="0">
+                <a:solidFill>
+                  <a:srgbClr val="1E293B"/>
+                </a:solidFill>
+                <a:latin typeface="Arial"/>
+              </a:defRPr>
+            </a:pPr>
+            <a:r>
+              <a:t>4. Pour supprimer : cliquez sur le bouton rouge Corbeille et confirmez.</a:t>
+            </a:r>
+          </a:p>
+          <a:p>
+            <a:pPr>
+              <a:defRPr sz="1200" b="0">
+                <a:solidFill>
+                  <a:srgbClr val="1E293B"/>
+                </a:solidFill>
+                <a:latin typeface="Arial"/>
+              </a:defRPr>
+            </a:pPr>
+            <a:r>
+              <a:t>5. ATTENTION : La suppression d'une classe retire aussi tous ses cours planifiés.</a:t>
             </a:r>
           </a:p>
         </p:txBody>

--- a/guide_utilisation.pptx
+++ b/guide_utilisation.pptx
@@ -5,45 +5,45 @@
     <p:sldMasterId id="2147483648" r:id="rId1"/>
   </p:sldMasterIdLst>
   <p:sldIdLst>
-    <p:sldId id="256" r:id="rId7"/>
-    <p:sldId id="257" r:id="rId8"/>
-    <p:sldId id="258" r:id="rId9"/>
-    <p:sldId id="259" r:id="rId10"/>
-    <p:sldId id="260" r:id="rId11"/>
-    <p:sldId id="261" r:id="rId12"/>
-    <p:sldId id="262" r:id="rId13"/>
-    <p:sldId id="263" r:id="rId14"/>
-    <p:sldId id="264" r:id="rId15"/>
-    <p:sldId id="265" r:id="rId16"/>
-    <p:sldId id="266" r:id="rId17"/>
-    <p:sldId id="267" r:id="rId18"/>
-    <p:sldId id="268" r:id="rId19"/>
-    <p:sldId id="269" r:id="rId20"/>
-    <p:sldId id="270" r:id="rId21"/>
-    <p:sldId id="271" r:id="rId22"/>
-    <p:sldId id="272" r:id="rId23"/>
-    <p:sldId id="273" r:id="rId24"/>
-    <p:sldId id="274" r:id="rId25"/>
-    <p:sldId id="275" r:id="rId26"/>
-    <p:sldId id="276" r:id="rId27"/>
-    <p:sldId id="277" r:id="rId28"/>
-    <p:sldId id="278" r:id="rId29"/>
-    <p:sldId id="279" r:id="rId30"/>
-    <p:sldId id="280" r:id="rId31"/>
-    <p:sldId id="281" r:id="rId32"/>
-    <p:sldId id="282" r:id="rId33"/>
-    <p:sldId id="283" r:id="rId34"/>
-    <p:sldId id="284" r:id="rId35"/>
-    <p:sldId id="285" r:id="rId36"/>
-    <p:sldId id="286" r:id="rId37"/>
-    <p:sldId id="287" r:id="rId38"/>
-    <p:sldId id="288" r:id="rId39"/>
-    <p:sldId id="289" r:id="rId40"/>
-    <p:sldId id="290" r:id="rId41"/>
-    <p:sldId id="291" r:id="rId42"/>
-    <p:sldId id="292" r:id="rId43"/>
+    <p:sldId id="256" r:id="rId2"/>
+    <p:sldId id="257" r:id="rId3"/>
+    <p:sldId id="258" r:id="rId4"/>
+    <p:sldId id="259" r:id="rId5"/>
+    <p:sldId id="260" r:id="rId6"/>
+    <p:sldId id="261" r:id="rId7"/>
+    <p:sldId id="262" r:id="rId8"/>
+    <p:sldId id="263" r:id="rId9"/>
+    <p:sldId id="264" r:id="rId10"/>
+    <p:sldId id="265" r:id="rId11"/>
+    <p:sldId id="266" r:id="rId12"/>
+    <p:sldId id="267" r:id="rId13"/>
+    <p:sldId id="268" r:id="rId14"/>
+    <p:sldId id="269" r:id="rId15"/>
+    <p:sldId id="270" r:id="rId16"/>
+    <p:sldId id="271" r:id="rId17"/>
+    <p:sldId id="272" r:id="rId18"/>
+    <p:sldId id="273" r:id="rId19"/>
+    <p:sldId id="274" r:id="rId20"/>
+    <p:sldId id="275" r:id="rId21"/>
+    <p:sldId id="276" r:id="rId22"/>
+    <p:sldId id="277" r:id="rId23"/>
+    <p:sldId id="278" r:id="rId24"/>
+    <p:sldId id="279" r:id="rId25"/>
+    <p:sldId id="280" r:id="rId26"/>
+    <p:sldId id="281" r:id="rId27"/>
+    <p:sldId id="282" r:id="rId28"/>
+    <p:sldId id="283" r:id="rId29"/>
+    <p:sldId id="284" r:id="rId30"/>
+    <p:sldId id="285" r:id="rId31"/>
+    <p:sldId id="286" r:id="rId32"/>
+    <p:sldId id="287" r:id="rId33"/>
+    <p:sldId id="288" r:id="rId34"/>
+    <p:sldId id="289" r:id="rId35"/>
+    <p:sldId id="290" r:id="rId36"/>
+    <p:sldId id="291" r:id="rId37"/>
+    <p:sldId id="292" r:id="rId38"/>
   </p:sldIdLst>
-  <p:sldSz cx="12191695" cy="6858000" type="screen4x3"/>
+  <p:sldSz cx="12192000" cy="6858000"/>
   <p:notesSz cx="6858000" cy="9144000"/>
   <p:defaultTextStyle>
     <a:defPPr>
@@ -140,6 +140,22 @@
       </a:defRPr>
     </a:lvl9pPr>
   </p:defaultTextStyle>
+  <p:extLst>
+    <p:ext uri="{EFAFB233-063F-42B5-8137-9DF3F51BA10A}">
+      <p15:sldGuideLst xmlns:p15="http://schemas.microsoft.com/office/powerpoint/2012/main">
+        <p15:guide id="1" orient="horz" pos="2160">
+          <p15:clr>
+            <a:srgbClr val="A4A3A4"/>
+          </p15:clr>
+        </p15:guide>
+        <p15:guide id="2" pos="2880">
+          <p15:clr>
+            <a:srgbClr val="A4A3A4"/>
+          </p15:clr>
+        </p15:guide>
+      </p15:sldGuideLst>
+    </p:ext>
+  </p:extLst>
 </p:presentation>
 </file>
 
@@ -324,7 +340,7 @@
           <a:p>
             <a:fld id="{5BCAD085-E8A6-8845-BD4E-CB4CCA059FC4}" type="datetimeFigureOut">
               <a:rPr lang="en-US" smtClean="0"/>
-              <a:t>1/27/13</a:t>
+              <a:t>6/26/2026</a:t>
             </a:fld>
             <a:endParaRPr lang="en-US"/>
           </a:p>
@@ -366,7 +382,7 @@
           <a:p>
             <a:fld id="{C1FF6DA9-008F-8B48-92A6-B652298478BF}" type="slidenum">
               <a:rPr lang="en-US" smtClean="0"/>
-              <a:t>‹#›</a:t>
+              <a:t>‹N°›</a:t>
             </a:fld>
             <a:endParaRPr lang="en-US"/>
           </a:p>
@@ -494,7 +510,7 @@
           <a:p>
             <a:fld id="{5BCAD085-E8A6-8845-BD4E-CB4CCA059FC4}" type="datetimeFigureOut">
               <a:rPr lang="en-US" smtClean="0"/>
-              <a:t>1/27/13</a:t>
+              <a:t>6/26/2026</a:t>
             </a:fld>
             <a:endParaRPr lang="en-US"/>
           </a:p>
@@ -536,7 +552,7 @@
           <a:p>
             <a:fld id="{C1FF6DA9-008F-8B48-92A6-B652298478BF}" type="slidenum">
               <a:rPr lang="en-US" smtClean="0"/>
-              <a:t>‹#›</a:t>
+              <a:t>‹N°›</a:t>
             </a:fld>
             <a:endParaRPr lang="en-US"/>
           </a:p>
@@ -674,7 +690,7 @@
           <a:p>
             <a:fld id="{5BCAD085-E8A6-8845-BD4E-CB4CCA059FC4}" type="datetimeFigureOut">
               <a:rPr lang="en-US" smtClean="0"/>
-              <a:t>1/27/13</a:t>
+              <a:t>6/26/2026</a:t>
             </a:fld>
             <a:endParaRPr lang="en-US"/>
           </a:p>
@@ -716,7 +732,7 @@
           <a:p>
             <a:fld id="{C1FF6DA9-008F-8B48-92A6-B652298478BF}" type="slidenum">
               <a:rPr lang="en-US" smtClean="0"/>
-              <a:t>‹#›</a:t>
+              <a:t>‹N°›</a:t>
             </a:fld>
             <a:endParaRPr lang="en-US"/>
           </a:p>
@@ -844,7 +860,7 @@
           <a:p>
             <a:fld id="{5BCAD085-E8A6-8845-BD4E-CB4CCA059FC4}" type="datetimeFigureOut">
               <a:rPr lang="en-US" smtClean="0"/>
-              <a:t>1/27/13</a:t>
+              <a:t>6/26/2026</a:t>
             </a:fld>
             <a:endParaRPr lang="en-US"/>
           </a:p>
@@ -886,7 +902,7 @@
           <a:p>
             <a:fld id="{C1FF6DA9-008F-8B48-92A6-B652298478BF}" type="slidenum">
               <a:rPr lang="en-US" smtClean="0"/>
-              <a:t>‹#›</a:t>
+              <a:t>‹N°›</a:t>
             </a:fld>
             <a:endParaRPr lang="en-US"/>
           </a:p>
@@ -1090,7 +1106,7 @@
           <a:p>
             <a:fld id="{5BCAD085-E8A6-8845-BD4E-CB4CCA059FC4}" type="datetimeFigureOut">
               <a:rPr lang="en-US" smtClean="0"/>
-              <a:t>1/27/13</a:t>
+              <a:t>6/26/2026</a:t>
             </a:fld>
             <a:endParaRPr lang="en-US"/>
           </a:p>
@@ -1132,7 +1148,7 @@
           <a:p>
             <a:fld id="{C1FF6DA9-008F-8B48-92A6-B652298478BF}" type="slidenum">
               <a:rPr lang="en-US" smtClean="0"/>
-              <a:t>‹#›</a:t>
+              <a:t>‹N°›</a:t>
             </a:fld>
             <a:endParaRPr lang="en-US"/>
           </a:p>
@@ -1378,7 +1394,7 @@
           <a:p>
             <a:fld id="{5BCAD085-E8A6-8845-BD4E-CB4CCA059FC4}" type="datetimeFigureOut">
               <a:rPr lang="en-US" smtClean="0"/>
-              <a:t>1/27/13</a:t>
+              <a:t>6/26/2026</a:t>
             </a:fld>
             <a:endParaRPr lang="en-US"/>
           </a:p>
@@ -1420,7 +1436,7 @@
           <a:p>
             <a:fld id="{C1FF6DA9-008F-8B48-92A6-B652298478BF}" type="slidenum">
               <a:rPr lang="en-US" smtClean="0"/>
-              <a:t>‹#›</a:t>
+              <a:t>‹N°›</a:t>
             </a:fld>
             <a:endParaRPr lang="en-US"/>
           </a:p>
@@ -1800,7 +1816,7 @@
           <a:p>
             <a:fld id="{5BCAD085-E8A6-8845-BD4E-CB4CCA059FC4}" type="datetimeFigureOut">
               <a:rPr lang="en-US" smtClean="0"/>
-              <a:t>1/27/13</a:t>
+              <a:t>6/26/2026</a:t>
             </a:fld>
             <a:endParaRPr lang="en-US"/>
           </a:p>
@@ -1842,7 +1858,7 @@
           <a:p>
             <a:fld id="{C1FF6DA9-008F-8B48-92A6-B652298478BF}" type="slidenum">
               <a:rPr lang="en-US" smtClean="0"/>
-              <a:t>‹#›</a:t>
+              <a:t>‹N°›</a:t>
             </a:fld>
             <a:endParaRPr lang="en-US"/>
           </a:p>
@@ -1918,7 +1934,7 @@
           <a:p>
             <a:fld id="{5BCAD085-E8A6-8845-BD4E-CB4CCA059FC4}" type="datetimeFigureOut">
               <a:rPr lang="en-US" smtClean="0"/>
-              <a:t>1/27/13</a:t>
+              <a:t>6/26/2026</a:t>
             </a:fld>
             <a:endParaRPr lang="en-US"/>
           </a:p>
@@ -1960,7 +1976,7 @@
           <a:p>
             <a:fld id="{C1FF6DA9-008F-8B48-92A6-B652298478BF}" type="slidenum">
               <a:rPr lang="en-US" smtClean="0"/>
-              <a:t>‹#›</a:t>
+              <a:t>‹N°›</a:t>
             </a:fld>
             <a:endParaRPr lang="en-US"/>
           </a:p>
@@ -2013,7 +2029,7 @@
           <a:p>
             <a:fld id="{5BCAD085-E8A6-8845-BD4E-CB4CCA059FC4}" type="datetimeFigureOut">
               <a:rPr lang="en-US" smtClean="0"/>
-              <a:t>1/27/13</a:t>
+              <a:t>6/26/2026</a:t>
             </a:fld>
             <a:endParaRPr lang="en-US"/>
           </a:p>
@@ -2055,7 +2071,7 @@
           <a:p>
             <a:fld id="{C1FF6DA9-008F-8B48-92A6-B652298478BF}" type="slidenum">
               <a:rPr lang="en-US" smtClean="0"/>
-              <a:t>‹#›</a:t>
+              <a:t>‹N°›</a:t>
             </a:fld>
             <a:endParaRPr lang="en-US"/>
           </a:p>
@@ -2290,7 +2306,7 @@
           <a:p>
             <a:fld id="{5BCAD085-E8A6-8845-BD4E-CB4CCA059FC4}" type="datetimeFigureOut">
               <a:rPr lang="en-US" smtClean="0"/>
-              <a:t>1/27/13</a:t>
+              <a:t>6/26/2026</a:t>
             </a:fld>
             <a:endParaRPr lang="en-US"/>
           </a:p>
@@ -2332,7 +2348,7 @@
           <a:p>
             <a:fld id="{C1FF6DA9-008F-8B48-92A6-B652298478BF}" type="slidenum">
               <a:rPr lang="en-US" smtClean="0"/>
-              <a:t>‹#›</a:t>
+              <a:t>‹N°›</a:t>
             </a:fld>
             <a:endParaRPr lang="en-US"/>
           </a:p>
@@ -2543,7 +2559,7 @@
           <a:p>
             <a:fld id="{5BCAD085-E8A6-8845-BD4E-CB4CCA059FC4}" type="datetimeFigureOut">
               <a:rPr lang="en-US" smtClean="0"/>
-              <a:t>1/27/13</a:t>
+              <a:t>6/26/2026</a:t>
             </a:fld>
             <a:endParaRPr lang="en-US"/>
           </a:p>
@@ -2585,7 +2601,7 @@
           <a:p>
             <a:fld id="{C1FF6DA9-008F-8B48-92A6-B652298478BF}" type="slidenum">
               <a:rPr lang="en-US" smtClean="0"/>
-              <a:t>‹#›</a:t>
+              <a:t>‹N°›</a:t>
             </a:fld>
             <a:endParaRPr lang="en-US"/>
           </a:p>
@@ -2756,7 +2772,7 @@
           <a:p>
             <a:fld id="{5BCAD085-E8A6-8845-BD4E-CB4CCA059FC4}" type="datetimeFigureOut">
               <a:rPr lang="en-US" smtClean="0"/>
-              <a:t>1/27/13</a:t>
+              <a:t>6/26/2026</a:t>
             </a:fld>
             <a:endParaRPr lang="en-US"/>
           </a:p>
@@ -2834,7 +2850,7 @@
           <a:p>
             <a:fld id="{C1FF6DA9-008F-8B48-92A6-B652298478BF}" type="slidenum">
               <a:rPr lang="en-US" smtClean="0"/>
-              <a:t>‹#›</a:t>
+              <a:t>‹N°›</a:t>
             </a:fld>
             <a:endParaRPr lang="en-US"/>
           </a:p>
@@ -3115,7 +3131,7 @@
 </file>
 
 <file path=ppt/slides/slide1.xml><?xml version="1.0" encoding="utf-8"?>
-<p:sld xmlns:a="http://schemas.openxmlformats.org/drawingml/2006/main" xmlns:p="http://schemas.openxmlformats.org/presentationml/2006/main" xmlns:r="http://schemas.openxmlformats.org/officeDocument/2006/relationships">
+<p:sld xmlns:a="http://schemas.openxmlformats.org/drawingml/2006/main" xmlns:r="http://schemas.openxmlformats.org/officeDocument/2006/relationships" xmlns:p="http://schemas.openxmlformats.org/presentationml/2006/main">
   <p:cSld>
     <p:bg>
       <p:bgPr>
@@ -3131,7 +3147,14 @@
         <p:cNvGrpSpPr/>
         <p:nvPr/>
       </p:nvGrpSpPr>
-      <p:grpSpPr/>
+      <p:grpSpPr>
+        <a:xfrm>
+          <a:off x="0" y="0"/>
+          <a:ext cx="0" cy="0"/>
+          <a:chOff x="0" y="0"/>
+          <a:chExt cx="0" cy="0"/>
+        </a:xfrm>
+      </p:grpSpPr>
       <p:sp>
         <p:nvSpPr>
           <p:cNvPr id="2" name="TextBox 1"/>
@@ -3203,7 +3226,7 @@
 </file>
 
 <file path=ppt/slides/slide10.xml><?xml version="1.0" encoding="utf-8"?>
-<p:sld xmlns:a="http://schemas.openxmlformats.org/drawingml/2006/main" xmlns:p="http://schemas.openxmlformats.org/presentationml/2006/main" xmlns:r="http://schemas.openxmlformats.org/officeDocument/2006/relationships">
+<p:sld xmlns:a="http://schemas.openxmlformats.org/drawingml/2006/main" xmlns:r="http://schemas.openxmlformats.org/officeDocument/2006/relationships" xmlns:p="http://schemas.openxmlformats.org/presentationml/2006/main">
   <p:cSld>
     <p:bg>
       <p:bgPr>
@@ -3219,7 +3242,14 @@
         <p:cNvGrpSpPr/>
         <p:nvPr/>
       </p:nvGrpSpPr>
-      <p:grpSpPr/>
+      <p:grpSpPr>
+        <a:xfrm>
+          <a:off x="0" y="0"/>
+          <a:ext cx="0" cy="0"/>
+          <a:chOff x="0" y="0"/>
+          <a:chExt cx="0" cy="0"/>
+        </a:xfrm>
+      </p:grpSpPr>
       <p:sp>
         <p:nvSpPr>
           <p:cNvPr id="2" name="TextBox 1"/>
@@ -3308,7 +3338,7 @@
         <p:spPr>
           <a:xfrm>
             <a:off x="457200" y="1143000"/>
-            <a:ext cx="11247120" cy="5394960"/>
+            <a:ext cx="11247120" cy="1323439"/>
           </a:xfrm>
           <a:prstGeom prst="rect">
             <a:avLst/>
@@ -3330,8 +3360,66 @@
               </a:defRPr>
             </a:pPr>
             <a:r>
-              <a:t>1. Allez dans l'onglet 'Matières' ou 'EDT - Classes &amp; Séries'.</a:t>
-            </a:r>
+              <a:rPr dirty="0"/>
+              <a:t>1. </a:t>
+            </a:r>
+            <a:r>
+              <a:rPr dirty="0" err="1"/>
+              <a:t>Allez</a:t>
+            </a:r>
+            <a:r>
+              <a:rPr dirty="0"/>
+              <a:t> </a:t>
+            </a:r>
+            <a:r>
+              <a:rPr dirty="0" err="1"/>
+              <a:t>dans</a:t>
+            </a:r>
+            <a:r>
+              <a:rPr dirty="0"/>
+              <a:t> </a:t>
+            </a:r>
+            <a:r>
+              <a:rPr dirty="0" err="1"/>
+              <a:t>l'onglet</a:t>
+            </a:r>
+            <a:r>
+              <a:rPr dirty="0"/>
+              <a:t> </a:t>
+            </a:r>
+            <a:r>
+              <a:rPr lang="fr-FR" dirty="0" smtClean="0"/>
+              <a:t> ‘ Emploi du Temps – EDT </a:t>
+            </a:r>
+            <a:r>
+              <a:rPr dirty="0" smtClean="0"/>
+              <a:t>' </a:t>
+            </a:r>
+            <a:r>
+              <a:rPr lang="fr-FR" i="1" dirty="0" smtClean="0"/>
+              <a:t>puis cliquer sur  </a:t>
+            </a:r>
+            <a:r>
+              <a:rPr dirty="0" smtClean="0"/>
+              <a:t>'EDT </a:t>
+            </a:r>
+            <a:r>
+              <a:rPr lang="fr-FR" dirty="0" smtClean="0"/>
+              <a:t>–</a:t>
+            </a:r>
+            <a:r>
+              <a:rPr dirty="0" smtClean="0"/>
+              <a:t> </a:t>
+            </a:r>
+            <a:r>
+              <a:rPr lang="fr-FR" dirty="0" smtClean="0"/>
+              <a:t>Matières de l’école</a:t>
+            </a:r>
+            <a:r>
+              <a:rPr dirty="0" smtClean="0"/>
+              <a:t>'.</a:t>
+            </a:r>
+            <a:endParaRPr dirty="0"/>
           </a:p>
           <a:p>
             <a:pPr>
@@ -3343,7 +3431,56 @@
               </a:defRPr>
             </a:pPr>
             <a:r>
-              <a:t>2. Dans le formulaire 'Ajouter une Matière', saisissez :</a:t>
+              <a:rPr dirty="0"/>
+              <a:t>2. </a:t>
+            </a:r>
+            <a:r>
+              <a:rPr dirty="0" err="1"/>
+              <a:t>Dans</a:t>
+            </a:r>
+            <a:r>
+              <a:rPr dirty="0"/>
+              <a:t> le </a:t>
+            </a:r>
+            <a:r>
+              <a:rPr dirty="0" err="1"/>
+              <a:t>formulaire</a:t>
+            </a:r>
+            <a:r>
+              <a:rPr dirty="0"/>
+              <a:t> '</a:t>
+            </a:r>
+            <a:r>
+              <a:rPr dirty="0" err="1"/>
+              <a:t>Ajouter</a:t>
+            </a:r>
+            <a:r>
+              <a:rPr dirty="0"/>
+              <a:t> </a:t>
+            </a:r>
+            <a:r>
+              <a:rPr dirty="0" err="1"/>
+              <a:t>une</a:t>
+            </a:r>
+            <a:r>
+              <a:rPr dirty="0"/>
+              <a:t> </a:t>
+            </a:r>
+            <a:r>
+              <a:rPr dirty="0" err="1"/>
+              <a:t>Matière</a:t>
+            </a:r>
+            <a:r>
+              <a:rPr dirty="0"/>
+              <a:t>', </a:t>
+            </a:r>
+            <a:r>
+              <a:rPr dirty="0" err="1"/>
+              <a:t>saisissez</a:t>
+            </a:r>
+            <a:r>
+              <a:rPr dirty="0"/>
+              <a:t> :</a:t>
             </a:r>
           </a:p>
           <a:p>
@@ -3356,7 +3493,40 @@
               </a:defRPr>
             </a:pPr>
             <a:r>
-              <a:t>    - Nom de la matière (ex: Mathématiques, Français, Anglais)</a:t>
+              <a:rPr dirty="0"/>
+              <a:t>    - Nom de la </a:t>
+            </a:r>
+            <a:r>
+              <a:rPr dirty="0" err="1"/>
+              <a:t>matière</a:t>
+            </a:r>
+            <a:r>
+              <a:rPr dirty="0"/>
+              <a:t> (ex: </a:t>
+            </a:r>
+            <a:r>
+              <a:rPr dirty="0" err="1"/>
+              <a:t>Mathématiques</a:t>
+            </a:r>
+            <a:r>
+              <a:rPr dirty="0"/>
+              <a:t>, </a:t>
+            </a:r>
+            <a:r>
+              <a:rPr dirty="0" err="1"/>
+              <a:t>Français</a:t>
+            </a:r>
+            <a:r>
+              <a:rPr dirty="0"/>
+              <a:t>, </a:t>
+            </a:r>
+            <a:r>
+              <a:rPr dirty="0" err="1"/>
+              <a:t>Anglais</a:t>
+            </a:r>
+            <a:r>
+              <a:rPr dirty="0"/>
+              <a:t>)</a:t>
             </a:r>
           </a:p>
           <a:p>
@@ -3369,7 +3539,48 @@
               </a:defRPr>
             </a:pPr>
             <a:r>
-              <a:t>    - Coefficient : poids de la matière dans le calcul des moyennes (ex: 4 pour Math)</a:t>
+              <a:rPr dirty="0"/>
+              <a:t>    - Coefficient : </a:t>
+            </a:r>
+            <a:r>
+              <a:rPr dirty="0" err="1"/>
+              <a:t>poids</a:t>
+            </a:r>
+            <a:r>
+              <a:rPr dirty="0"/>
+              <a:t> de la </a:t>
+            </a:r>
+            <a:r>
+              <a:rPr dirty="0" err="1"/>
+              <a:t>matière</a:t>
+            </a:r>
+            <a:r>
+              <a:rPr dirty="0"/>
+              <a:t> </a:t>
+            </a:r>
+            <a:r>
+              <a:rPr dirty="0" err="1"/>
+              <a:t>dans</a:t>
+            </a:r>
+            <a:r>
+              <a:rPr dirty="0"/>
+              <a:t> le </a:t>
+            </a:r>
+            <a:r>
+              <a:rPr dirty="0" err="1"/>
+              <a:t>calcul</a:t>
+            </a:r>
+            <a:r>
+              <a:rPr dirty="0"/>
+              <a:t> des </a:t>
+            </a:r>
+            <a:r>
+              <a:rPr dirty="0" err="1"/>
+              <a:t>moyennes</a:t>
+            </a:r>
+            <a:r>
+              <a:rPr dirty="0"/>
+              <a:t> (ex: 4 pour Math)</a:t>
             </a:r>
           </a:p>
           <a:p>
@@ -3382,7 +3593,64 @@
               </a:defRPr>
             </a:pPr>
             <a:r>
-              <a:t>    - Cochez 'Langue Vivante 2 (LV2)' si c'est une langue facultative (ex: Espagnol, Allemand)</a:t>
+              <a:rPr dirty="0"/>
+              <a:t>    - </a:t>
+            </a:r>
+            <a:r>
+              <a:rPr dirty="0" err="1"/>
+              <a:t>Cochez</a:t>
+            </a:r>
+            <a:r>
+              <a:rPr dirty="0"/>
+              <a:t> 'Langue </a:t>
+            </a:r>
+            <a:r>
+              <a:rPr dirty="0" err="1"/>
+              <a:t>Vivante</a:t>
+            </a:r>
+            <a:r>
+              <a:rPr dirty="0"/>
+              <a:t> 2 (LV2)' </a:t>
+            </a:r>
+            <a:r>
+              <a:rPr dirty="0" err="1"/>
+              <a:t>si</a:t>
+            </a:r>
+            <a:r>
+              <a:rPr dirty="0"/>
+              <a:t> </a:t>
+            </a:r>
+            <a:r>
+              <a:rPr dirty="0" err="1"/>
+              <a:t>c'est</a:t>
+            </a:r>
+            <a:r>
+              <a:rPr dirty="0"/>
+              <a:t> </a:t>
+            </a:r>
+            <a:r>
+              <a:rPr dirty="0" err="1"/>
+              <a:t>une</a:t>
+            </a:r>
+            <a:r>
+              <a:rPr dirty="0"/>
+              <a:t> langue facultative (ex: </a:t>
+            </a:r>
+            <a:r>
+              <a:rPr dirty="0" err="1"/>
+              <a:t>Espagnol</a:t>
+            </a:r>
+            <a:r>
+              <a:rPr dirty="0"/>
+              <a:t>, </a:t>
+            </a:r>
+            <a:r>
+              <a:rPr dirty="0" err="1"/>
+              <a:t>Allemand</a:t>
+            </a:r>
+            <a:r>
+              <a:rPr dirty="0"/>
+              <a:t>)</a:t>
             </a:r>
           </a:p>
           <a:p>
@@ -3395,8 +3663,54 @@
               </a:defRPr>
             </a:pPr>
             <a:r>
-              <a:t>    - Choisissez une couleur pour l'affichage dans l'EDT</a:t>
-            </a:r>
+              <a:rPr dirty="0"/>
+              <a:t>    - </a:t>
+            </a:r>
+            <a:r>
+              <a:rPr dirty="0" err="1"/>
+              <a:t>Choisissez</a:t>
+            </a:r>
+            <a:r>
+              <a:rPr dirty="0"/>
+              <a:t> </a:t>
+            </a:r>
+            <a:r>
+              <a:rPr dirty="0" err="1"/>
+              <a:t>une</a:t>
+            </a:r>
+            <a:r>
+              <a:rPr dirty="0"/>
+              <a:t> </a:t>
+            </a:r>
+            <a:r>
+              <a:rPr dirty="0" err="1"/>
+              <a:t>couleur</a:t>
+            </a:r>
+            <a:r>
+              <a:rPr dirty="0"/>
+              <a:t> pour </a:t>
+            </a:r>
+            <a:r>
+              <a:rPr dirty="0" err="1"/>
+              <a:t>l'affichage</a:t>
+            </a:r>
+            <a:r>
+              <a:rPr dirty="0"/>
+              <a:t> </a:t>
+            </a:r>
+            <a:r>
+              <a:rPr dirty="0" err="1"/>
+              <a:t>dans</a:t>
+            </a:r>
+            <a:r>
+              <a:rPr dirty="0"/>
+              <a:t> </a:t>
+            </a:r>
+            <a:r>
+              <a:rPr dirty="0" err="1"/>
+              <a:t>l'EDT</a:t>
+            </a:r>
+            <a:endParaRPr dirty="0"/>
           </a:p>
           <a:p>
             <a:pPr>
@@ -3408,7 +3722,32 @@
               </a:defRPr>
             </a:pPr>
             <a:r>
-              <a:t>7. Cliquez sur 'Ajouter la Matière'.</a:t>
+              <a:rPr dirty="0"/>
+              <a:t>7. </a:t>
+            </a:r>
+            <a:r>
+              <a:rPr dirty="0" err="1"/>
+              <a:t>Cliquez</a:t>
+            </a:r>
+            <a:r>
+              <a:rPr dirty="0"/>
+              <a:t> sur '</a:t>
+            </a:r>
+            <a:r>
+              <a:rPr dirty="0" err="1"/>
+              <a:t>Ajouter</a:t>
+            </a:r>
+            <a:r>
+              <a:rPr dirty="0"/>
+              <a:t> la </a:t>
+            </a:r>
+            <a:r>
+              <a:rPr dirty="0" err="1"/>
+              <a:t>Matière</a:t>
+            </a:r>
+            <a:r>
+              <a:rPr dirty="0"/>
+              <a:t>'.</a:t>
             </a:r>
           </a:p>
         </p:txBody>
@@ -3422,7 +3761,7 @@
 </file>
 
 <file path=ppt/slides/slide11.xml><?xml version="1.0" encoding="utf-8"?>
-<p:sld xmlns:a="http://schemas.openxmlformats.org/drawingml/2006/main" xmlns:p="http://schemas.openxmlformats.org/presentationml/2006/main" xmlns:r="http://schemas.openxmlformats.org/officeDocument/2006/relationships">
+<p:sld xmlns:a="http://schemas.openxmlformats.org/drawingml/2006/main" xmlns:r="http://schemas.openxmlformats.org/officeDocument/2006/relationships" xmlns:p="http://schemas.openxmlformats.org/presentationml/2006/main">
   <p:cSld>
     <p:bg>
       <p:bgPr>
@@ -3438,7 +3777,14 @@
         <p:cNvGrpSpPr/>
         <p:nvPr/>
       </p:nvGrpSpPr>
-      <p:grpSpPr/>
+      <p:grpSpPr>
+        <a:xfrm>
+          <a:off x="0" y="0"/>
+          <a:ext cx="0" cy="0"/>
+          <a:chOff x="0" y="0"/>
+          <a:chExt cx="0" cy="0"/>
+        </a:xfrm>
+      </p:grpSpPr>
       <p:sp>
         <p:nvSpPr>
           <p:cNvPr id="2" name="TextBox 1"/>
@@ -3527,7 +3873,7 @@
         <p:spPr>
           <a:xfrm>
             <a:off x="457200" y="1143000"/>
-            <a:ext cx="11247120" cy="5394960"/>
+            <a:ext cx="11247120" cy="646331"/>
           </a:xfrm>
           <a:prstGeom prst="rect">
             <a:avLst/>
@@ -3549,7 +3895,68 @@
               </a:defRPr>
             </a:pPr>
             <a:r>
-              <a:t>1. Dans la liste des matières, cliquez sur le bouton Modifier de la matière.</a:t>
+              <a:rPr dirty="0"/>
+              <a:t>1. </a:t>
+            </a:r>
+            <a:r>
+              <a:rPr dirty="0" err="1"/>
+              <a:t>Dans</a:t>
+            </a:r>
+            <a:r>
+              <a:rPr dirty="0"/>
+              <a:t> la </a:t>
+            </a:r>
+            <a:r>
+              <a:rPr dirty="0" err="1"/>
+              <a:t>liste</a:t>
+            </a:r>
+            <a:r>
+              <a:rPr dirty="0"/>
+              <a:t> des </a:t>
+            </a:r>
+            <a:r>
+              <a:rPr b="1" dirty="0" err="1" smtClean="0"/>
+              <a:t>matières</a:t>
+            </a:r>
+            <a:r>
+              <a:rPr lang="fr-FR" b="1" dirty="0" smtClean="0"/>
+              <a:t> (</a:t>
+            </a:r>
+            <a:r>
+              <a:rPr lang="fr-FR" b="1" dirty="0"/>
+              <a:t>l'onglet  ‘ Emploi du Temps – EDT ' </a:t>
+            </a:r>
+            <a:r>
+              <a:rPr lang="fr-FR" b="1" i="1" dirty="0"/>
+              <a:t>puis cliquer sur  </a:t>
+            </a:r>
+            <a:r>
+              <a:rPr lang="fr-FR" b="1" dirty="0"/>
+              <a:t>'EDT – Matières de l’école</a:t>
+            </a:r>
+            <a:r>
+              <a:rPr lang="fr-FR" b="1" dirty="0" smtClean="0"/>
+              <a:t>')</a:t>
+            </a:r>
+            <a:r>
+              <a:rPr dirty="0" smtClean="0"/>
+              <a:t>, </a:t>
+            </a:r>
+            <a:r>
+              <a:rPr dirty="0" err="1"/>
+              <a:t>cliquez</a:t>
+            </a:r>
+            <a:r>
+              <a:rPr dirty="0"/>
+              <a:t> sur le bouton Modifier de la </a:t>
+            </a:r>
+            <a:r>
+              <a:rPr dirty="0" err="1"/>
+              <a:t>matière</a:t>
+            </a:r>
+            <a:r>
+              <a:rPr dirty="0"/>
+              <a:t>.</a:t>
             </a:r>
           </a:p>
           <a:p>
@@ -3562,7 +3969,40 @@
               </a:defRPr>
             </a:pPr>
             <a:r>
-              <a:t>2. Changez la valeur du Coefficient selon les directives pédagogiques.</a:t>
+              <a:rPr dirty="0"/>
+              <a:t>2. </a:t>
+            </a:r>
+            <a:r>
+              <a:rPr dirty="0" err="1"/>
+              <a:t>Changez</a:t>
+            </a:r>
+            <a:r>
+              <a:rPr dirty="0"/>
+              <a:t> la </a:t>
+            </a:r>
+            <a:r>
+              <a:rPr dirty="0" err="1"/>
+              <a:t>valeur</a:t>
+            </a:r>
+            <a:r>
+              <a:rPr dirty="0"/>
+              <a:t> du Coefficient </a:t>
+            </a:r>
+            <a:r>
+              <a:rPr dirty="0" err="1"/>
+              <a:t>selon</a:t>
+            </a:r>
+            <a:r>
+              <a:rPr dirty="0"/>
+              <a:t> les directives </a:t>
+            </a:r>
+            <a:r>
+              <a:rPr dirty="0" err="1"/>
+              <a:t>pédagogiques</a:t>
+            </a:r>
+            <a:r>
+              <a:rPr dirty="0"/>
+              <a:t>.</a:t>
             </a:r>
           </a:p>
           <a:p>
@@ -3575,7 +4015,48 @@
               </a:defRPr>
             </a:pPr>
             <a:r>
-              <a:t>3. Cliquez sur 'Enregistrer'. Les bulletins recalculent automatiquement les moyennes.</a:t>
+              <a:rPr dirty="0"/>
+              <a:t>3. </a:t>
+            </a:r>
+            <a:r>
+              <a:rPr dirty="0" err="1"/>
+              <a:t>Cliquez</a:t>
+            </a:r>
+            <a:r>
+              <a:rPr dirty="0"/>
+              <a:t> sur '</a:t>
+            </a:r>
+            <a:r>
+              <a:rPr dirty="0" err="1"/>
+              <a:t>Enregistrer</a:t>
+            </a:r>
+            <a:r>
+              <a:rPr dirty="0"/>
+              <a:t>'. Les bulletins </a:t>
+            </a:r>
+            <a:r>
+              <a:rPr dirty="0" err="1"/>
+              <a:t>recalculent</a:t>
+            </a:r>
+            <a:r>
+              <a:rPr dirty="0"/>
+              <a:t> </a:t>
+            </a:r>
+            <a:r>
+              <a:rPr dirty="0" err="1"/>
+              <a:t>automatiquement</a:t>
+            </a:r>
+            <a:r>
+              <a:rPr dirty="0"/>
+              <a:t> les </a:t>
+            </a:r>
+            <a:r>
+              <a:rPr dirty="0" err="1"/>
+              <a:t>moyennes</a:t>
+            </a:r>
+            <a:r>
+              <a:rPr dirty="0"/>
+              <a:t>.</a:t>
             </a:r>
           </a:p>
         </p:txBody>
@@ -3589,7 +4070,7 @@
 </file>
 
 <file path=ppt/slides/slide12.xml><?xml version="1.0" encoding="utf-8"?>
-<p:sld xmlns:a="http://schemas.openxmlformats.org/drawingml/2006/main" xmlns:p="http://schemas.openxmlformats.org/presentationml/2006/main" xmlns:r="http://schemas.openxmlformats.org/officeDocument/2006/relationships">
+<p:sld xmlns:a="http://schemas.openxmlformats.org/drawingml/2006/main" xmlns:r="http://schemas.openxmlformats.org/officeDocument/2006/relationships" xmlns:p="http://schemas.openxmlformats.org/presentationml/2006/main">
   <p:cSld>
     <p:bg>
       <p:bgPr>
@@ -3605,7 +4086,14 @@
         <p:cNvGrpSpPr/>
         <p:nvPr/>
       </p:nvGrpSpPr>
-      <p:grpSpPr/>
+      <p:grpSpPr>
+        <a:xfrm>
+          <a:off x="0" y="0"/>
+          <a:ext cx="0" cy="0"/>
+          <a:chOff x="0" y="0"/>
+          <a:chExt cx="0" cy="0"/>
+        </a:xfrm>
+      </p:grpSpPr>
       <p:sp>
         <p:nvSpPr>
           <p:cNvPr id="2" name="TextBox 1"/>
@@ -3694,7 +4182,7 @@
         <p:spPr>
           <a:xfrm>
             <a:off x="457200" y="1143000"/>
-            <a:ext cx="11247120" cy="5394960"/>
+            <a:ext cx="11247120" cy="1323439"/>
           </a:xfrm>
           <a:prstGeom prst="rect">
             <a:avLst/>
@@ -3716,8 +4204,66 @@
               </a:defRPr>
             </a:pPr>
             <a:r>
-              <a:t>1. Allez dans l'onglet 'Enseignants &amp; Équipes'.</a:t>
-            </a:r>
+              <a:rPr dirty="0"/>
+              <a:t>1. </a:t>
+            </a:r>
+            <a:r>
+              <a:rPr dirty="0" err="1"/>
+              <a:t>Allez</a:t>
+            </a:r>
+            <a:r>
+              <a:rPr dirty="0"/>
+              <a:t> </a:t>
+            </a:r>
+            <a:r>
+              <a:rPr dirty="0" err="1"/>
+              <a:t>dans</a:t>
+            </a:r>
+            <a:r>
+              <a:rPr dirty="0"/>
+              <a:t> </a:t>
+            </a:r>
+            <a:r>
+              <a:rPr dirty="0" err="1"/>
+              <a:t>l'onglet</a:t>
+            </a:r>
+            <a:r>
+              <a:rPr dirty="0"/>
+              <a:t> </a:t>
+            </a:r>
+            <a:r>
+              <a:rPr dirty="0" smtClean="0"/>
+              <a:t>'</a:t>
+            </a:r>
+            <a:r>
+              <a:rPr lang="fr-FR" dirty="0" smtClean="0"/>
+              <a:t>Gestion </a:t>
+            </a:r>
+            <a:r>
+              <a:rPr dirty="0" smtClean="0"/>
+              <a:t>&amp; </a:t>
+            </a:r>
+            <a:r>
+              <a:rPr lang="fr-FR" dirty="0" smtClean="0"/>
+              <a:t>Scolarité(ERP)</a:t>
+            </a:r>
+            <a:r>
+              <a:rPr dirty="0" smtClean="0"/>
+              <a:t>'</a:t>
+            </a:r>
+            <a:r>
+              <a:rPr lang="fr-FR" dirty="0" smtClean="0"/>
+              <a:t> puis cliquer sur </a:t>
+            </a:r>
+            <a:r>
+              <a:rPr lang="fr-FR" dirty="0"/>
+              <a:t>'Enseignants &amp; Équipes</a:t>
+            </a:r>
+            <a:r>
+              <a:rPr lang="fr-FR" dirty="0" smtClean="0"/>
+              <a:t>'.</a:t>
+            </a:r>
+            <a:endParaRPr dirty="0"/>
           </a:p>
           <a:p>
             <a:pPr>
@@ -3729,7 +4275,40 @@
               </a:defRPr>
             </a:pPr>
             <a:r>
-              <a:t>2. Dans le formulaire d'ajout, saisissez :</a:t>
+              <a:rPr dirty="0"/>
+              <a:t>2. </a:t>
+            </a:r>
+            <a:r>
+              <a:rPr dirty="0" err="1"/>
+              <a:t>Dans</a:t>
+            </a:r>
+            <a:r>
+              <a:rPr dirty="0"/>
+              <a:t> le </a:t>
+            </a:r>
+            <a:r>
+              <a:rPr dirty="0" err="1"/>
+              <a:t>formulaire</a:t>
+            </a:r>
+            <a:r>
+              <a:rPr dirty="0"/>
+              <a:t> </a:t>
+            </a:r>
+            <a:r>
+              <a:rPr dirty="0" err="1"/>
+              <a:t>d'ajout</a:t>
+            </a:r>
+            <a:r>
+              <a:rPr dirty="0"/>
+              <a:t>, </a:t>
+            </a:r>
+            <a:r>
+              <a:rPr dirty="0" err="1"/>
+              <a:t>saisissez</a:t>
+            </a:r>
+            <a:r>
+              <a:rPr dirty="0"/>
+              <a:t> :</a:t>
             </a:r>
           </a:p>
           <a:p>
@@ -3742,8 +4321,22 @@
               </a:defRPr>
             </a:pPr>
             <a:r>
-              <a:t>    - Nom et Prénom complets</a:t>
-            </a:r>
+              <a:rPr dirty="0"/>
+              <a:t>    - Nom et </a:t>
+            </a:r>
+            <a:r>
+              <a:rPr dirty="0" err="1"/>
+              <a:t>Prénom</a:t>
+            </a:r>
+            <a:r>
+              <a:rPr dirty="0"/>
+              <a:t> </a:t>
+            </a:r>
+            <a:r>
+              <a:rPr dirty="0" err="1"/>
+              <a:t>complets</a:t>
+            </a:r>
+            <a:endParaRPr dirty="0"/>
           </a:p>
           <a:p>
             <a:pPr>
@@ -3755,7 +4348,24 @@
               </a:defRPr>
             </a:pPr>
             <a:r>
-              <a:t>    - Matière(s) enseignée(s)</a:t>
+              <a:rPr dirty="0"/>
+              <a:t>    - </a:t>
+            </a:r>
+            <a:r>
+              <a:rPr dirty="0" err="1"/>
+              <a:t>Matière</a:t>
+            </a:r>
+            <a:r>
+              <a:rPr dirty="0"/>
+              <a:t>(s) </a:t>
+            </a:r>
+            <a:r>
+              <a:rPr dirty="0" err="1"/>
+              <a:t>enseignée</a:t>
+            </a:r>
+            <a:r>
+              <a:rPr dirty="0"/>
+              <a:t>(s)</a:t>
             </a:r>
           </a:p>
           <a:p>
@@ -3768,8 +4378,22 @@
               </a:defRPr>
             </a:pPr>
             <a:r>
-              <a:t>    - Téléphone et Email professionnel</a:t>
-            </a:r>
+              <a:rPr dirty="0"/>
+              <a:t>    - </a:t>
+            </a:r>
+            <a:r>
+              <a:rPr dirty="0" err="1"/>
+              <a:t>Téléphone</a:t>
+            </a:r>
+            <a:r>
+              <a:rPr dirty="0"/>
+              <a:t> et Email </a:t>
+            </a:r>
+            <a:r>
+              <a:rPr dirty="0" err="1"/>
+              <a:t>professionnel</a:t>
+            </a:r>
+            <a:endParaRPr dirty="0"/>
           </a:p>
           <a:p>
             <a:pPr>
@@ -3781,7 +4405,40 @@
               </a:defRPr>
             </a:pPr>
             <a:r>
-              <a:t>    - Statut (Titulaire, Contractuel, Vacataire)</a:t>
+              <a:rPr dirty="0"/>
+              <a:t>    - </a:t>
+            </a:r>
+            <a:r>
+              <a:rPr dirty="0" err="1"/>
+              <a:t>Statut</a:t>
+            </a:r>
+            <a:r>
+              <a:rPr dirty="0"/>
+              <a:t> (</a:t>
+            </a:r>
+            <a:r>
+              <a:rPr dirty="0" err="1"/>
+              <a:t>Titulaire</a:t>
+            </a:r>
+            <a:r>
+              <a:rPr dirty="0"/>
+              <a:t>, </a:t>
+            </a:r>
+            <a:r>
+              <a:rPr dirty="0" err="1"/>
+              <a:t>Contractuel</a:t>
+            </a:r>
+            <a:r>
+              <a:rPr dirty="0"/>
+              <a:t>, </a:t>
+            </a:r>
+            <a:r>
+              <a:rPr dirty="0" err="1"/>
+              <a:t>Vacataire</a:t>
+            </a:r>
+            <a:r>
+              <a:rPr dirty="0"/>
+              <a:t>)</a:t>
             </a:r>
           </a:p>
           <a:p>
@@ -3794,7 +4451,32 @@
               </a:defRPr>
             </a:pPr>
             <a:r>
-              <a:t>7. Cliquez sur 'Ajouter l'Enseignant'.</a:t>
+              <a:rPr dirty="0"/>
+              <a:t>7. </a:t>
+            </a:r>
+            <a:r>
+              <a:rPr dirty="0" err="1"/>
+              <a:t>Cliquez</a:t>
+            </a:r>
+            <a:r>
+              <a:rPr dirty="0"/>
+              <a:t> sur '</a:t>
+            </a:r>
+            <a:r>
+              <a:rPr dirty="0" err="1"/>
+              <a:t>Ajouter</a:t>
+            </a:r>
+            <a:r>
+              <a:rPr dirty="0"/>
+              <a:t> </a:t>
+            </a:r>
+            <a:r>
+              <a:rPr dirty="0" err="1"/>
+              <a:t>l'Enseignant</a:t>
+            </a:r>
+            <a:r>
+              <a:rPr dirty="0"/>
+              <a:t>'.</a:t>
             </a:r>
           </a:p>
         </p:txBody>
@@ -3808,7 +4490,7 @@
 </file>
 
 <file path=ppt/slides/slide13.xml><?xml version="1.0" encoding="utf-8"?>
-<p:sld xmlns:a="http://schemas.openxmlformats.org/drawingml/2006/main" xmlns:p="http://schemas.openxmlformats.org/presentationml/2006/main" xmlns:r="http://schemas.openxmlformats.org/officeDocument/2006/relationships">
+<p:sld xmlns:a="http://schemas.openxmlformats.org/drawingml/2006/main" xmlns:r="http://schemas.openxmlformats.org/officeDocument/2006/relationships" xmlns:p="http://schemas.openxmlformats.org/presentationml/2006/main">
   <p:cSld>
     <p:bg>
       <p:bgPr>
@@ -3824,7 +4506,14 @@
         <p:cNvGrpSpPr/>
         <p:nvPr/>
       </p:nvGrpSpPr>
-      <p:grpSpPr/>
+      <p:grpSpPr>
+        <a:xfrm>
+          <a:off x="0" y="0"/>
+          <a:ext cx="0" cy="0"/>
+          <a:chOff x="0" y="0"/>
+          <a:chExt cx="0" cy="0"/>
+        </a:xfrm>
+      </p:grpSpPr>
       <p:sp>
         <p:nvSpPr>
           <p:cNvPr id="2" name="TextBox 1"/>
@@ -3913,7 +4602,7 @@
         <p:spPr>
           <a:xfrm>
             <a:off x="457200" y="1143000"/>
-            <a:ext cx="11247120" cy="5394960"/>
+            <a:ext cx="11247120" cy="1200329"/>
           </a:xfrm>
           <a:prstGeom prst="rect">
             <a:avLst/>
@@ -3935,8 +4624,70 @@
               </a:defRPr>
             </a:pPr>
             <a:r>
-              <a:t>1. Allez dans l'Espace Enseignant (Portail Professeur).</a:t>
-            </a:r>
+              <a:rPr dirty="0"/>
+              <a:t>1. </a:t>
+            </a:r>
+            <a:r>
+              <a:rPr dirty="0" err="1"/>
+              <a:t>Allez</a:t>
+            </a:r>
+            <a:r>
+              <a:rPr dirty="0"/>
+              <a:t> </a:t>
+            </a:r>
+            <a:r>
+              <a:rPr dirty="0" err="1"/>
+              <a:t>dans</a:t>
+            </a:r>
+            <a:r>
+              <a:rPr dirty="0"/>
+              <a:t> </a:t>
+            </a:r>
+            <a:r>
+              <a:rPr dirty="0" err="1"/>
+              <a:t>l'Espace</a:t>
+            </a:r>
+            <a:r>
+              <a:rPr dirty="0"/>
+              <a:t> </a:t>
+            </a:r>
+            <a:r>
+              <a:rPr dirty="0" err="1"/>
+              <a:t>Enseignant</a:t>
+            </a:r>
+            <a:r>
+              <a:rPr dirty="0"/>
+              <a:t> </a:t>
+            </a:r>
+            <a:r>
+              <a:rPr dirty="0" smtClean="0"/>
+              <a:t>(</a:t>
+            </a:r>
+            <a:r>
+              <a:rPr lang="fr-FR" dirty="0" smtClean="0"/>
+              <a:t>dans l’onglet </a:t>
+            </a:r>
+            <a:r>
+              <a:rPr dirty="0" err="1" smtClean="0"/>
+              <a:t>Portail</a:t>
+            </a:r>
+            <a:r>
+              <a:rPr dirty="0" smtClean="0"/>
+              <a:t> </a:t>
+            </a:r>
+            <a:r>
+              <a:rPr lang="fr-FR" dirty="0" err="1" smtClean="0"/>
+              <a:t>Dedies</a:t>
+            </a:r>
+            <a:r>
+              <a:rPr lang="fr-FR" dirty="0" smtClean="0"/>
+              <a:t> puis cliquer sur ‘Espace enseignant individuel</a:t>
+            </a:r>
+            <a:r>
+              <a:rPr dirty="0" smtClean="0"/>
+              <a:t>).</a:t>
+            </a:r>
+            <a:endParaRPr dirty="0"/>
           </a:p>
           <a:p>
             <a:pPr>
@@ -3948,7 +4699,56 @@
               </a:defRPr>
             </a:pPr>
             <a:r>
-              <a:t>2. Sélectionnez le professeur dans la liste déroulante en haut.</a:t>
+              <a:rPr dirty="0"/>
+              <a:t>2. </a:t>
+            </a:r>
+            <a:r>
+              <a:rPr dirty="0" err="1"/>
+              <a:t>Sélectionnez</a:t>
+            </a:r>
+            <a:r>
+              <a:rPr dirty="0"/>
+              <a:t> le </a:t>
+            </a:r>
+            <a:r>
+              <a:rPr dirty="0" err="1"/>
+              <a:t>professeur</a:t>
+            </a:r>
+            <a:r>
+              <a:rPr dirty="0"/>
+              <a:t> </a:t>
+            </a:r>
+            <a:r>
+              <a:rPr dirty="0" err="1"/>
+              <a:t>dans</a:t>
+            </a:r>
+            <a:r>
+              <a:rPr dirty="0"/>
+              <a:t> la </a:t>
+            </a:r>
+            <a:r>
+              <a:rPr dirty="0" err="1"/>
+              <a:t>liste</a:t>
+            </a:r>
+            <a:r>
+              <a:rPr dirty="0"/>
+              <a:t> </a:t>
+            </a:r>
+            <a:r>
+              <a:rPr dirty="0" err="1"/>
+              <a:t>déroulante</a:t>
+            </a:r>
+            <a:r>
+              <a:rPr dirty="0"/>
+              <a:t> </a:t>
+            </a:r>
+            <a:r>
+              <a:rPr dirty="0" err="1"/>
+              <a:t>en</a:t>
+            </a:r>
+            <a:r>
+              <a:rPr dirty="0"/>
+              <a:t> haut.</a:t>
             </a:r>
           </a:p>
           <a:p>
@@ -3961,7 +4761,40 @@
               </a:defRPr>
             </a:pPr>
             <a:r>
-              <a:t>3. Repérez la grille horaire hebdomadaire affichée.</a:t>
+              <a:rPr dirty="0"/>
+              <a:t>3. </a:t>
+            </a:r>
+            <a:r>
+              <a:rPr dirty="0" err="1"/>
+              <a:t>Repérez</a:t>
+            </a:r>
+            <a:r>
+              <a:rPr dirty="0"/>
+              <a:t> la grille </a:t>
+            </a:r>
+            <a:r>
+              <a:rPr dirty="0" err="1"/>
+              <a:t>horaire</a:t>
+            </a:r>
+            <a:r>
+              <a:rPr dirty="0"/>
+              <a:t> </a:t>
+            </a:r>
+            <a:r>
+              <a:rPr dirty="0" err="1"/>
+              <a:t>hebdomadaire</a:t>
+            </a:r>
+            <a:r>
+              <a:rPr dirty="0"/>
+              <a:t> </a:t>
+            </a:r>
+            <a:r>
+              <a:rPr dirty="0" err="1"/>
+              <a:t>affichée</a:t>
+            </a:r>
+            <a:r>
+              <a:rPr dirty="0"/>
+              <a:t>.</a:t>
             </a:r>
           </a:p>
           <a:p>
@@ -3974,7 +4807,64 @@
               </a:defRPr>
             </a:pPr>
             <a:r>
-              <a:t>4. Cliquez directement sur une case de la grille pour la basculer en 'Indisponible' (case grisée avec ❌).</a:t>
+              <a:rPr dirty="0"/>
+              <a:t>4. </a:t>
+            </a:r>
+            <a:r>
+              <a:rPr dirty="0" err="1"/>
+              <a:t>Cliquez</a:t>
+            </a:r>
+            <a:r>
+              <a:rPr dirty="0"/>
+              <a:t> </a:t>
+            </a:r>
+            <a:r>
+              <a:rPr dirty="0" err="1"/>
+              <a:t>directement</a:t>
+            </a:r>
+            <a:r>
+              <a:rPr dirty="0"/>
+              <a:t> sur </a:t>
+            </a:r>
+            <a:r>
+              <a:rPr dirty="0" err="1"/>
+              <a:t>une</a:t>
+            </a:r>
+            <a:r>
+              <a:rPr dirty="0"/>
+              <a:t> case de la grille pour la </a:t>
+            </a:r>
+            <a:r>
+              <a:rPr dirty="0" err="1"/>
+              <a:t>basculer</a:t>
+            </a:r>
+            <a:r>
+              <a:rPr dirty="0"/>
+              <a:t> </a:t>
+            </a:r>
+            <a:r>
+              <a:rPr dirty="0" err="1"/>
+              <a:t>en</a:t>
+            </a:r>
+            <a:r>
+              <a:rPr dirty="0"/>
+              <a:t> '</a:t>
+            </a:r>
+            <a:r>
+              <a:rPr dirty="0" err="1"/>
+              <a:t>Indisponible</a:t>
+            </a:r>
+            <a:r>
+              <a:rPr dirty="0"/>
+              <a:t>' (case </a:t>
+            </a:r>
+            <a:r>
+              <a:rPr dirty="0" err="1"/>
+              <a:t>grisée</a:t>
+            </a:r>
+            <a:r>
+              <a:rPr dirty="0"/>
+              <a:t> avec ❌).</a:t>
             </a:r>
           </a:p>
           <a:p>
@@ -3987,7 +4877,40 @@
               </a:defRPr>
             </a:pPr>
             <a:r>
-              <a:t>5. Recliquez sur la case pour la remettre en disponible.</a:t>
+              <a:rPr dirty="0"/>
+              <a:t>5. </a:t>
+            </a:r>
+            <a:r>
+              <a:rPr dirty="0" err="1"/>
+              <a:t>Recliquez</a:t>
+            </a:r>
+            <a:r>
+              <a:rPr dirty="0"/>
+              <a:t> sur la case pour la </a:t>
+            </a:r>
+            <a:r>
+              <a:rPr dirty="0" err="1"/>
+              <a:t>remettre</a:t>
+            </a:r>
+            <a:r>
+              <a:rPr dirty="0"/>
+              <a:t> </a:t>
+            </a:r>
+            <a:r>
+              <a:rPr dirty="0" err="1"/>
+              <a:t>en</a:t>
+            </a:r>
+            <a:r>
+              <a:rPr dirty="0"/>
+              <a:t> </a:t>
+            </a:r>
+            <a:r>
+              <a:rPr dirty="0" err="1"/>
+              <a:t>disponible</a:t>
+            </a:r>
+            <a:r>
+              <a:rPr dirty="0"/>
+              <a:t>.</a:t>
             </a:r>
           </a:p>
           <a:p>
@@ -4000,7 +4923,72 @@
               </a:defRPr>
             </a:pPr>
             <a:r>
-              <a:t>6. Les créneaux indisponibles bloquent automatiquement la planification de cours sur ces plages.</a:t>
+              <a:rPr dirty="0"/>
+              <a:t>6. Les </a:t>
+            </a:r>
+            <a:r>
+              <a:rPr dirty="0" err="1"/>
+              <a:t>créneaux</a:t>
+            </a:r>
+            <a:r>
+              <a:rPr dirty="0"/>
+              <a:t> </a:t>
+            </a:r>
+            <a:r>
+              <a:rPr dirty="0" err="1"/>
+              <a:t>indisponibles</a:t>
+            </a:r>
+            <a:r>
+              <a:rPr dirty="0"/>
+              <a:t> </a:t>
+            </a:r>
+            <a:r>
+              <a:rPr dirty="0" err="1"/>
+              <a:t>bloquent</a:t>
+            </a:r>
+            <a:r>
+              <a:rPr dirty="0"/>
+              <a:t> </a:t>
+            </a:r>
+            <a:r>
+              <a:rPr dirty="0" err="1"/>
+              <a:t>automatiquement</a:t>
+            </a:r>
+            <a:r>
+              <a:rPr dirty="0"/>
+              <a:t> la </a:t>
+            </a:r>
+            <a:r>
+              <a:rPr dirty="0" err="1"/>
+              <a:t>planification</a:t>
+            </a:r>
+            <a:r>
+              <a:rPr dirty="0"/>
+              <a:t> de </a:t>
+            </a:r>
+            <a:r>
+              <a:rPr dirty="0" err="1"/>
+              <a:t>cours</a:t>
+            </a:r>
+            <a:r>
+              <a:rPr dirty="0"/>
+              <a:t> sur </a:t>
+            </a:r>
+            <a:r>
+              <a:rPr dirty="0" err="1"/>
+              <a:t>ces</a:t>
+            </a:r>
+            <a:r>
+              <a:rPr dirty="0"/>
+              <a:t> </a:t>
+            </a:r>
+            <a:r>
+              <a:rPr dirty="0" err="1"/>
+              <a:t>plages</a:t>
+            </a:r>
+            <a:r>
+              <a:rPr dirty="0"/>
+              <a:t>.</a:t>
             </a:r>
           </a:p>
         </p:txBody>
@@ -4014,7 +5002,7 @@
 </file>
 
 <file path=ppt/slides/slide14.xml><?xml version="1.0" encoding="utf-8"?>
-<p:sld xmlns:a="http://schemas.openxmlformats.org/drawingml/2006/main" xmlns:p="http://schemas.openxmlformats.org/presentationml/2006/main" xmlns:r="http://schemas.openxmlformats.org/officeDocument/2006/relationships">
+<p:sld xmlns:a="http://schemas.openxmlformats.org/drawingml/2006/main" xmlns:r="http://schemas.openxmlformats.org/officeDocument/2006/relationships" xmlns:p="http://schemas.openxmlformats.org/presentationml/2006/main">
   <p:cSld>
     <p:bg>
       <p:bgPr>
@@ -4030,7 +5018,14 @@
         <p:cNvGrpSpPr/>
         <p:nvPr/>
       </p:nvGrpSpPr>
-      <p:grpSpPr/>
+      <p:grpSpPr>
+        <a:xfrm>
+          <a:off x="0" y="0"/>
+          <a:ext cx="0" cy="0"/>
+          <a:chOff x="0" y="0"/>
+          <a:chExt cx="0" cy="0"/>
+        </a:xfrm>
+      </p:grpSpPr>
       <p:sp>
         <p:nvSpPr>
           <p:cNvPr id="2" name="TextBox 1"/>
@@ -4119,7 +5114,7 @@
         <p:spPr>
           <a:xfrm>
             <a:off x="457200" y="1143000"/>
-            <a:ext cx="11247120" cy="5394960"/>
+            <a:ext cx="11247120" cy="830997"/>
           </a:xfrm>
           <a:prstGeom prst="rect">
             <a:avLst/>
@@ -4141,8 +5136,50 @@
               </a:defRPr>
             </a:pPr>
             <a:r>
-              <a:t>1. Allez dans l'onglet de gestion des Classes.</a:t>
-            </a:r>
+              <a:rPr dirty="0"/>
+              <a:t>1. </a:t>
+            </a:r>
+            <a:r>
+              <a:rPr dirty="0" err="1"/>
+              <a:t>Allez</a:t>
+            </a:r>
+            <a:r>
+              <a:rPr dirty="0"/>
+              <a:t> </a:t>
+            </a:r>
+            <a:r>
+              <a:rPr dirty="0" err="1"/>
+              <a:t>dans</a:t>
+            </a:r>
+            <a:r>
+              <a:rPr dirty="0"/>
+              <a:t> </a:t>
+            </a:r>
+            <a:r>
+              <a:rPr dirty="0" err="1"/>
+              <a:t>l'onglet</a:t>
+            </a:r>
+            <a:r>
+              <a:rPr dirty="0"/>
+              <a:t> </a:t>
+            </a:r>
+            <a:r>
+              <a:rPr lang="fr-FR" dirty="0" smtClean="0"/>
+              <a:t>(Emploi du temps – EDT  puis cliquer sur le sous menu  ‘EDT- classes &amp; </a:t>
+            </a:r>
+            <a:r>
+              <a:rPr lang="fr-FR" dirty="0" err="1" smtClean="0"/>
+              <a:t>Series</a:t>
+            </a:r>
+            <a:r>
+              <a:rPr lang="fr-FR" dirty="0" smtClean="0"/>
+              <a:t>’)</a:t>
+            </a:r>
+            <a:r>
+              <a:rPr dirty="0" smtClean="0"/>
+              <a:t>.</a:t>
+            </a:r>
+            <a:endParaRPr dirty="0"/>
           </a:p>
           <a:p>
             <a:pPr>
@@ -4154,7 +5191,32 @@
               </a:defRPr>
             </a:pPr>
             <a:r>
-              <a:t>2. Cliquez sur Modifier pour la classe concernée.</a:t>
+              <a:rPr dirty="0"/>
+              <a:t>2. </a:t>
+            </a:r>
+            <a:r>
+              <a:rPr dirty="0" err="1"/>
+              <a:t>Cliquez</a:t>
+            </a:r>
+            <a:r>
+              <a:rPr dirty="0"/>
+              <a:t> sur Modifier pour la </a:t>
+            </a:r>
+            <a:r>
+              <a:rPr dirty="0" err="1"/>
+              <a:t>classe</a:t>
+            </a:r>
+            <a:r>
+              <a:rPr dirty="0"/>
+              <a:t> </a:t>
+            </a:r>
+            <a:r>
+              <a:rPr dirty="0" err="1"/>
+              <a:t>concernée</a:t>
+            </a:r>
+            <a:r>
+              <a:rPr dirty="0"/>
+              <a:t>.</a:t>
             </a:r>
           </a:p>
           <a:p>
@@ -4167,7 +5229,64 @@
               </a:defRPr>
             </a:pPr>
             <a:r>
-              <a:t>3. Dans le champ 'Professeur Principal', sélectionnez l'enseignant dans la liste déroulante.</a:t>
+              <a:rPr dirty="0"/>
+              <a:t>3. </a:t>
+            </a:r>
+            <a:r>
+              <a:rPr dirty="0" err="1"/>
+              <a:t>Dans</a:t>
+            </a:r>
+            <a:r>
+              <a:rPr dirty="0"/>
+              <a:t> le champ '</a:t>
+            </a:r>
+            <a:r>
+              <a:rPr dirty="0" err="1"/>
+              <a:t>Professeur</a:t>
+            </a:r>
+            <a:r>
+              <a:rPr dirty="0"/>
+              <a:t> Principal', </a:t>
+            </a:r>
+            <a:r>
+              <a:rPr dirty="0" err="1"/>
+              <a:t>sélectionnez</a:t>
+            </a:r>
+            <a:r>
+              <a:rPr dirty="0"/>
+              <a:t> </a:t>
+            </a:r>
+            <a:r>
+              <a:rPr dirty="0" err="1"/>
+              <a:t>l'enseignant</a:t>
+            </a:r>
+            <a:r>
+              <a:rPr dirty="0"/>
+              <a:t> </a:t>
+            </a:r>
+            <a:r>
+              <a:rPr dirty="0" err="1"/>
+              <a:t>dans</a:t>
+            </a:r>
+            <a:r>
+              <a:rPr dirty="0"/>
+              <a:t> la </a:t>
+            </a:r>
+            <a:r>
+              <a:rPr dirty="0" err="1"/>
+              <a:t>liste</a:t>
+            </a:r>
+            <a:r>
+              <a:rPr dirty="0"/>
+              <a:t> </a:t>
+            </a:r>
+            <a:r>
+              <a:rPr dirty="0" err="1"/>
+              <a:t>déroulante</a:t>
+            </a:r>
+            <a:r>
+              <a:rPr dirty="0"/>
+              <a:t>.</a:t>
             </a:r>
           </a:p>
           <a:p>
@@ -4180,7 +5299,56 @@
               </a:defRPr>
             </a:pPr>
             <a:r>
-              <a:t>4. Cliquez sur 'Enregistrer'. Le nom apparaîtra sur tous les bulletins de cette classe.</a:t>
+              <a:rPr dirty="0"/>
+              <a:t>4. </a:t>
+            </a:r>
+            <a:r>
+              <a:rPr dirty="0" err="1"/>
+              <a:t>Cliquez</a:t>
+            </a:r>
+            <a:r>
+              <a:rPr dirty="0"/>
+              <a:t> sur '</a:t>
+            </a:r>
+            <a:r>
+              <a:rPr dirty="0" err="1"/>
+              <a:t>Enregistrer</a:t>
+            </a:r>
+            <a:r>
+              <a:rPr dirty="0"/>
+              <a:t>'. Le nom </a:t>
+            </a:r>
+            <a:r>
+              <a:rPr dirty="0" err="1"/>
+              <a:t>apparaîtra</a:t>
+            </a:r>
+            <a:r>
+              <a:rPr dirty="0"/>
+              <a:t> sur </a:t>
+            </a:r>
+            <a:r>
+              <a:rPr dirty="0" err="1"/>
+              <a:t>tous</a:t>
+            </a:r>
+            <a:r>
+              <a:rPr dirty="0"/>
+              <a:t> les bulletins de </a:t>
+            </a:r>
+            <a:r>
+              <a:rPr dirty="0" err="1"/>
+              <a:t>cette</a:t>
+            </a:r>
+            <a:r>
+              <a:rPr dirty="0"/>
+              <a:t> </a:t>
+            </a:r>
+            <a:r>
+              <a:rPr dirty="0" err="1"/>
+              <a:t>classe</a:t>
+            </a:r>
+            <a:r>
+              <a:rPr dirty="0"/>
+              <a:t>.</a:t>
             </a:r>
           </a:p>
         </p:txBody>
@@ -4194,7 +5362,7 @@
 </file>
 
 <file path=ppt/slides/slide15.xml><?xml version="1.0" encoding="utf-8"?>
-<p:sld xmlns:a="http://schemas.openxmlformats.org/drawingml/2006/main" xmlns:p="http://schemas.openxmlformats.org/presentationml/2006/main" xmlns:r="http://schemas.openxmlformats.org/officeDocument/2006/relationships">
+<p:sld xmlns:a="http://schemas.openxmlformats.org/drawingml/2006/main" xmlns:r="http://schemas.openxmlformats.org/officeDocument/2006/relationships" xmlns:p="http://schemas.openxmlformats.org/presentationml/2006/main">
   <p:cSld>
     <p:bg>
       <p:bgPr>
@@ -4210,7 +5378,14 @@
         <p:cNvGrpSpPr/>
         <p:nvPr/>
       </p:nvGrpSpPr>
-      <p:grpSpPr/>
+      <p:grpSpPr>
+        <a:xfrm>
+          <a:off x="0" y="0"/>
+          <a:ext cx="0" cy="0"/>
+          <a:chOff x="0" y="0"/>
+          <a:chExt cx="0" cy="0"/>
+        </a:xfrm>
+      </p:grpSpPr>
       <p:sp>
         <p:nvSpPr>
           <p:cNvPr id="2" name="TextBox 1"/>
@@ -4299,7 +5474,7 @@
         <p:spPr>
           <a:xfrm>
             <a:off x="457200" y="1143000"/>
-            <a:ext cx="11247120" cy="5394960"/>
+            <a:ext cx="11247120" cy="1323439"/>
           </a:xfrm>
           <a:prstGeom prst="rect">
             <a:avLst/>
@@ -4321,8 +5496,58 @@
               </a:defRPr>
             </a:pPr>
             <a:r>
-              <a:t>1. Allez dans l'onglet 'EDT - Salles &amp; Classes'.</a:t>
-            </a:r>
+              <a:rPr dirty="0"/>
+              <a:t>1. </a:t>
+            </a:r>
+            <a:r>
+              <a:rPr dirty="0" err="1"/>
+              <a:t>Allez</a:t>
+            </a:r>
+            <a:r>
+              <a:rPr dirty="0"/>
+              <a:t> </a:t>
+            </a:r>
+            <a:r>
+              <a:rPr dirty="0" err="1"/>
+              <a:t>dans</a:t>
+            </a:r>
+            <a:r>
+              <a:rPr dirty="0"/>
+              <a:t> </a:t>
+            </a:r>
+            <a:r>
+              <a:rPr dirty="0" err="1" smtClean="0"/>
+              <a:t>l'onglet</a:t>
+            </a:r>
+            <a:r>
+              <a:rPr lang="fr-FR" dirty="0" smtClean="0"/>
+              <a:t> (Emploi du Temps – EDT   puis cliquer sur le sous menu </a:t>
+            </a:r>
+            <a:r>
+              <a:rPr dirty="0" smtClean="0"/>
+              <a:t> </a:t>
+            </a:r>
+            <a:r>
+              <a:rPr dirty="0"/>
+              <a:t>'EDT - </a:t>
+            </a:r>
+            <a:r>
+              <a:rPr dirty="0" err="1"/>
+              <a:t>Salles</a:t>
+            </a:r>
+            <a:r>
+              <a:rPr dirty="0"/>
+              <a:t> </a:t>
+            </a:r>
+            <a:r>
+              <a:rPr lang="fr-FR" dirty="0" smtClean="0"/>
+              <a:t>de cours</a:t>
+            </a:r>
+            <a:r>
+              <a:rPr dirty="0" smtClean="0"/>
+              <a:t>'.</a:t>
+            </a:r>
+            <a:endParaRPr dirty="0"/>
           </a:p>
           <a:p>
             <a:pPr>
@@ -4334,7 +5559,48 @@
               </a:defRPr>
             </a:pPr>
             <a:r>
-              <a:t>2. Dans le formulaire 'Ajouter une Salle', saisissez :</a:t>
+              <a:rPr dirty="0"/>
+              <a:t>2. </a:t>
+            </a:r>
+            <a:r>
+              <a:rPr dirty="0" err="1"/>
+              <a:t>Dans</a:t>
+            </a:r>
+            <a:r>
+              <a:rPr dirty="0"/>
+              <a:t> le </a:t>
+            </a:r>
+            <a:r>
+              <a:rPr dirty="0" err="1"/>
+              <a:t>formulaire</a:t>
+            </a:r>
+            <a:r>
+              <a:rPr dirty="0"/>
+              <a:t> '</a:t>
+            </a:r>
+            <a:r>
+              <a:rPr dirty="0" err="1"/>
+              <a:t>Ajouter</a:t>
+            </a:r>
+            <a:r>
+              <a:rPr dirty="0"/>
+              <a:t> </a:t>
+            </a:r>
+            <a:r>
+              <a:rPr dirty="0" err="1"/>
+              <a:t>une</a:t>
+            </a:r>
+            <a:r>
+              <a:rPr dirty="0"/>
+              <a:t> Salle', </a:t>
+            </a:r>
+            <a:r>
+              <a:rPr dirty="0" err="1"/>
+              <a:t>saisissez</a:t>
+            </a:r>
+            <a:r>
+              <a:rPr dirty="0"/>
+              <a:t> :</a:t>
             </a:r>
           </a:p>
           <a:p>
@@ -4347,7 +5613,24 @@
               </a:defRPr>
             </a:pPr>
             <a:r>
-              <a:t>    - Identifiant (ex: s101, slab, sgym)</a:t>
+              <a:rPr dirty="0"/>
+              <a:t>    - </a:t>
+            </a:r>
+            <a:r>
+              <a:rPr dirty="0" err="1"/>
+              <a:t>Identifiant</a:t>
+            </a:r>
+            <a:r>
+              <a:rPr dirty="0"/>
+              <a:t> (ex: s101, slab, </a:t>
+            </a:r>
+            <a:r>
+              <a:rPr dirty="0" err="1"/>
+              <a:t>sgym</a:t>
+            </a:r>
+            <a:r>
+              <a:rPr dirty="0"/>
+              <a:t>)</a:t>
             </a:r>
           </a:p>
           <a:p>
@@ -4360,7 +5643,16 @@
               </a:defRPr>
             </a:pPr>
             <a:r>
-              <a:t>    - Nom complet (ex: Salle 101 - Standard)</a:t>
+              <a:rPr dirty="0"/>
+              <a:t>    - Nom </a:t>
+            </a:r>
+            <a:r>
+              <a:rPr dirty="0" err="1"/>
+              <a:t>complet</a:t>
+            </a:r>
+            <a:r>
+              <a:rPr dirty="0"/>
+              <a:t> (ex: Salle 101 - Standard)</a:t>
             </a:r>
           </a:p>
           <a:p>
@@ -4373,7 +5665,24 @@
               </a:defRPr>
             </a:pPr>
             <a:r>
-              <a:t>    - Type : Standard, Laboratoire, Gymnase, Atelier</a:t>
+              <a:rPr dirty="0"/>
+              <a:t>    - Type : Standard, </a:t>
+            </a:r>
+            <a:r>
+              <a:rPr dirty="0" err="1"/>
+              <a:t>Laboratoire</a:t>
+            </a:r>
+            <a:r>
+              <a:rPr dirty="0"/>
+              <a:t>, </a:t>
+            </a:r>
+            <a:r>
+              <a:rPr dirty="0" err="1"/>
+              <a:t>Gymnase</a:t>
+            </a:r>
+            <a:r>
+              <a:rPr dirty="0"/>
+              <a:t>, Atelier</a:t>
             </a:r>
           </a:p>
           <a:p>
@@ -4386,8 +5695,22 @@
               </a:defRPr>
             </a:pPr>
             <a:r>
-              <a:t>    - Capacité maximale</a:t>
-            </a:r>
+              <a:rPr dirty="0"/>
+              <a:t>    - </a:t>
+            </a:r>
+            <a:r>
+              <a:rPr dirty="0" err="1"/>
+              <a:t>Capacité</a:t>
+            </a:r>
+            <a:r>
+              <a:rPr dirty="0"/>
+              <a:t> </a:t>
+            </a:r>
+            <a:r>
+              <a:rPr dirty="0" err="1"/>
+              <a:t>maximale</a:t>
+            </a:r>
+            <a:endParaRPr dirty="0"/>
           </a:p>
           <a:p>
             <a:pPr>
@@ -4399,7 +5722,64 @@
               </a:defRPr>
             </a:pPr>
             <a:r>
-              <a:t>7. Cliquez sur 'Ajouter la Salle'. Elle est disponible dans le planificateur d'EDT.</a:t>
+              <a:rPr dirty="0"/>
+              <a:t>7. </a:t>
+            </a:r>
+            <a:r>
+              <a:rPr dirty="0" err="1"/>
+              <a:t>Cliquez</a:t>
+            </a:r>
+            <a:r>
+              <a:rPr dirty="0"/>
+              <a:t> sur '</a:t>
+            </a:r>
+            <a:r>
+              <a:rPr dirty="0" err="1"/>
+              <a:t>Ajouter</a:t>
+            </a:r>
+            <a:r>
+              <a:rPr dirty="0"/>
+              <a:t> la Salle'. Elle </a:t>
+            </a:r>
+            <a:r>
+              <a:rPr dirty="0" err="1"/>
+              <a:t>est</a:t>
+            </a:r>
+            <a:r>
+              <a:rPr dirty="0"/>
+              <a:t> </a:t>
+            </a:r>
+            <a:r>
+              <a:rPr dirty="0" err="1"/>
+              <a:t>disponible</a:t>
+            </a:r>
+            <a:r>
+              <a:rPr dirty="0"/>
+              <a:t> </a:t>
+            </a:r>
+            <a:r>
+              <a:rPr dirty="0" err="1"/>
+              <a:t>dans</a:t>
+            </a:r>
+            <a:r>
+              <a:rPr dirty="0"/>
+              <a:t> le </a:t>
+            </a:r>
+            <a:r>
+              <a:rPr dirty="0" err="1"/>
+              <a:t>planificateur</a:t>
+            </a:r>
+            <a:r>
+              <a:rPr dirty="0"/>
+              <a:t> </a:t>
+            </a:r>
+            <a:r>
+              <a:rPr dirty="0" err="1"/>
+              <a:t>d'EDT</a:t>
+            </a:r>
+            <a:r>
+              <a:rPr dirty="0"/>
+              <a:t>.</a:t>
             </a:r>
           </a:p>
         </p:txBody>
@@ -4413,7 +5793,7 @@
 </file>
 
 <file path=ppt/slides/slide16.xml><?xml version="1.0" encoding="utf-8"?>
-<p:sld xmlns:a="http://schemas.openxmlformats.org/drawingml/2006/main" xmlns:p="http://schemas.openxmlformats.org/presentationml/2006/main" xmlns:r="http://schemas.openxmlformats.org/officeDocument/2006/relationships">
+<p:sld xmlns:a="http://schemas.openxmlformats.org/drawingml/2006/main" xmlns:r="http://schemas.openxmlformats.org/officeDocument/2006/relationships" xmlns:p="http://schemas.openxmlformats.org/presentationml/2006/main">
   <p:cSld>
     <p:bg>
       <p:bgPr>
@@ -4429,7 +5809,14 @@
         <p:cNvGrpSpPr/>
         <p:nvPr/>
       </p:nvGrpSpPr>
-      <p:grpSpPr/>
+      <p:grpSpPr>
+        <a:xfrm>
+          <a:off x="0" y="0"/>
+          <a:ext cx="0" cy="0"/>
+          <a:chOff x="0" y="0"/>
+          <a:chExt cx="0" cy="0"/>
+        </a:xfrm>
+      </p:grpSpPr>
       <p:sp>
         <p:nvSpPr>
           <p:cNvPr id="2" name="TextBox 1"/>
@@ -4518,7 +5905,7 @@
         <p:spPr>
           <a:xfrm>
             <a:off x="457200" y="1143000"/>
-            <a:ext cx="11247120" cy="5394960"/>
+            <a:ext cx="11247120" cy="2031325"/>
           </a:xfrm>
           <a:prstGeom prst="rect">
             <a:avLst/>
@@ -4540,8 +5927,50 @@
               </a:defRPr>
             </a:pPr>
             <a:r>
-              <a:t>1. Allez sur l'onglet 'EDT - Planification'.</a:t>
-            </a:r>
+              <a:rPr dirty="0"/>
+              <a:t>1. </a:t>
+            </a:r>
+            <a:r>
+              <a:rPr dirty="0" err="1"/>
+              <a:t>Allez</a:t>
+            </a:r>
+            <a:r>
+              <a:rPr dirty="0"/>
+              <a:t> sur </a:t>
+            </a:r>
+            <a:r>
+              <a:rPr dirty="0" err="1" smtClean="0"/>
+              <a:t>l'onglet</a:t>
+            </a:r>
+            <a:r>
+              <a:rPr lang="fr-FR" dirty="0" smtClean="0"/>
+              <a:t> (Emploi du Temps – EDT   puis cliquer sur le sous menu </a:t>
+            </a:r>
+            <a:r>
+              <a:rPr dirty="0" smtClean="0"/>
+              <a:t> </a:t>
+            </a:r>
+            <a:r>
+              <a:rPr dirty="0"/>
+              <a:t>'EDT </a:t>
+            </a:r>
+            <a:r>
+              <a:rPr lang="fr-FR" dirty="0" smtClean="0"/>
+              <a:t>–</a:t>
+            </a:r>
+            <a:r>
+              <a:rPr dirty="0" smtClean="0"/>
+              <a:t> </a:t>
+            </a:r>
+            <a:r>
+              <a:rPr lang="fr-FR" dirty="0" smtClean="0"/>
+              <a:t>Ordonnancer </a:t>
+            </a:r>
+            <a:r>
+              <a:rPr dirty="0" smtClean="0"/>
+              <a:t>'.</a:t>
+            </a:r>
+            <a:endParaRPr dirty="0"/>
           </a:p>
           <a:p>
             <a:pPr>
@@ -4553,7 +5982,48 @@
               </a:defRPr>
             </a:pPr>
             <a:r>
-              <a:t>2. Dans le formulaire à gauche, sélectionnez dans l'ordre :</a:t>
+              <a:rPr dirty="0"/>
+              <a:t>2. </a:t>
+            </a:r>
+            <a:r>
+              <a:rPr dirty="0" err="1"/>
+              <a:t>Dans</a:t>
+            </a:r>
+            <a:r>
+              <a:rPr dirty="0"/>
+              <a:t> le </a:t>
+            </a:r>
+            <a:r>
+              <a:rPr dirty="0" err="1"/>
+              <a:t>formulaire</a:t>
+            </a:r>
+            <a:r>
+              <a:rPr dirty="0"/>
+              <a:t> à gauche, </a:t>
+            </a:r>
+            <a:r>
+              <a:rPr dirty="0" err="1"/>
+              <a:t>sélectionnez</a:t>
+            </a:r>
+            <a:r>
+              <a:rPr dirty="0"/>
+              <a:t> </a:t>
+            </a:r>
+            <a:r>
+              <a:rPr dirty="0" err="1"/>
+              <a:t>dans</a:t>
+            </a:r>
+            <a:r>
+              <a:rPr dirty="0"/>
+              <a:t> </a:t>
+            </a:r>
+            <a:r>
+              <a:rPr dirty="0" err="1"/>
+              <a:t>l'ordre</a:t>
+            </a:r>
+            <a:r>
+              <a:rPr dirty="0"/>
+              <a:t> :</a:t>
             </a:r>
           </a:p>
           <a:p>
@@ -4566,7 +6036,16 @@
               </a:defRPr>
             </a:pPr>
             <a:r>
-              <a:t>    1. La Classe (ex: 6ème A)</a:t>
+              <a:rPr dirty="0"/>
+              <a:t>    1. La </a:t>
+            </a:r>
+            <a:r>
+              <a:rPr dirty="0" err="1"/>
+              <a:t>Classe</a:t>
+            </a:r>
+            <a:r>
+              <a:rPr dirty="0"/>
+              <a:t> (ex: 6ème A)</a:t>
             </a:r>
           </a:p>
           <a:p>
@@ -4579,7 +6058,24 @@
               </a:defRPr>
             </a:pPr>
             <a:r>
-              <a:t>    2. Le Professeur (ex: M. Koffi)</a:t>
+              <a:rPr dirty="0"/>
+              <a:t>    2. Le </a:t>
+            </a:r>
+            <a:r>
+              <a:rPr dirty="0" err="1"/>
+              <a:t>Professeur</a:t>
+            </a:r>
+            <a:r>
+              <a:rPr dirty="0"/>
+              <a:t> (ex: M. </a:t>
+            </a:r>
+            <a:r>
+              <a:rPr dirty="0" err="1"/>
+              <a:t>Koffi</a:t>
+            </a:r>
+            <a:r>
+              <a:rPr dirty="0"/>
+              <a:t>)</a:t>
             </a:r>
           </a:p>
           <a:p>
@@ -4592,7 +6088,24 @@
               </a:defRPr>
             </a:pPr>
             <a:r>
-              <a:t>    3. La Matière (ex: Mathématiques)</a:t>
+              <a:rPr dirty="0"/>
+              <a:t>    3. La </a:t>
+            </a:r>
+            <a:r>
+              <a:rPr dirty="0" err="1"/>
+              <a:t>Matière</a:t>
+            </a:r>
+            <a:r>
+              <a:rPr dirty="0"/>
+              <a:t> (ex: </a:t>
+            </a:r>
+            <a:r>
+              <a:rPr dirty="0" err="1"/>
+              <a:t>Mathématiques</a:t>
+            </a:r>
+            <a:r>
+              <a:rPr dirty="0"/>
+              <a:t>)</a:t>
             </a:r>
           </a:p>
           <a:p>
@@ -4605,6 +6118,7 @@
               </a:defRPr>
             </a:pPr>
             <a:r>
+              <a:rPr dirty="0"/>
               <a:t>    4. La Salle (ex: Salle 101)</a:t>
             </a:r>
           </a:p>
@@ -4618,7 +6132,16 @@
               </a:defRPr>
             </a:pPr>
             <a:r>
-              <a:t>    5. Le Jour (ex: Lundi)</a:t>
+              <a:rPr dirty="0"/>
+              <a:t>    5. Le Jour (ex: </a:t>
+            </a:r>
+            <a:r>
+              <a:rPr dirty="0" err="1"/>
+              <a:t>Lundi</a:t>
+            </a:r>
+            <a:r>
+              <a:rPr dirty="0"/>
+              <a:t>)</a:t>
             </a:r>
           </a:p>
           <a:p>
@@ -4631,7 +6154,24 @@
               </a:defRPr>
             </a:pPr>
             <a:r>
-              <a:t>    6. Le Créneau horaire (ex: 08:00 - 10:00)</a:t>
+              <a:rPr dirty="0"/>
+              <a:t>    6. Le </a:t>
+            </a:r>
+            <a:r>
+              <a:rPr dirty="0" err="1"/>
+              <a:t>Créneau</a:t>
+            </a:r>
+            <a:r>
+              <a:rPr dirty="0"/>
+              <a:t> </a:t>
+            </a:r>
+            <a:r>
+              <a:rPr dirty="0" err="1"/>
+              <a:t>horaire</a:t>
+            </a:r>
+            <a:r>
+              <a:rPr dirty="0"/>
+              <a:t> (ex: 08:00 - 10:00)</a:t>
             </a:r>
           </a:p>
           <a:p>
@@ -4644,7 +6184,40 @@
               </a:defRPr>
             </a:pPr>
             <a:r>
-              <a:t>9. Cliquez sur 'Planifier ce cours'.</a:t>
+              <a:rPr dirty="0"/>
+              <a:t>9. </a:t>
+            </a:r>
+            <a:r>
+              <a:rPr dirty="0" err="1"/>
+              <a:t>Cliquez</a:t>
+            </a:r>
+            <a:r>
+              <a:rPr dirty="0"/>
+              <a:t> sur '</a:t>
+            </a:r>
+            <a:r>
+              <a:rPr dirty="0" err="1"/>
+              <a:t>Planifier</a:t>
+            </a:r>
+            <a:r>
+              <a:rPr dirty="0"/>
+              <a:t> </a:t>
+            </a:r>
+            <a:r>
+              <a:rPr dirty="0" err="1"/>
+              <a:t>ce</a:t>
+            </a:r>
+            <a:r>
+              <a:rPr dirty="0"/>
+              <a:t> </a:t>
+            </a:r>
+            <a:r>
+              <a:rPr dirty="0" err="1"/>
+              <a:t>cours</a:t>
+            </a:r>
+            <a:r>
+              <a:rPr dirty="0"/>
+              <a:t>'.</a:t>
             </a:r>
           </a:p>
           <a:p>
@@ -4657,7 +6230,72 @@
               </a:defRPr>
             </a:pPr>
             <a:r>
-              <a:t>10. Si aucun conflit n'est détecté, le cours s'affiche dans la grille hebdomadaire.</a:t>
+              <a:rPr dirty="0"/>
+              <a:t>10. Si </a:t>
+            </a:r>
+            <a:r>
+              <a:rPr dirty="0" err="1"/>
+              <a:t>aucun</a:t>
+            </a:r>
+            <a:r>
+              <a:rPr dirty="0"/>
+              <a:t> </a:t>
+            </a:r>
+            <a:r>
+              <a:rPr dirty="0" err="1"/>
+              <a:t>conflit</a:t>
+            </a:r>
+            <a:r>
+              <a:rPr dirty="0"/>
+              <a:t> </a:t>
+            </a:r>
+            <a:r>
+              <a:rPr dirty="0" err="1"/>
+              <a:t>n'est</a:t>
+            </a:r>
+            <a:r>
+              <a:rPr dirty="0"/>
+              <a:t> </a:t>
+            </a:r>
+            <a:r>
+              <a:rPr dirty="0" err="1"/>
+              <a:t>détecté</a:t>
+            </a:r>
+            <a:r>
+              <a:rPr dirty="0"/>
+              <a:t>, le </a:t>
+            </a:r>
+            <a:r>
+              <a:rPr dirty="0" err="1"/>
+              <a:t>cours</a:t>
+            </a:r>
+            <a:r>
+              <a:rPr dirty="0"/>
+              <a:t> </a:t>
+            </a:r>
+            <a:r>
+              <a:rPr dirty="0" err="1"/>
+              <a:t>s'affiche</a:t>
+            </a:r>
+            <a:r>
+              <a:rPr dirty="0"/>
+              <a:t> </a:t>
+            </a:r>
+            <a:r>
+              <a:rPr dirty="0" err="1"/>
+              <a:t>dans</a:t>
+            </a:r>
+            <a:r>
+              <a:rPr dirty="0"/>
+              <a:t> la grille </a:t>
+            </a:r>
+            <a:r>
+              <a:rPr dirty="0" err="1"/>
+              <a:t>hebdomadaire</a:t>
+            </a:r>
+            <a:r>
+              <a:rPr dirty="0"/>
+              <a:t>.</a:t>
             </a:r>
           </a:p>
           <a:p>
@@ -4670,7 +6308,96 @@
               </a:defRPr>
             </a:pPr>
             <a:r>
-              <a:t>11. Si un conflit est détecté (prof occupé, salle prise, indispo), une alerte rouge bloque la création.</a:t>
+              <a:rPr dirty="0"/>
+              <a:t>11. Si un </a:t>
+            </a:r>
+            <a:r>
+              <a:rPr dirty="0" err="1"/>
+              <a:t>conflit</a:t>
+            </a:r>
+            <a:r>
+              <a:rPr dirty="0"/>
+              <a:t> </a:t>
+            </a:r>
+            <a:r>
+              <a:rPr dirty="0" err="1"/>
+              <a:t>est</a:t>
+            </a:r>
+            <a:r>
+              <a:rPr dirty="0"/>
+              <a:t> </a:t>
+            </a:r>
+            <a:r>
+              <a:rPr dirty="0" err="1"/>
+              <a:t>détecté</a:t>
+            </a:r>
+            <a:r>
+              <a:rPr dirty="0"/>
+              <a:t> (prof </a:t>
+            </a:r>
+            <a:r>
+              <a:rPr dirty="0" err="1"/>
+              <a:t>occupé</a:t>
+            </a:r>
+            <a:r>
+              <a:rPr dirty="0"/>
+              <a:t>, </a:t>
+            </a:r>
+            <a:r>
+              <a:rPr dirty="0" err="1"/>
+              <a:t>salle</a:t>
+            </a:r>
+            <a:r>
+              <a:rPr dirty="0"/>
+              <a:t> </a:t>
+            </a:r>
+            <a:r>
+              <a:rPr dirty="0" err="1"/>
+              <a:t>prise</a:t>
+            </a:r>
+            <a:r>
+              <a:rPr dirty="0"/>
+              <a:t>, </a:t>
+            </a:r>
+            <a:r>
+              <a:rPr dirty="0" err="1"/>
+              <a:t>indispo</a:t>
+            </a:r>
+            <a:r>
+              <a:rPr dirty="0"/>
+              <a:t>), </a:t>
+            </a:r>
+            <a:r>
+              <a:rPr dirty="0" err="1"/>
+              <a:t>une</a:t>
+            </a:r>
+            <a:r>
+              <a:rPr dirty="0"/>
+              <a:t> </a:t>
+            </a:r>
+            <a:r>
+              <a:rPr dirty="0" err="1"/>
+              <a:t>alerte</a:t>
+            </a:r>
+            <a:r>
+              <a:rPr dirty="0"/>
+              <a:t> rouge </a:t>
+            </a:r>
+            <a:r>
+              <a:rPr dirty="0" err="1"/>
+              <a:t>bloque</a:t>
+            </a:r>
+            <a:r>
+              <a:rPr dirty="0"/>
+              <a:t> la </a:t>
+            </a:r>
+            <a:r>
+              <a:rPr dirty="0" err="1"/>
+              <a:t>création</a:t>
+            </a:r>
+            <a:r>
+              <a:rPr dirty="0"/>
+              <a:t>.</a:t>
             </a:r>
           </a:p>
         </p:txBody>
@@ -4684,7 +6411,7 @@
 </file>
 
 <file path=ppt/slides/slide17.xml><?xml version="1.0" encoding="utf-8"?>
-<p:sld xmlns:a="http://schemas.openxmlformats.org/drawingml/2006/main" xmlns:p="http://schemas.openxmlformats.org/presentationml/2006/main" xmlns:r="http://schemas.openxmlformats.org/officeDocument/2006/relationships">
+<p:sld xmlns:a="http://schemas.openxmlformats.org/drawingml/2006/main" xmlns:r="http://schemas.openxmlformats.org/officeDocument/2006/relationships" xmlns:p="http://schemas.openxmlformats.org/presentationml/2006/main">
   <p:cSld>
     <p:bg>
       <p:bgPr>
@@ -4700,7 +6427,14 @@
         <p:cNvGrpSpPr/>
         <p:nvPr/>
       </p:nvGrpSpPr>
-      <p:grpSpPr/>
+      <p:grpSpPr>
+        <a:xfrm>
+          <a:off x="0" y="0"/>
+          <a:ext cx="0" cy="0"/>
+          <a:chOff x="0" y="0"/>
+          <a:chExt cx="0" cy="0"/>
+        </a:xfrm>
+      </p:grpSpPr>
       <p:sp>
         <p:nvSpPr>
           <p:cNvPr id="2" name="TextBox 1"/>
@@ -4789,7 +6523,7 @@
         <p:spPr>
           <a:xfrm>
             <a:off x="457200" y="1143000"/>
-            <a:ext cx="11247120" cy="5394960"/>
+            <a:ext cx="11247120" cy="830997"/>
           </a:xfrm>
           <a:prstGeom prst="rect">
             <a:avLst/>
@@ -4811,8 +6545,58 @@
               </a:defRPr>
             </a:pPr>
             <a:r>
-              <a:t>1. Dans la grille d'EDT, cliquez sur le cours à supprimer.</a:t>
-            </a:r>
+              <a:rPr dirty="0"/>
+              <a:t>1. </a:t>
+            </a:r>
+            <a:r>
+              <a:rPr dirty="0" err="1"/>
+              <a:t>Dans</a:t>
+            </a:r>
+            <a:r>
+              <a:rPr dirty="0"/>
+              <a:t> </a:t>
+            </a:r>
+            <a:r>
+              <a:rPr lang="fr-FR" dirty="0"/>
+              <a:t>l'onglet (Emploi du Temps – EDT   puis cliquer sur le sous menu  'EDT – </a:t>
+            </a:r>
+            <a:r>
+              <a:rPr lang="fr-FR" dirty="0" smtClean="0"/>
+              <a:t>Ordonnancer’ </a:t>
+            </a:r>
+            <a:r>
+              <a:rPr dirty="0" smtClean="0"/>
+              <a:t>, </a:t>
+            </a:r>
+            <a:r>
+              <a:rPr dirty="0" err="1"/>
+              <a:t>cliquez</a:t>
+            </a:r>
+            <a:r>
+              <a:rPr dirty="0"/>
+              <a:t> sur le </a:t>
+            </a:r>
+            <a:r>
+              <a:rPr dirty="0" err="1"/>
+              <a:t>cours</a:t>
+            </a:r>
+            <a:r>
+              <a:rPr dirty="0"/>
+              <a:t> à </a:t>
+            </a:r>
+            <a:r>
+              <a:rPr dirty="0" err="1" smtClean="0"/>
+              <a:t>supprimer</a:t>
+            </a:r>
+            <a:r>
+              <a:rPr lang="fr-FR" dirty="0" smtClean="0"/>
+              <a:t>)</a:t>
+            </a:r>
+            <a:r>
+              <a:rPr dirty="0" smtClean="0"/>
+              <a:t>.</a:t>
+            </a:r>
+            <a:endParaRPr dirty="0"/>
           </a:p>
           <a:p>
             <a:pPr>
@@ -4824,7 +6608,72 @@
               </a:defRPr>
             </a:pPr>
             <a:r>
-              <a:t>2. Un panneau de détail s'ouvre à droite ou une boîte de dialogue apparaît.</a:t>
+              <a:rPr dirty="0"/>
+              <a:t>2. Un </a:t>
+            </a:r>
+            <a:r>
+              <a:rPr dirty="0" err="1"/>
+              <a:t>panneau</a:t>
+            </a:r>
+            <a:r>
+              <a:rPr dirty="0"/>
+              <a:t> de </a:t>
+            </a:r>
+            <a:r>
+              <a:rPr dirty="0" err="1"/>
+              <a:t>détail</a:t>
+            </a:r>
+            <a:r>
+              <a:rPr dirty="0"/>
+              <a:t> </a:t>
+            </a:r>
+            <a:r>
+              <a:rPr dirty="0" err="1"/>
+              <a:t>s'ouvre</a:t>
+            </a:r>
+            <a:r>
+              <a:rPr dirty="0"/>
+              <a:t> à </a:t>
+            </a:r>
+            <a:r>
+              <a:rPr dirty="0" err="1"/>
+              <a:t>droite</a:t>
+            </a:r>
+            <a:r>
+              <a:rPr dirty="0"/>
+              <a:t> </a:t>
+            </a:r>
+            <a:r>
+              <a:rPr dirty="0" err="1"/>
+              <a:t>ou</a:t>
+            </a:r>
+            <a:r>
+              <a:rPr dirty="0"/>
+              <a:t> </a:t>
+            </a:r>
+            <a:r>
+              <a:rPr dirty="0" err="1"/>
+              <a:t>une</a:t>
+            </a:r>
+            <a:r>
+              <a:rPr dirty="0"/>
+              <a:t> </a:t>
+            </a:r>
+            <a:r>
+              <a:rPr dirty="0" err="1"/>
+              <a:t>boîte</a:t>
+            </a:r>
+            <a:r>
+              <a:rPr dirty="0"/>
+              <a:t> de dialogue </a:t>
+            </a:r>
+            <a:r>
+              <a:rPr dirty="0" err="1"/>
+              <a:t>apparaît</a:t>
+            </a:r>
+            <a:r>
+              <a:rPr dirty="0"/>
+              <a:t>.</a:t>
             </a:r>
           </a:p>
           <a:p>
@@ -4837,7 +6686,48 @@
               </a:defRPr>
             </a:pPr>
             <a:r>
-              <a:t>3. Cliquez sur le bouton rouge 'Supprimer ce cours' et confirmez.</a:t>
+              <a:rPr dirty="0"/>
+              <a:t>3. </a:t>
+            </a:r>
+            <a:r>
+              <a:rPr dirty="0" err="1"/>
+              <a:t>Cliquez</a:t>
+            </a:r>
+            <a:r>
+              <a:rPr dirty="0"/>
+              <a:t> sur le bouton rouge '</a:t>
+            </a:r>
+            <a:r>
+              <a:rPr dirty="0" err="1"/>
+              <a:t>Supprimer</a:t>
+            </a:r>
+            <a:r>
+              <a:rPr dirty="0"/>
+              <a:t> </a:t>
+            </a:r>
+            <a:r>
+              <a:rPr dirty="0" err="1"/>
+              <a:t>ce</a:t>
+            </a:r>
+            <a:r>
+              <a:rPr dirty="0"/>
+              <a:t> </a:t>
+            </a:r>
+            <a:r>
+              <a:rPr dirty="0" err="1"/>
+              <a:t>cours</a:t>
+            </a:r>
+            <a:r>
+              <a:rPr dirty="0"/>
+              <a:t>' et </a:t>
+            </a:r>
+            <a:r>
+              <a:rPr dirty="0" err="1"/>
+              <a:t>confirmez</a:t>
+            </a:r>
+            <a:r>
+              <a:rPr dirty="0"/>
+              <a:t>.</a:t>
             </a:r>
           </a:p>
           <a:p>
@@ -4850,7 +6740,40 @@
               </a:defRPr>
             </a:pPr>
             <a:r>
-              <a:t>4. Le créneau est immédiatement libéré.</a:t>
+              <a:rPr dirty="0"/>
+              <a:t>4. Le </a:t>
+            </a:r>
+            <a:r>
+              <a:rPr dirty="0" err="1"/>
+              <a:t>créneau</a:t>
+            </a:r>
+            <a:r>
+              <a:rPr dirty="0"/>
+              <a:t> </a:t>
+            </a:r>
+            <a:r>
+              <a:rPr dirty="0" err="1"/>
+              <a:t>est</a:t>
+            </a:r>
+            <a:r>
+              <a:rPr dirty="0"/>
+              <a:t> </a:t>
+            </a:r>
+            <a:r>
+              <a:rPr dirty="0" err="1"/>
+              <a:t>immédiatement</a:t>
+            </a:r>
+            <a:r>
+              <a:rPr dirty="0"/>
+              <a:t> </a:t>
+            </a:r>
+            <a:r>
+              <a:rPr dirty="0" err="1"/>
+              <a:t>libéré</a:t>
+            </a:r>
+            <a:r>
+              <a:rPr dirty="0"/>
+              <a:t>.</a:t>
             </a:r>
           </a:p>
         </p:txBody>
@@ -4864,7 +6787,7 @@
 </file>
 
 <file path=ppt/slides/slide18.xml><?xml version="1.0" encoding="utf-8"?>
-<p:sld xmlns:a="http://schemas.openxmlformats.org/drawingml/2006/main" xmlns:p="http://schemas.openxmlformats.org/presentationml/2006/main" xmlns:r="http://schemas.openxmlformats.org/officeDocument/2006/relationships">
+<p:sld xmlns:a="http://schemas.openxmlformats.org/drawingml/2006/main" xmlns:r="http://schemas.openxmlformats.org/officeDocument/2006/relationships" xmlns:p="http://schemas.openxmlformats.org/presentationml/2006/main">
   <p:cSld>
     <p:bg>
       <p:bgPr>
@@ -4880,7 +6803,14 @@
         <p:cNvGrpSpPr/>
         <p:nvPr/>
       </p:nvGrpSpPr>
-      <p:grpSpPr/>
+      <p:grpSpPr>
+        <a:xfrm>
+          <a:off x="0" y="0"/>
+          <a:ext cx="0" cy="0"/>
+          <a:chOff x="0" y="0"/>
+          <a:chExt cx="0" cy="0"/>
+        </a:xfrm>
+      </p:grpSpPr>
       <p:sp>
         <p:nvSpPr>
           <p:cNvPr id="2" name="TextBox 1"/>
@@ -4969,7 +6899,7 @@
         <p:spPr>
           <a:xfrm>
             <a:off x="457200" y="1143000"/>
-            <a:ext cx="11247120" cy="5394960"/>
+            <a:ext cx="11247120" cy="984885"/>
           </a:xfrm>
           <a:prstGeom prst="rect">
             <a:avLst/>
@@ -4991,7 +6921,88 @@
               </a:defRPr>
             </a:pPr>
             <a:r>
-              <a:t>1. Dans l'onglet EDT, utilisez les filtres en haut pour choisir la vue :</a:t>
+              <a:rPr dirty="0"/>
+              <a:t>1. </a:t>
+            </a:r>
+            <a:r>
+              <a:rPr dirty="0" err="1"/>
+              <a:t>Dans</a:t>
+            </a:r>
+            <a:r>
+              <a:rPr dirty="0"/>
+              <a:t> </a:t>
+            </a:r>
+            <a:r>
+              <a:rPr dirty="0" err="1"/>
+              <a:t>l'onglet</a:t>
+            </a:r>
+            <a:r>
+              <a:rPr dirty="0"/>
+              <a:t> </a:t>
+            </a:r>
+            <a:r>
+              <a:rPr lang="fr-FR" dirty="0" smtClean="0"/>
+              <a:t>(</a:t>
+            </a:r>
+            <a:r>
+              <a:rPr lang="fr-FR" b="1" dirty="0" smtClean="0"/>
+              <a:t>Emploi </a:t>
+            </a:r>
+            <a:r>
+              <a:rPr lang="fr-FR" b="1" dirty="0"/>
+              <a:t>du Temps – EDT   </a:t>
+            </a:r>
+            <a:r>
+              <a:rPr lang="fr-FR" dirty="0"/>
+              <a:t>puis cliquer sur le sous menu  </a:t>
+            </a:r>
+            <a:r>
+              <a:rPr lang="fr-FR" b="1" dirty="0"/>
+              <a:t>'EDT – Ordonnancer’ </a:t>
+            </a:r>
+            <a:r>
+              <a:rPr dirty="0" smtClean="0"/>
+              <a:t>, </a:t>
+            </a:r>
+            <a:r>
+              <a:rPr dirty="0" err="1"/>
+              <a:t>utilisez</a:t>
+            </a:r>
+            <a:r>
+              <a:rPr dirty="0"/>
+              <a:t> les </a:t>
+            </a:r>
+            <a:r>
+              <a:rPr dirty="0" err="1"/>
+              <a:t>filtres</a:t>
+            </a:r>
+            <a:r>
+              <a:rPr dirty="0"/>
+              <a:t> </a:t>
+            </a:r>
+            <a:r>
+              <a:rPr dirty="0" err="1"/>
+              <a:t>en</a:t>
+            </a:r>
+            <a:r>
+              <a:rPr dirty="0"/>
+              <a:t> haut pour </a:t>
+            </a:r>
+            <a:r>
+              <a:rPr dirty="0" err="1"/>
+              <a:t>choisir</a:t>
+            </a:r>
+            <a:r>
+              <a:rPr dirty="0"/>
+              <a:t> la </a:t>
+            </a:r>
+            <a:r>
+              <a:rPr dirty="0" err="1"/>
+              <a:t>vue</a:t>
+            </a:r>
+            <a:r>
+              <a:rPr dirty="0"/>
+              <a:t> :</a:t>
             </a:r>
           </a:p>
           <a:p>
@@ -5004,8 +7015,54 @@
               </a:defRPr>
             </a:pPr>
             <a:r>
-              <a:t>    - Par Classe : affiche tous les cours de la classe sélectionnée</a:t>
-            </a:r>
+              <a:rPr dirty="0"/>
+              <a:t>    - Par </a:t>
+            </a:r>
+            <a:r>
+              <a:rPr dirty="0" err="1"/>
+              <a:t>Classe</a:t>
+            </a:r>
+            <a:r>
+              <a:rPr dirty="0"/>
+              <a:t> : </a:t>
+            </a:r>
+            <a:r>
+              <a:rPr dirty="0" err="1"/>
+              <a:t>affiche</a:t>
+            </a:r>
+            <a:r>
+              <a:rPr dirty="0"/>
+              <a:t> </a:t>
+            </a:r>
+            <a:r>
+              <a:rPr dirty="0" err="1"/>
+              <a:t>tous</a:t>
+            </a:r>
+            <a:r>
+              <a:rPr dirty="0"/>
+              <a:t> les </a:t>
+            </a:r>
+            <a:r>
+              <a:rPr dirty="0" err="1"/>
+              <a:t>cours</a:t>
+            </a:r>
+            <a:r>
+              <a:rPr dirty="0"/>
+              <a:t> de la </a:t>
+            </a:r>
+            <a:r>
+              <a:rPr dirty="0" err="1"/>
+              <a:t>classe</a:t>
+            </a:r>
+            <a:r>
+              <a:rPr dirty="0"/>
+              <a:t> </a:t>
+            </a:r>
+            <a:r>
+              <a:rPr dirty="0" err="1"/>
+              <a:t>sélectionnée</a:t>
+            </a:r>
+            <a:endParaRPr dirty="0"/>
           </a:p>
           <a:p>
             <a:pPr>
@@ -5017,8 +7074,38 @@
               </a:defRPr>
             </a:pPr>
             <a:r>
-              <a:t>    - Par Enseignant : affiche le planning personnel du professeur sélectionné</a:t>
-            </a:r>
+              <a:rPr dirty="0"/>
+              <a:t>    - Par </a:t>
+            </a:r>
+            <a:r>
+              <a:rPr dirty="0" err="1"/>
+              <a:t>Enseignant</a:t>
+            </a:r>
+            <a:r>
+              <a:rPr dirty="0"/>
+              <a:t> : </a:t>
+            </a:r>
+            <a:r>
+              <a:rPr dirty="0" err="1"/>
+              <a:t>affiche</a:t>
+            </a:r>
+            <a:r>
+              <a:rPr dirty="0"/>
+              <a:t> le planning personnel du </a:t>
+            </a:r>
+            <a:r>
+              <a:rPr dirty="0" err="1"/>
+              <a:t>professeur</a:t>
+            </a:r>
+            <a:r>
+              <a:rPr dirty="0"/>
+              <a:t> </a:t>
+            </a:r>
+            <a:r>
+              <a:rPr dirty="0" err="1"/>
+              <a:t>sélectionné</a:t>
+            </a:r>
+            <a:endParaRPr dirty="0"/>
           </a:p>
           <a:p>
             <a:pPr>
@@ -5030,7 +7117,40 @@
               </a:defRPr>
             </a:pPr>
             <a:r>
-              <a:t>4. Cliquez sur le bouton 'Imprimer' (icône imprimante).</a:t>
+              <a:rPr dirty="0"/>
+              <a:t>4. </a:t>
+            </a:r>
+            <a:r>
+              <a:rPr dirty="0" err="1"/>
+              <a:t>Cliquez</a:t>
+            </a:r>
+            <a:r>
+              <a:rPr dirty="0"/>
+              <a:t> sur le bouton '</a:t>
+            </a:r>
+            <a:r>
+              <a:rPr dirty="0" err="1"/>
+              <a:t>Imprimer</a:t>
+            </a:r>
+            <a:r>
+              <a:rPr dirty="0"/>
+              <a:t>' (</a:t>
+            </a:r>
+            <a:r>
+              <a:rPr dirty="0" err="1"/>
+              <a:t>icône</a:t>
+            </a:r>
+            <a:r>
+              <a:rPr dirty="0"/>
+              <a:t> </a:t>
+            </a:r>
+            <a:r>
+              <a:rPr dirty="0" err="1"/>
+              <a:t>imprimante</a:t>
+            </a:r>
+            <a:r>
+              <a:rPr dirty="0"/>
+              <a:t>).</a:t>
             </a:r>
           </a:p>
           <a:p>
@@ -5043,7 +7163,88 @@
               </a:defRPr>
             </a:pPr>
             <a:r>
-              <a:t>5. La boîte de dialogue d'impression du navigateur s'ouvre. Choisissez 'Enregistrer en PDF' ou imprimez directement.</a:t>
+              <a:rPr dirty="0"/>
+              <a:t>5. La </a:t>
+            </a:r>
+            <a:r>
+              <a:rPr dirty="0" err="1"/>
+              <a:t>boîte</a:t>
+            </a:r>
+            <a:r>
+              <a:rPr dirty="0"/>
+              <a:t> de dialogue </a:t>
+            </a:r>
+            <a:r>
+              <a:rPr dirty="0" err="1"/>
+              <a:t>d'impression</a:t>
+            </a:r>
+            <a:r>
+              <a:rPr dirty="0"/>
+              <a:t> du </a:t>
+            </a:r>
+            <a:r>
+              <a:rPr dirty="0" err="1"/>
+              <a:t>navigateur</a:t>
+            </a:r>
+            <a:r>
+              <a:rPr dirty="0"/>
+              <a:t> </a:t>
+            </a:r>
+            <a:r>
+              <a:rPr dirty="0" err="1"/>
+              <a:t>s'ouvre</a:t>
+            </a:r>
+            <a:r>
+              <a:rPr dirty="0"/>
+              <a:t>. </a:t>
+            </a:r>
+            <a:r>
+              <a:rPr dirty="0" err="1"/>
+              <a:t>Choisissez</a:t>
+            </a:r>
+            <a:r>
+              <a:rPr dirty="0"/>
+              <a:t> '</a:t>
+            </a:r>
+            <a:r>
+              <a:rPr dirty="0" err="1"/>
+              <a:t>Enregistrer</a:t>
+            </a:r>
+            <a:r>
+              <a:rPr dirty="0"/>
+              <a:t> </a:t>
+            </a:r>
+            <a:r>
+              <a:rPr dirty="0" err="1"/>
+              <a:t>en</a:t>
+            </a:r>
+            <a:r>
+              <a:rPr dirty="0"/>
+              <a:t> PDF' </a:t>
+            </a:r>
+            <a:r>
+              <a:rPr dirty="0" err="1"/>
+              <a:t>ou</a:t>
+            </a:r>
+            <a:r>
+              <a:rPr dirty="0"/>
+              <a:t> </a:t>
+            </a:r>
+            <a:r>
+              <a:rPr dirty="0" err="1"/>
+              <a:t>imprimez</a:t>
+            </a:r>
+            <a:r>
+              <a:rPr dirty="0"/>
+              <a:t> </a:t>
+            </a:r>
+            <a:r>
+              <a:rPr dirty="0" err="1"/>
+              <a:t>directement</a:t>
+            </a:r>
+            <a:r>
+              <a:rPr dirty="0"/>
+              <a:t>.</a:t>
             </a:r>
           </a:p>
         </p:txBody>
@@ -5057,7 +7258,7 @@
 </file>
 
 <file path=ppt/slides/slide19.xml><?xml version="1.0" encoding="utf-8"?>
-<p:sld xmlns:a="http://schemas.openxmlformats.org/drawingml/2006/main" xmlns:p="http://schemas.openxmlformats.org/presentationml/2006/main" xmlns:r="http://schemas.openxmlformats.org/officeDocument/2006/relationships">
+<p:sld xmlns:a="http://schemas.openxmlformats.org/drawingml/2006/main" xmlns:r="http://schemas.openxmlformats.org/officeDocument/2006/relationships" xmlns:p="http://schemas.openxmlformats.org/presentationml/2006/main">
   <p:cSld>
     <p:bg>
       <p:bgPr>
@@ -5073,7 +7274,14 @@
         <p:cNvGrpSpPr/>
         <p:nvPr/>
       </p:nvGrpSpPr>
-      <p:grpSpPr/>
+      <p:grpSpPr>
+        <a:xfrm>
+          <a:off x="0" y="0"/>
+          <a:ext cx="0" cy="0"/>
+          <a:chOff x="0" y="0"/>
+          <a:chExt cx="0" cy="0"/>
+        </a:xfrm>
+      </p:grpSpPr>
       <p:sp>
         <p:nvSpPr>
           <p:cNvPr id="2" name="TextBox 1"/>
@@ -5162,7 +7370,7 @@
         <p:spPr>
           <a:xfrm>
             <a:off x="457200" y="1143000"/>
-            <a:ext cx="11247120" cy="5394960"/>
+            <a:ext cx="11247120" cy="1508105"/>
           </a:xfrm>
           <a:prstGeom prst="rect">
             <a:avLst/>
@@ -5184,8 +7392,62 @@
               </a:defRPr>
             </a:pPr>
             <a:r>
-              <a:t>1. Allez dans l'onglet 'Élèves' du menu principal.</a:t>
-            </a:r>
+              <a:rPr dirty="0"/>
+              <a:t>1. </a:t>
+            </a:r>
+            <a:r>
+              <a:rPr dirty="0" err="1"/>
+              <a:t>Allez</a:t>
+            </a:r>
+            <a:r>
+              <a:rPr dirty="0"/>
+              <a:t> </a:t>
+            </a:r>
+            <a:r>
+              <a:rPr dirty="0" err="1"/>
+              <a:t>dans</a:t>
+            </a:r>
+            <a:r>
+              <a:rPr dirty="0"/>
+              <a:t> </a:t>
+            </a:r>
+            <a:r>
+              <a:rPr dirty="0" err="1"/>
+              <a:t>l'onglet</a:t>
+            </a:r>
+            <a:r>
+              <a:rPr dirty="0"/>
+              <a:t> </a:t>
+            </a:r>
+            <a:r>
+              <a:rPr dirty="0" smtClean="0"/>
+              <a:t>'</a:t>
+            </a:r>
+            <a:r>
+              <a:rPr lang="fr-FR" dirty="0" smtClean="0"/>
+              <a:t>Gestion &amp; Scolarité - ERP</a:t>
+            </a:r>
+            <a:r>
+              <a:rPr dirty="0" smtClean="0"/>
+              <a:t>' </a:t>
+            </a:r>
+            <a:r>
+              <a:rPr dirty="0"/>
+              <a:t>du menu </a:t>
+            </a:r>
+            <a:r>
+              <a:rPr dirty="0" smtClean="0"/>
+              <a:t>principal</a:t>
+            </a:r>
+            <a:r>
+              <a:rPr lang="fr-FR" dirty="0" smtClean="0"/>
+              <a:t> cliquer ensuite sur le sous menu  ‘Gestion des élèves’</a:t>
+            </a:r>
+            <a:r>
+              <a:rPr dirty="0" smtClean="0"/>
+              <a:t>.</a:t>
+            </a:r>
+            <a:endParaRPr dirty="0"/>
           </a:p>
           <a:p>
             <a:pPr>
@@ -5197,7 +7459,64 @@
               </a:defRPr>
             </a:pPr>
             <a:r>
-              <a:t>2. Dans le panneau 'Inscrire un nouvel élève', remplissez :</a:t>
+              <a:rPr dirty="0"/>
+              <a:t>2. </a:t>
+            </a:r>
+            <a:r>
+              <a:rPr dirty="0" err="1"/>
+              <a:t>Dans</a:t>
+            </a:r>
+            <a:r>
+              <a:rPr dirty="0"/>
+              <a:t> le </a:t>
+            </a:r>
+            <a:r>
+              <a:rPr dirty="0" err="1" smtClean="0"/>
+              <a:t>panneau</a:t>
+            </a:r>
+            <a:r>
+              <a:rPr lang="fr-FR" dirty="0" smtClean="0"/>
+              <a:t> clique sur le bouton </a:t>
+            </a:r>
+            <a:r>
+              <a:rPr dirty="0" smtClean="0"/>
+              <a:t> </a:t>
+            </a:r>
+            <a:r>
+              <a:rPr dirty="0"/>
+              <a:t>'</a:t>
+            </a:r>
+            <a:r>
+              <a:rPr dirty="0" err="1"/>
+              <a:t>Inscrire</a:t>
+            </a:r>
+            <a:r>
+              <a:rPr dirty="0"/>
+              <a:t> un </a:t>
+            </a:r>
+            <a:r>
+              <a:rPr dirty="0" err="1"/>
+              <a:t>nouvel</a:t>
+            </a:r>
+            <a:r>
+              <a:rPr dirty="0"/>
+              <a:t> </a:t>
+            </a:r>
+            <a:r>
+              <a:rPr dirty="0" err="1"/>
+              <a:t>élève</a:t>
+            </a:r>
+            <a:r>
+              <a:rPr dirty="0"/>
+              <a:t>', </a:t>
+            </a:r>
+            <a:r>
+              <a:rPr dirty="0" err="1"/>
+              <a:t>remplissez</a:t>
+            </a:r>
+            <a:r>
+              <a:rPr dirty="0"/>
+              <a:t> :</a:t>
             </a:r>
           </a:p>
           <a:p>
@@ -5210,8 +7529,14 @@
               </a:defRPr>
             </a:pPr>
             <a:r>
-              <a:t>    - Nom de famille</a:t>
-            </a:r>
+              <a:rPr dirty="0"/>
+              <a:t>    - Nom de </a:t>
+            </a:r>
+            <a:r>
+              <a:rPr dirty="0" err="1"/>
+              <a:t>famille</a:t>
+            </a:r>
+            <a:endParaRPr dirty="0"/>
           </a:p>
           <a:p>
             <a:pPr>
@@ -5223,7 +7548,16 @@
               </a:defRPr>
             </a:pPr>
             <a:r>
-              <a:t>    - Prénom(s)</a:t>
+              <a:rPr dirty="0"/>
+              <a:t>    - </a:t>
+            </a:r>
+            <a:r>
+              <a:rPr dirty="0" err="1"/>
+              <a:t>Prénom</a:t>
+            </a:r>
+            <a:r>
+              <a:rPr dirty="0"/>
+              <a:t>(s)</a:t>
             </a:r>
           </a:p>
           <a:p>
@@ -5236,7 +7570,24 @@
               </a:defRPr>
             </a:pPr>
             <a:r>
-              <a:t>    - Genre (Masculin / Féminin)</a:t>
+              <a:rPr dirty="0"/>
+              <a:t>    - Genre (</a:t>
+            </a:r>
+            <a:r>
+              <a:rPr dirty="0" err="1"/>
+              <a:t>Masculin</a:t>
+            </a:r>
+            <a:r>
+              <a:rPr dirty="0"/>
+              <a:t> / </a:t>
+            </a:r>
+            <a:r>
+              <a:rPr dirty="0" err="1"/>
+              <a:t>Féminin</a:t>
+            </a:r>
+            <a:r>
+              <a:rPr dirty="0"/>
+              <a:t>)</a:t>
             </a:r>
           </a:p>
           <a:p>
@@ -5249,7 +7600,48 @@
               </a:defRPr>
             </a:pPr>
             <a:r>
-              <a:t>    - Classe d'affectation (sélectionnez dans la liste des classes)</a:t>
+              <a:rPr dirty="0"/>
+              <a:t>    - </a:t>
+            </a:r>
+            <a:r>
+              <a:rPr dirty="0" err="1"/>
+              <a:t>Classe</a:t>
+            </a:r>
+            <a:r>
+              <a:rPr dirty="0"/>
+              <a:t> </a:t>
+            </a:r>
+            <a:r>
+              <a:rPr dirty="0" err="1"/>
+              <a:t>d'affectation</a:t>
+            </a:r>
+            <a:r>
+              <a:rPr dirty="0"/>
+              <a:t> (</a:t>
+            </a:r>
+            <a:r>
+              <a:rPr dirty="0" err="1"/>
+              <a:t>sélectionnez</a:t>
+            </a:r>
+            <a:r>
+              <a:rPr dirty="0"/>
+              <a:t> </a:t>
+            </a:r>
+            <a:r>
+              <a:rPr dirty="0" err="1"/>
+              <a:t>dans</a:t>
+            </a:r>
+            <a:r>
+              <a:rPr dirty="0"/>
+              <a:t> la </a:t>
+            </a:r>
+            <a:r>
+              <a:rPr dirty="0" err="1"/>
+              <a:t>liste</a:t>
+            </a:r>
+            <a:r>
+              <a:rPr dirty="0"/>
+              <a:t> des classes)</a:t>
             </a:r>
           </a:p>
           <a:p>
@@ -5262,7 +7654,32 @@
               </a:defRPr>
             </a:pPr>
             <a:r>
-              <a:t>7. Cliquez sur 'Enregistrer l'inscription'.</a:t>
+              <a:rPr dirty="0"/>
+              <a:t>7. </a:t>
+            </a:r>
+            <a:r>
+              <a:rPr dirty="0" err="1"/>
+              <a:t>Cliquez</a:t>
+            </a:r>
+            <a:r>
+              <a:rPr dirty="0"/>
+              <a:t> sur '</a:t>
+            </a:r>
+            <a:r>
+              <a:rPr dirty="0" err="1"/>
+              <a:t>Enregistrer</a:t>
+            </a:r>
+            <a:r>
+              <a:rPr dirty="0"/>
+              <a:t> </a:t>
+            </a:r>
+            <a:r>
+              <a:rPr dirty="0" err="1"/>
+              <a:t>l'inscription</a:t>
+            </a:r>
+            <a:r>
+              <a:rPr dirty="0"/>
+              <a:t>'.</a:t>
             </a:r>
           </a:p>
           <a:p>
@@ -5275,7 +7692,72 @@
               </a:defRPr>
             </a:pPr>
             <a:r>
-              <a:t>8. L'élève apparaît dans le registre de sa classe et dans la liste des bulletins.</a:t>
+              <a:rPr dirty="0"/>
+              <a:t>8. </a:t>
+            </a:r>
+            <a:r>
+              <a:rPr dirty="0" err="1"/>
+              <a:t>L'élève</a:t>
+            </a:r>
+            <a:r>
+              <a:rPr dirty="0"/>
+              <a:t> </a:t>
+            </a:r>
+            <a:r>
+              <a:rPr dirty="0" err="1"/>
+              <a:t>apparaît</a:t>
+            </a:r>
+            <a:r>
+              <a:rPr dirty="0"/>
+              <a:t> </a:t>
+            </a:r>
+            <a:r>
+              <a:rPr dirty="0" err="1"/>
+              <a:t>dans</a:t>
+            </a:r>
+            <a:r>
+              <a:rPr dirty="0"/>
+              <a:t> le </a:t>
+            </a:r>
+            <a:r>
+              <a:rPr dirty="0" err="1"/>
+              <a:t>registre</a:t>
+            </a:r>
+            <a:r>
+              <a:rPr dirty="0"/>
+              <a:t> de </a:t>
+            </a:r>
+            <a:r>
+              <a:rPr dirty="0" err="1"/>
+              <a:t>sa</a:t>
+            </a:r>
+            <a:r>
+              <a:rPr dirty="0"/>
+              <a:t> </a:t>
+            </a:r>
+            <a:r>
+              <a:rPr dirty="0" err="1"/>
+              <a:t>classe</a:t>
+            </a:r>
+            <a:r>
+              <a:rPr dirty="0"/>
+              <a:t> et </a:t>
+            </a:r>
+            <a:r>
+              <a:rPr dirty="0" err="1"/>
+              <a:t>dans</a:t>
+            </a:r>
+            <a:r>
+              <a:rPr dirty="0"/>
+              <a:t> la </a:t>
+            </a:r>
+            <a:r>
+              <a:rPr dirty="0" err="1"/>
+              <a:t>liste</a:t>
+            </a:r>
+            <a:r>
+              <a:rPr dirty="0"/>
+              <a:t> des bulletins.</a:t>
             </a:r>
           </a:p>
         </p:txBody>
@@ -5289,7 +7771,7 @@
 </file>
 
 <file path=ppt/slides/slide2.xml><?xml version="1.0" encoding="utf-8"?>
-<p:sld xmlns:a="http://schemas.openxmlformats.org/drawingml/2006/main" xmlns:p="http://schemas.openxmlformats.org/presentationml/2006/main" xmlns:r="http://schemas.openxmlformats.org/officeDocument/2006/relationships">
+<p:sld xmlns:a="http://schemas.openxmlformats.org/drawingml/2006/main" xmlns:r="http://schemas.openxmlformats.org/officeDocument/2006/relationships" xmlns:p="http://schemas.openxmlformats.org/presentationml/2006/main">
   <p:cSld>
     <p:bg>
       <p:bgPr>
@@ -5305,7 +7787,14 @@
         <p:cNvGrpSpPr/>
         <p:nvPr/>
       </p:nvGrpSpPr>
-      <p:grpSpPr/>
+      <p:grpSpPr>
+        <a:xfrm>
+          <a:off x="0" y="0"/>
+          <a:ext cx="0" cy="0"/>
+          <a:chOff x="0" y="0"/>
+          <a:chExt cx="0" cy="0"/>
+        </a:xfrm>
+      </p:grpSpPr>
       <p:sp>
         <p:nvSpPr>
           <p:cNvPr id="2" name="TextBox 1"/>
@@ -5495,7 +7984,7 @@
 </file>
 
 <file path=ppt/slides/slide20.xml><?xml version="1.0" encoding="utf-8"?>
-<p:sld xmlns:a="http://schemas.openxmlformats.org/drawingml/2006/main" xmlns:p="http://schemas.openxmlformats.org/presentationml/2006/main" xmlns:r="http://schemas.openxmlformats.org/officeDocument/2006/relationships">
+<p:sld xmlns:a="http://schemas.openxmlformats.org/drawingml/2006/main" xmlns:r="http://schemas.openxmlformats.org/officeDocument/2006/relationships" xmlns:p="http://schemas.openxmlformats.org/presentationml/2006/main">
   <p:cSld>
     <p:bg>
       <p:bgPr>
@@ -5511,7 +8000,14 @@
         <p:cNvGrpSpPr/>
         <p:nvPr/>
       </p:nvGrpSpPr>
-      <p:grpSpPr/>
+      <p:grpSpPr>
+        <a:xfrm>
+          <a:off x="0" y="0"/>
+          <a:ext cx="0" cy="0"/>
+          <a:chOff x="0" y="0"/>
+          <a:chExt cx="0" cy="0"/>
+        </a:xfrm>
+      </p:grpSpPr>
       <p:sp>
         <p:nvSpPr>
           <p:cNvPr id="2" name="TextBox 1"/>
@@ -5600,7 +8096,7 @@
         <p:spPr>
           <a:xfrm>
             <a:off x="457200" y="1143000"/>
-            <a:ext cx="11247120" cy="5394960"/>
+            <a:ext cx="11247120" cy="1015663"/>
           </a:xfrm>
           <a:prstGeom prst="rect">
             <a:avLst/>
@@ -5622,7 +8118,95 @@
               </a:defRPr>
             </a:pPr>
             <a:r>
-              <a:t>1. Dans la liste des élèves, cliquez sur le bouton Modifier (crayon) à droite de l'élève.</a:t>
+              <a:rPr dirty="0"/>
+              <a:t>1. </a:t>
+            </a:r>
+            <a:r>
+              <a:rPr dirty="0" err="1"/>
+              <a:t>Dans</a:t>
+            </a:r>
+            <a:r>
+              <a:rPr dirty="0"/>
+              <a:t> la </a:t>
+            </a:r>
+            <a:r>
+              <a:rPr dirty="0" err="1"/>
+              <a:t>liste</a:t>
+            </a:r>
+            <a:r>
+              <a:rPr dirty="0"/>
+              <a:t> des </a:t>
+            </a:r>
+            <a:r>
+              <a:rPr dirty="0" err="1" smtClean="0"/>
+              <a:t>élèves</a:t>
+            </a:r>
+            <a:r>
+              <a:rPr lang="fr-FR" dirty="0" smtClean="0"/>
+              <a:t> (</a:t>
+            </a:r>
+            <a:r>
+              <a:rPr lang="fr-FR" dirty="0"/>
+              <a:t>dans l'onglet 'Gestion &amp; Scolarité - ERP' du menu principal cliquer ensuite sur le sous menu  ‘</a:t>
+            </a:r>
+            <a:r>
+              <a:rPr lang="fr-FR" b="1" dirty="0"/>
+              <a:t>Gestion des élèves</a:t>
+            </a:r>
+            <a:r>
+              <a:rPr lang="fr-FR" dirty="0" smtClean="0"/>
+              <a:t>’ et cliquer sur le bouton ‘</a:t>
+            </a:r>
+            <a:r>
+              <a:rPr lang="fr-FR" b="1" dirty="0" smtClean="0"/>
+              <a:t>Annales &amp; Dossiers’)</a:t>
+            </a:r>
+            <a:r>
+              <a:rPr lang="fr-FR" dirty="0" smtClean="0"/>
+              <a:t>.</a:t>
+            </a:r>
+            <a:endParaRPr lang="fr-FR" dirty="0"/>
+          </a:p>
+          <a:p>
+            <a:pPr>
+              <a:defRPr sz="1200" b="0">
+                <a:solidFill>
+                  <a:srgbClr val="1E293B"/>
+                </a:solidFill>
+                <a:latin typeface="Arial"/>
+              </a:defRPr>
+            </a:pPr>
+            <a:r>
+              <a:rPr lang="fr-FR" dirty="0" smtClean="0"/>
+              <a:t>)</a:t>
+            </a:r>
+            <a:r>
+              <a:rPr dirty="0" smtClean="0"/>
+              <a:t>, </a:t>
+            </a:r>
+            <a:r>
+              <a:rPr dirty="0" err="1"/>
+              <a:t>cliquez</a:t>
+            </a:r>
+            <a:r>
+              <a:rPr dirty="0"/>
+              <a:t> sur le bouton Modifier (crayon) à </a:t>
+            </a:r>
+            <a:r>
+              <a:rPr dirty="0" err="1"/>
+              <a:t>droite</a:t>
+            </a:r>
+            <a:r>
+              <a:rPr dirty="0"/>
+              <a:t> de </a:t>
+            </a:r>
+            <a:r>
+              <a:rPr dirty="0" err="1"/>
+              <a:t>l'élève</a:t>
+            </a:r>
+            <a:r>
+              <a:rPr dirty="0"/>
+              <a:t>.</a:t>
             </a:r>
           </a:p>
           <a:p>
@@ -5635,7 +8219,32 @@
               </a:defRPr>
             </a:pPr>
             <a:r>
-              <a:t>2. Mettez à jour les champs nécessaires (nom, classe, genre).</a:t>
+              <a:rPr dirty="0"/>
+              <a:t>2. </a:t>
+            </a:r>
+            <a:r>
+              <a:rPr dirty="0" err="1"/>
+              <a:t>Mettez</a:t>
+            </a:r>
+            <a:r>
+              <a:rPr dirty="0"/>
+              <a:t> à jour les champs </a:t>
+            </a:r>
+            <a:r>
+              <a:rPr dirty="0" err="1"/>
+              <a:t>nécessaires</a:t>
+            </a:r>
+            <a:r>
+              <a:rPr dirty="0"/>
+              <a:t> (nom, </a:t>
+            </a:r>
+            <a:r>
+              <a:rPr dirty="0" err="1"/>
+              <a:t>classe</a:t>
+            </a:r>
+            <a:r>
+              <a:rPr dirty="0"/>
+              <a:t>, genre).</a:t>
             </a:r>
           </a:p>
           <a:p>
@@ -5648,7 +8257,56 @@
               </a:defRPr>
             </a:pPr>
             <a:r>
-              <a:t>3. Cliquez sur 'Enregistrer'. Les bulletins et registres sont mis à jour automatiquement.</a:t>
+              <a:rPr dirty="0"/>
+              <a:t>3. </a:t>
+            </a:r>
+            <a:r>
+              <a:rPr dirty="0" err="1"/>
+              <a:t>Cliquez</a:t>
+            </a:r>
+            <a:r>
+              <a:rPr dirty="0"/>
+              <a:t> sur '</a:t>
+            </a:r>
+            <a:r>
+              <a:rPr dirty="0" err="1"/>
+              <a:t>Enregistrer</a:t>
+            </a:r>
+            <a:r>
+              <a:rPr dirty="0"/>
+              <a:t>'. Les bulletins et </a:t>
+            </a:r>
+            <a:r>
+              <a:rPr dirty="0" err="1"/>
+              <a:t>registres</a:t>
+            </a:r>
+            <a:r>
+              <a:rPr dirty="0"/>
+              <a:t> </a:t>
+            </a:r>
+            <a:r>
+              <a:rPr dirty="0" err="1"/>
+              <a:t>sont</a:t>
+            </a:r>
+            <a:r>
+              <a:rPr dirty="0"/>
+              <a:t> </a:t>
+            </a:r>
+            <a:r>
+              <a:rPr dirty="0" err="1"/>
+              <a:t>mis</a:t>
+            </a:r>
+            <a:r>
+              <a:rPr dirty="0"/>
+              <a:t> à jour </a:t>
+            </a:r>
+            <a:r>
+              <a:rPr dirty="0" err="1"/>
+              <a:t>automatiquement</a:t>
+            </a:r>
+            <a:r>
+              <a:rPr dirty="0"/>
+              <a:t>.</a:t>
             </a:r>
           </a:p>
         </p:txBody>
@@ -5662,7 +8320,7 @@
 </file>
 
 <file path=ppt/slides/slide21.xml><?xml version="1.0" encoding="utf-8"?>
-<p:sld xmlns:a="http://schemas.openxmlformats.org/drawingml/2006/main" xmlns:p="http://schemas.openxmlformats.org/presentationml/2006/main" xmlns:r="http://schemas.openxmlformats.org/officeDocument/2006/relationships">
+<p:sld xmlns:a="http://schemas.openxmlformats.org/drawingml/2006/main" xmlns:r="http://schemas.openxmlformats.org/officeDocument/2006/relationships" xmlns:p="http://schemas.openxmlformats.org/presentationml/2006/main">
   <p:cSld>
     <p:bg>
       <p:bgPr>
@@ -5678,7 +8336,14 @@
         <p:cNvGrpSpPr/>
         <p:nvPr/>
       </p:nvGrpSpPr>
-      <p:grpSpPr/>
+      <p:grpSpPr>
+        <a:xfrm>
+          <a:off x="0" y="0"/>
+          <a:ext cx="0" cy="0"/>
+          <a:chOff x="0" y="0"/>
+          <a:chExt cx="0" cy="0"/>
+        </a:xfrm>
+      </p:grpSpPr>
       <p:sp>
         <p:nvSpPr>
           <p:cNvPr id="2" name="TextBox 1"/>
@@ -5767,7 +8432,7 @@
         <p:spPr>
           <a:xfrm>
             <a:off x="457200" y="1143000"/>
-            <a:ext cx="11247120" cy="5394960"/>
+            <a:ext cx="11430000" cy="830997"/>
           </a:xfrm>
           <a:prstGeom prst="rect">
             <a:avLst/>
@@ -5789,8 +8454,34 @@
               </a:defRPr>
             </a:pPr>
             <a:r>
-              <a:t>1. Cliquez sur Modifier pour l'élève concerné.</a:t>
-            </a:r>
+              <a:rPr dirty="0"/>
+              <a:t>1. </a:t>
+            </a:r>
+            <a:r>
+              <a:rPr lang="fr-FR" dirty="0" smtClean="0"/>
+              <a:t>Cliquer sur l’onglet ‘Outils’ du menu général et le sous menu ‘</a:t>
+            </a:r>
+            <a:r>
+              <a:rPr lang="fr-FR" dirty="0" err="1" smtClean="0"/>
+              <a:t>Parametres</a:t>
+            </a:r>
+            <a:r>
+              <a:rPr lang="fr-FR" dirty="0" smtClean="0"/>
+              <a:t> &amp; outils scolaire’ puis cliquer sur le bouton </a:t>
+            </a:r>
+            <a:r>
+              <a:rPr lang="fr-FR" dirty="0" err="1" smtClean="0"/>
+              <a:t>Reaffectation</a:t>
+            </a:r>
+            <a:r>
+              <a:rPr lang="fr-FR" dirty="0" smtClean="0"/>
+              <a:t>/ Transfert de classe </a:t>
+            </a:r>
+            <a:r>
+              <a:rPr dirty="0" smtClean="0"/>
+              <a:t>.</a:t>
+            </a:r>
+            <a:endParaRPr dirty="0"/>
           </a:p>
           <a:p>
             <a:pPr>
@@ -5802,7 +8493,76 @@
               </a:defRPr>
             </a:pPr>
             <a:r>
-              <a:t>2. Changez la 'Classe d'affectation' dans le menu déroulant.</a:t>
+              <a:rPr dirty="0"/>
+              <a:t>2. </a:t>
+            </a:r>
+            <a:r>
+              <a:rPr lang="fr-FR" dirty="0" err="1" smtClean="0"/>
+              <a:t>Selection</a:t>
+            </a:r>
+            <a:r>
+              <a:rPr lang="fr-FR" dirty="0" smtClean="0"/>
+              <a:t> l’</a:t>
+            </a:r>
+            <a:r>
+              <a:rPr lang="fr-FR" dirty="0" err="1" smtClean="0"/>
+              <a:t>eleve</a:t>
+            </a:r>
+            <a:r>
+              <a:rPr lang="fr-FR" dirty="0" smtClean="0"/>
+              <a:t> ou les </a:t>
+            </a:r>
+            <a:r>
+              <a:rPr lang="fr-FR" dirty="0" err="1" smtClean="0"/>
+              <a:t>eleves</a:t>
+            </a:r>
+            <a:r>
+              <a:rPr lang="fr-FR" dirty="0" smtClean="0"/>
+              <a:t> concerné  et </a:t>
+            </a:r>
+            <a:r>
+              <a:rPr dirty="0" err="1" smtClean="0"/>
+              <a:t>Changez</a:t>
+            </a:r>
+            <a:r>
+              <a:rPr dirty="0" smtClean="0"/>
+              <a:t> </a:t>
+            </a:r>
+            <a:r>
+              <a:rPr dirty="0"/>
+              <a:t>la '</a:t>
+            </a:r>
+            <a:r>
+              <a:rPr dirty="0" err="1"/>
+              <a:t>Classe</a:t>
+            </a:r>
+            <a:r>
+              <a:rPr dirty="0"/>
+              <a:t> </a:t>
+            </a:r>
+            <a:r>
+              <a:rPr dirty="0" err="1"/>
+              <a:t>d'affectation</a:t>
+            </a:r>
+            <a:r>
+              <a:rPr dirty="0"/>
+              <a:t>' </a:t>
+            </a:r>
+            <a:r>
+              <a:rPr dirty="0" err="1"/>
+              <a:t>dans</a:t>
+            </a:r>
+            <a:r>
+              <a:rPr dirty="0"/>
+              <a:t> le menu </a:t>
+            </a:r>
+            <a:r>
+              <a:rPr dirty="0" err="1"/>
+              <a:t>déroulant</a:t>
+            </a:r>
+            <a:r>
+              <a:rPr dirty="0"/>
+              <a:t>.</a:t>
             </a:r>
           </a:p>
           <a:p>
@@ -5815,7 +8575,24 @@
               </a:defRPr>
             </a:pPr>
             <a:r>
-              <a:t>3. Cliquez sur 'Enregistrer'.</a:t>
+              <a:rPr dirty="0"/>
+              <a:t>3. </a:t>
+            </a:r>
+            <a:r>
+              <a:rPr dirty="0" err="1"/>
+              <a:t>Cliquez</a:t>
+            </a:r>
+            <a:r>
+              <a:rPr dirty="0"/>
+              <a:t> sur '</a:t>
+            </a:r>
+            <a:r>
+              <a:rPr dirty="0" err="1"/>
+              <a:t>Enregistrer</a:t>
+            </a:r>
+            <a:r>
+              <a:rPr dirty="0"/>
+              <a:t>'.</a:t>
             </a:r>
           </a:p>
           <a:p>
@@ -5828,7 +8605,56 @@
               </a:defRPr>
             </a:pPr>
             <a:r>
-              <a:t>4. ATTENTION : Les notes déjà saisies pour l'ancienne classe restent associées à l'élève.</a:t>
+              <a:rPr dirty="0"/>
+              <a:t>4. ATTENTION : Les notes déjà </a:t>
+            </a:r>
+            <a:r>
+              <a:rPr dirty="0" err="1"/>
+              <a:t>saisies</a:t>
+            </a:r>
+            <a:r>
+              <a:rPr dirty="0"/>
+              <a:t> pour </a:t>
+            </a:r>
+            <a:r>
+              <a:rPr dirty="0" err="1"/>
+              <a:t>l'ancienne</a:t>
+            </a:r>
+            <a:r>
+              <a:rPr dirty="0"/>
+              <a:t> </a:t>
+            </a:r>
+            <a:r>
+              <a:rPr dirty="0" err="1"/>
+              <a:t>classe</a:t>
+            </a:r>
+            <a:r>
+              <a:rPr dirty="0"/>
+              <a:t> </a:t>
+            </a:r>
+            <a:r>
+              <a:rPr dirty="0" err="1"/>
+              <a:t>restent</a:t>
+            </a:r>
+            <a:r>
+              <a:rPr dirty="0"/>
+              <a:t> </a:t>
+            </a:r>
+            <a:r>
+              <a:rPr dirty="0" err="1"/>
+              <a:t>associées</a:t>
+            </a:r>
+            <a:r>
+              <a:rPr dirty="0"/>
+              <a:t> à </a:t>
+            </a:r>
+            <a:r>
+              <a:rPr dirty="0" err="1"/>
+              <a:t>l'élève</a:t>
+            </a:r>
+            <a:r>
+              <a:rPr dirty="0"/>
+              <a:t>.</a:t>
             </a:r>
           </a:p>
         </p:txBody>
@@ -5842,7 +8668,7 @@
 </file>
 
 <file path=ppt/slides/slide22.xml><?xml version="1.0" encoding="utf-8"?>
-<p:sld xmlns:a="http://schemas.openxmlformats.org/drawingml/2006/main" xmlns:p="http://schemas.openxmlformats.org/presentationml/2006/main" xmlns:r="http://schemas.openxmlformats.org/officeDocument/2006/relationships">
+<p:sld xmlns:a="http://schemas.openxmlformats.org/drawingml/2006/main" xmlns:r="http://schemas.openxmlformats.org/officeDocument/2006/relationships" xmlns:p="http://schemas.openxmlformats.org/presentationml/2006/main">
   <p:cSld>
     <p:bg>
       <p:bgPr>
@@ -5858,7 +8684,14 @@
         <p:cNvGrpSpPr/>
         <p:nvPr/>
       </p:nvGrpSpPr>
-      <p:grpSpPr/>
+      <p:grpSpPr>
+        <a:xfrm>
+          <a:off x="0" y="0"/>
+          <a:ext cx="0" cy="0"/>
+          <a:chOff x="0" y="0"/>
+          <a:chExt cx="0" cy="0"/>
+        </a:xfrm>
+      </p:grpSpPr>
       <p:sp>
         <p:nvSpPr>
           <p:cNvPr id="2" name="TextBox 1"/>
@@ -5947,7 +8780,7 @@
         <p:spPr>
           <a:xfrm>
             <a:off x="457200" y="1143000"/>
-            <a:ext cx="11247120" cy="5394960"/>
+            <a:ext cx="11247120" cy="830997"/>
           </a:xfrm>
           <a:prstGeom prst="rect">
             <a:avLst/>
@@ -5969,7 +8802,48 @@
               </a:defRPr>
             </a:pPr>
             <a:r>
-              <a:t>1. Connectez-vous avec un compte Directeur ou Informaticien.</a:t>
+              <a:rPr dirty="0"/>
+              <a:t>1. </a:t>
+            </a:r>
+            <a:r>
+              <a:rPr dirty="0" err="1"/>
+              <a:t>Connectez-vous</a:t>
+            </a:r>
+            <a:r>
+              <a:rPr dirty="0"/>
+              <a:t> avec un </a:t>
+            </a:r>
+            <a:r>
+              <a:rPr dirty="0" err="1"/>
+              <a:t>compte</a:t>
+            </a:r>
+            <a:r>
+              <a:rPr dirty="0"/>
+              <a:t> </a:t>
+            </a:r>
+            <a:r>
+              <a:rPr dirty="0" err="1"/>
+              <a:t>Directeur</a:t>
+            </a:r>
+            <a:r>
+              <a:rPr dirty="0"/>
+              <a:t> </a:t>
+            </a:r>
+            <a:r>
+              <a:rPr dirty="0" err="1"/>
+              <a:t>ou</a:t>
+            </a:r>
+            <a:r>
+              <a:rPr dirty="0"/>
+              <a:t> </a:t>
+            </a:r>
+            <a:r>
+              <a:rPr dirty="0" err="1"/>
+              <a:t>Informaticien</a:t>
+            </a:r>
+            <a:r>
+              <a:rPr dirty="0"/>
+              <a:t>.</a:t>
             </a:r>
           </a:p>
           <a:p>
@@ -5982,8 +8856,54 @@
               </a:defRPr>
             </a:pPr>
             <a:r>
-              <a:t>2. Allez dans l'onglet 'Évaluations &amp; Examens'.</a:t>
-            </a:r>
+              <a:rPr dirty="0"/>
+              <a:t>2. </a:t>
+            </a:r>
+            <a:r>
+              <a:rPr dirty="0" err="1"/>
+              <a:t>Allez</a:t>
+            </a:r>
+            <a:r>
+              <a:rPr dirty="0"/>
+              <a:t> </a:t>
+            </a:r>
+            <a:r>
+              <a:rPr dirty="0" err="1"/>
+              <a:t>dans</a:t>
+            </a:r>
+            <a:r>
+              <a:rPr dirty="0"/>
+              <a:t> </a:t>
+            </a:r>
+            <a:r>
+              <a:rPr dirty="0" err="1"/>
+              <a:t>l'onglet</a:t>
+            </a:r>
+            <a:r>
+              <a:rPr dirty="0"/>
+              <a:t> </a:t>
+            </a:r>
+            <a:r>
+              <a:rPr lang="fr-FR" dirty="0" err="1" smtClean="0"/>
+              <a:t>Pedagogie</a:t>
+            </a:r>
+            <a:r>
+              <a:rPr lang="fr-FR" dirty="0" smtClean="0"/>
+              <a:t> </a:t>
+            </a:r>
+            <a:r>
+              <a:rPr dirty="0" smtClean="0"/>
+              <a:t>&amp; </a:t>
+            </a:r>
+            <a:r>
+              <a:rPr lang="fr-FR" dirty="0" smtClean="0"/>
+              <a:t>notes</a:t>
+            </a:r>
+            <a:r>
+              <a:rPr dirty="0" smtClean="0"/>
+              <a:t>'.</a:t>
+            </a:r>
+            <a:endParaRPr dirty="0"/>
           </a:p>
           <a:p>
             <a:pPr>
@@ -5995,72 +8915,28 @@
               </a:defRPr>
             </a:pPr>
             <a:r>
-              <a:t>3. Dans le formulaire 'Saisir une Note d'Évaluation' :</a:t>
-            </a:r>
-          </a:p>
-          <a:p>
-            <a:pPr>
-              <a:defRPr sz="1100" b="0">
-                <a:solidFill>
-                  <a:srgbClr val="505050"/>
-                </a:solidFill>
-                <a:latin typeface="Arial"/>
-              </a:defRPr>
-            </a:pPr>
-            <a:r>
-              <a:t>    - Sélectionnez l'Élève dans la liste déroulante</a:t>
-            </a:r>
-          </a:p>
-          <a:p>
-            <a:pPr>
-              <a:defRPr sz="1100" b="0">
-                <a:solidFill>
-                  <a:srgbClr val="505050"/>
-                </a:solidFill>
-                <a:latin typeface="Arial"/>
-              </a:defRPr>
-            </a:pPr>
-            <a:r>
-              <a:t>    - Sélectionnez la Matière</a:t>
-            </a:r>
-          </a:p>
-          <a:p>
-            <a:pPr>
-              <a:defRPr sz="1100" b="0">
-                <a:solidFill>
-                  <a:srgbClr val="505050"/>
-                </a:solidFill>
-                <a:latin typeface="Arial"/>
-              </a:defRPr>
-            </a:pPr>
-            <a:r>
-              <a:t>    - Choisissez le Coefficient de l'évaluation (1, 2, 3 ou 5)</a:t>
-            </a:r>
-          </a:p>
-          <a:p>
-            <a:pPr>
-              <a:defRPr sz="1100" b="0">
-                <a:solidFill>
-                  <a:srgbClr val="505050"/>
-                </a:solidFill>
-                <a:latin typeface="Arial"/>
-              </a:defRPr>
-            </a:pPr>
-            <a:r>
-              <a:t>    - Saisissez l'intitulé du devoir (ex: Interrogation Écrite n°1)</a:t>
-            </a:r>
-          </a:p>
-          <a:p>
-            <a:pPr>
-              <a:defRPr sz="1100" b="0">
-                <a:solidFill>
-                  <a:srgbClr val="505050"/>
-                </a:solidFill>
-                <a:latin typeface="Arial"/>
-              </a:defRPr>
-            </a:pPr>
-            <a:r>
-              <a:t>    - Entrez la Note sur 20 (ex: 14.5)</a:t>
+              <a:rPr dirty="0"/>
+              <a:t>3. </a:t>
+            </a:r>
+            <a:r>
+              <a:rPr lang="fr-FR" dirty="0" smtClean="0"/>
+              <a:t>Cliquer sur le sous menu ‘Notes &amp; Bulletins</a:t>
+            </a:r>
+            <a:r>
+              <a:rPr dirty="0" smtClean="0"/>
+              <a:t>'</a:t>
+            </a:r>
+            <a:r>
+              <a:rPr lang="fr-FR" dirty="0" smtClean="0"/>
+              <a:t>  puis clique sur le bouton Enregistrement des NOTES</a:t>
+            </a:r>
+            <a:r>
+              <a:rPr dirty="0" smtClean="0"/>
+              <a:t> </a:t>
+            </a:r>
+            <a:r>
+              <a:rPr dirty="0"/>
+              <a:t>:</a:t>
             </a:r>
           </a:p>
           <a:p>
@@ -6073,8 +8949,42 @@
               </a:defRPr>
             </a:pPr>
             <a:r>
-              <a:t>9. Cliquez sur 'Soumettre au Registre Électronique'.</a:t>
-            </a:r>
+              <a:rPr dirty="0" smtClean="0"/>
+              <a:t>9. </a:t>
+            </a:r>
+            <a:r>
+              <a:rPr dirty="0" err="1" smtClean="0"/>
+              <a:t>Cliquez</a:t>
+            </a:r>
+            <a:r>
+              <a:rPr dirty="0" smtClean="0"/>
+              <a:t> sur '</a:t>
+            </a:r>
+            <a:r>
+              <a:rPr dirty="0" err="1" smtClean="0"/>
+              <a:t>Soumettre</a:t>
+            </a:r>
+            <a:r>
+              <a:rPr dirty="0" smtClean="0"/>
+              <a:t> au </a:t>
+            </a:r>
+            <a:r>
+              <a:rPr dirty="0" err="1" smtClean="0"/>
+              <a:t>Registre</a:t>
+            </a:r>
+            <a:r>
+              <a:rPr dirty="0" smtClean="0"/>
+              <a:t> </a:t>
+            </a:r>
+            <a:r>
+              <a:rPr dirty="0" err="1" smtClean="0"/>
+              <a:t>Électronique</a:t>
+            </a:r>
+            <a:r>
+              <a:rPr dirty="0" smtClean="0"/>
+              <a:t>'.</a:t>
+            </a:r>
+            <a:endParaRPr dirty="0"/>
           </a:p>
         </p:txBody>
       </p:sp>
@@ -6087,7 +8997,7 @@
 </file>
 
 <file path=ppt/slides/slide23.xml><?xml version="1.0" encoding="utf-8"?>
-<p:sld xmlns:a="http://schemas.openxmlformats.org/drawingml/2006/main" xmlns:p="http://schemas.openxmlformats.org/presentationml/2006/main" xmlns:r="http://schemas.openxmlformats.org/officeDocument/2006/relationships">
+<p:sld xmlns:a="http://schemas.openxmlformats.org/drawingml/2006/main" xmlns:r="http://schemas.openxmlformats.org/officeDocument/2006/relationships" xmlns:p="http://schemas.openxmlformats.org/presentationml/2006/main">
   <p:cSld>
     <p:bg>
       <p:bgPr>
@@ -6103,7 +9013,14 @@
         <p:cNvGrpSpPr/>
         <p:nvPr/>
       </p:nvGrpSpPr>
-      <p:grpSpPr/>
+      <p:grpSpPr>
+        <a:xfrm>
+          <a:off x="0" y="0"/>
+          <a:ext cx="0" cy="0"/>
+          <a:chOff x="0" y="0"/>
+          <a:chExt cx="0" cy="0"/>
+        </a:xfrm>
+      </p:grpSpPr>
       <p:sp>
         <p:nvSpPr>
           <p:cNvPr id="2" name="TextBox 1"/>
@@ -6192,7 +9109,7 @@
         <p:spPr>
           <a:xfrm>
             <a:off x="457200" y="1143000"/>
-            <a:ext cx="11247120" cy="5394960"/>
+            <a:ext cx="11247120" cy="1384995"/>
           </a:xfrm>
           <a:prstGeom prst="rect">
             <a:avLst/>
@@ -6214,7 +9131,56 @@
               </a:defRPr>
             </a:pPr>
             <a:r>
-              <a:t>1. Connectez-vous avec un compte Professeur autorisé (permission 'Saisie des Moyennes' active).</a:t>
+              <a:rPr dirty="0"/>
+              <a:t>1. </a:t>
+            </a:r>
+            <a:r>
+              <a:rPr dirty="0" err="1"/>
+              <a:t>Connectez-vous</a:t>
+            </a:r>
+            <a:r>
+              <a:rPr dirty="0"/>
+              <a:t> avec un </a:t>
+            </a:r>
+            <a:r>
+              <a:rPr dirty="0" err="1"/>
+              <a:t>compte</a:t>
+            </a:r>
+            <a:r>
+              <a:rPr dirty="0"/>
+              <a:t> </a:t>
+            </a:r>
+            <a:r>
+              <a:rPr dirty="0" err="1"/>
+              <a:t>Professeur</a:t>
+            </a:r>
+            <a:r>
+              <a:rPr dirty="0"/>
+              <a:t> </a:t>
+            </a:r>
+            <a:r>
+              <a:rPr dirty="0" err="1"/>
+              <a:t>autorisé</a:t>
+            </a:r>
+            <a:r>
+              <a:rPr dirty="0"/>
+              <a:t> (permission '</a:t>
+            </a:r>
+            <a:r>
+              <a:rPr dirty="0" err="1"/>
+              <a:t>Saisie</a:t>
+            </a:r>
+            <a:r>
+              <a:rPr dirty="0"/>
+              <a:t> des </a:t>
+            </a:r>
+            <a:r>
+              <a:rPr dirty="0" err="1"/>
+              <a:t>Moyennes</a:t>
+            </a:r>
+            <a:r>
+              <a:rPr dirty="0"/>
+              <a:t>' active).</a:t>
             </a:r>
           </a:p>
           <a:p>
@@ -6227,7 +9193,60 @@
               </a:defRPr>
             </a:pPr>
             <a:r>
-              <a:t>2. Allez dans 'Espace Enseignant' &gt; sous-section 'Saisie des Moyennes'.</a:t>
+              <a:rPr dirty="0"/>
+              <a:t>2. </a:t>
+            </a:r>
+            <a:r>
+              <a:rPr dirty="0" err="1"/>
+              <a:t>Allez</a:t>
+            </a:r>
+            <a:r>
+              <a:rPr dirty="0"/>
+              <a:t> </a:t>
+            </a:r>
+            <a:r>
+              <a:rPr dirty="0" err="1"/>
+              <a:t>dans</a:t>
+            </a:r>
+            <a:r>
+              <a:rPr dirty="0"/>
+              <a:t> '</a:t>
+            </a:r>
+            <a:r>
+              <a:rPr dirty="0" err="1"/>
+              <a:t>Espace</a:t>
+            </a:r>
+            <a:r>
+              <a:rPr dirty="0"/>
+              <a:t> </a:t>
+            </a:r>
+            <a:r>
+              <a:rPr dirty="0" err="1"/>
+              <a:t>Enseignant</a:t>
+            </a:r>
+            <a:r>
+              <a:rPr dirty="0" smtClean="0"/>
+              <a:t>' </a:t>
+            </a:r>
+            <a:r>
+              <a:rPr dirty="0"/>
+              <a:t>&gt; sous-section '</a:t>
+            </a:r>
+            <a:r>
+              <a:rPr dirty="0" err="1"/>
+              <a:t>Saisie</a:t>
+            </a:r>
+            <a:r>
+              <a:rPr dirty="0"/>
+              <a:t> des </a:t>
+            </a:r>
+            <a:r>
+              <a:rPr dirty="0" err="1"/>
+              <a:t>Moyennes</a:t>
+            </a:r>
+            <a:r>
+              <a:rPr dirty="0"/>
+              <a:t>'.</a:t>
             </a:r>
           </a:p>
           <a:p>
@@ -6240,7 +9259,64 @@
               </a:defRPr>
             </a:pPr>
             <a:r>
-              <a:t>3. Sélectionnez votre Classe et votre Matière dans les filtres.</a:t>
+              <a:rPr dirty="0"/>
+              <a:t>3. </a:t>
+            </a:r>
+            <a:r>
+              <a:rPr dirty="0" err="1"/>
+              <a:t>Sélectionnez</a:t>
+            </a:r>
+            <a:r>
+              <a:rPr dirty="0"/>
+              <a:t> </a:t>
+            </a:r>
+            <a:r>
+              <a:rPr dirty="0" err="1"/>
+              <a:t>votre</a:t>
+            </a:r>
+            <a:r>
+              <a:rPr dirty="0"/>
+              <a:t> </a:t>
+            </a:r>
+            <a:r>
+              <a:rPr dirty="0" err="1"/>
+              <a:t>Classe</a:t>
+            </a:r>
+            <a:r>
+              <a:rPr dirty="0"/>
+              <a:t> et </a:t>
+            </a:r>
+            <a:r>
+              <a:rPr dirty="0" err="1"/>
+              <a:t>votre</a:t>
+            </a:r>
+            <a:r>
+              <a:rPr dirty="0"/>
+              <a:t> </a:t>
+            </a:r>
+            <a:r>
+              <a:rPr dirty="0" err="1"/>
+              <a:t>Matière</a:t>
+            </a:r>
+            <a:r>
+              <a:rPr dirty="0"/>
+              <a:t> </a:t>
+            </a:r>
+            <a:r>
+              <a:rPr dirty="0" err="1"/>
+              <a:t>dans</a:t>
+            </a:r>
+            <a:r>
+              <a:rPr dirty="0"/>
+              <a:t> les </a:t>
+            </a:r>
+            <a:r>
+              <a:rPr dirty="0" err="1"/>
+              <a:t>filtres</a:t>
+            </a:r>
+            <a:r>
+              <a:rPr dirty="0"/>
+              <a:t>.</a:t>
             </a:r>
           </a:p>
           <a:p>
@@ -6253,7 +9329,40 @@
               </a:defRPr>
             </a:pPr>
             <a:r>
-              <a:t>4. La liste de vos élèves apparaît.</a:t>
+              <a:rPr dirty="0"/>
+              <a:t>4. La </a:t>
+            </a:r>
+            <a:r>
+              <a:rPr dirty="0" err="1"/>
+              <a:t>liste</a:t>
+            </a:r>
+            <a:r>
+              <a:rPr dirty="0"/>
+              <a:t> de </a:t>
+            </a:r>
+            <a:r>
+              <a:rPr dirty="0" err="1"/>
+              <a:t>vos</a:t>
+            </a:r>
+            <a:r>
+              <a:rPr dirty="0"/>
+              <a:t> </a:t>
+            </a:r>
+            <a:r>
+              <a:rPr dirty="0" err="1"/>
+              <a:t>élèves</a:t>
+            </a:r>
+            <a:r>
+              <a:rPr dirty="0"/>
+              <a:t> </a:t>
+            </a:r>
+            <a:r>
+              <a:rPr dirty="0" err="1"/>
+              <a:t>apparaît</a:t>
+            </a:r>
+            <a:r>
+              <a:rPr dirty="0"/>
+              <a:t>.</a:t>
             </a:r>
           </a:p>
           <a:p>
@@ -6266,7 +9375,56 @@
               </a:defRPr>
             </a:pPr>
             <a:r>
-              <a:t>5. Pour chaque élève, saisissez sa note dans le champ numérique.</a:t>
+              <a:rPr dirty="0"/>
+              <a:t>5. Pour </a:t>
+            </a:r>
+            <a:r>
+              <a:rPr dirty="0" err="1"/>
+              <a:t>chaque</a:t>
+            </a:r>
+            <a:r>
+              <a:rPr dirty="0"/>
+              <a:t> </a:t>
+            </a:r>
+            <a:r>
+              <a:rPr dirty="0" err="1"/>
+              <a:t>élève</a:t>
+            </a:r>
+            <a:r>
+              <a:rPr dirty="0"/>
+              <a:t>, </a:t>
+            </a:r>
+            <a:r>
+              <a:rPr dirty="0" err="1"/>
+              <a:t>saisissez</a:t>
+            </a:r>
+            <a:r>
+              <a:rPr dirty="0"/>
+              <a:t> </a:t>
+            </a:r>
+            <a:r>
+              <a:rPr dirty="0" err="1"/>
+              <a:t>sa</a:t>
+            </a:r>
+            <a:r>
+              <a:rPr dirty="0"/>
+              <a:t> note </a:t>
+            </a:r>
+            <a:r>
+              <a:rPr dirty="0" err="1"/>
+              <a:t>dans</a:t>
+            </a:r>
+            <a:r>
+              <a:rPr dirty="0"/>
+              <a:t> le champ </a:t>
+            </a:r>
+            <a:r>
+              <a:rPr dirty="0" err="1"/>
+              <a:t>numérique</a:t>
+            </a:r>
+            <a:r>
+              <a:rPr dirty="0"/>
+              <a:t>.</a:t>
             </a:r>
           </a:p>
           <a:p>
@@ -6279,7 +9437,32 @@
               </a:defRPr>
             </a:pPr>
             <a:r>
-              <a:t>6. Renseignez l'intitulé de l'évaluation et le coefficient.</a:t>
+              <a:rPr dirty="0"/>
+              <a:t>6. </a:t>
+            </a:r>
+            <a:r>
+              <a:rPr dirty="0" err="1"/>
+              <a:t>Renseignez</a:t>
+            </a:r>
+            <a:r>
+              <a:rPr dirty="0"/>
+              <a:t> </a:t>
+            </a:r>
+            <a:r>
+              <a:rPr dirty="0" err="1"/>
+              <a:t>l'intitulé</a:t>
+            </a:r>
+            <a:r>
+              <a:rPr dirty="0"/>
+              <a:t> de </a:t>
+            </a:r>
+            <a:r>
+              <a:rPr dirty="0" err="1"/>
+              <a:t>l'évaluation</a:t>
+            </a:r>
+            <a:r>
+              <a:rPr dirty="0"/>
+              <a:t> et le coefficient.</a:t>
             </a:r>
           </a:p>
           <a:p>
@@ -6292,7 +9475,40 @@
               </a:defRPr>
             </a:pPr>
             <a:r>
-              <a:t>7. Cliquez sur le bouton orange 'Enregistrer toutes les notes saisies'.</a:t>
+              <a:rPr dirty="0"/>
+              <a:t>7. </a:t>
+            </a:r>
+            <a:r>
+              <a:rPr dirty="0" err="1"/>
+              <a:t>Cliquez</a:t>
+            </a:r>
+            <a:r>
+              <a:rPr dirty="0"/>
+              <a:t> sur le bouton orange '</a:t>
+            </a:r>
+            <a:r>
+              <a:rPr dirty="0" err="1"/>
+              <a:t>Enregistrer</a:t>
+            </a:r>
+            <a:r>
+              <a:rPr dirty="0"/>
+              <a:t> </a:t>
+            </a:r>
+            <a:r>
+              <a:rPr dirty="0" err="1"/>
+              <a:t>toutes</a:t>
+            </a:r>
+            <a:r>
+              <a:rPr dirty="0"/>
+              <a:t> les notes </a:t>
+            </a:r>
+            <a:r>
+              <a:rPr dirty="0" err="1"/>
+              <a:t>saisies</a:t>
+            </a:r>
+            <a:r>
+              <a:rPr dirty="0"/>
+              <a:t>'.</a:t>
             </a:r>
           </a:p>
         </p:txBody>
@@ -6306,7 +9522,7 @@
 </file>
 
 <file path=ppt/slides/slide24.xml><?xml version="1.0" encoding="utf-8"?>
-<p:sld xmlns:a="http://schemas.openxmlformats.org/drawingml/2006/main" xmlns:p="http://schemas.openxmlformats.org/presentationml/2006/main" xmlns:r="http://schemas.openxmlformats.org/officeDocument/2006/relationships">
+<p:sld xmlns:a="http://schemas.openxmlformats.org/drawingml/2006/main" xmlns:r="http://schemas.openxmlformats.org/officeDocument/2006/relationships" xmlns:p="http://schemas.openxmlformats.org/presentationml/2006/main">
   <p:cSld>
     <p:bg>
       <p:bgPr>
@@ -6322,7 +9538,14 @@
         <p:cNvGrpSpPr/>
         <p:nvPr/>
       </p:nvGrpSpPr>
-      <p:grpSpPr/>
+      <p:grpSpPr>
+        <a:xfrm>
+          <a:off x="0" y="0"/>
+          <a:ext cx="0" cy="0"/>
+          <a:chOff x="0" y="0"/>
+          <a:chExt cx="0" cy="0"/>
+        </a:xfrm>
+      </p:grpSpPr>
       <p:sp>
         <p:nvSpPr>
           <p:cNvPr id="2" name="TextBox 1"/>
@@ -6499,7 +9722,7 @@
 </file>
 
 <file path=ppt/slides/slide25.xml><?xml version="1.0" encoding="utf-8"?>
-<p:sld xmlns:a="http://schemas.openxmlformats.org/drawingml/2006/main" xmlns:p="http://schemas.openxmlformats.org/presentationml/2006/main" xmlns:r="http://schemas.openxmlformats.org/officeDocument/2006/relationships">
+<p:sld xmlns:a="http://schemas.openxmlformats.org/drawingml/2006/main" xmlns:r="http://schemas.openxmlformats.org/officeDocument/2006/relationships" xmlns:p="http://schemas.openxmlformats.org/presentationml/2006/main">
   <p:cSld>
     <p:bg>
       <p:bgPr>
@@ -6515,7 +9738,14 @@
         <p:cNvGrpSpPr/>
         <p:nvPr/>
       </p:nvGrpSpPr>
-      <p:grpSpPr/>
+      <p:grpSpPr>
+        <a:xfrm>
+          <a:off x="0" y="0"/>
+          <a:ext cx="0" cy="0"/>
+          <a:chOff x="0" y="0"/>
+          <a:chExt cx="0" cy="0"/>
+        </a:xfrm>
+      </p:grpSpPr>
       <p:sp>
         <p:nvSpPr>
           <p:cNvPr id="2" name="TextBox 1"/>
@@ -6705,7 +9935,7 @@
 </file>
 
 <file path=ppt/slides/slide26.xml><?xml version="1.0" encoding="utf-8"?>
-<p:sld xmlns:a="http://schemas.openxmlformats.org/drawingml/2006/main" xmlns:p="http://schemas.openxmlformats.org/presentationml/2006/main" xmlns:r="http://schemas.openxmlformats.org/officeDocument/2006/relationships">
+<p:sld xmlns:a="http://schemas.openxmlformats.org/drawingml/2006/main" xmlns:r="http://schemas.openxmlformats.org/officeDocument/2006/relationships" xmlns:p="http://schemas.openxmlformats.org/presentationml/2006/main">
   <p:cSld>
     <p:bg>
       <p:bgPr>
@@ -6721,7 +9951,14 @@
         <p:cNvGrpSpPr/>
         <p:nvPr/>
       </p:nvGrpSpPr>
-      <p:grpSpPr/>
+      <p:grpSpPr>
+        <a:xfrm>
+          <a:off x="0" y="0"/>
+          <a:ext cx="0" cy="0"/>
+          <a:chOff x="0" y="0"/>
+          <a:chExt cx="0" cy="0"/>
+        </a:xfrm>
+      </p:grpSpPr>
       <p:sp>
         <p:nvSpPr>
           <p:cNvPr id="2" name="TextBox 1"/>
@@ -6810,7 +10047,7 @@
         <p:spPr>
           <a:xfrm>
             <a:off x="457200" y="1143000"/>
-            <a:ext cx="11247120" cy="5394960"/>
+            <a:ext cx="11247120" cy="1015663"/>
           </a:xfrm>
           <a:prstGeom prst="rect">
             <a:avLst/>
@@ -6832,7 +10069,48 @@
               </a:defRPr>
             </a:pPr>
             <a:r>
-              <a:t>1. Seuls le Directeur et l'Informaticien peuvent supprimer des notes.</a:t>
+              <a:rPr dirty="0"/>
+              <a:t>1. </a:t>
+            </a:r>
+            <a:r>
+              <a:rPr dirty="0" err="1"/>
+              <a:t>Seuls</a:t>
+            </a:r>
+            <a:r>
+              <a:rPr dirty="0"/>
+              <a:t> le </a:t>
+            </a:r>
+            <a:r>
+              <a:rPr dirty="0" err="1"/>
+              <a:t>Directeur</a:t>
+            </a:r>
+            <a:r>
+              <a:rPr dirty="0"/>
+              <a:t> et </a:t>
+            </a:r>
+            <a:r>
+              <a:rPr dirty="0" err="1"/>
+              <a:t>l'Informaticien</a:t>
+            </a:r>
+            <a:r>
+              <a:rPr dirty="0"/>
+              <a:t> </a:t>
+            </a:r>
+            <a:r>
+              <a:rPr dirty="0" err="1"/>
+              <a:t>peuvent</a:t>
+            </a:r>
+            <a:r>
+              <a:rPr dirty="0"/>
+              <a:t> </a:t>
+            </a:r>
+            <a:r>
+              <a:rPr dirty="0" err="1"/>
+              <a:t>supprimer</a:t>
+            </a:r>
+            <a:r>
+              <a:rPr dirty="0"/>
+              <a:t> des notes.</a:t>
             </a:r>
           </a:p>
           <a:p>
@@ -6845,7 +10123,96 @@
               </a:defRPr>
             </a:pPr>
             <a:r>
-              <a:t>2. Dans l'onglet Évaluations, repérez la note dans la liste 'Derniers coefficients enregistrés'.</a:t>
+              <a:rPr dirty="0"/>
+              <a:t>2. </a:t>
+            </a:r>
+            <a:r>
+              <a:rPr dirty="0" err="1"/>
+              <a:t>Dans</a:t>
+            </a:r>
+            <a:r>
+              <a:rPr dirty="0"/>
+              <a:t> </a:t>
+            </a:r>
+            <a:r>
+              <a:rPr dirty="0" err="1"/>
+              <a:t>l'onglet</a:t>
+            </a:r>
+            <a:r>
+              <a:rPr dirty="0"/>
+              <a:t> </a:t>
+            </a:r>
+            <a:r>
+              <a:rPr lang="fr-FR" dirty="0" smtClean="0"/>
+              <a:t>‘</a:t>
+            </a:r>
+            <a:r>
+              <a:rPr lang="fr-FR" b="1" dirty="0" err="1" smtClean="0"/>
+              <a:t>Pedagogie</a:t>
+            </a:r>
+            <a:r>
+              <a:rPr lang="fr-FR" b="1" dirty="0" smtClean="0"/>
+              <a:t> &amp; Notes</a:t>
+            </a:r>
+            <a:r>
+              <a:rPr lang="fr-FR" dirty="0" smtClean="0"/>
+              <a:t>’ et le sous menu ‘</a:t>
+            </a:r>
+            <a:r>
+              <a:rPr lang="fr-FR" b="1" dirty="0"/>
+              <a:t>N</a:t>
+            </a:r>
+            <a:r>
+              <a:rPr lang="fr-FR" b="1" dirty="0" smtClean="0"/>
+              <a:t>otes &amp; Bulletins</a:t>
+            </a:r>
+            <a:r>
+              <a:rPr lang="fr-FR" dirty="0" smtClean="0"/>
+              <a:t>’</a:t>
+            </a:r>
+            <a:r>
+              <a:rPr dirty="0" smtClean="0"/>
+              <a:t>, </a:t>
+            </a:r>
+            <a:r>
+              <a:rPr dirty="0" err="1"/>
+              <a:t>repérez</a:t>
+            </a:r>
+            <a:r>
+              <a:rPr dirty="0"/>
+              <a:t> la note </a:t>
+            </a:r>
+            <a:r>
+              <a:rPr dirty="0" err="1"/>
+              <a:t>dans</a:t>
+            </a:r>
+            <a:r>
+              <a:rPr dirty="0"/>
+              <a:t> la </a:t>
+            </a:r>
+            <a:r>
+              <a:rPr dirty="0" err="1"/>
+              <a:t>liste</a:t>
+            </a:r>
+            <a:r>
+              <a:rPr dirty="0"/>
+              <a:t> '</a:t>
+            </a:r>
+            <a:r>
+              <a:rPr dirty="0" err="1"/>
+              <a:t>Derniers</a:t>
+            </a:r>
+            <a:r>
+              <a:rPr dirty="0"/>
+              <a:t> coefficients </a:t>
+            </a:r>
+            <a:r>
+              <a:rPr dirty="0" err="1"/>
+              <a:t>enregistrés</a:t>
+            </a:r>
+            <a:r>
+              <a:rPr dirty="0"/>
+              <a:t>'.</a:t>
             </a:r>
           </a:p>
           <a:p>
@@ -6858,7 +10225,48 @@
               </a:defRPr>
             </a:pPr>
             <a:r>
-              <a:t>3. Survolez la ligne avec la souris : un bouton rouge Corbeille apparaît.</a:t>
+              <a:rPr dirty="0"/>
+              <a:t>3. </a:t>
+            </a:r>
+            <a:r>
+              <a:rPr dirty="0" err="1"/>
+              <a:t>Survolez</a:t>
+            </a:r>
+            <a:r>
+              <a:rPr dirty="0"/>
+              <a:t> la </a:t>
+            </a:r>
+            <a:r>
+              <a:rPr dirty="0" err="1"/>
+              <a:t>ligne</a:t>
+            </a:r>
+            <a:r>
+              <a:rPr dirty="0"/>
+              <a:t> avec la </a:t>
+            </a:r>
+            <a:r>
+              <a:rPr dirty="0" err="1"/>
+              <a:t>souris</a:t>
+            </a:r>
+            <a:r>
+              <a:rPr dirty="0"/>
+              <a:t> : un bouton rouge </a:t>
+            </a:r>
+            <a:r>
+              <a:rPr dirty="0" err="1"/>
+              <a:t>Corbeille</a:t>
+            </a:r>
+            <a:r>
+              <a:rPr dirty="0"/>
+              <a:t> </a:t>
+            </a:r>
+            <a:r>
+              <a:rPr dirty="0" err="1"/>
+              <a:t>apparaît</a:t>
+            </a:r>
+            <a:r>
+              <a:rPr dirty="0"/>
+              <a:t>.</a:t>
             </a:r>
           </a:p>
           <a:p>
@@ -6871,7 +10279,32 @@
               </a:defRPr>
             </a:pPr>
             <a:r>
-              <a:t>4. Cliquez sur la Corbeille et confirmez la suppression.</a:t>
+              <a:rPr dirty="0"/>
+              <a:t>4. </a:t>
+            </a:r>
+            <a:r>
+              <a:rPr dirty="0" err="1"/>
+              <a:t>Cliquez</a:t>
+            </a:r>
+            <a:r>
+              <a:rPr dirty="0"/>
+              <a:t> sur la </a:t>
+            </a:r>
+            <a:r>
+              <a:rPr dirty="0" err="1"/>
+              <a:t>Corbeille</a:t>
+            </a:r>
+            <a:r>
+              <a:rPr dirty="0"/>
+              <a:t> et </a:t>
+            </a:r>
+            <a:r>
+              <a:rPr dirty="0" err="1"/>
+              <a:t>confirmez</a:t>
+            </a:r>
+            <a:r>
+              <a:rPr dirty="0"/>
+              <a:t> la suppression.</a:t>
             </a:r>
           </a:p>
           <a:p>
@@ -6884,7 +10317,64 @@
               </a:defRPr>
             </a:pPr>
             <a:r>
-              <a:t>5. Si la note est figée, utilisez d'abord le déverrouillage avant de la supprimer.</a:t>
+              <a:rPr dirty="0"/>
+              <a:t>5. Si la note </a:t>
+            </a:r>
+            <a:r>
+              <a:rPr dirty="0" err="1"/>
+              <a:t>est</a:t>
+            </a:r>
+            <a:r>
+              <a:rPr dirty="0"/>
+              <a:t> </a:t>
+            </a:r>
+            <a:r>
+              <a:rPr dirty="0" err="1"/>
+              <a:t>figée</a:t>
+            </a:r>
+            <a:r>
+              <a:rPr dirty="0"/>
+              <a:t>, </a:t>
+            </a:r>
+            <a:r>
+              <a:rPr dirty="0" err="1"/>
+              <a:t>utilisez</a:t>
+            </a:r>
+            <a:r>
+              <a:rPr dirty="0"/>
+              <a:t> </a:t>
+            </a:r>
+            <a:r>
+              <a:rPr dirty="0" err="1"/>
+              <a:t>d'abord</a:t>
+            </a:r>
+            <a:r>
+              <a:rPr dirty="0"/>
+              <a:t> le </a:t>
+            </a:r>
+            <a:r>
+              <a:rPr dirty="0" err="1"/>
+              <a:t>déverrouillage</a:t>
+            </a:r>
+            <a:r>
+              <a:rPr dirty="0"/>
+              <a:t> </a:t>
+            </a:r>
+            <a:r>
+              <a:rPr dirty="0" err="1"/>
+              <a:t>avant</a:t>
+            </a:r>
+            <a:r>
+              <a:rPr dirty="0"/>
+              <a:t> de la </a:t>
+            </a:r>
+            <a:r>
+              <a:rPr dirty="0" err="1"/>
+              <a:t>supprimer</a:t>
+            </a:r>
+            <a:r>
+              <a:rPr dirty="0"/>
+              <a:t>.</a:t>
             </a:r>
           </a:p>
         </p:txBody>
@@ -6898,7 +10388,7 @@
 </file>
 
 <file path=ppt/slides/slide27.xml><?xml version="1.0" encoding="utf-8"?>
-<p:sld xmlns:a="http://schemas.openxmlformats.org/drawingml/2006/main" xmlns:p="http://schemas.openxmlformats.org/presentationml/2006/main" xmlns:r="http://schemas.openxmlformats.org/officeDocument/2006/relationships">
+<p:sld xmlns:a="http://schemas.openxmlformats.org/drawingml/2006/main" xmlns:r="http://schemas.openxmlformats.org/officeDocument/2006/relationships" xmlns:p="http://schemas.openxmlformats.org/presentationml/2006/main">
   <p:cSld>
     <p:bg>
       <p:bgPr>
@@ -6914,7 +10404,14 @@
         <p:cNvGrpSpPr/>
         <p:nvPr/>
       </p:nvGrpSpPr>
-      <p:grpSpPr/>
+      <p:grpSpPr>
+        <a:xfrm>
+          <a:off x="0" y="0"/>
+          <a:ext cx="0" cy="0"/>
+          <a:chOff x="0" y="0"/>
+          <a:chExt cx="0" cy="0"/>
+        </a:xfrm>
+      </p:grpSpPr>
       <p:sp>
         <p:nvSpPr>
           <p:cNvPr id="2" name="TextBox 1"/>
@@ -7117,7 +10614,7 @@
 </file>
 
 <file path=ppt/slides/slide28.xml><?xml version="1.0" encoding="utf-8"?>
-<p:sld xmlns:a="http://schemas.openxmlformats.org/drawingml/2006/main" xmlns:p="http://schemas.openxmlformats.org/presentationml/2006/main" xmlns:r="http://schemas.openxmlformats.org/officeDocument/2006/relationships">
+<p:sld xmlns:a="http://schemas.openxmlformats.org/drawingml/2006/main" xmlns:r="http://schemas.openxmlformats.org/officeDocument/2006/relationships" xmlns:p="http://schemas.openxmlformats.org/presentationml/2006/main">
   <p:cSld>
     <p:bg>
       <p:bgPr>
@@ -7133,7 +10630,14 @@
         <p:cNvGrpSpPr/>
         <p:nvPr/>
       </p:nvGrpSpPr>
-      <p:grpSpPr/>
+      <p:grpSpPr>
+        <a:xfrm>
+          <a:off x="0" y="0"/>
+          <a:ext cx="0" cy="0"/>
+          <a:chOff x="0" y="0"/>
+          <a:chExt cx="0" cy="0"/>
+        </a:xfrm>
+      </p:grpSpPr>
       <p:sp>
         <p:nvSpPr>
           <p:cNvPr id="2" name="TextBox 1"/>
@@ -7336,7 +10840,7 @@
 </file>
 
 <file path=ppt/slides/slide29.xml><?xml version="1.0" encoding="utf-8"?>
-<p:sld xmlns:a="http://schemas.openxmlformats.org/drawingml/2006/main" xmlns:p="http://schemas.openxmlformats.org/presentationml/2006/main" xmlns:r="http://schemas.openxmlformats.org/officeDocument/2006/relationships">
+<p:sld xmlns:a="http://schemas.openxmlformats.org/drawingml/2006/main" xmlns:r="http://schemas.openxmlformats.org/officeDocument/2006/relationships" xmlns:p="http://schemas.openxmlformats.org/presentationml/2006/main">
   <p:cSld>
     <p:bg>
       <p:bgPr>
@@ -7352,7 +10856,14 @@
         <p:cNvGrpSpPr/>
         <p:nvPr/>
       </p:nvGrpSpPr>
-      <p:grpSpPr/>
+      <p:grpSpPr>
+        <a:xfrm>
+          <a:off x="0" y="0"/>
+          <a:ext cx="0" cy="0"/>
+          <a:chOff x="0" y="0"/>
+          <a:chExt cx="0" cy="0"/>
+        </a:xfrm>
+      </p:grpSpPr>
       <p:sp>
         <p:nvSpPr>
           <p:cNvPr id="2" name="TextBox 1"/>
@@ -7542,7 +11053,7 @@
 </file>
 
 <file path=ppt/slides/slide3.xml><?xml version="1.0" encoding="utf-8"?>
-<p:sld xmlns:a="http://schemas.openxmlformats.org/drawingml/2006/main" xmlns:p="http://schemas.openxmlformats.org/presentationml/2006/main" xmlns:r="http://schemas.openxmlformats.org/officeDocument/2006/relationships">
+<p:sld xmlns:a="http://schemas.openxmlformats.org/drawingml/2006/main" xmlns:r="http://schemas.openxmlformats.org/officeDocument/2006/relationships" xmlns:p="http://schemas.openxmlformats.org/presentationml/2006/main">
   <p:cSld>
     <p:bg>
       <p:bgPr>
@@ -7558,7 +11069,14 @@
         <p:cNvGrpSpPr/>
         <p:nvPr/>
       </p:nvGrpSpPr>
-      <p:grpSpPr/>
+      <p:grpSpPr>
+        <a:xfrm>
+          <a:off x="0" y="0"/>
+          <a:ext cx="0" cy="0"/>
+          <a:chOff x="0" y="0"/>
+          <a:chExt cx="0" cy="0"/>
+        </a:xfrm>
+      </p:grpSpPr>
       <p:sp>
         <p:nvSpPr>
           <p:cNvPr id="2" name="TextBox 1"/>
@@ -7709,7 +11227,7 @@
 </file>
 
 <file path=ppt/slides/slide30.xml><?xml version="1.0" encoding="utf-8"?>
-<p:sld xmlns:a="http://schemas.openxmlformats.org/drawingml/2006/main" xmlns:p="http://schemas.openxmlformats.org/presentationml/2006/main" xmlns:r="http://schemas.openxmlformats.org/officeDocument/2006/relationships">
+<p:sld xmlns:a="http://schemas.openxmlformats.org/drawingml/2006/main" xmlns:r="http://schemas.openxmlformats.org/officeDocument/2006/relationships" xmlns:p="http://schemas.openxmlformats.org/presentationml/2006/main">
   <p:cSld>
     <p:bg>
       <p:bgPr>
@@ -7725,7 +11243,14 @@
         <p:cNvGrpSpPr/>
         <p:nvPr/>
       </p:nvGrpSpPr>
-      <p:grpSpPr/>
+      <p:grpSpPr>
+        <a:xfrm>
+          <a:off x="0" y="0"/>
+          <a:ext cx="0" cy="0"/>
+          <a:chOff x="0" y="0"/>
+          <a:chExt cx="0" cy="0"/>
+        </a:xfrm>
+      </p:grpSpPr>
       <p:sp>
         <p:nvSpPr>
           <p:cNvPr id="2" name="TextBox 1"/>
@@ -7889,7 +11414,7 @@
 </file>
 
 <file path=ppt/slides/slide31.xml><?xml version="1.0" encoding="utf-8"?>
-<p:sld xmlns:a="http://schemas.openxmlformats.org/drawingml/2006/main" xmlns:p="http://schemas.openxmlformats.org/presentationml/2006/main" xmlns:r="http://schemas.openxmlformats.org/officeDocument/2006/relationships">
+<p:sld xmlns:a="http://schemas.openxmlformats.org/drawingml/2006/main" xmlns:r="http://schemas.openxmlformats.org/officeDocument/2006/relationships" xmlns:p="http://schemas.openxmlformats.org/presentationml/2006/main">
   <p:cSld>
     <p:bg>
       <p:bgPr>
@@ -7905,7 +11430,14 @@
         <p:cNvGrpSpPr/>
         <p:nvPr/>
       </p:nvGrpSpPr>
-      <p:grpSpPr/>
+      <p:grpSpPr>
+        <a:xfrm>
+          <a:off x="0" y="0"/>
+          <a:ext cx="0" cy="0"/>
+          <a:chOff x="0" y="0"/>
+          <a:chExt cx="0" cy="0"/>
+        </a:xfrm>
+      </p:grpSpPr>
       <p:sp>
         <p:nvSpPr>
           <p:cNvPr id="2" name="TextBox 1"/>
@@ -7993,7 +11525,7 @@
         </p:nvSpPr>
         <p:spPr>
           <a:xfrm>
-            <a:off x="457200" y="1143000"/>
+            <a:off x="457200" y="1152832"/>
             <a:ext cx="11247120" cy="5394960"/>
           </a:xfrm>
           <a:prstGeom prst="rect">
@@ -8134,7 +11666,7 @@
 </file>
 
 <file path=ppt/slides/slide32.xml><?xml version="1.0" encoding="utf-8"?>
-<p:sld xmlns:a="http://schemas.openxmlformats.org/drawingml/2006/main" xmlns:p="http://schemas.openxmlformats.org/presentationml/2006/main" xmlns:r="http://schemas.openxmlformats.org/officeDocument/2006/relationships">
+<p:sld xmlns:a="http://schemas.openxmlformats.org/drawingml/2006/main" xmlns:r="http://schemas.openxmlformats.org/officeDocument/2006/relationships" xmlns:p="http://schemas.openxmlformats.org/presentationml/2006/main">
   <p:cSld>
     <p:bg>
       <p:bgPr>
@@ -8150,7 +11682,14 @@
         <p:cNvGrpSpPr/>
         <p:nvPr/>
       </p:nvGrpSpPr>
-      <p:grpSpPr/>
+      <p:grpSpPr>
+        <a:xfrm>
+          <a:off x="0" y="0"/>
+          <a:ext cx="0" cy="0"/>
+          <a:chOff x="0" y="0"/>
+          <a:chExt cx="0" cy="0"/>
+        </a:xfrm>
+      </p:grpSpPr>
       <p:sp>
         <p:nvSpPr>
           <p:cNvPr id="2" name="TextBox 1"/>
@@ -8366,7 +11905,7 @@
 </file>
 
 <file path=ppt/slides/slide33.xml><?xml version="1.0" encoding="utf-8"?>
-<p:sld xmlns:a="http://schemas.openxmlformats.org/drawingml/2006/main" xmlns:p="http://schemas.openxmlformats.org/presentationml/2006/main" xmlns:r="http://schemas.openxmlformats.org/officeDocument/2006/relationships">
+<p:sld xmlns:a="http://schemas.openxmlformats.org/drawingml/2006/main" xmlns:r="http://schemas.openxmlformats.org/officeDocument/2006/relationships" xmlns:p="http://schemas.openxmlformats.org/presentationml/2006/main">
   <p:cSld>
     <p:bg>
       <p:bgPr>
@@ -8382,7 +11921,14 @@
         <p:cNvGrpSpPr/>
         <p:nvPr/>
       </p:nvGrpSpPr>
-      <p:grpSpPr/>
+      <p:grpSpPr>
+        <a:xfrm>
+          <a:off x="0" y="0"/>
+          <a:ext cx="0" cy="0"/>
+          <a:chOff x="0" y="0"/>
+          <a:chExt cx="0" cy="0"/>
+        </a:xfrm>
+      </p:grpSpPr>
       <p:sp>
         <p:nvSpPr>
           <p:cNvPr id="2" name="TextBox 1"/>
@@ -8546,7 +12092,7 @@
 </file>
 
 <file path=ppt/slides/slide34.xml><?xml version="1.0" encoding="utf-8"?>
-<p:sld xmlns:a="http://schemas.openxmlformats.org/drawingml/2006/main" xmlns:p="http://schemas.openxmlformats.org/presentationml/2006/main" xmlns:r="http://schemas.openxmlformats.org/officeDocument/2006/relationships">
+<p:sld xmlns:a="http://schemas.openxmlformats.org/drawingml/2006/main" xmlns:r="http://schemas.openxmlformats.org/officeDocument/2006/relationships" xmlns:p="http://schemas.openxmlformats.org/presentationml/2006/main">
   <p:cSld>
     <p:bg>
       <p:bgPr>
@@ -8562,7 +12108,14 @@
         <p:cNvGrpSpPr/>
         <p:nvPr/>
       </p:nvGrpSpPr>
-      <p:grpSpPr/>
+      <p:grpSpPr>
+        <a:xfrm>
+          <a:off x="0" y="0"/>
+          <a:ext cx="0" cy="0"/>
+          <a:chOff x="0" y="0"/>
+          <a:chExt cx="0" cy="0"/>
+        </a:xfrm>
+      </p:grpSpPr>
       <p:sp>
         <p:nvSpPr>
           <p:cNvPr id="2" name="TextBox 1"/>
@@ -8752,7 +12305,7 @@
 </file>
 
 <file path=ppt/slides/slide35.xml><?xml version="1.0" encoding="utf-8"?>
-<p:sld xmlns:a="http://schemas.openxmlformats.org/drawingml/2006/main" xmlns:p="http://schemas.openxmlformats.org/presentationml/2006/main" xmlns:r="http://schemas.openxmlformats.org/officeDocument/2006/relationships">
+<p:sld xmlns:a="http://schemas.openxmlformats.org/drawingml/2006/main" xmlns:r="http://schemas.openxmlformats.org/officeDocument/2006/relationships" xmlns:p="http://schemas.openxmlformats.org/presentationml/2006/main">
   <p:cSld>
     <p:bg>
       <p:bgPr>
@@ -8768,7 +12321,14 @@
         <p:cNvGrpSpPr/>
         <p:nvPr/>
       </p:nvGrpSpPr>
-      <p:grpSpPr/>
+      <p:grpSpPr>
+        <a:xfrm>
+          <a:off x="0" y="0"/>
+          <a:ext cx="0" cy="0"/>
+          <a:chOff x="0" y="0"/>
+          <a:chExt cx="0" cy="0"/>
+        </a:xfrm>
+      </p:grpSpPr>
       <p:sp>
         <p:nvSpPr>
           <p:cNvPr id="2" name="TextBox 1"/>
@@ -8971,7 +12531,7 @@
 </file>
 
 <file path=ppt/slides/slide36.xml><?xml version="1.0" encoding="utf-8"?>
-<p:sld xmlns:a="http://schemas.openxmlformats.org/drawingml/2006/main" xmlns:p="http://schemas.openxmlformats.org/presentationml/2006/main" xmlns:r="http://schemas.openxmlformats.org/officeDocument/2006/relationships">
+<p:sld xmlns:a="http://schemas.openxmlformats.org/drawingml/2006/main" xmlns:r="http://schemas.openxmlformats.org/officeDocument/2006/relationships" xmlns:p="http://schemas.openxmlformats.org/presentationml/2006/main">
   <p:cSld>
     <p:bg>
       <p:bgPr>
@@ -8987,7 +12547,14 @@
         <p:cNvGrpSpPr/>
         <p:nvPr/>
       </p:nvGrpSpPr>
-      <p:grpSpPr/>
+      <p:grpSpPr>
+        <a:xfrm>
+          <a:off x="0" y="0"/>
+          <a:ext cx="0" cy="0"/>
+          <a:chOff x="0" y="0"/>
+          <a:chExt cx="0" cy="0"/>
+        </a:xfrm>
+      </p:grpSpPr>
       <p:sp>
         <p:nvSpPr>
           <p:cNvPr id="2" name="TextBox 1"/>
@@ -9164,7 +12731,7 @@
 </file>
 
 <file path=ppt/slides/slide37.xml><?xml version="1.0" encoding="utf-8"?>
-<p:sld xmlns:a="http://schemas.openxmlformats.org/drawingml/2006/main" xmlns:p="http://schemas.openxmlformats.org/presentationml/2006/main" xmlns:r="http://schemas.openxmlformats.org/officeDocument/2006/relationships">
+<p:sld xmlns:a="http://schemas.openxmlformats.org/drawingml/2006/main" xmlns:r="http://schemas.openxmlformats.org/officeDocument/2006/relationships" xmlns:p="http://schemas.openxmlformats.org/presentationml/2006/main">
   <p:cSld>
     <p:bg>
       <p:bgPr>
@@ -9180,7 +12747,14 @@
         <p:cNvGrpSpPr/>
         <p:nvPr/>
       </p:nvGrpSpPr>
-      <p:grpSpPr/>
+      <p:grpSpPr>
+        <a:xfrm>
+          <a:off x="0" y="0"/>
+          <a:ext cx="0" cy="0"/>
+          <a:chOff x="0" y="0"/>
+          <a:chExt cx="0" cy="0"/>
+        </a:xfrm>
+      </p:grpSpPr>
       <p:sp>
         <p:nvSpPr>
           <p:cNvPr id="2" name="TextBox 1"/>
@@ -9357,7 +12931,7 @@
 </file>
 
 <file path=ppt/slides/slide4.xml><?xml version="1.0" encoding="utf-8"?>
-<p:sld xmlns:a="http://schemas.openxmlformats.org/drawingml/2006/main" xmlns:p="http://schemas.openxmlformats.org/presentationml/2006/main" xmlns:r="http://schemas.openxmlformats.org/officeDocument/2006/relationships">
+<p:sld xmlns:a="http://schemas.openxmlformats.org/drawingml/2006/main" xmlns:r="http://schemas.openxmlformats.org/officeDocument/2006/relationships" xmlns:p="http://schemas.openxmlformats.org/presentationml/2006/main">
   <p:cSld>
     <p:bg>
       <p:bgPr>
@@ -9373,7 +12947,14 @@
         <p:cNvGrpSpPr/>
         <p:nvPr/>
       </p:nvGrpSpPr>
-      <p:grpSpPr/>
+      <p:grpSpPr>
+        <a:xfrm>
+          <a:off x="0" y="0"/>
+          <a:ext cx="0" cy="0"/>
+          <a:chOff x="0" y="0"/>
+          <a:chExt cx="0" cy="0"/>
+        </a:xfrm>
+      </p:grpSpPr>
       <p:sp>
         <p:nvSpPr>
           <p:cNvPr id="2" name="TextBox 1"/>
@@ -9462,7 +13043,7 @@
         <p:spPr>
           <a:xfrm>
             <a:off x="457200" y="1143000"/>
-            <a:ext cx="11247120" cy="5394960"/>
+            <a:ext cx="11247120" cy="1569660"/>
           </a:xfrm>
           <a:prstGeom prst="rect">
             <a:avLst/>
@@ -9484,7 +13065,40 @@
               </a:defRPr>
             </a:pPr>
             <a:r>
-              <a:t>1. Connectez-vous avec un compte Directeur ou Super Admin.</a:t>
+              <a:rPr dirty="0"/>
+              <a:t>1. </a:t>
+            </a:r>
+            <a:r>
+              <a:rPr dirty="0" err="1"/>
+              <a:t>Connectez-vous</a:t>
+            </a:r>
+            <a:r>
+              <a:rPr dirty="0"/>
+              <a:t> avec un </a:t>
+            </a:r>
+            <a:r>
+              <a:rPr dirty="0" err="1"/>
+              <a:t>compte</a:t>
+            </a:r>
+            <a:r>
+              <a:rPr dirty="0"/>
+              <a:t> </a:t>
+            </a:r>
+            <a:r>
+              <a:rPr dirty="0" err="1"/>
+              <a:t>Directeur</a:t>
+            </a:r>
+            <a:r>
+              <a:rPr dirty="0"/>
+              <a:t> </a:t>
+            </a:r>
+            <a:r>
+              <a:rPr dirty="0" err="1"/>
+              <a:t>ou</a:t>
+            </a:r>
+            <a:r>
+              <a:rPr dirty="0"/>
+              <a:t> Super Admin.</a:t>
             </a:r>
           </a:p>
           <a:p>
@@ -9497,8 +13111,62 @@
               </a:defRPr>
             </a:pPr>
             <a:r>
-              <a:t>2. Cliquez sur l'onglet 'Administration' dans la barre de navigation.</a:t>
-            </a:r>
+              <a:rPr dirty="0"/>
+              <a:t>2. </a:t>
+            </a:r>
+            <a:r>
+              <a:rPr dirty="0" err="1"/>
+              <a:t>Cliquez</a:t>
+            </a:r>
+            <a:r>
+              <a:rPr dirty="0"/>
+              <a:t> sur </a:t>
+            </a:r>
+            <a:r>
+              <a:rPr dirty="0" err="1"/>
+              <a:t>l'onglet</a:t>
+            </a:r>
+            <a:r>
+              <a:rPr dirty="0"/>
+              <a:t> </a:t>
+            </a:r>
+            <a:r>
+              <a:rPr dirty="0" smtClean="0"/>
+              <a:t>'</a:t>
+            </a:r>
+            <a:r>
+              <a:rPr lang="fr-FR" b="1" dirty="0" smtClean="0"/>
+              <a:t>PORTAILS DEDIES</a:t>
+            </a:r>
+            <a:r>
+              <a:rPr dirty="0" smtClean="0"/>
+              <a:t>' </a:t>
+            </a:r>
+            <a:r>
+              <a:rPr dirty="0" err="1"/>
+              <a:t>dans</a:t>
+            </a:r>
+            <a:r>
+              <a:rPr dirty="0"/>
+              <a:t> la barre de </a:t>
+            </a:r>
+            <a:r>
+              <a:rPr dirty="0" smtClean="0"/>
+              <a:t>navigation</a:t>
+            </a:r>
+            <a:r>
+              <a:rPr lang="fr-FR" dirty="0" smtClean="0"/>
+              <a:t> et cliquer sur </a:t>
+            </a:r>
+            <a:r>
+              <a:rPr lang="fr-FR" b="1" dirty="0" smtClean="0"/>
+              <a:t>Comptes &amp; Structure Administratifs</a:t>
+            </a:r>
+            <a:r>
+              <a:rPr dirty="0" smtClean="0"/>
+              <a:t>.</a:t>
+            </a:r>
+            <a:endParaRPr dirty="0"/>
           </a:p>
           <a:p>
             <a:pPr>
@@ -9510,7 +13178,40 @@
               </a:defRPr>
             </a:pPr>
             <a:r>
-              <a:t>3. Allez à la section 'Créer un nouveau compte utilisateur'.</a:t>
+              <a:rPr dirty="0"/>
+              <a:t>3. </a:t>
+            </a:r>
+            <a:r>
+              <a:rPr dirty="0" err="1"/>
+              <a:t>Allez</a:t>
+            </a:r>
+            <a:r>
+              <a:rPr dirty="0"/>
+              <a:t> à la section '</a:t>
+            </a:r>
+            <a:r>
+              <a:rPr dirty="0" err="1"/>
+              <a:t>Créer</a:t>
+            </a:r>
+            <a:r>
+              <a:rPr dirty="0"/>
+              <a:t> un nouveau </a:t>
+            </a:r>
+            <a:r>
+              <a:rPr dirty="0" err="1"/>
+              <a:t>compte</a:t>
+            </a:r>
+            <a:r>
+              <a:rPr dirty="0"/>
+              <a:t> </a:t>
+            </a:r>
+            <a:r>
+              <a:rPr dirty="0" err="1"/>
+              <a:t>utilisateur</a:t>
+            </a:r>
+            <a:r>
+              <a:rPr dirty="0"/>
+              <a:t>'.</a:t>
             </a:r>
           </a:p>
           <a:p>
@@ -9523,7 +13224,40 @@
               </a:defRPr>
             </a:pPr>
             <a:r>
-              <a:t>4. Remplissez : Nom complet, Identifiant/Email, Mot de passe.</a:t>
+              <a:rPr dirty="0"/>
+              <a:t>4. </a:t>
+            </a:r>
+            <a:r>
+              <a:rPr dirty="0" err="1"/>
+              <a:t>Remplissez</a:t>
+            </a:r>
+            <a:r>
+              <a:rPr dirty="0"/>
+              <a:t> : Nom </a:t>
+            </a:r>
+            <a:r>
+              <a:rPr dirty="0" err="1"/>
+              <a:t>complet</a:t>
+            </a:r>
+            <a:r>
+              <a:rPr dirty="0"/>
+              <a:t>, </a:t>
+            </a:r>
+            <a:r>
+              <a:rPr dirty="0" err="1"/>
+              <a:t>Identifiant</a:t>
+            </a:r>
+            <a:r>
+              <a:rPr dirty="0"/>
+              <a:t>/Email, Mot de </a:t>
+            </a:r>
+            <a:r>
+              <a:rPr dirty="0" err="1"/>
+              <a:t>passe</a:t>
+            </a:r>
+            <a:r>
+              <a:rPr dirty="0"/>
+              <a:t>.</a:t>
             </a:r>
           </a:p>
           <a:p>
@@ -9536,7 +13270,56 @@
               </a:defRPr>
             </a:pPr>
             <a:r>
-              <a:t>5. Sélectionnez le Rôle : Super Admin, Directeur, Informaticien ou Professeur.</a:t>
+              <a:rPr dirty="0"/>
+              <a:t>5. </a:t>
+            </a:r>
+            <a:r>
+              <a:rPr dirty="0" err="1"/>
+              <a:t>Sélectionnez</a:t>
+            </a:r>
+            <a:r>
+              <a:rPr dirty="0"/>
+              <a:t> le </a:t>
+            </a:r>
+            <a:r>
+              <a:rPr dirty="0" err="1"/>
+              <a:t>Rôle</a:t>
+            </a:r>
+            <a:r>
+              <a:rPr dirty="0"/>
+              <a:t> : Super Admin, </a:t>
+            </a:r>
+            <a:r>
+              <a:rPr dirty="0" err="1"/>
+              <a:t>Directeur</a:t>
+            </a:r>
+            <a:r>
+              <a:rPr dirty="0"/>
+              <a:t>, </a:t>
+            </a:r>
+            <a:r>
+              <a:rPr dirty="0" err="1"/>
+              <a:t>Informaticien</a:t>
+            </a:r>
+            <a:r>
+              <a:rPr dirty="0"/>
+              <a:t> </a:t>
+            </a:r>
+            <a:r>
+              <a:rPr dirty="0" err="1"/>
+              <a:t>ou</a:t>
+            </a:r>
+            <a:r>
+              <a:rPr dirty="0"/>
+              <a:t> </a:t>
+            </a:r>
+            <a:r>
+              <a:rPr dirty="0" err="1"/>
+              <a:t>Professeur</a:t>
+            </a:r>
+            <a:r>
+              <a:rPr dirty="0"/>
+              <a:t>.</a:t>
             </a:r>
           </a:p>
           <a:p>
@@ -9549,7 +13332,64 @@
               </a:defRPr>
             </a:pPr>
             <a:r>
-              <a:t>6. Si c'est un professeur, associez-le à un enseignant de la liste via 'Professeur lié'.</a:t>
+              <a:rPr dirty="0"/>
+              <a:t>6. Si </a:t>
+            </a:r>
+            <a:r>
+              <a:rPr dirty="0" err="1"/>
+              <a:t>c'est</a:t>
+            </a:r>
+            <a:r>
+              <a:rPr dirty="0"/>
+              <a:t> un </a:t>
+            </a:r>
+            <a:r>
+              <a:rPr dirty="0" err="1"/>
+              <a:t>professeur</a:t>
+            </a:r>
+            <a:r>
+              <a:rPr dirty="0"/>
+              <a:t>, </a:t>
+            </a:r>
+            <a:r>
+              <a:rPr dirty="0" err="1"/>
+              <a:t>associez</a:t>
+            </a:r>
+            <a:r>
+              <a:rPr dirty="0"/>
+              <a:t>-le à un </a:t>
+            </a:r>
+            <a:r>
+              <a:rPr dirty="0" err="1"/>
+              <a:t>enseignant</a:t>
+            </a:r>
+            <a:r>
+              <a:rPr dirty="0"/>
+              <a:t> de la </a:t>
+            </a:r>
+            <a:r>
+              <a:rPr dirty="0" err="1"/>
+              <a:t>liste</a:t>
+            </a:r>
+            <a:r>
+              <a:rPr dirty="0"/>
+              <a:t> via '</a:t>
+            </a:r>
+            <a:r>
+              <a:rPr dirty="0" err="1"/>
+              <a:t>Professeur</a:t>
+            </a:r>
+            <a:r>
+              <a:rPr dirty="0"/>
+              <a:t> </a:t>
+            </a:r>
+            <a:r>
+              <a:rPr dirty="0" err="1"/>
+              <a:t>lié</a:t>
+            </a:r>
+            <a:r>
+              <a:rPr dirty="0"/>
+              <a:t>'.</a:t>
             </a:r>
           </a:p>
           <a:p>
@@ -9562,7 +13402,40 @@
               </a:defRPr>
             </a:pPr>
             <a:r>
-              <a:t>7. Cliquez sur le bouton orange 'Créer le compte utilisateur'.</a:t>
+              <a:rPr dirty="0"/>
+              <a:t>7. </a:t>
+            </a:r>
+            <a:r>
+              <a:rPr dirty="0" err="1"/>
+              <a:t>Cliquez</a:t>
+            </a:r>
+            <a:r>
+              <a:rPr dirty="0"/>
+              <a:t> sur le bouton orange '</a:t>
+            </a:r>
+            <a:r>
+              <a:rPr dirty="0" err="1"/>
+              <a:t>Créer</a:t>
+            </a:r>
+            <a:r>
+              <a:rPr dirty="0"/>
+              <a:t> le </a:t>
+            </a:r>
+            <a:r>
+              <a:rPr dirty="0" err="1"/>
+              <a:t>compte</a:t>
+            </a:r>
+            <a:r>
+              <a:rPr dirty="0"/>
+              <a:t> </a:t>
+            </a:r>
+            <a:r>
+              <a:rPr dirty="0" err="1"/>
+              <a:t>utilisateur</a:t>
+            </a:r>
+            <a:r>
+              <a:rPr dirty="0"/>
+              <a:t>'.</a:t>
             </a:r>
           </a:p>
           <a:p>
@@ -9575,7 +13448,56 @@
               </a:defRPr>
             </a:pPr>
             <a:r>
-              <a:t>8. Le compte apparaît dans la liste des comptes ci-dessous.</a:t>
+              <a:rPr dirty="0"/>
+              <a:t>8. Le </a:t>
+            </a:r>
+            <a:r>
+              <a:rPr dirty="0" err="1"/>
+              <a:t>compte</a:t>
+            </a:r>
+            <a:r>
+              <a:rPr dirty="0"/>
+              <a:t> </a:t>
+            </a:r>
+            <a:r>
+              <a:rPr dirty="0" err="1"/>
+              <a:t>apparaît</a:t>
+            </a:r>
+            <a:r>
+              <a:rPr dirty="0"/>
+              <a:t> </a:t>
+            </a:r>
+            <a:r>
+              <a:rPr dirty="0" err="1"/>
+              <a:t>dans</a:t>
+            </a:r>
+            <a:r>
+              <a:rPr dirty="0"/>
+              <a:t> la </a:t>
+            </a:r>
+            <a:r>
+              <a:rPr dirty="0" err="1"/>
+              <a:t>liste</a:t>
+            </a:r>
+            <a:r>
+              <a:rPr dirty="0"/>
+              <a:t> des </a:t>
+            </a:r>
+            <a:r>
+              <a:rPr dirty="0" err="1"/>
+              <a:t>comptes</a:t>
+            </a:r>
+            <a:r>
+              <a:rPr dirty="0"/>
+              <a:t> ci-</a:t>
+            </a:r>
+            <a:r>
+              <a:rPr dirty="0" err="1"/>
+              <a:t>dessous</a:t>
+            </a:r>
+            <a:r>
+              <a:rPr dirty="0"/>
+              <a:t>.</a:t>
             </a:r>
           </a:p>
         </p:txBody>
@@ -9589,7 +13511,7 @@
 </file>
 
 <file path=ppt/slides/slide5.xml><?xml version="1.0" encoding="utf-8"?>
-<p:sld xmlns:a="http://schemas.openxmlformats.org/drawingml/2006/main" xmlns:p="http://schemas.openxmlformats.org/presentationml/2006/main" xmlns:r="http://schemas.openxmlformats.org/officeDocument/2006/relationships">
+<p:sld xmlns:a="http://schemas.openxmlformats.org/drawingml/2006/main" xmlns:r="http://schemas.openxmlformats.org/officeDocument/2006/relationships" xmlns:p="http://schemas.openxmlformats.org/presentationml/2006/main">
   <p:cSld>
     <p:bg>
       <p:bgPr>
@@ -9605,7 +13527,14 @@
         <p:cNvGrpSpPr/>
         <p:nvPr/>
       </p:nvGrpSpPr>
-      <p:grpSpPr/>
+      <p:grpSpPr>
+        <a:xfrm>
+          <a:off x="0" y="0"/>
+          <a:ext cx="0" cy="0"/>
+          <a:chOff x="0" y="0"/>
+          <a:chExt cx="0" cy="0"/>
+        </a:xfrm>
+      </p:grpSpPr>
       <p:sp>
         <p:nvSpPr>
           <p:cNvPr id="2" name="TextBox 1"/>
@@ -9694,7 +13623,7 @@
         <p:spPr>
           <a:xfrm>
             <a:off x="457200" y="1143000"/>
-            <a:ext cx="11247120" cy="5394960"/>
+            <a:ext cx="11247120" cy="1015663"/>
           </a:xfrm>
           <a:prstGeom prst="rect">
             <a:avLst/>
@@ -9716,8 +13645,58 @@
               </a:defRPr>
             </a:pPr>
             <a:r>
-              <a:t>1. Dans l'onglet Administration, repérez la table 'Comptes utilisateurs enregistrés'.</a:t>
-            </a:r>
+              <a:rPr dirty="0"/>
+              <a:t>1. </a:t>
+            </a:r>
+            <a:r>
+              <a:rPr dirty="0" err="1"/>
+              <a:t>Dans</a:t>
+            </a:r>
+            <a:r>
+              <a:rPr dirty="0"/>
+              <a:t> </a:t>
+            </a:r>
+            <a:r>
+              <a:rPr dirty="0" err="1"/>
+              <a:t>l'onglet</a:t>
+            </a:r>
+            <a:r>
+              <a:rPr dirty="0"/>
+              <a:t> </a:t>
+            </a:r>
+            <a:r>
+              <a:rPr lang="fr-FR" b="1" dirty="0"/>
+              <a:t>PORTAILS DEDIES</a:t>
+            </a:r>
+            <a:r>
+              <a:rPr dirty="0" smtClean="0"/>
+              <a:t>, </a:t>
+            </a:r>
+            <a:r>
+              <a:rPr dirty="0" err="1"/>
+              <a:t>repérez</a:t>
+            </a:r>
+            <a:r>
+              <a:rPr dirty="0"/>
+              <a:t> la table </a:t>
+            </a:r>
+            <a:r>
+              <a:rPr lang="fr-FR" dirty="0"/>
+              <a:t>sur </a:t>
+            </a:r>
+            <a:r>
+              <a:rPr lang="fr-FR" b="1" dirty="0"/>
+              <a:t>Comptes &amp; Structure </a:t>
+            </a:r>
+            <a:r>
+              <a:rPr lang="fr-FR" b="1" dirty="0" smtClean="0"/>
+              <a:t>Administratifs</a:t>
+            </a:r>
+            <a:r>
+              <a:rPr dirty="0" smtClean="0"/>
+              <a:t>'.</a:t>
+            </a:r>
+            <a:endParaRPr dirty="0"/>
           </a:p>
           <a:p>
             <a:pPr>
@@ -9729,7 +13708,56 @@
               </a:defRPr>
             </a:pPr>
             <a:r>
-              <a:t>2. Localisez le compte du professeur concerné dans la liste.</a:t>
+              <a:rPr dirty="0"/>
+              <a:t>2. </a:t>
+            </a:r>
+            <a:r>
+              <a:rPr dirty="0" err="1"/>
+              <a:t>Localisez</a:t>
+            </a:r>
+            <a:r>
+              <a:rPr dirty="0"/>
+              <a:t> le </a:t>
+            </a:r>
+            <a:r>
+              <a:rPr dirty="0" err="1"/>
+              <a:t>compte</a:t>
+            </a:r>
+            <a:r>
+              <a:rPr dirty="0"/>
+              <a:t> du </a:t>
+            </a:r>
+            <a:r>
+              <a:rPr dirty="0" err="1"/>
+              <a:t>professeur</a:t>
+            </a:r>
+            <a:r>
+              <a:rPr dirty="0"/>
+              <a:t> </a:t>
+            </a:r>
+            <a:r>
+              <a:rPr dirty="0" err="1"/>
+              <a:t>concerné</a:t>
+            </a:r>
+            <a:r>
+              <a:rPr dirty="0"/>
+              <a:t> </a:t>
+            </a:r>
+            <a:r>
+              <a:rPr dirty="0" err="1"/>
+              <a:t>dans</a:t>
+            </a:r>
+            <a:r>
+              <a:rPr dirty="0"/>
+              <a:t> la </a:t>
+            </a:r>
+            <a:r>
+              <a:rPr dirty="0" err="1"/>
+              <a:t>liste</a:t>
+            </a:r>
+            <a:r>
+              <a:rPr dirty="0"/>
+              <a:t>.</a:t>
             </a:r>
           </a:p>
           <a:p>
@@ -9742,7 +13770,48 @@
               </a:defRPr>
             </a:pPr>
             <a:r>
-              <a:t>3. Dans la colonne 'Permissions', cochez la case 'Saisie des Moyennes'.</a:t>
+              <a:rPr dirty="0"/>
+              <a:t>3. </a:t>
+            </a:r>
+            <a:r>
+              <a:rPr dirty="0" err="1"/>
+              <a:t>Dans</a:t>
+            </a:r>
+            <a:r>
+              <a:rPr dirty="0"/>
+              <a:t> la </a:t>
+            </a:r>
+            <a:r>
+              <a:rPr dirty="0" err="1"/>
+              <a:t>colonne</a:t>
+            </a:r>
+            <a:r>
+              <a:rPr dirty="0"/>
+              <a:t> 'Permissions', </a:t>
+            </a:r>
+            <a:r>
+              <a:rPr dirty="0" err="1"/>
+              <a:t>cochez</a:t>
+            </a:r>
+            <a:r>
+              <a:rPr dirty="0"/>
+              <a:t> la case '</a:t>
+            </a:r>
+            <a:r>
+              <a:rPr dirty="0" err="1"/>
+              <a:t>Saisie</a:t>
+            </a:r>
+            <a:r>
+              <a:rPr dirty="0"/>
+              <a:t> des </a:t>
+            </a:r>
+            <a:r>
+              <a:rPr dirty="0" err="1"/>
+              <a:t>Moyennes</a:t>
+            </a:r>
+            <a:r>
+              <a:rPr dirty="0"/>
+              <a:t>'.</a:t>
             </a:r>
           </a:p>
           <a:p>
@@ -9755,7 +13824,48 @@
               </a:defRPr>
             </a:pPr>
             <a:r>
-              <a:t>4. La permission est activée instantanément, sans déconnexion requise.</a:t>
+              <a:rPr dirty="0"/>
+              <a:t>4. La permission </a:t>
+            </a:r>
+            <a:r>
+              <a:rPr dirty="0" err="1"/>
+              <a:t>est</a:t>
+            </a:r>
+            <a:r>
+              <a:rPr dirty="0"/>
+              <a:t> </a:t>
+            </a:r>
+            <a:r>
+              <a:rPr dirty="0" err="1"/>
+              <a:t>activée</a:t>
+            </a:r>
+            <a:r>
+              <a:rPr dirty="0"/>
+              <a:t> </a:t>
+            </a:r>
+            <a:r>
+              <a:rPr dirty="0" err="1"/>
+              <a:t>instantanément</a:t>
+            </a:r>
+            <a:r>
+              <a:rPr dirty="0"/>
+              <a:t>, sans </a:t>
+            </a:r>
+            <a:r>
+              <a:rPr dirty="0" err="1"/>
+              <a:t>déconnexion</a:t>
+            </a:r>
+            <a:r>
+              <a:rPr dirty="0"/>
+              <a:t> </a:t>
+            </a:r>
+            <a:r>
+              <a:rPr dirty="0" err="1"/>
+              <a:t>requise</a:t>
+            </a:r>
+            <a:r>
+              <a:rPr dirty="0"/>
+              <a:t>.</a:t>
             </a:r>
           </a:p>
           <a:p>
@@ -9768,7 +13878,32 @@
               </a:defRPr>
             </a:pPr>
             <a:r>
-              <a:t>5. Pour révoquer le droit, décochez la même case.</a:t>
+              <a:rPr dirty="0"/>
+              <a:t>5. Pour </a:t>
+            </a:r>
+            <a:r>
+              <a:rPr dirty="0" err="1"/>
+              <a:t>révoquer</a:t>
+            </a:r>
+            <a:r>
+              <a:rPr dirty="0"/>
+              <a:t> le droit, </a:t>
+            </a:r>
+            <a:r>
+              <a:rPr dirty="0" err="1"/>
+              <a:t>décochez</a:t>
+            </a:r>
+            <a:r>
+              <a:rPr dirty="0"/>
+              <a:t> la </a:t>
+            </a:r>
+            <a:r>
+              <a:rPr dirty="0" err="1"/>
+              <a:t>même</a:t>
+            </a:r>
+            <a:r>
+              <a:rPr dirty="0"/>
+              <a:t> case.</a:t>
             </a:r>
           </a:p>
         </p:txBody>
@@ -9782,7 +13917,7 @@
 </file>
 
 <file path=ppt/slides/slide6.xml><?xml version="1.0" encoding="utf-8"?>
-<p:sld xmlns:a="http://schemas.openxmlformats.org/drawingml/2006/main" xmlns:p="http://schemas.openxmlformats.org/presentationml/2006/main" xmlns:r="http://schemas.openxmlformats.org/officeDocument/2006/relationships">
+<p:sld xmlns:a="http://schemas.openxmlformats.org/drawingml/2006/main" xmlns:r="http://schemas.openxmlformats.org/officeDocument/2006/relationships" xmlns:p="http://schemas.openxmlformats.org/presentationml/2006/main">
   <p:cSld>
     <p:bg>
       <p:bgPr>
@@ -9798,7 +13933,14 @@
         <p:cNvGrpSpPr/>
         <p:nvPr/>
       </p:nvGrpSpPr>
-      <p:grpSpPr/>
+      <p:grpSpPr>
+        <a:xfrm>
+          <a:off x="0" y="0"/>
+          <a:ext cx="0" cy="0"/>
+          <a:chOff x="0" y="0"/>
+          <a:chExt cx="0" cy="0"/>
+        </a:xfrm>
+      </p:grpSpPr>
       <p:sp>
         <p:nvSpPr>
           <p:cNvPr id="2" name="TextBox 1"/>
@@ -9887,7 +14029,7 @@
         <p:spPr>
           <a:xfrm>
             <a:off x="457200" y="1143000"/>
-            <a:ext cx="11247120" cy="5394960"/>
+            <a:ext cx="11247120" cy="1015663"/>
           </a:xfrm>
           <a:prstGeom prst="rect">
             <a:avLst/>
@@ -9909,7 +14051,40 @@
               </a:defRPr>
             </a:pPr>
             <a:r>
-              <a:t>1. Dans l'onglet Administration, repérez le compte dans la liste.</a:t>
+              <a:rPr dirty="0" smtClean="0"/>
+              <a:t>1. </a:t>
+            </a:r>
+            <a:r>
+              <a:rPr dirty="0" err="1" smtClean="0"/>
+              <a:t>Dans</a:t>
+            </a:r>
+            <a:r>
+              <a:rPr dirty="0" smtClean="0"/>
+              <a:t> </a:t>
+            </a:r>
+            <a:r>
+              <a:rPr lang="fr-FR" dirty="0"/>
+              <a:t>Dans l'onglet </a:t>
+            </a:r>
+            <a:r>
+              <a:rPr lang="fr-FR" b="1" dirty="0"/>
+              <a:t>PORTAILS DEDIES</a:t>
+            </a:r>
+            <a:r>
+              <a:rPr lang="fr-FR" dirty="0"/>
+              <a:t>, repérez la table sur </a:t>
+            </a:r>
+            <a:r>
+              <a:rPr lang="fr-FR" b="1" dirty="0"/>
+              <a:t>Comptes &amp; Structure Administratifs</a:t>
+            </a:r>
+            <a:r>
+              <a:rPr lang="fr-FR" dirty="0"/>
+              <a:t>'.</a:t>
+            </a:r>
+            <a:r>
+              <a:rPr dirty="0" smtClean="0"/>
+              <a:t>.</a:t>
             </a:r>
           </a:p>
           <a:p>
@@ -9922,7 +14097,36 @@
               </a:defRPr>
             </a:pPr>
             <a:r>
-              <a:t>2. Pour modifier : cliquez sur le bouton Crayon (Modifier) à droite du compte.</a:t>
+              <a:rPr dirty="0" smtClean="0"/>
+              <a:t>2</a:t>
+            </a:r>
+            <a:r>
+              <a:rPr dirty="0"/>
+              <a:t>. Pour modifier : </a:t>
+            </a:r>
+            <a:r>
+              <a:rPr dirty="0" err="1"/>
+              <a:t>cliquez</a:t>
+            </a:r>
+            <a:r>
+              <a:rPr dirty="0"/>
+              <a:t> sur le bouton Crayon (Modifier) à </a:t>
+            </a:r>
+            <a:r>
+              <a:rPr dirty="0" err="1"/>
+              <a:t>droite</a:t>
+            </a:r>
+            <a:r>
+              <a:rPr dirty="0"/>
+              <a:t> du </a:t>
+            </a:r>
+            <a:r>
+              <a:rPr dirty="0" err="1"/>
+              <a:t>compte</a:t>
+            </a:r>
+            <a:r>
+              <a:rPr dirty="0"/>
+              <a:t>.</a:t>
             </a:r>
           </a:p>
           <a:p>
@@ -9935,7 +14139,40 @@
               </a:defRPr>
             </a:pPr>
             <a:r>
-              <a:t>3. Mettez à jour les champs souhaités (nom, rôle, mot de passe).</a:t>
+              <a:rPr dirty="0"/>
+              <a:t>3. </a:t>
+            </a:r>
+            <a:r>
+              <a:rPr dirty="0" err="1"/>
+              <a:t>Mettez</a:t>
+            </a:r>
+            <a:r>
+              <a:rPr dirty="0"/>
+              <a:t> à jour les champs </a:t>
+            </a:r>
+            <a:r>
+              <a:rPr dirty="0" err="1"/>
+              <a:t>souhaités</a:t>
+            </a:r>
+            <a:r>
+              <a:rPr dirty="0"/>
+              <a:t> (nom, </a:t>
+            </a:r>
+            <a:r>
+              <a:rPr dirty="0" err="1"/>
+              <a:t>rôle</a:t>
+            </a:r>
+            <a:r>
+              <a:rPr dirty="0"/>
+              <a:t>, mot de </a:t>
+            </a:r>
+            <a:r>
+              <a:rPr dirty="0" err="1"/>
+              <a:t>passe</a:t>
+            </a:r>
+            <a:r>
+              <a:rPr dirty="0"/>
+              <a:t>).</a:t>
             </a:r>
           </a:p>
           <a:p>
@@ -9948,7 +14185,24 @@
               </a:defRPr>
             </a:pPr>
             <a:r>
-              <a:t>4. Cliquez sur 'Enregistrer les modifications'.</a:t>
+              <a:rPr dirty="0"/>
+              <a:t>4. </a:t>
+            </a:r>
+            <a:r>
+              <a:rPr dirty="0" err="1"/>
+              <a:t>Cliquez</a:t>
+            </a:r>
+            <a:r>
+              <a:rPr dirty="0"/>
+              <a:t> sur '</a:t>
+            </a:r>
+            <a:r>
+              <a:rPr dirty="0" err="1"/>
+              <a:t>Enregistrer</a:t>
+            </a:r>
+            <a:r>
+              <a:rPr dirty="0"/>
+              <a:t> les modifications'.</a:t>
             </a:r>
           </a:p>
           <a:p>
@@ -9961,7 +14215,40 @@
               </a:defRPr>
             </a:pPr>
             <a:r>
-              <a:t>5. Pour supprimer : cliquez sur le bouton rouge Corbeille et confirmez la suppression.</a:t>
+              <a:rPr dirty="0"/>
+              <a:t>5. Pour </a:t>
+            </a:r>
+            <a:r>
+              <a:rPr dirty="0" err="1"/>
+              <a:t>supprimer</a:t>
+            </a:r>
+            <a:r>
+              <a:rPr dirty="0"/>
+              <a:t> : </a:t>
+            </a:r>
+            <a:r>
+              <a:rPr dirty="0" err="1"/>
+              <a:t>cliquez</a:t>
+            </a:r>
+            <a:r>
+              <a:rPr dirty="0"/>
+              <a:t> sur le bouton rouge </a:t>
+            </a:r>
+            <a:r>
+              <a:rPr dirty="0" err="1"/>
+              <a:t>Corbeille</a:t>
+            </a:r>
+            <a:r>
+              <a:rPr dirty="0"/>
+              <a:t> et </a:t>
+            </a:r>
+            <a:r>
+              <a:rPr dirty="0" err="1"/>
+              <a:t>confirmez</a:t>
+            </a:r>
+            <a:r>
+              <a:rPr dirty="0"/>
+              <a:t> la suppression.</a:t>
             </a:r>
           </a:p>
         </p:txBody>
@@ -9975,7 +14262,7 @@
 </file>
 
 <file path=ppt/slides/slide7.xml><?xml version="1.0" encoding="utf-8"?>
-<p:sld xmlns:a="http://schemas.openxmlformats.org/drawingml/2006/main" xmlns:p="http://schemas.openxmlformats.org/presentationml/2006/main" xmlns:r="http://schemas.openxmlformats.org/officeDocument/2006/relationships">
+<p:sld xmlns:a="http://schemas.openxmlformats.org/drawingml/2006/main" xmlns:r="http://schemas.openxmlformats.org/officeDocument/2006/relationships" xmlns:p="http://schemas.openxmlformats.org/presentationml/2006/main">
   <p:cSld>
     <p:bg>
       <p:bgPr>
@@ -9991,7 +14278,14 @@
         <p:cNvGrpSpPr/>
         <p:nvPr/>
       </p:nvGrpSpPr>
-      <p:grpSpPr/>
+      <p:grpSpPr>
+        <a:xfrm>
+          <a:off x="0" y="0"/>
+          <a:ext cx="0" cy="0"/>
+          <a:chOff x="0" y="0"/>
+          <a:chExt cx="0" cy="0"/>
+        </a:xfrm>
+      </p:grpSpPr>
       <p:sp>
         <p:nvSpPr>
           <p:cNvPr id="2" name="TextBox 1"/>
@@ -10080,7 +14374,7 @@
         <p:spPr>
           <a:xfrm>
             <a:off x="457200" y="1143000"/>
-            <a:ext cx="11247120" cy="5394960"/>
+            <a:ext cx="11247120" cy="1677382"/>
           </a:xfrm>
           <a:prstGeom prst="rect">
             <a:avLst/>
@@ -10102,7 +14396,48 @@
               </a:defRPr>
             </a:pPr>
             <a:r>
-              <a:t>1. Accédez à l'onglet 'Paramètres' (icône engrenage) dans la navigation.</a:t>
+              <a:rPr dirty="0"/>
+              <a:t>1. </a:t>
+            </a:r>
+            <a:r>
+              <a:rPr dirty="0" err="1"/>
+              <a:t>Accédez</a:t>
+            </a:r>
+            <a:r>
+              <a:rPr dirty="0"/>
+              <a:t> à </a:t>
+            </a:r>
+            <a:r>
+              <a:rPr lang="fr-FR" b="1" dirty="0" smtClean="0"/>
+              <a:t>PORTAILS </a:t>
+            </a:r>
+            <a:r>
+              <a:rPr lang="fr-FR" b="1" dirty="0"/>
+              <a:t>DEDIES</a:t>
+            </a:r>
+            <a:r>
+              <a:rPr lang="fr-FR" dirty="0"/>
+              <a:t>, repérez </a:t>
+            </a:r>
+            <a:r>
+              <a:rPr lang="fr-FR" dirty="0" smtClean="0"/>
+              <a:t>le menu </a:t>
+            </a:r>
+            <a:r>
+              <a:rPr lang="fr-FR" b="1" dirty="0" err="1" smtClean="0"/>
+              <a:t>Parametres</a:t>
+            </a:r>
+            <a:r>
+              <a:rPr lang="fr-FR" b="1" dirty="0" smtClean="0"/>
+              <a:t> Techniques &amp; </a:t>
+            </a:r>
+            <a:r>
+              <a:rPr lang="fr-FR" b="1" dirty="0" err="1" smtClean="0"/>
+              <a:t>Demo</a:t>
+            </a:r>
+            <a:r>
+              <a:rPr lang="fr-FR" dirty="0" smtClean="0"/>
+              <a:t>‘</a:t>
             </a:r>
           </a:p>
           <a:p>
@@ -10115,7 +14450,44 @@
               </a:defRPr>
             </a:pPr>
             <a:r>
-              <a:t>2. Dans la section 'Informations de l'établissement', modifiez :</a:t>
+              <a:rPr dirty="0" smtClean="0"/>
+              <a:t>2</a:t>
+            </a:r>
+            <a:r>
+              <a:rPr dirty="0"/>
+              <a:t>. </a:t>
+            </a:r>
+            <a:r>
+              <a:rPr dirty="0" err="1"/>
+              <a:t>Dans</a:t>
+            </a:r>
+            <a:r>
+              <a:rPr dirty="0"/>
+              <a:t> la section '</a:t>
+            </a:r>
+            <a:r>
+              <a:rPr dirty="0" err="1"/>
+              <a:t>Informations</a:t>
+            </a:r>
+            <a:r>
+              <a:rPr dirty="0"/>
+              <a:t> de </a:t>
+            </a:r>
+            <a:r>
+              <a:rPr dirty="0" err="1"/>
+              <a:t>l'établissement</a:t>
+            </a:r>
+            <a:r>
+              <a:rPr dirty="0"/>
+              <a:t>', </a:t>
+            </a:r>
+            <a:r>
+              <a:rPr dirty="0" err="1"/>
+              <a:t>modifiez</a:t>
+            </a:r>
+            <a:r>
+              <a:rPr dirty="0"/>
+              <a:t> :</a:t>
             </a:r>
           </a:p>
           <a:p>
@@ -10128,8 +14500,22 @@
               </a:defRPr>
             </a:pPr>
             <a:r>
-              <a:t>    - Nom officiel de l'école</a:t>
-            </a:r>
+              <a:rPr dirty="0"/>
+              <a:t>    - Nom </a:t>
+            </a:r>
+            <a:r>
+              <a:rPr dirty="0" err="1"/>
+              <a:t>officiel</a:t>
+            </a:r>
+            <a:r>
+              <a:rPr dirty="0"/>
+              <a:t> de </a:t>
+            </a:r>
+            <a:r>
+              <a:rPr dirty="0" err="1"/>
+              <a:t>l'école</a:t>
+            </a:r>
+            <a:endParaRPr dirty="0"/>
           </a:p>
           <a:p>
             <a:pPr>
@@ -10141,7 +14527,24 @@
               </a:defRPr>
             </a:pPr>
             <a:r>
-              <a:t>    - Sous-titre ou devise</a:t>
+              <a:rPr dirty="0"/>
+              <a:t>    - Sous-</a:t>
+            </a:r>
+            <a:r>
+              <a:rPr dirty="0" err="1"/>
+              <a:t>titre</a:t>
+            </a:r>
+            <a:r>
+              <a:rPr dirty="0"/>
+              <a:t> </a:t>
+            </a:r>
+            <a:r>
+              <a:rPr dirty="0" err="1"/>
+              <a:t>ou</a:t>
+            </a:r>
+            <a:r>
+              <a:rPr dirty="0"/>
+              <a:t> devise</a:t>
             </a:r>
           </a:p>
           <a:p>
@@ -10154,7 +14557,24 @@
               </a:defRPr>
             </a:pPr>
             <a:r>
-              <a:t>    - Adresse, Téléphone, Email de contact</a:t>
+              <a:rPr dirty="0"/>
+              <a:t>    - </a:t>
+            </a:r>
+            <a:r>
+              <a:rPr dirty="0" err="1"/>
+              <a:t>Adresse</a:t>
+            </a:r>
+            <a:r>
+              <a:rPr dirty="0"/>
+              <a:t>, </a:t>
+            </a:r>
+            <a:r>
+              <a:rPr dirty="0" err="1"/>
+              <a:t>Téléphone</a:t>
+            </a:r>
+            <a:r>
+              <a:rPr dirty="0"/>
+              <a:t>, Email de contact</a:t>
             </a:r>
           </a:p>
           <a:p>
@@ -10167,7 +14587,24 @@
               </a:defRPr>
             </a:pPr>
             <a:r>
-              <a:t>    - Nom du Directeur (imprimé sur les bulletins)</a:t>
+              <a:rPr dirty="0"/>
+              <a:t>    - Nom du </a:t>
+            </a:r>
+            <a:r>
+              <a:rPr dirty="0" err="1"/>
+              <a:t>Directeur</a:t>
+            </a:r>
+            <a:r>
+              <a:rPr dirty="0"/>
+              <a:t> (</a:t>
+            </a:r>
+            <a:r>
+              <a:rPr dirty="0" err="1"/>
+              <a:t>imprimé</a:t>
+            </a:r>
+            <a:r>
+              <a:rPr dirty="0"/>
+              <a:t> sur les bulletins)</a:t>
             </a:r>
           </a:p>
           <a:p>
@@ -10180,7 +14617,40 @@
               </a:defRPr>
             </a:pPr>
             <a:r>
-              <a:t>    - Année scolaire en cours (ex: 2025-2026)</a:t>
+              <a:rPr dirty="0"/>
+              <a:t>    - </a:t>
+            </a:r>
+            <a:r>
+              <a:rPr dirty="0" err="1"/>
+              <a:t>Année</a:t>
+            </a:r>
+            <a:r>
+              <a:rPr dirty="0"/>
+              <a:t> </a:t>
+            </a:r>
+            <a:r>
+              <a:rPr dirty="0" err="1"/>
+              <a:t>scolaire</a:t>
+            </a:r>
+            <a:r>
+              <a:rPr dirty="0"/>
+              <a:t> </a:t>
+            </a:r>
+            <a:r>
+              <a:rPr dirty="0" err="1"/>
+              <a:t>en</a:t>
+            </a:r>
+            <a:r>
+              <a:rPr dirty="0"/>
+              <a:t> </a:t>
+            </a:r>
+            <a:r>
+              <a:rPr dirty="0" err="1"/>
+              <a:t>cours</a:t>
+            </a:r>
+            <a:r>
+              <a:rPr dirty="0"/>
+              <a:t> (ex: 2025-2026)</a:t>
             </a:r>
           </a:p>
           <a:p>
@@ -10193,7 +14663,40 @@
               </a:defRPr>
             </a:pPr>
             <a:r>
-              <a:t>8. Cliquez sur 'Enregistrer les paramètres' pour sauvegarder.</a:t>
+              <a:rPr dirty="0"/>
+              <a:t>8. </a:t>
+            </a:r>
+            <a:r>
+              <a:rPr dirty="0" err="1"/>
+              <a:t>Cliquez</a:t>
+            </a:r>
+            <a:r>
+              <a:rPr dirty="0"/>
+              <a:t> sur '</a:t>
+            </a:r>
+            <a:r>
+              <a:rPr dirty="0" err="1"/>
+              <a:t>Enregistrer</a:t>
+            </a:r>
+            <a:r>
+              <a:rPr dirty="0"/>
+              <a:t> les </a:t>
+            </a:r>
+            <a:r>
+              <a:rPr dirty="0" err="1"/>
+              <a:t>paramètres</a:t>
+            </a:r>
+            <a:r>
+              <a:rPr dirty="0"/>
+              <a:t>' pour </a:t>
+            </a:r>
+            <a:r>
+              <a:rPr dirty="0" err="1"/>
+              <a:t>sauvegarder</a:t>
+            </a:r>
+            <a:r>
+              <a:rPr dirty="0"/>
+              <a:t>.</a:t>
             </a:r>
           </a:p>
           <a:p>
@@ -10206,7 +14709,56 @@
               </a:defRPr>
             </a:pPr>
             <a:r>
-              <a:t>9. Ces informations apparaissent automatiquement sur tous les bulletins et procès-verbaux imprimés.</a:t>
+              <a:rPr dirty="0"/>
+              <a:t>9. </a:t>
+            </a:r>
+            <a:r>
+              <a:rPr dirty="0" err="1"/>
+              <a:t>Ces</a:t>
+            </a:r>
+            <a:r>
+              <a:rPr dirty="0"/>
+              <a:t> </a:t>
+            </a:r>
+            <a:r>
+              <a:rPr dirty="0" err="1"/>
+              <a:t>informations</a:t>
+            </a:r>
+            <a:r>
+              <a:rPr dirty="0"/>
+              <a:t> </a:t>
+            </a:r>
+            <a:r>
+              <a:rPr dirty="0" err="1"/>
+              <a:t>apparaissent</a:t>
+            </a:r>
+            <a:r>
+              <a:rPr dirty="0"/>
+              <a:t> </a:t>
+            </a:r>
+            <a:r>
+              <a:rPr dirty="0" err="1"/>
+              <a:t>automatiquement</a:t>
+            </a:r>
+            <a:r>
+              <a:rPr dirty="0"/>
+              <a:t> sur </a:t>
+            </a:r>
+            <a:r>
+              <a:rPr dirty="0" err="1"/>
+              <a:t>tous</a:t>
+            </a:r>
+            <a:r>
+              <a:rPr dirty="0"/>
+              <a:t> les bulletins et procès-verbaux </a:t>
+            </a:r>
+            <a:r>
+              <a:rPr dirty="0" err="1"/>
+              <a:t>imprimés</a:t>
+            </a:r>
+            <a:r>
+              <a:rPr dirty="0"/>
+              <a:t>.</a:t>
             </a:r>
           </a:p>
         </p:txBody>
@@ -10220,7 +14772,7 @@
 </file>
 
 <file path=ppt/slides/slide8.xml><?xml version="1.0" encoding="utf-8"?>
-<p:sld xmlns:a="http://schemas.openxmlformats.org/drawingml/2006/main" xmlns:p="http://schemas.openxmlformats.org/presentationml/2006/main" xmlns:r="http://schemas.openxmlformats.org/officeDocument/2006/relationships">
+<p:sld xmlns:a="http://schemas.openxmlformats.org/drawingml/2006/main" xmlns:r="http://schemas.openxmlformats.org/officeDocument/2006/relationships" xmlns:p="http://schemas.openxmlformats.org/presentationml/2006/main">
   <p:cSld>
     <p:bg>
       <p:bgPr>
@@ -10236,7 +14788,14 @@
         <p:cNvGrpSpPr/>
         <p:nvPr/>
       </p:nvGrpSpPr>
-      <p:grpSpPr/>
+      <p:grpSpPr>
+        <a:xfrm>
+          <a:off x="0" y="0"/>
+          <a:ext cx="0" cy="0"/>
+          <a:chOff x="0" y="0"/>
+          <a:chExt cx="0" cy="0"/>
+        </a:xfrm>
+      </p:grpSpPr>
       <p:sp>
         <p:nvSpPr>
           <p:cNvPr id="2" name="TextBox 1"/>
@@ -10325,7 +14884,7 @@
         <p:spPr>
           <a:xfrm>
             <a:off x="457200" y="1143000"/>
-            <a:ext cx="11247120" cy="5394960"/>
+            <a:ext cx="11247120" cy="1492716"/>
           </a:xfrm>
           <a:prstGeom prst="rect">
             <a:avLst/>
@@ -10347,8 +14906,70 @@
               </a:defRPr>
             </a:pPr>
             <a:r>
-              <a:t>1. Allez dans l'onglet 'EDT - Salles &amp; Classes' (ou module Académique).</a:t>
-            </a:r>
+              <a:rPr dirty="0"/>
+              <a:t>1. </a:t>
+            </a:r>
+            <a:r>
+              <a:rPr dirty="0" err="1"/>
+              <a:t>Allez</a:t>
+            </a:r>
+            <a:r>
+              <a:rPr dirty="0"/>
+              <a:t> </a:t>
+            </a:r>
+            <a:r>
+              <a:rPr dirty="0" err="1"/>
+              <a:t>dans</a:t>
+            </a:r>
+            <a:r>
+              <a:rPr dirty="0"/>
+              <a:t> </a:t>
+            </a:r>
+            <a:r>
+              <a:rPr dirty="0" err="1"/>
+              <a:t>l'onglet</a:t>
+            </a:r>
+            <a:r>
+              <a:rPr dirty="0"/>
+              <a:t> </a:t>
+            </a:r>
+            <a:r>
+              <a:rPr b="1" dirty="0"/>
+              <a:t>'EDT </a:t>
+            </a:r>
+            <a:r>
+              <a:rPr lang="fr-FR" b="1" dirty="0" smtClean="0"/>
+              <a:t>–</a:t>
+            </a:r>
+            <a:r>
+              <a:rPr b="1" dirty="0" smtClean="0"/>
+              <a:t> </a:t>
+            </a:r>
+            <a:r>
+              <a:rPr lang="fr-FR" b="1" dirty="0" smtClean="0"/>
+              <a:t>Emploi du Temps</a:t>
+            </a:r>
+            <a:r>
+              <a:rPr dirty="0" smtClean="0"/>
+              <a:t>'</a:t>
+            </a:r>
+            <a:r>
+              <a:rPr lang="fr-FR" dirty="0" smtClean="0"/>
+              <a:t> et cliquer sur </a:t>
+            </a:r>
+            <a:r>
+              <a:rPr lang="fr-FR" b="1" dirty="0"/>
+              <a:t>EDT - Salles &amp; </a:t>
+            </a:r>
+            <a:r>
+              <a:rPr lang="fr-FR" b="1" dirty="0" smtClean="0"/>
+              <a:t>Classes</a:t>
+            </a:r>
+            <a:r>
+              <a:rPr dirty="0" smtClean="0"/>
+              <a:t>.</a:t>
+            </a:r>
+            <a:endParaRPr dirty="0"/>
           </a:p>
           <a:p>
             <a:pPr>
@@ -10360,7 +14981,56 @@
               </a:defRPr>
             </a:pPr>
             <a:r>
-              <a:t>2. Dans le formulaire 'Ajouter une Classe', saisissez :</a:t>
+              <a:rPr dirty="0"/>
+              <a:t>2. </a:t>
+            </a:r>
+            <a:r>
+              <a:rPr dirty="0" err="1"/>
+              <a:t>Dans</a:t>
+            </a:r>
+            <a:r>
+              <a:rPr dirty="0"/>
+              <a:t> le </a:t>
+            </a:r>
+            <a:r>
+              <a:rPr dirty="0" err="1"/>
+              <a:t>formulaire</a:t>
+            </a:r>
+            <a:r>
+              <a:rPr dirty="0"/>
+              <a:t> '</a:t>
+            </a:r>
+            <a:r>
+              <a:rPr dirty="0" err="1"/>
+              <a:t>Ajouter</a:t>
+            </a:r>
+            <a:r>
+              <a:rPr dirty="0"/>
+              <a:t> </a:t>
+            </a:r>
+            <a:r>
+              <a:rPr dirty="0" err="1"/>
+              <a:t>une</a:t>
+            </a:r>
+            <a:r>
+              <a:rPr dirty="0"/>
+              <a:t> </a:t>
+            </a:r>
+            <a:r>
+              <a:rPr dirty="0" err="1"/>
+              <a:t>Classe</a:t>
+            </a:r>
+            <a:r>
+              <a:rPr dirty="0"/>
+              <a:t>', </a:t>
+            </a:r>
+            <a:r>
+              <a:rPr dirty="0" err="1"/>
+              <a:t>saisissez</a:t>
+            </a:r>
+            <a:r>
+              <a:rPr dirty="0"/>
+              <a:t> :</a:t>
             </a:r>
           </a:p>
           <a:p>
@@ -10373,7 +15043,16 @@
               </a:defRPr>
             </a:pPr>
             <a:r>
-              <a:t>    - Identifiant unique (ex: 6A, 5B, 4C, 3D)</a:t>
+              <a:rPr dirty="0"/>
+              <a:t>    - </a:t>
+            </a:r>
+            <a:r>
+              <a:rPr dirty="0" err="1"/>
+              <a:t>Identifiant</a:t>
+            </a:r>
+            <a:r>
+              <a:rPr dirty="0"/>
+              <a:t> unique (ex: 6A, 5B, 4C, 3D)</a:t>
             </a:r>
           </a:p>
           <a:p>
@@ -10386,7 +15065,32 @@
               </a:defRPr>
             </a:pPr>
             <a:r>
-              <a:t>    - Nom complet de la classe (ex: Classe de 6ème A)</a:t>
+              <a:rPr dirty="0"/>
+              <a:t>    - Nom </a:t>
+            </a:r>
+            <a:r>
+              <a:rPr dirty="0" err="1"/>
+              <a:t>complet</a:t>
+            </a:r>
+            <a:r>
+              <a:rPr dirty="0"/>
+              <a:t> de la </a:t>
+            </a:r>
+            <a:r>
+              <a:rPr dirty="0" err="1"/>
+              <a:t>classe</a:t>
+            </a:r>
+            <a:r>
+              <a:rPr dirty="0"/>
+              <a:t> (ex: </a:t>
+            </a:r>
+            <a:r>
+              <a:rPr dirty="0" err="1"/>
+              <a:t>Classe</a:t>
+            </a:r>
+            <a:r>
+              <a:rPr dirty="0"/>
+              <a:t> de 6ème A)</a:t>
             </a:r>
           </a:p>
           <a:p>
@@ -10399,8 +15103,30 @@
               </a:defRPr>
             </a:pPr>
             <a:r>
-              <a:t>    - Capacité maximale d'élèves</a:t>
-            </a:r>
+              <a:rPr dirty="0"/>
+              <a:t>    - </a:t>
+            </a:r>
+            <a:r>
+              <a:rPr dirty="0" err="1"/>
+              <a:t>Capacité</a:t>
+            </a:r>
+            <a:r>
+              <a:rPr dirty="0"/>
+              <a:t> </a:t>
+            </a:r>
+            <a:r>
+              <a:rPr dirty="0" err="1"/>
+              <a:t>maximale</a:t>
+            </a:r>
+            <a:r>
+              <a:rPr dirty="0"/>
+              <a:t> </a:t>
+            </a:r>
+            <a:r>
+              <a:rPr dirty="0" err="1"/>
+              <a:t>d'élèves</a:t>
+            </a:r>
+            <a:endParaRPr dirty="0"/>
           </a:p>
           <a:p>
             <a:pPr>
@@ -10412,8 +15138,38 @@
               </a:defRPr>
             </a:pPr>
             <a:r>
-              <a:t>    - Couleur d'affichage dans l'EDT</a:t>
-            </a:r>
+              <a:rPr dirty="0"/>
+              <a:t>    - </a:t>
+            </a:r>
+            <a:r>
+              <a:rPr dirty="0" err="1"/>
+              <a:t>Couleur</a:t>
+            </a:r>
+            <a:r>
+              <a:rPr dirty="0"/>
+              <a:t> </a:t>
+            </a:r>
+            <a:r>
+              <a:rPr dirty="0" err="1"/>
+              <a:t>d'affichage</a:t>
+            </a:r>
+            <a:r>
+              <a:rPr dirty="0"/>
+              <a:t> </a:t>
+            </a:r>
+            <a:r>
+              <a:rPr dirty="0" err="1"/>
+              <a:t>dans</a:t>
+            </a:r>
+            <a:r>
+              <a:rPr dirty="0"/>
+              <a:t> </a:t>
+            </a:r>
+            <a:r>
+              <a:rPr dirty="0" err="1"/>
+              <a:t>l'EDT</a:t>
+            </a:r>
+            <a:endParaRPr dirty="0"/>
           </a:p>
           <a:p>
             <a:pPr>
@@ -10425,7 +15181,48 @@
               </a:defRPr>
             </a:pPr>
             <a:r>
-              <a:t>    - Professeur Principal (sélectionnez dans la liste des enseignants)</a:t>
+              <a:rPr dirty="0"/>
+              <a:t>    - </a:t>
+            </a:r>
+            <a:r>
+              <a:rPr dirty="0" err="1"/>
+              <a:t>Professeur</a:t>
+            </a:r>
+            <a:r>
+              <a:rPr dirty="0"/>
+              <a:t> Principal (</a:t>
+            </a:r>
+            <a:r>
+              <a:rPr dirty="0" err="1"/>
+              <a:t>sélectionnez</a:t>
+            </a:r>
+            <a:r>
+              <a:rPr dirty="0"/>
+              <a:t> </a:t>
+            </a:r>
+            <a:r>
+              <a:rPr dirty="0" err="1"/>
+              <a:t>dans</a:t>
+            </a:r>
+            <a:r>
+              <a:rPr dirty="0"/>
+              <a:t> la </a:t>
+            </a:r>
+            <a:r>
+              <a:rPr dirty="0" err="1"/>
+              <a:t>liste</a:t>
+            </a:r>
+            <a:r>
+              <a:rPr dirty="0"/>
+              <a:t> des </a:t>
+            </a:r>
+            <a:r>
+              <a:rPr dirty="0" err="1"/>
+              <a:t>enseignants</a:t>
+            </a:r>
+            <a:r>
+              <a:rPr dirty="0"/>
+              <a:t>)</a:t>
             </a:r>
           </a:p>
           <a:p>
@@ -10438,7 +15235,56 @@
               </a:defRPr>
             </a:pPr>
             <a:r>
-              <a:t>8. Cliquez sur 'Ajouter la Classe'. Elle apparaît dans la grille d'emplois du temps.</a:t>
+              <a:rPr dirty="0"/>
+              <a:t>8. </a:t>
+            </a:r>
+            <a:r>
+              <a:rPr dirty="0" err="1"/>
+              <a:t>Cliquez</a:t>
+            </a:r>
+            <a:r>
+              <a:rPr dirty="0"/>
+              <a:t> sur '</a:t>
+            </a:r>
+            <a:r>
+              <a:rPr dirty="0" err="1"/>
+              <a:t>Ajouter</a:t>
+            </a:r>
+            <a:r>
+              <a:rPr dirty="0"/>
+              <a:t> la </a:t>
+            </a:r>
+            <a:r>
+              <a:rPr dirty="0" err="1"/>
+              <a:t>Classe</a:t>
+            </a:r>
+            <a:r>
+              <a:rPr dirty="0"/>
+              <a:t>'. Elle </a:t>
+            </a:r>
+            <a:r>
+              <a:rPr dirty="0" err="1"/>
+              <a:t>apparaît</a:t>
+            </a:r>
+            <a:r>
+              <a:rPr dirty="0"/>
+              <a:t> </a:t>
+            </a:r>
+            <a:r>
+              <a:rPr dirty="0" err="1"/>
+              <a:t>dans</a:t>
+            </a:r>
+            <a:r>
+              <a:rPr dirty="0"/>
+              <a:t> la grille </a:t>
+            </a:r>
+            <a:r>
+              <a:rPr dirty="0" err="1"/>
+              <a:t>d'emplois</a:t>
+            </a:r>
+            <a:r>
+              <a:rPr dirty="0"/>
+              <a:t> du temps.</a:t>
             </a:r>
           </a:p>
         </p:txBody>
@@ -10452,7 +15298,7 @@
 </file>
 
 <file path=ppt/slides/slide9.xml><?xml version="1.0" encoding="utf-8"?>
-<p:sld xmlns:a="http://schemas.openxmlformats.org/drawingml/2006/main" xmlns:p="http://schemas.openxmlformats.org/presentationml/2006/main" xmlns:r="http://schemas.openxmlformats.org/officeDocument/2006/relationships">
+<p:sld xmlns:a="http://schemas.openxmlformats.org/drawingml/2006/main" xmlns:r="http://schemas.openxmlformats.org/officeDocument/2006/relationships" xmlns:p="http://schemas.openxmlformats.org/presentationml/2006/main">
   <p:cSld>
     <p:bg>
       <p:bgPr>
@@ -10468,7 +15314,14 @@
         <p:cNvGrpSpPr/>
         <p:nvPr/>
       </p:nvGrpSpPr>
-      <p:grpSpPr/>
+      <p:grpSpPr>
+        <a:xfrm>
+          <a:off x="0" y="0"/>
+          <a:ext cx="0" cy="0"/>
+          <a:chOff x="0" y="0"/>
+          <a:chExt cx="0" cy="0"/>
+        </a:xfrm>
+      </p:grpSpPr>
       <p:sp>
         <p:nvSpPr>
           <p:cNvPr id="2" name="TextBox 1"/>
@@ -10557,7 +15410,7 @@
         <p:spPr>
           <a:xfrm>
             <a:off x="457200" y="1143000"/>
-            <a:ext cx="11247120" cy="5394960"/>
+            <a:ext cx="11247120" cy="1015663"/>
           </a:xfrm>
           <a:prstGeom prst="rect">
             <a:avLst/>
@@ -10579,7 +15432,76 @@
               </a:defRPr>
             </a:pPr>
             <a:r>
-              <a:t>1. Dans la liste des classes affichées, cliquez sur le bouton Modifier (crayon) de la classe.</a:t>
+              <a:rPr dirty="0"/>
+              <a:t>1. </a:t>
+            </a:r>
+            <a:r>
+              <a:rPr dirty="0" err="1"/>
+              <a:t>Dans</a:t>
+            </a:r>
+            <a:r>
+              <a:rPr dirty="0"/>
+              <a:t> la </a:t>
+            </a:r>
+            <a:r>
+              <a:rPr dirty="0" err="1"/>
+              <a:t>liste</a:t>
+            </a:r>
+            <a:r>
+              <a:rPr dirty="0"/>
+              <a:t> des classes </a:t>
+            </a:r>
+            <a:r>
+              <a:rPr dirty="0" err="1" smtClean="0"/>
+              <a:t>affichée</a:t>
+            </a:r>
+            <a:r>
+              <a:rPr lang="fr-FR" dirty="0" smtClean="0"/>
+              <a:t> (</a:t>
+            </a:r>
+            <a:r>
+              <a:rPr lang="fr-FR" b="1" dirty="0" err="1"/>
+              <a:t>O</a:t>
+            </a:r>
+            <a:r>
+              <a:rPr lang="fr-FR" b="1" dirty="0" err="1" smtClean="0"/>
+              <a:t>nglet:Emploi</a:t>
+            </a:r>
+            <a:r>
+              <a:rPr lang="fr-FR" b="1" dirty="0" smtClean="0"/>
+              <a:t> du temps-EDT </a:t>
+            </a:r>
+            <a:r>
+              <a:rPr lang="fr-FR" dirty="0" smtClean="0"/>
+              <a:t>et sous menu </a:t>
+            </a:r>
+            <a:r>
+              <a:rPr lang="fr-FR" b="1" dirty="0"/>
+              <a:t>EDT - Salles &amp; Classes</a:t>
+            </a:r>
+            <a:r>
+              <a:rPr lang="fr-FR" b="1" dirty="0" smtClean="0"/>
+              <a:t>)</a:t>
+            </a:r>
+            <a:r>
+              <a:rPr dirty="0" smtClean="0"/>
+              <a:t>, </a:t>
+            </a:r>
+            <a:r>
+              <a:rPr dirty="0" err="1"/>
+              <a:t>cliquez</a:t>
+            </a:r>
+            <a:r>
+              <a:rPr dirty="0"/>
+              <a:t> sur le bouton Modifier (crayon) de la </a:t>
+            </a:r>
+            <a:r>
+              <a:rPr dirty="0" err="1"/>
+              <a:t>classe</a:t>
+            </a:r>
+            <a:r>
+              <a:rPr dirty="0"/>
+              <a:t>.</a:t>
             </a:r>
           </a:p>
           <a:p>
@@ -10592,7 +15514,40 @@
               </a:defRPr>
             </a:pPr>
             <a:r>
-              <a:t>2. Modifiez les champs (nom, capacité, professeur principal, couleur).</a:t>
+              <a:rPr dirty="0"/>
+              <a:t>2. </a:t>
+            </a:r>
+            <a:r>
+              <a:rPr dirty="0" err="1"/>
+              <a:t>Modifiez</a:t>
+            </a:r>
+            <a:r>
+              <a:rPr dirty="0"/>
+              <a:t> les champs (nom, </a:t>
+            </a:r>
+            <a:r>
+              <a:rPr dirty="0" err="1"/>
+              <a:t>capacité</a:t>
+            </a:r>
+            <a:r>
+              <a:rPr dirty="0"/>
+              <a:t>, </a:t>
+            </a:r>
+            <a:r>
+              <a:rPr dirty="0" err="1"/>
+              <a:t>professeur</a:t>
+            </a:r>
+            <a:r>
+              <a:rPr dirty="0"/>
+              <a:t> principal, </a:t>
+            </a:r>
+            <a:r>
+              <a:rPr dirty="0" err="1"/>
+              <a:t>couleur</a:t>
+            </a:r>
+            <a:r>
+              <a:rPr dirty="0"/>
+              <a:t>).</a:t>
             </a:r>
           </a:p>
           <a:p>
@@ -10605,7 +15560,64 @@
               </a:defRPr>
             </a:pPr>
             <a:r>
-              <a:t>3. Cliquez sur 'Enregistrer'. Les changements sont reflétés dans tous les modules.</a:t>
+              <a:rPr dirty="0"/>
+              <a:t>3. </a:t>
+            </a:r>
+            <a:r>
+              <a:rPr dirty="0" err="1"/>
+              <a:t>Cliquez</a:t>
+            </a:r>
+            <a:r>
+              <a:rPr dirty="0"/>
+              <a:t> sur '</a:t>
+            </a:r>
+            <a:r>
+              <a:rPr dirty="0" err="1"/>
+              <a:t>Enregistrer</a:t>
+            </a:r>
+            <a:r>
+              <a:rPr dirty="0"/>
+              <a:t>'. Les </a:t>
+            </a:r>
+            <a:r>
+              <a:rPr dirty="0" err="1"/>
+              <a:t>changements</a:t>
+            </a:r>
+            <a:r>
+              <a:rPr dirty="0"/>
+              <a:t> </a:t>
+            </a:r>
+            <a:r>
+              <a:rPr dirty="0" err="1"/>
+              <a:t>sont</a:t>
+            </a:r>
+            <a:r>
+              <a:rPr dirty="0"/>
+              <a:t> </a:t>
+            </a:r>
+            <a:r>
+              <a:rPr dirty="0" err="1"/>
+              <a:t>reflétés</a:t>
+            </a:r>
+            <a:r>
+              <a:rPr dirty="0"/>
+              <a:t> </a:t>
+            </a:r>
+            <a:r>
+              <a:rPr dirty="0" err="1"/>
+              <a:t>dans</a:t>
+            </a:r>
+            <a:r>
+              <a:rPr dirty="0"/>
+              <a:t> </a:t>
+            </a:r>
+            <a:r>
+              <a:rPr dirty="0" err="1"/>
+              <a:t>tous</a:t>
+            </a:r>
+            <a:r>
+              <a:rPr dirty="0"/>
+              <a:t> les modules.</a:t>
             </a:r>
           </a:p>
           <a:p>
@@ -10618,7 +15630,40 @@
               </a:defRPr>
             </a:pPr>
             <a:r>
-              <a:t>4. Pour supprimer : cliquez sur le bouton rouge Corbeille et confirmez.</a:t>
+              <a:rPr dirty="0"/>
+              <a:t>4. Pour </a:t>
+            </a:r>
+            <a:r>
+              <a:rPr dirty="0" err="1"/>
+              <a:t>supprimer</a:t>
+            </a:r>
+            <a:r>
+              <a:rPr dirty="0"/>
+              <a:t> : </a:t>
+            </a:r>
+            <a:r>
+              <a:rPr dirty="0" err="1"/>
+              <a:t>cliquez</a:t>
+            </a:r>
+            <a:r>
+              <a:rPr dirty="0"/>
+              <a:t> sur le bouton rouge </a:t>
+            </a:r>
+            <a:r>
+              <a:rPr dirty="0" err="1"/>
+              <a:t>Corbeille</a:t>
+            </a:r>
+            <a:r>
+              <a:rPr dirty="0"/>
+              <a:t> et </a:t>
+            </a:r>
+            <a:r>
+              <a:rPr dirty="0" err="1"/>
+              <a:t>confirmez</a:t>
+            </a:r>
+            <a:r>
+              <a:rPr dirty="0"/>
+              <a:t>.</a:t>
             </a:r>
           </a:p>
           <a:p>
@@ -10631,7 +15676,56 @@
               </a:defRPr>
             </a:pPr>
             <a:r>
-              <a:t>5. ATTENTION : La suppression d'une classe retire aussi tous ses cours planifiés.</a:t>
+              <a:rPr dirty="0"/>
+              <a:t>5. ATTENTION : La suppression d'une </a:t>
+            </a:r>
+            <a:r>
+              <a:rPr dirty="0" err="1"/>
+              <a:t>classe</a:t>
+            </a:r>
+            <a:r>
+              <a:rPr dirty="0"/>
+              <a:t> retire </a:t>
+            </a:r>
+            <a:r>
+              <a:rPr dirty="0" err="1"/>
+              <a:t>aussi</a:t>
+            </a:r>
+            <a:r>
+              <a:rPr dirty="0"/>
+              <a:t> </a:t>
+            </a:r>
+            <a:r>
+              <a:rPr dirty="0" err="1"/>
+              <a:t>tous</a:t>
+            </a:r>
+            <a:r>
+              <a:rPr dirty="0"/>
+              <a:t> </a:t>
+            </a:r>
+            <a:r>
+              <a:rPr dirty="0" err="1"/>
+              <a:t>ses</a:t>
+            </a:r>
+            <a:r>
+              <a:rPr dirty="0"/>
+              <a:t> </a:t>
+            </a:r>
+            <a:r>
+              <a:rPr dirty="0" err="1"/>
+              <a:t>cours</a:t>
+            </a:r>
+            <a:r>
+              <a:rPr dirty="0"/>
+              <a:t> </a:t>
+            </a:r>
+            <a:r>
+              <a:rPr dirty="0" err="1"/>
+              <a:t>planifiés</a:t>
+            </a:r>
+            <a:r>
+              <a:rPr dirty="0"/>
+              <a:t>.</a:t>
             </a:r>
           </a:p>
         </p:txBody>
